--- a/power_point/Day1.pptx
+++ b/power_point/Day1.pptx
@@ -5,7 +5,7 @@
     <p:sldMasterId id="2147483684" r:id="rId1"/>
   </p:sldMasterIdLst>
   <p:notesMasterIdLst>
-    <p:notesMasterId r:id="rId40"/>
+    <p:notesMasterId r:id="rId41"/>
   </p:notesMasterIdLst>
   <p:sldIdLst>
     <p:sldId id="256" r:id="rId2"/>
@@ -37,15 +37,16 @@
     <p:sldId id="276" r:id="rId28"/>
     <p:sldId id="278" r:id="rId29"/>
     <p:sldId id="281" r:id="rId30"/>
-    <p:sldId id="293" r:id="rId31"/>
-    <p:sldId id="279" r:id="rId32"/>
-    <p:sldId id="280" r:id="rId33"/>
-    <p:sldId id="285" r:id="rId34"/>
-    <p:sldId id="292" r:id="rId35"/>
-    <p:sldId id="288" r:id="rId36"/>
-    <p:sldId id="291" r:id="rId37"/>
-    <p:sldId id="286" r:id="rId38"/>
-    <p:sldId id="287" r:id="rId39"/>
+    <p:sldId id="295" r:id="rId31"/>
+    <p:sldId id="293" r:id="rId32"/>
+    <p:sldId id="279" r:id="rId33"/>
+    <p:sldId id="280" r:id="rId34"/>
+    <p:sldId id="285" r:id="rId35"/>
+    <p:sldId id="292" r:id="rId36"/>
+    <p:sldId id="288" r:id="rId37"/>
+    <p:sldId id="291" r:id="rId38"/>
+    <p:sldId id="286" r:id="rId39"/>
+    <p:sldId id="287" r:id="rId40"/>
   </p:sldIdLst>
   <p:sldSz cx="12192000" cy="6858000"/>
   <p:notesSz cx="6858000" cy="9144000"/>
@@ -234,7 +235,7 @@
           <a:p>
             <a:fld id="{AD06BF8C-4158-F342-8216-E1A8A29CF1BB}" type="datetimeFigureOut">
               <a:rPr lang="en-GB" smtClean="0"/>
-              <a:t>17/09/2026</a:t>
+              <a:t>21/09/2026</a:t>
             </a:fld>
             <a:endParaRPr lang="en-GB"/>
           </a:p>
@@ -716,7 +717,7 @@
           <a:p>
             <a:fld id="{DE396E4B-6C64-E643-9A0A-AB5E13C2F5FA}" type="datetime1">
               <a:rPr lang="it-IT" smtClean="0"/>
-              <a:t>17/09/26</a:t>
+              <a:t>21/09/26</a:t>
             </a:fld>
             <a:endParaRPr lang="en-GB"/>
           </a:p>
@@ -889,7 +890,7 @@
           <a:p>
             <a:fld id="{31B09858-3BFB-DA41-A1A7-0A2A32E9793F}" type="datetime1">
               <a:rPr lang="it-IT" smtClean="0"/>
-              <a:t>17/09/26</a:t>
+              <a:t>21/09/26</a:t>
             </a:fld>
             <a:endParaRPr lang="en-GB"/>
           </a:p>
@@ -1072,7 +1073,7 @@
           <a:p>
             <a:fld id="{2C58458F-C659-9242-908F-36A06BB8B093}" type="datetime1">
               <a:rPr lang="it-IT" smtClean="0"/>
-              <a:t>17/09/26</a:t>
+              <a:t>21/09/26</a:t>
             </a:fld>
             <a:endParaRPr lang="en-GB"/>
           </a:p>
@@ -1245,7 +1246,7 @@
           <a:p>
             <a:fld id="{761DFEEA-1162-B343-ACBF-B3E92F6AC390}" type="datetime1">
               <a:rPr lang="it-IT" smtClean="0"/>
-              <a:t>17/09/26</a:t>
+              <a:t>21/09/26</a:t>
             </a:fld>
             <a:endParaRPr lang="en-GB"/>
           </a:p>
@@ -1494,7 +1495,7 @@
           <a:p>
             <a:fld id="{449ECE03-5904-2640-B404-A3FEAB598526}" type="datetime1">
               <a:rPr lang="it-IT" smtClean="0"/>
-              <a:t>17/09/26</a:t>
+              <a:t>21/09/26</a:t>
             </a:fld>
             <a:endParaRPr lang="en-GB"/>
           </a:p>
@@ -1729,7 +1730,7 @@
           <a:p>
             <a:fld id="{60BAE46A-96B1-BD4E-91A6-BD8913D3E1E1}" type="datetime1">
               <a:rPr lang="it-IT" smtClean="0"/>
-              <a:t>17/09/26</a:t>
+              <a:t>21/09/26</a:t>
             </a:fld>
             <a:endParaRPr lang="en-GB"/>
           </a:p>
@@ -2099,7 +2100,7 @@
           <a:p>
             <a:fld id="{9BACEE35-98CA-3449-A912-39DDE1219E25}" type="datetime1">
               <a:rPr lang="it-IT" smtClean="0"/>
-              <a:t>17/09/26</a:t>
+              <a:t>21/09/26</a:t>
             </a:fld>
             <a:endParaRPr lang="en-GB"/>
           </a:p>
@@ -2220,7 +2221,7 @@
           <a:p>
             <a:fld id="{5953B74D-CC1D-D544-8CB0-DB12C3D1744A}" type="datetime1">
               <a:rPr lang="it-IT" smtClean="0"/>
-              <a:t>17/09/26</a:t>
+              <a:t>21/09/26</a:t>
             </a:fld>
             <a:endParaRPr lang="en-GB"/>
           </a:p>
@@ -2318,7 +2319,7 @@
           <a:p>
             <a:fld id="{77398775-032D-C849-B9B0-C1D11ED802C1}" type="datetime1">
               <a:rPr lang="it-IT" smtClean="0"/>
-              <a:t>17/09/26</a:t>
+              <a:t>21/09/26</a:t>
             </a:fld>
             <a:endParaRPr lang="en-GB"/>
           </a:p>
@@ -2598,7 +2599,7 @@
           <a:p>
             <a:fld id="{28DD5ADB-7CE0-804E-9C85-40A519507F1A}" type="datetime1">
               <a:rPr lang="it-IT" smtClean="0"/>
-              <a:t>17/09/26</a:t>
+              <a:t>21/09/26</a:t>
             </a:fld>
             <a:endParaRPr lang="en-GB"/>
           </a:p>
@@ -2858,7 +2859,7 @@
           <a:p>
             <a:fld id="{D404C8A3-CA6B-DB4B-8A18-5294010BD3CB}" type="datetime1">
               <a:rPr lang="it-IT" smtClean="0"/>
-              <a:t>17/09/26</a:t>
+              <a:t>21/09/26</a:t>
             </a:fld>
             <a:endParaRPr lang="en-GB"/>
           </a:p>
@@ -3074,7 +3075,7 @@
           <a:p>
             <a:fld id="{01A1503F-4B7A-6348-924A-FFD23680AA8F}" type="datetime1">
               <a:rPr lang="it-IT" smtClean="0"/>
-              <a:t>17/09/26</a:t>
+              <a:t>21/09/26</a:t>
             </a:fld>
             <a:endParaRPr lang="en-GB"/>
           </a:p>
@@ -3535,7 +3536,7 @@
           <a:p>
             <a:fld id="{220AD085-7898-BE4F-A67D-B59B606A6206}" type="datetime1">
               <a:rPr lang="it-IT" smtClean="0"/>
-              <a:t>17/09/26</a:t>
+              <a:t>21/09/26</a:t>
             </a:fld>
             <a:endParaRPr lang="en-GB"/>
           </a:p>
@@ -3787,7 +3788,7 @@
           <a:p>
             <a:fld id="{761DFEEA-1162-B343-ACBF-B3E92F6AC390}" type="datetime1">
               <a:rPr lang="it-IT" smtClean="0"/>
-              <a:t>17/09/26</a:t>
+              <a:t>21/09/26</a:t>
             </a:fld>
             <a:endParaRPr lang="en-GB"/>
           </a:p>
@@ -4128,7 +4129,7 @@
           <a:p>
             <a:fld id="{761DFEEA-1162-B343-ACBF-B3E92F6AC390}" type="datetime1">
               <a:rPr lang="it-IT" smtClean="0"/>
-              <a:t>17/09/26</a:t>
+              <a:t>21/09/26</a:t>
             </a:fld>
             <a:endParaRPr lang="en-GB"/>
           </a:p>
@@ -4695,7 +4696,7 @@
           <a:p>
             <a:fld id="{761DFEEA-1162-B343-ACBF-B3E92F6AC390}" type="datetime1">
               <a:rPr lang="it-IT" smtClean="0"/>
-              <a:t>17/09/26</a:t>
+              <a:t>21/09/26</a:t>
             </a:fld>
             <a:endParaRPr lang="en-GB" dirty="0"/>
           </a:p>
@@ -4872,9 +4873,16 @@
             </a:r>
             <a:r>
               <a:rPr lang="en-GB" sz="1200" dirty="0" err="1"/>
-              <a:t>Dockerfile_recipies</a:t>
-            </a:r>
-            <a:endParaRPr lang="en-GB" sz="1200" dirty="0"/>
+              <a:t>Dockerfile</a:t>
+            </a:r>
+            <a:r>
+              <a:rPr lang="en-GB" sz="1200" dirty="0"/>
+              <a:t>_</a:t>
+            </a:r>
+            <a:r>
+              <a:rPr lang="en-IT" sz="1200" dirty="0"/>
+              <a:t> recipes </a:t>
+            </a:r>
           </a:p>
           <a:p>
             <a:r>
@@ -4889,14 +4897,14 @@
                 <a:latin typeface="Courier New" panose="02070309020205020404" pitchFamily="49" charset="0"/>
                 <a:cs typeface="Courier New" panose="02070309020205020404" pitchFamily="49" charset="0"/>
               </a:rPr>
-              <a:t> –p </a:t>
+              <a:t> -p </a:t>
             </a:r>
             <a:r>
               <a:rPr lang="en-GB" sz="1200" dirty="0" err="1">
                 <a:latin typeface="Courier New" panose="02070309020205020404" pitchFamily="49" charset="0"/>
                 <a:cs typeface="Courier New" panose="02070309020205020404" pitchFamily="49" charset="0"/>
               </a:rPr>
-              <a:t>Dockerfile_recipies</a:t>
+              <a:t>Dockerfile_recipes</a:t>
             </a:r>
             <a:endParaRPr lang="en-GB" sz="1200" dirty="0"/>
           </a:p>
@@ -4923,6 +4931,17 @@
                 <a:latin typeface="Courier New" panose="02070309020205020404" pitchFamily="49" charset="0"/>
                 <a:cs typeface="Courier New" panose="02070309020205020404" pitchFamily="49" charset="0"/>
               </a:rPr>
+              <a:t>Dockerfile_recipes</a:t>
+            </a:r>
+            <a:r>
+              <a:rPr lang="en-GB" sz="1200" dirty="0"/>
+              <a:t>/</a:t>
+            </a:r>
+            <a:r>
+              <a:rPr lang="en-GB" sz="1200" dirty="0" err="1">
+                <a:latin typeface="Courier New" panose="02070309020205020404" pitchFamily="49" charset="0"/>
+                <a:cs typeface="Courier New" panose="02070309020205020404" pitchFamily="49" charset="0"/>
+              </a:rPr>
               <a:t>Dockerfile.curl</a:t>
             </a:r>
             <a:endParaRPr lang="en-GB" sz="1200" dirty="0">
@@ -4975,6 +4994,17 @@
                 <a:latin typeface="Courier New" panose="02070309020205020404" pitchFamily="49" charset="0"/>
                 <a:cs typeface="Courier New" panose="02070309020205020404" pitchFamily="49" charset="0"/>
               </a:rPr>
+              <a:t>Dockerfile_recipes</a:t>
+            </a:r>
+            <a:r>
+              <a:rPr lang="en-GB" sz="1200" dirty="0"/>
+              <a:t>/</a:t>
+            </a:r>
+            <a:r>
+              <a:rPr lang="en-GB" sz="1200" dirty="0" err="1">
+                <a:latin typeface="Courier New" panose="02070309020205020404" pitchFamily="49" charset="0"/>
+                <a:cs typeface="Courier New" panose="02070309020205020404" pitchFamily="49" charset="0"/>
+              </a:rPr>
               <a:t>Dockerfile.fastp</a:t>
             </a:r>
             <a:endParaRPr lang="en-GB" sz="1200" dirty="0">
@@ -5124,21 +5154,21 @@
           </a:p>
           <a:p>
             <a:r>
-              <a:rPr lang="en-GB" sz="1200" dirty="0">
+              <a:rPr lang="en-GB" sz="1200" b="1" dirty="0">
                 <a:latin typeface="Courier New" panose="02070309020205020404" pitchFamily="49" charset="0"/>
                 <a:cs typeface="Courier New" panose="02070309020205020404" pitchFamily="49" charset="0"/>
               </a:rPr>
               <a:t>--builder selects the </a:t>
             </a:r>
             <a:r>
-              <a:rPr lang="en-GB" sz="1200" dirty="0" err="1">
+              <a:rPr lang="en-GB" sz="1200" b="1" dirty="0" err="1">
                 <a:latin typeface="Courier New" panose="02070309020205020404" pitchFamily="49" charset="0"/>
                 <a:cs typeface="Courier New" panose="02070309020205020404" pitchFamily="49" charset="0"/>
               </a:rPr>
               <a:t>Buildx</a:t>
             </a:r>
             <a:r>
-              <a:rPr lang="en-GB" sz="1200" dirty="0">
+              <a:rPr lang="en-GB" sz="1200" b="1" dirty="0">
                 <a:latin typeface="Courier New" panose="02070309020205020404" pitchFamily="49" charset="0"/>
                 <a:cs typeface="Courier New" panose="02070309020205020404" pitchFamily="49" charset="0"/>
               </a:rPr>
@@ -5147,7 +5177,7 @@
           </a:p>
           <a:p>
             <a:r>
-              <a:rPr lang="en-GB" sz="1200" dirty="0">
+              <a:rPr lang="en-GB" sz="1200" b="1" dirty="0">
                 <a:latin typeface="Courier New" panose="02070309020205020404" pitchFamily="49" charset="0"/>
                 <a:cs typeface="Courier New" panose="02070309020205020404" pitchFamily="49" charset="0"/>
               </a:rPr>
@@ -5261,7 +5291,7 @@
                 <a:latin typeface="Courier New" panose="02070309020205020404" pitchFamily="49" charset="0"/>
                 <a:cs typeface="Courier New" panose="02070309020205020404" pitchFamily="49" charset="0"/>
               </a:rPr>
-              <a:t>Dockerfile_recipies</a:t>
+              <a:t>Dockerfile_recipes</a:t>
             </a:r>
             <a:r>
               <a:rPr lang="en-GB" sz="1200" dirty="0">
@@ -5334,7 +5364,7 @@
         <p:spPr>
           <a:xfrm>
             <a:off x="304798" y="5518556"/>
-            <a:ext cx="4182555" cy="1015663"/>
+            <a:ext cx="4089581" cy="1015663"/>
           </a:xfrm>
           <a:prstGeom prst="rect">
             <a:avLst/>
@@ -5424,7 +5454,7 @@
                 <a:latin typeface="Courier New" panose="02070309020205020404" pitchFamily="49" charset="0"/>
                 <a:cs typeface="Courier New" panose="02070309020205020404" pitchFamily="49" charset="0"/>
               </a:rPr>
-              <a:t>Dockerfile_recipies</a:t>
+              <a:t>Dockerfile_recipes</a:t>
             </a:r>
             <a:r>
               <a:rPr lang="en-GB" sz="1200" dirty="0">
@@ -5760,7 +5790,7 @@
           <a:p>
             <a:fld id="{761DFEEA-1162-B343-ACBF-B3E92F6AC390}" type="datetime1">
               <a:rPr lang="it-IT" smtClean="0"/>
-              <a:t>17/09/26</a:t>
+              <a:t>21/09/26</a:t>
             </a:fld>
             <a:endParaRPr lang="en-GB"/>
           </a:p>
@@ -6359,7 +6389,7 @@
           <a:p>
             <a:fld id="{761DFEEA-1162-B343-ACBF-B3E92F6AC390}" type="datetime1">
               <a:rPr lang="it-IT" smtClean="0"/>
-              <a:t>17/09/26</a:t>
+              <a:t>21/09/26</a:t>
             </a:fld>
             <a:endParaRPr lang="en-GB"/>
           </a:p>
@@ -7518,7 +7548,7 @@
           <a:p>
             <a:fld id="{761DFEEA-1162-B343-ACBF-B3E92F6AC390}" type="datetime1">
               <a:rPr lang="it-IT" smtClean="0"/>
-              <a:t>17/09/26</a:t>
+              <a:t>21/09/26</a:t>
             </a:fld>
             <a:endParaRPr lang="en-GB"/>
           </a:p>
@@ -7995,7 +8025,7 @@
           <a:p>
             <a:fld id="{761DFEEA-1162-B343-ACBF-B3E92F6AC390}" type="datetime1">
               <a:rPr lang="it-IT" smtClean="0"/>
-              <a:t>17/09/26</a:t>
+              <a:t>21/09/26</a:t>
             </a:fld>
             <a:endParaRPr lang="en-GB"/>
           </a:p>
@@ -8871,7 +8901,7 @@
           <a:p>
             <a:fld id="{761DFEEA-1162-B343-ACBF-B3E92F6AC390}" type="datetime1">
               <a:rPr lang="it-IT" smtClean="0"/>
-              <a:t>17/09/26</a:t>
+              <a:t>21/09/26</a:t>
             </a:fld>
             <a:endParaRPr lang="en-GB"/>
           </a:p>
@@ -9022,7 +9052,15 @@
             </a:pPr>
             <a:r>
               <a:rPr lang="en-GB" sz="2400" dirty="0"/>
-              <a:t>Assemble first script : </a:t>
+              <a:t>Assemble first </a:t>
+            </a:r>
+            <a:r>
+              <a:rPr lang="en-IT" sz="2400" dirty="0"/>
+              <a:t>scripts</a:t>
+            </a:r>
+            <a:r>
+              <a:rPr lang="en-GB" sz="2400" dirty="0"/>
+              <a:t> : </a:t>
             </a:r>
             <a:r>
               <a:rPr lang="en-GB" sz="2400" b="1" dirty="0"/>
@@ -9122,7 +9160,7 @@
           <a:p>
             <a:fld id="{538730E4-1E99-1D48-A8E4-52FD9285B379}" type="datetime1">
               <a:rPr lang="it-IT" smtClean="0"/>
-              <a:t>17/09/26</a:t>
+              <a:t>21/09/26</a:t>
             </a:fld>
             <a:endParaRPr lang="en-GB"/>
           </a:p>
@@ -9201,7 +9239,7 @@
             <p:ph idx="1"/>
             <p:extLst>
               <p:ext uri="{D42A27DB-BD31-4B8C-83A1-F6EECF244321}">
-                <p14:modId xmlns:p14="http://schemas.microsoft.com/office/powerpoint/2010/main" val="3727992249"/>
+                <p14:modId xmlns:p14="http://schemas.microsoft.com/office/powerpoint/2010/main" val="1970533836"/>
               </p:ext>
             </p:extLst>
           </p:nvPr>
@@ -9258,7 +9296,7 @@
                       </a:r>
                     </a:p>
                   </a:txBody>
-                  <a:tcPr marL="122301" marR="122301" marT="61150" marB="61150"/>
+                  <a:tcPr marL="122301" marR="122301" marT="61150" marB="61150" anchor="ctr"/>
                 </a:tc>
                 <a:tc>
                   <a:txBody>
@@ -9271,7 +9309,7 @@
                       </a:r>
                     </a:p>
                   </a:txBody>
-                  <a:tcPr marL="122301" marR="122301" marT="61150" marB="61150"/>
+                  <a:tcPr marL="122301" marR="122301" marT="61150" marB="61150" anchor="ctr"/>
                 </a:tc>
                 <a:tc>
                   <a:txBody>
@@ -9284,7 +9322,7 @@
                       </a:r>
                     </a:p>
                   </a:txBody>
-                  <a:tcPr marL="122301" marR="122301" marT="61150" marB="61150"/>
+                  <a:tcPr marL="122301" marR="122301" marT="61150" marB="61150" anchor="ctr"/>
                 </a:tc>
                 <a:tc>
                   <a:txBody>
@@ -9297,7 +9335,7 @@
                       </a:r>
                     </a:p>
                   </a:txBody>
-                  <a:tcPr marL="122301" marR="122301" marT="61150" marB="61150"/>
+                  <a:tcPr marL="122301" marR="122301" marT="61150" marB="61150" anchor="ctr"/>
                 </a:tc>
                 <a:extLst>
                   <a:ext uri="{0D108BD9-81ED-4DB2-BD59-A6C34878D82A}">
@@ -9317,7 +9355,7 @@
                       </a:r>
                     </a:p>
                   </a:txBody>
-                  <a:tcPr marL="122301" marR="122301" marT="61150" marB="61150"/>
+                  <a:tcPr marL="122301" marR="122301" marT="61150" marB="61150" anchor="ctr"/>
                 </a:tc>
                 <a:tc>
                   <a:txBody>
@@ -9347,7 +9385,7 @@
                       <a:endParaRPr lang="en-GB" sz="1600" dirty="0"/>
                     </a:p>
                   </a:txBody>
-                  <a:tcPr marL="122301" marR="122301" marT="61150" marB="61150"/>
+                  <a:tcPr marL="122301" marR="122301" marT="61150" marB="61150" anchor="ctr"/>
                 </a:tc>
                 <a:tc>
                   <a:txBody>
@@ -9360,7 +9398,7 @@
                       </a:r>
                     </a:p>
                   </a:txBody>
-                  <a:tcPr marL="122301" marR="122301" marT="61150" marB="61150"/>
+                  <a:tcPr marL="122301" marR="122301" marT="61150" marB="61150" anchor="ctr"/>
                 </a:tc>
                 <a:extLst>
                   <a:ext uri="{0D108BD9-81ED-4DB2-BD59-A6C34878D82A}">
@@ -9380,7 +9418,7 @@
                       </a:r>
                     </a:p>
                   </a:txBody>
-                  <a:tcPr marL="122301" marR="122301" marT="61150" marB="61150"/>
+                  <a:tcPr marL="122301" marR="122301" marT="61150" marB="61150" anchor="ctr"/>
                 </a:tc>
                 <a:tc>
                   <a:txBody>
@@ -9394,7 +9432,7 @@
                       <a:endParaRPr lang="en-GB" sz="1600" dirty="0"/>
                     </a:p>
                   </a:txBody>
-                  <a:tcPr marL="122301" marR="122301" marT="61150" marB="61150"/>
+                  <a:tcPr marL="122301" marR="122301" marT="61150" marB="61150" anchor="ctr"/>
                 </a:tc>
                 <a:tc>
                   <a:txBody>
@@ -9408,7 +9446,7 @@
                       <a:endParaRPr lang="en-GB" sz="1600" dirty="0"/>
                     </a:p>
                   </a:txBody>
-                  <a:tcPr marL="122301" marR="122301" marT="61150" marB="61150"/>
+                  <a:tcPr marL="122301" marR="122301" marT="61150" marB="61150" anchor="ctr"/>
                 </a:tc>
                 <a:tc>
                   <a:txBody>
@@ -9441,7 +9479,7 @@
                       <a:endParaRPr lang="en-GB" sz="1600" dirty="0"/>
                     </a:p>
                   </a:txBody>
-                  <a:tcPr marL="122301" marR="122301" marT="61150" marB="61150"/>
+                  <a:tcPr marL="122301" marR="122301" marT="61150" marB="61150" anchor="ctr"/>
                 </a:tc>
                 <a:extLst>
                   <a:ext uri="{0D108BD9-81ED-4DB2-BD59-A6C34878D82A}">
@@ -9461,7 +9499,7 @@
                       </a:r>
                     </a:p>
                   </a:txBody>
-                  <a:tcPr marL="122301" marR="122301" marT="61150" marB="61150"/>
+                  <a:tcPr marL="122301" marR="122301" marT="61150" marB="61150" anchor="ctr"/>
                 </a:tc>
                 <a:tc>
                   <a:txBody>
@@ -9475,7 +9513,7 @@
                       <a:endParaRPr lang="en-GB" sz="1600" dirty="0"/>
                     </a:p>
                   </a:txBody>
-                  <a:tcPr marL="122301" marR="122301" marT="61150" marB="61150"/>
+                  <a:tcPr marL="122301" marR="122301" marT="61150" marB="61150" anchor="ctr"/>
                 </a:tc>
                 <a:tc>
                   <a:txBody>
@@ -9489,7 +9527,7 @@
                       <a:endParaRPr lang="en-GB" sz="1600" dirty="0"/>
                     </a:p>
                   </a:txBody>
-                  <a:tcPr marL="122301" marR="122301" marT="61150" marB="61150"/>
+                  <a:tcPr marL="122301" marR="122301" marT="61150" marB="61150" anchor="ctr"/>
                 </a:tc>
                 <a:tc>
                   <a:txBody>
@@ -9522,7 +9560,7 @@
                       <a:endParaRPr lang="en-GB" sz="1600" dirty="0"/>
                     </a:p>
                   </a:txBody>
-                  <a:tcPr marL="122301" marR="122301" marT="61150" marB="61150"/>
+                  <a:tcPr marL="122301" marR="122301" marT="61150" marB="61150" anchor="ctr"/>
                 </a:tc>
                 <a:extLst>
                   <a:ext uri="{0D108BD9-81ED-4DB2-BD59-A6C34878D82A}">
@@ -9542,7 +9580,7 @@
                       </a:r>
                     </a:p>
                   </a:txBody>
-                  <a:tcPr marL="122301" marR="122301" marT="61150" marB="61150"/>
+                  <a:tcPr marL="122301" marR="122301" marT="61150" marB="61150" anchor="ctr"/>
                 </a:tc>
                 <a:tc>
                   <a:txBody>
@@ -9556,7 +9594,7 @@
                       <a:endParaRPr lang="en-GB" sz="1600" dirty="0"/>
                     </a:p>
                   </a:txBody>
-                  <a:tcPr marL="122301" marR="122301" marT="61150" marB="61150"/>
+                  <a:tcPr marL="122301" marR="122301" marT="61150" marB="61150" anchor="ctr"/>
                 </a:tc>
                 <a:tc>
                   <a:txBody>
@@ -9570,7 +9608,7 @@
                       <a:endParaRPr lang="en-GB" sz="1600" dirty="0"/>
                     </a:p>
                   </a:txBody>
-                  <a:tcPr marL="122301" marR="122301" marT="61150" marB="61150"/>
+                  <a:tcPr marL="122301" marR="122301" marT="61150" marB="61150" anchor="ctr"/>
                 </a:tc>
                 <a:tc>
                   <a:txBody>
@@ -9603,7 +9641,7 @@
                       <a:endParaRPr lang="en-GB" sz="1600" dirty="0"/>
                     </a:p>
                   </a:txBody>
-                  <a:tcPr marL="122301" marR="122301" marT="61150" marB="61150"/>
+                  <a:tcPr marL="122301" marR="122301" marT="61150" marB="61150" anchor="ctr"/>
                 </a:tc>
                 <a:extLst>
                   <a:ext uri="{0D108BD9-81ED-4DB2-BD59-A6C34878D82A}">
@@ -9623,7 +9661,7 @@
                       </a:r>
                     </a:p>
                   </a:txBody>
-                  <a:tcPr marL="122301" marR="122301" marT="61150" marB="61150"/>
+                  <a:tcPr marL="122301" marR="122301" marT="61150" marB="61150" anchor="ctr"/>
                 </a:tc>
                 <a:tc>
                   <a:txBody>
@@ -9637,7 +9675,7 @@
                       <a:endParaRPr lang="en-GB" sz="1600" dirty="0"/>
                     </a:p>
                   </a:txBody>
-                  <a:tcPr marL="122301" marR="122301" marT="61150" marB="61150"/>
+                  <a:tcPr marL="122301" marR="122301" marT="61150" marB="61150" anchor="ctr"/>
                 </a:tc>
                 <a:tc>
                   <a:txBody>
@@ -9651,7 +9689,7 @@
                       <a:endParaRPr lang="en-GB" sz="1600" dirty="0"/>
                     </a:p>
                   </a:txBody>
-                  <a:tcPr marL="122301" marR="122301" marT="61150" marB="61150"/>
+                  <a:tcPr marL="122301" marR="122301" marT="61150" marB="61150" anchor="ctr"/>
                 </a:tc>
                 <a:tc>
                   <a:txBody>
@@ -9664,7 +9702,7 @@
                       </a:r>
                     </a:p>
                   </a:txBody>
-                  <a:tcPr marL="122301" marR="122301" marT="61150" marB="61150"/>
+                  <a:tcPr marL="122301" marR="122301" marT="61150" marB="61150" anchor="ctr"/>
                 </a:tc>
                 <a:extLst>
                   <a:ext uri="{0D108BD9-81ED-4DB2-BD59-A6C34878D82A}">
@@ -9894,7 +9932,7 @@
         <p:spPr>
           <a:xfrm>
             <a:off x="223382" y="335845"/>
-            <a:ext cx="10079937" cy="6186309"/>
+            <a:ext cx="10079937" cy="5816977"/>
           </a:xfrm>
           <a:prstGeom prst="rect">
             <a:avLst/>
@@ -10042,7 +10080,7 @@
                 <a:latin typeface="Courier New" panose="02070309020205020404" pitchFamily="49" charset="0"/>
                 <a:cs typeface="Courier New" panose="02070309020205020404" pitchFamily="49" charset="0"/>
               </a:rPr>
-              <a:t>/genomes/all/GCF/025/998/455 GCF_025998455.1_ASM2599845v1"</a:t>
+              <a:t>/genomes/all/GCF/025/998/455/${assembly}"</a:t>
             </a:r>
           </a:p>
           <a:p>
@@ -10052,6 +10090,36 @@
             </a:endParaRPr>
           </a:p>
           <a:p>
+            <a:r>
+              <a:rPr lang="en-GB" sz="1200" dirty="0" err="1">
+                <a:latin typeface="Courier New" panose="02070309020205020404" pitchFamily="49" charset="0"/>
+                <a:cs typeface="Courier New" panose="02070309020205020404" pitchFamily="49" charset="0"/>
+              </a:rPr>
+              <a:t>mkdir</a:t>
+            </a:r>
+            <a:r>
+              <a:rPr lang="en-GB" sz="1200" dirty="0">
+                <a:latin typeface="Courier New" panose="02070309020205020404" pitchFamily="49" charset="0"/>
+                <a:cs typeface="Courier New" panose="02070309020205020404" pitchFamily="49" charset="0"/>
+              </a:rPr>
+              <a:t> -p "${</a:t>
+            </a:r>
+            <a:r>
+              <a:rPr lang="en-GB" sz="1200" dirty="0" err="1">
+                <a:latin typeface="Courier New" panose="02070309020205020404" pitchFamily="49" charset="0"/>
+                <a:cs typeface="Courier New" panose="02070309020205020404" pitchFamily="49" charset="0"/>
+              </a:rPr>
+              <a:t>out_dir</a:t>
+            </a:r>
+            <a:r>
+              <a:rPr lang="en-GB" sz="1200" dirty="0">
+                <a:latin typeface="Courier New" panose="02070309020205020404" pitchFamily="49" charset="0"/>
+                <a:cs typeface="Courier New" panose="02070309020205020404" pitchFamily="49" charset="0"/>
+              </a:rPr>
+              <a:t>}"</a:t>
+            </a:r>
+          </a:p>
+          <a:p>
             <a:endParaRPr lang="en-GB" sz="1200" dirty="0">
               <a:latin typeface="Courier New" panose="02070309020205020404" pitchFamily="49" charset="0"/>
               <a:cs typeface="Courier New" panose="02070309020205020404" pitchFamily="49" charset="0"/>
@@ -10059,24 +10127,68 @@
           </a:p>
           <a:p>
             <a:r>
+              <a:rPr lang="en-GB" sz="1200" dirty="0">
+                <a:latin typeface="Courier New" panose="02070309020205020404" pitchFamily="49" charset="0"/>
+                <a:cs typeface="Courier New" panose="02070309020205020404" pitchFamily="49" charset="0"/>
+              </a:rPr>
+              <a:t>echo "Downloading genome FASTA"</a:t>
+            </a:r>
+          </a:p>
+          <a:p>
+            <a:r>
+              <a:rPr lang="en-GB" sz="1200" dirty="0">
+                <a:latin typeface="Courier New" panose="02070309020205020404" pitchFamily="49" charset="0"/>
+                <a:cs typeface="Courier New" panose="02070309020205020404" pitchFamily="49" charset="0"/>
+              </a:rPr>
+              <a:t>curl -</a:t>
+            </a:r>
+            <a:r>
               <a:rPr lang="en-GB" sz="1200" dirty="0" err="1">
                 <a:latin typeface="Courier New" panose="02070309020205020404" pitchFamily="49" charset="0"/>
                 <a:cs typeface="Courier New" panose="02070309020205020404" pitchFamily="49" charset="0"/>
               </a:rPr>
-              <a:t>mkdir</a:t>
+              <a:t>fL</a:t>
             </a:r>
             <a:r>
               <a:rPr lang="en-GB" sz="1200" dirty="0">
                 <a:latin typeface="Courier New" panose="02070309020205020404" pitchFamily="49" charset="0"/>
                 <a:cs typeface="Courier New" panose="02070309020205020404" pitchFamily="49" charset="0"/>
               </a:rPr>
-              <a:t> -p "${</a:t>
+              <a:t> "${</a:t>
             </a:r>
             <a:r>
               <a:rPr lang="en-GB" sz="1200" dirty="0" err="1">
                 <a:latin typeface="Courier New" panose="02070309020205020404" pitchFamily="49" charset="0"/>
                 <a:cs typeface="Courier New" panose="02070309020205020404" pitchFamily="49" charset="0"/>
               </a:rPr>
+              <a:t>base_url</a:t>
+            </a:r>
+            <a:r>
+              <a:rPr lang="en-GB" sz="1200" dirty="0">
+                <a:latin typeface="Courier New" panose="02070309020205020404" pitchFamily="49" charset="0"/>
+                <a:cs typeface="Courier New" panose="02070309020205020404" pitchFamily="49" charset="0"/>
+              </a:rPr>
+              <a:t>}/${assembly}_</a:t>
+            </a:r>
+            <a:r>
+              <a:rPr lang="en-GB" sz="1200" dirty="0" err="1">
+                <a:latin typeface="Courier New" panose="02070309020205020404" pitchFamily="49" charset="0"/>
+                <a:cs typeface="Courier New" panose="02070309020205020404" pitchFamily="49" charset="0"/>
+              </a:rPr>
+              <a:t>genomic.fna.gz</a:t>
+            </a:r>
+            <a:r>
+              <a:rPr lang="en-GB" sz="1200" dirty="0">
+                <a:latin typeface="Courier New" panose="02070309020205020404" pitchFamily="49" charset="0"/>
+                <a:cs typeface="Courier New" panose="02070309020205020404" pitchFamily="49" charset="0"/>
+              </a:rPr>
+              <a:t>" -o "${</a:t>
+            </a:r>
+            <a:r>
+              <a:rPr lang="en-GB" sz="1200" dirty="0" err="1">
+                <a:latin typeface="Courier New" panose="02070309020205020404" pitchFamily="49" charset="0"/>
+                <a:cs typeface="Courier New" panose="02070309020205020404" pitchFamily="49" charset="0"/>
+              </a:rPr>
               <a:t>out_dir</a:t>
             </a:r>
             <a:r>
@@ -10084,7 +10196,79 @@
                 <a:latin typeface="Courier New" panose="02070309020205020404" pitchFamily="49" charset="0"/>
                 <a:cs typeface="Courier New" panose="02070309020205020404" pitchFamily="49" charset="0"/>
               </a:rPr>
-              <a:t>}"</a:t>
+              <a:t>}/</a:t>
+            </a:r>
+            <a:r>
+              <a:rPr lang="en-GB" sz="1200" dirty="0" err="1">
+                <a:latin typeface="Courier New" panose="02070309020205020404" pitchFamily="49" charset="0"/>
+                <a:cs typeface="Courier New" panose="02070309020205020404" pitchFamily="49" charset="0"/>
+              </a:rPr>
+              <a:t>genome.fa.gz</a:t>
+            </a:r>
+            <a:r>
+              <a:rPr lang="en-GB" sz="1200" dirty="0">
+                <a:latin typeface="Courier New" panose="02070309020205020404" pitchFamily="49" charset="0"/>
+                <a:cs typeface="Courier New" panose="02070309020205020404" pitchFamily="49" charset="0"/>
+              </a:rPr>
+              <a:t>"</a:t>
+            </a:r>
+          </a:p>
+          <a:p>
+            <a:r>
+              <a:rPr lang="en-GB" sz="1200" dirty="0" err="1">
+                <a:latin typeface="Courier New" panose="02070309020205020404" pitchFamily="49" charset="0"/>
+                <a:cs typeface="Courier New" panose="02070309020205020404" pitchFamily="49" charset="0"/>
+              </a:rPr>
+              <a:t>gzip</a:t>
+            </a:r>
+            <a:r>
+              <a:rPr lang="en-GB" sz="1200" dirty="0">
+                <a:latin typeface="Courier New" panose="02070309020205020404" pitchFamily="49" charset="0"/>
+                <a:cs typeface="Courier New" panose="02070309020205020404" pitchFamily="49" charset="0"/>
+              </a:rPr>
+              <a:t> -</a:t>
+            </a:r>
+            <a:r>
+              <a:rPr lang="en-GB" sz="1200" dirty="0" err="1">
+                <a:latin typeface="Courier New" panose="02070309020205020404" pitchFamily="49" charset="0"/>
+                <a:cs typeface="Courier New" panose="02070309020205020404" pitchFamily="49" charset="0"/>
+              </a:rPr>
+              <a:t>df</a:t>
+            </a:r>
+            <a:r>
+              <a:rPr lang="en-GB" sz="1200" dirty="0">
+                <a:latin typeface="Courier New" panose="02070309020205020404" pitchFamily="49" charset="0"/>
+                <a:cs typeface="Courier New" panose="02070309020205020404" pitchFamily="49" charset="0"/>
+              </a:rPr>
+              <a:t> "${</a:t>
+            </a:r>
+            <a:r>
+              <a:rPr lang="en-GB" sz="1200" dirty="0" err="1">
+                <a:latin typeface="Courier New" panose="02070309020205020404" pitchFamily="49" charset="0"/>
+                <a:cs typeface="Courier New" panose="02070309020205020404" pitchFamily="49" charset="0"/>
+              </a:rPr>
+              <a:t>out_dir</a:t>
+            </a:r>
+            <a:r>
+              <a:rPr lang="en-GB" sz="1200" dirty="0">
+                <a:latin typeface="Courier New" panose="02070309020205020404" pitchFamily="49" charset="0"/>
+                <a:cs typeface="Courier New" panose="02070309020205020404" pitchFamily="49" charset="0"/>
+              </a:rPr>
+              <a:t>}/</a:t>
+            </a:r>
+            <a:r>
+              <a:rPr lang="en-GB" sz="1200" dirty="0" err="1">
+                <a:latin typeface="Courier New" panose="02070309020205020404" pitchFamily="49" charset="0"/>
+                <a:cs typeface="Courier New" panose="02070309020205020404" pitchFamily="49" charset="0"/>
+              </a:rPr>
+              <a:t>genome.fa.gz</a:t>
+            </a:r>
+            <a:r>
+              <a:rPr lang="en-GB" sz="1200" dirty="0">
+                <a:latin typeface="Courier New" panose="02070309020205020404" pitchFamily="49" charset="0"/>
+                <a:cs typeface="Courier New" panose="02070309020205020404" pitchFamily="49" charset="0"/>
+              </a:rPr>
+              <a:t>"</a:t>
             </a:r>
           </a:p>
           <a:p>
@@ -10099,43 +10283,101 @@
                 <a:latin typeface="Courier New" panose="02070309020205020404" pitchFamily="49" charset="0"/>
                 <a:cs typeface="Courier New" panose="02070309020205020404" pitchFamily="49" charset="0"/>
               </a:rPr>
-              <a:t>echo "Downloading genome FASTA" | tee -a "${</a:t>
+              <a:t>echo "Downloading GFF3 annotation" </a:t>
+            </a:r>
+          </a:p>
+          <a:p>
+            <a:r>
+              <a:rPr lang="en-GB" sz="1200" dirty="0">
+                <a:latin typeface="Courier New" panose="02070309020205020404" pitchFamily="49" charset="0"/>
+                <a:cs typeface="Courier New" panose="02070309020205020404" pitchFamily="49" charset="0"/>
+              </a:rPr>
+              <a:t>curl -</a:t>
             </a:r>
             <a:r>
               <a:rPr lang="en-GB" sz="1200" dirty="0" err="1">
                 <a:latin typeface="Courier New" panose="02070309020205020404" pitchFamily="49" charset="0"/>
                 <a:cs typeface="Courier New" panose="02070309020205020404" pitchFamily="49" charset="0"/>
               </a:rPr>
-              <a:t>log_file</a:t>
+              <a:t>fL</a:t>
             </a:r>
             <a:r>
               <a:rPr lang="en-GB" sz="1200" dirty="0">
                 <a:latin typeface="Courier New" panose="02070309020205020404" pitchFamily="49" charset="0"/>
                 <a:cs typeface="Courier New" panose="02070309020205020404" pitchFamily="49" charset="0"/>
               </a:rPr>
-              <a:t>}"</a:t>
-            </a:r>
-          </a:p>
-          <a:p>
+              <a:t> "${</a:t>
+            </a:r>
+            <a:r>
+              <a:rPr lang="en-GB" sz="1200" dirty="0" err="1">
+                <a:latin typeface="Courier New" panose="02070309020205020404" pitchFamily="49" charset="0"/>
+                <a:cs typeface="Courier New" panose="02070309020205020404" pitchFamily="49" charset="0"/>
+              </a:rPr>
+              <a:t>base_url</a:t>
+            </a:r>
             <a:r>
               <a:rPr lang="en-GB" sz="1200" dirty="0">
                 <a:latin typeface="Courier New" panose="02070309020205020404" pitchFamily="49" charset="0"/>
                 <a:cs typeface="Courier New" panose="02070309020205020404" pitchFamily="49" charset="0"/>
               </a:rPr>
-              <a:t>curl -</a:t>
+              <a:t>}/${assembly}_</a:t>
             </a:r>
             <a:r>
               <a:rPr lang="en-GB" sz="1200" dirty="0" err="1">
                 <a:latin typeface="Courier New" panose="02070309020205020404" pitchFamily="49" charset="0"/>
                 <a:cs typeface="Courier New" panose="02070309020205020404" pitchFamily="49" charset="0"/>
               </a:rPr>
-              <a:t>fL</a:t>
+              <a:t>genomic.gff.gz</a:t>
             </a:r>
             <a:r>
               <a:rPr lang="en-GB" sz="1200" dirty="0">
                 <a:latin typeface="Courier New" panose="02070309020205020404" pitchFamily="49" charset="0"/>
                 <a:cs typeface="Courier New" panose="02070309020205020404" pitchFamily="49" charset="0"/>
               </a:rPr>
+              <a:t>" -o "${</a:t>
+            </a:r>
+            <a:r>
+              <a:rPr lang="en-GB" sz="1200" dirty="0" err="1">
+                <a:latin typeface="Courier New" panose="02070309020205020404" pitchFamily="49" charset="0"/>
+                <a:cs typeface="Courier New" panose="02070309020205020404" pitchFamily="49" charset="0"/>
+              </a:rPr>
+              <a:t>out_dir</a:t>
+            </a:r>
+            <a:r>
+              <a:rPr lang="en-GB" sz="1200" dirty="0">
+                <a:latin typeface="Courier New" panose="02070309020205020404" pitchFamily="49" charset="0"/>
+                <a:cs typeface="Courier New" panose="02070309020205020404" pitchFamily="49" charset="0"/>
+              </a:rPr>
+              <a:t>}/annotation.gff3.gz"</a:t>
+            </a:r>
+          </a:p>
+          <a:p>
+            <a:r>
+              <a:rPr lang="en-GB" sz="1200" dirty="0" err="1">
+                <a:latin typeface="Courier New" panose="02070309020205020404" pitchFamily="49" charset="0"/>
+                <a:cs typeface="Courier New" panose="02070309020205020404" pitchFamily="49" charset="0"/>
+              </a:rPr>
+              <a:t>gzip</a:t>
+            </a:r>
+            <a:r>
+              <a:rPr lang="en-GB" sz="1200" dirty="0">
+                <a:latin typeface="Courier New" panose="02070309020205020404" pitchFamily="49" charset="0"/>
+                <a:cs typeface="Courier New" panose="02070309020205020404" pitchFamily="49" charset="0"/>
+              </a:rPr>
+              <a:t> -</a:t>
+            </a:r>
+            <a:r>
+              <a:rPr lang="en-GB" sz="1200" dirty="0" err="1">
+                <a:latin typeface="Courier New" panose="02070309020205020404" pitchFamily="49" charset="0"/>
+                <a:cs typeface="Courier New" panose="02070309020205020404" pitchFamily="49" charset="0"/>
+              </a:rPr>
+              <a:t>df</a:t>
+            </a:r>
+            <a:r>
+              <a:rPr lang="en-GB" sz="1200" dirty="0">
+                <a:latin typeface="Courier New" panose="02070309020205020404" pitchFamily="49" charset="0"/>
+                <a:cs typeface="Courier New" panose="02070309020205020404" pitchFamily="49" charset="0"/>
+              </a:rPr>
               <a:t> "${</a:t>
             </a:r>
             <a:r>
@@ -10143,114 +10385,14 @@
                 <a:latin typeface="Courier New" panose="02070309020205020404" pitchFamily="49" charset="0"/>
                 <a:cs typeface="Courier New" panose="02070309020205020404" pitchFamily="49" charset="0"/>
               </a:rPr>
-              <a:t>base_url</a:t>
+              <a:t>out_dir</a:t>
             </a:r>
             <a:r>
               <a:rPr lang="en-GB" sz="1200" dirty="0">
                 <a:latin typeface="Courier New" panose="02070309020205020404" pitchFamily="49" charset="0"/>
                 <a:cs typeface="Courier New" panose="02070309020205020404" pitchFamily="49" charset="0"/>
               </a:rPr>
-              <a:t>}/${assembly}_</a:t>
-            </a:r>
-            <a:r>
-              <a:rPr lang="en-GB" sz="1200" dirty="0" err="1">
-                <a:latin typeface="Courier New" panose="02070309020205020404" pitchFamily="49" charset="0"/>
-                <a:cs typeface="Courier New" panose="02070309020205020404" pitchFamily="49" charset="0"/>
-              </a:rPr>
-              <a:t>genomic.fna.gz</a:t>
-            </a:r>
-            <a:r>
-              <a:rPr lang="en-GB" sz="1200" dirty="0">
-                <a:latin typeface="Courier New" panose="02070309020205020404" pitchFamily="49" charset="0"/>
-                <a:cs typeface="Courier New" panose="02070309020205020404" pitchFamily="49" charset="0"/>
-              </a:rPr>
-              <a:t>" -o "${</a:t>
-            </a:r>
-            <a:r>
-              <a:rPr lang="en-GB" sz="1200" dirty="0" err="1">
-                <a:latin typeface="Courier New" panose="02070309020205020404" pitchFamily="49" charset="0"/>
-                <a:cs typeface="Courier New" panose="02070309020205020404" pitchFamily="49" charset="0"/>
-              </a:rPr>
-              <a:t>out_dir</a:t>
-            </a:r>
-            <a:r>
-              <a:rPr lang="en-GB" sz="1200" dirty="0">
-                <a:latin typeface="Courier New" panose="02070309020205020404" pitchFamily="49" charset="0"/>
-                <a:cs typeface="Courier New" panose="02070309020205020404" pitchFamily="49" charset="0"/>
-              </a:rPr>
-              <a:t>}/</a:t>
-            </a:r>
-            <a:r>
-              <a:rPr lang="en-GB" sz="1200" dirty="0" err="1">
-                <a:latin typeface="Courier New" panose="02070309020205020404" pitchFamily="49" charset="0"/>
-                <a:cs typeface="Courier New" panose="02070309020205020404" pitchFamily="49" charset="0"/>
-              </a:rPr>
-              <a:t>genome.fa.gz</a:t>
-            </a:r>
-            <a:r>
-              <a:rPr lang="en-GB" sz="1200" dirty="0">
-                <a:latin typeface="Courier New" panose="02070309020205020404" pitchFamily="49" charset="0"/>
-                <a:cs typeface="Courier New" panose="02070309020205020404" pitchFamily="49" charset="0"/>
-              </a:rPr>
-              <a:t>"</a:t>
-            </a:r>
-          </a:p>
-          <a:p>
-            <a:r>
-              <a:rPr lang="en-GB" sz="1200" dirty="0" err="1">
-                <a:latin typeface="Courier New" panose="02070309020205020404" pitchFamily="49" charset="0"/>
-                <a:cs typeface="Courier New" panose="02070309020205020404" pitchFamily="49" charset="0"/>
-              </a:rPr>
-              <a:t>gzip</a:t>
-            </a:r>
-            <a:r>
-              <a:rPr lang="en-GB" sz="1200" dirty="0">
-                <a:latin typeface="Courier New" panose="02070309020205020404" pitchFamily="49" charset="0"/>
-                <a:cs typeface="Courier New" panose="02070309020205020404" pitchFamily="49" charset="0"/>
-              </a:rPr>
-              <a:t> -</a:t>
-            </a:r>
-            <a:r>
-              <a:rPr lang="en-GB" sz="1200" dirty="0" err="1">
-                <a:latin typeface="Courier New" panose="02070309020205020404" pitchFamily="49" charset="0"/>
-                <a:cs typeface="Courier New" panose="02070309020205020404" pitchFamily="49" charset="0"/>
-              </a:rPr>
-              <a:t>df</a:t>
-            </a:r>
-            <a:r>
-              <a:rPr lang="en-GB" sz="1200" dirty="0">
-                <a:latin typeface="Courier New" panose="02070309020205020404" pitchFamily="49" charset="0"/>
-                <a:cs typeface="Courier New" panose="02070309020205020404" pitchFamily="49" charset="0"/>
-              </a:rPr>
-              <a:t> "${</a:t>
-            </a:r>
-            <a:r>
-              <a:rPr lang="en-GB" sz="1200" dirty="0" err="1">
-                <a:latin typeface="Courier New" panose="02070309020205020404" pitchFamily="49" charset="0"/>
-                <a:cs typeface="Courier New" panose="02070309020205020404" pitchFamily="49" charset="0"/>
-              </a:rPr>
-              <a:t>out_dir</a:t>
-            </a:r>
-            <a:r>
-              <a:rPr lang="en-GB" sz="1200" dirty="0">
-                <a:latin typeface="Courier New" panose="02070309020205020404" pitchFamily="49" charset="0"/>
-                <a:cs typeface="Courier New" panose="02070309020205020404" pitchFamily="49" charset="0"/>
-              </a:rPr>
-              <a:t>}/</a:t>
-            </a:r>
-            <a:r>
-              <a:rPr lang="en-GB" sz="1200" dirty="0" err="1">
-                <a:latin typeface="Courier New" panose="02070309020205020404" pitchFamily="49" charset="0"/>
-                <a:cs typeface="Courier New" panose="02070309020205020404" pitchFamily="49" charset="0"/>
-              </a:rPr>
-              <a:t>genome.fa.gz</a:t>
-            </a:r>
-            <a:r>
-              <a:rPr lang="en-GB" sz="1200" dirty="0">
-                <a:latin typeface="Courier New" panose="02070309020205020404" pitchFamily="49" charset="0"/>
-                <a:cs typeface="Courier New" panose="02070309020205020404" pitchFamily="49" charset="0"/>
-              </a:rPr>
-              <a:t>"</a:t>
+              <a:t>}/annotation.gff3.gz"</a:t>
             </a:r>
           </a:p>
           <a:p>
@@ -10265,43 +10407,115 @@
                 <a:latin typeface="Courier New" panose="02070309020205020404" pitchFamily="49" charset="0"/>
                 <a:cs typeface="Courier New" panose="02070309020205020404" pitchFamily="49" charset="0"/>
               </a:rPr>
-              <a:t>echo "Downloading GFF3 annotation" | tee -a "${</a:t>
+              <a:t>echo "Downloading GTF annotation" </a:t>
+            </a:r>
+          </a:p>
+          <a:p>
+            <a:r>
+              <a:rPr lang="en-GB" sz="1200" dirty="0">
+                <a:latin typeface="Courier New" panose="02070309020205020404" pitchFamily="49" charset="0"/>
+                <a:cs typeface="Courier New" panose="02070309020205020404" pitchFamily="49" charset="0"/>
+              </a:rPr>
+              <a:t>curl -</a:t>
             </a:r>
             <a:r>
               <a:rPr lang="en-GB" sz="1200" dirty="0" err="1">
                 <a:latin typeface="Courier New" panose="02070309020205020404" pitchFamily="49" charset="0"/>
                 <a:cs typeface="Courier New" panose="02070309020205020404" pitchFamily="49" charset="0"/>
               </a:rPr>
-              <a:t>log_file</a:t>
+              <a:t>fL</a:t>
             </a:r>
             <a:r>
               <a:rPr lang="en-GB" sz="1200" dirty="0">
                 <a:latin typeface="Courier New" panose="02070309020205020404" pitchFamily="49" charset="0"/>
                 <a:cs typeface="Courier New" panose="02070309020205020404" pitchFamily="49" charset="0"/>
               </a:rPr>
-              <a:t>}"</a:t>
-            </a:r>
-          </a:p>
-          <a:p>
+              <a:t> "${</a:t>
+            </a:r>
+            <a:r>
+              <a:rPr lang="en-GB" sz="1200" dirty="0" err="1">
+                <a:latin typeface="Courier New" panose="02070309020205020404" pitchFamily="49" charset="0"/>
+                <a:cs typeface="Courier New" panose="02070309020205020404" pitchFamily="49" charset="0"/>
+              </a:rPr>
+              <a:t>base_url</a:t>
+            </a:r>
             <a:r>
               <a:rPr lang="en-GB" sz="1200" dirty="0">
                 <a:latin typeface="Courier New" panose="02070309020205020404" pitchFamily="49" charset="0"/>
                 <a:cs typeface="Courier New" panose="02070309020205020404" pitchFamily="49" charset="0"/>
               </a:rPr>
-              <a:t>curl -</a:t>
+              <a:t>}/${assembly}_</a:t>
             </a:r>
             <a:r>
               <a:rPr lang="en-GB" sz="1200" dirty="0" err="1">
                 <a:latin typeface="Courier New" panose="02070309020205020404" pitchFamily="49" charset="0"/>
                 <a:cs typeface="Courier New" panose="02070309020205020404" pitchFamily="49" charset="0"/>
               </a:rPr>
-              <a:t>fL</a:t>
+              <a:t>genomic.gtf.gz</a:t>
             </a:r>
             <a:r>
               <a:rPr lang="en-GB" sz="1200" dirty="0">
                 <a:latin typeface="Courier New" panose="02070309020205020404" pitchFamily="49" charset="0"/>
                 <a:cs typeface="Courier New" panose="02070309020205020404" pitchFamily="49" charset="0"/>
               </a:rPr>
+              <a:t>" -o "${</a:t>
+            </a:r>
+            <a:r>
+              <a:rPr lang="en-GB" sz="1200" dirty="0" err="1">
+                <a:latin typeface="Courier New" panose="02070309020205020404" pitchFamily="49" charset="0"/>
+                <a:cs typeface="Courier New" panose="02070309020205020404" pitchFamily="49" charset="0"/>
+              </a:rPr>
+              <a:t>out_dir</a:t>
+            </a:r>
+            <a:r>
+              <a:rPr lang="en-GB" sz="1200" dirty="0">
+                <a:latin typeface="Courier New" panose="02070309020205020404" pitchFamily="49" charset="0"/>
+                <a:cs typeface="Courier New" panose="02070309020205020404" pitchFamily="49" charset="0"/>
+              </a:rPr>
+              <a:t>}/</a:t>
+            </a:r>
+            <a:r>
+              <a:rPr lang="en-GB" sz="1200" dirty="0" err="1">
+                <a:latin typeface="Courier New" panose="02070309020205020404" pitchFamily="49" charset="0"/>
+                <a:cs typeface="Courier New" panose="02070309020205020404" pitchFamily="49" charset="0"/>
+              </a:rPr>
+              <a:t>annotation.gtf.gz</a:t>
+            </a:r>
+            <a:r>
+              <a:rPr lang="en-GB" sz="1200" dirty="0">
+                <a:latin typeface="Courier New" panose="02070309020205020404" pitchFamily="49" charset="0"/>
+                <a:cs typeface="Courier New" panose="02070309020205020404" pitchFamily="49" charset="0"/>
+              </a:rPr>
+              <a:t>"</a:t>
+            </a:r>
+          </a:p>
+          <a:p>
+            <a:r>
+              <a:rPr lang="en-GB" sz="1200" dirty="0" err="1">
+                <a:latin typeface="Courier New" panose="02070309020205020404" pitchFamily="49" charset="0"/>
+                <a:cs typeface="Courier New" panose="02070309020205020404" pitchFamily="49" charset="0"/>
+              </a:rPr>
+              <a:t>gzip</a:t>
+            </a:r>
+            <a:r>
+              <a:rPr lang="en-GB" sz="1200" dirty="0">
+                <a:latin typeface="Courier New" panose="02070309020205020404" pitchFamily="49" charset="0"/>
+                <a:cs typeface="Courier New" panose="02070309020205020404" pitchFamily="49" charset="0"/>
+              </a:rPr>
+              <a:t> -</a:t>
+            </a:r>
+            <a:r>
+              <a:rPr lang="en-GB" sz="1200" dirty="0" err="1">
+                <a:latin typeface="Courier New" panose="02070309020205020404" pitchFamily="49" charset="0"/>
+                <a:cs typeface="Courier New" panose="02070309020205020404" pitchFamily="49" charset="0"/>
+              </a:rPr>
+              <a:t>df</a:t>
+            </a:r>
+            <a:r>
+              <a:rPr lang="en-GB" sz="1200" dirty="0">
+                <a:latin typeface="Courier New" panose="02070309020205020404" pitchFamily="49" charset="0"/>
+                <a:cs typeface="Courier New" panose="02070309020205020404" pitchFamily="49" charset="0"/>
+              </a:rPr>
               <a:t> "${</a:t>
             </a:r>
             <a:r>
@@ -10309,86 +10523,285 @@
                 <a:latin typeface="Courier New" panose="02070309020205020404" pitchFamily="49" charset="0"/>
                 <a:cs typeface="Courier New" panose="02070309020205020404" pitchFamily="49" charset="0"/>
               </a:rPr>
-              <a:t>base_url</a:t>
+              <a:t>out_dir</a:t>
             </a:r>
             <a:r>
               <a:rPr lang="en-GB" sz="1200" dirty="0">
                 <a:latin typeface="Courier New" panose="02070309020205020404" pitchFamily="49" charset="0"/>
                 <a:cs typeface="Courier New" panose="02070309020205020404" pitchFamily="49" charset="0"/>
               </a:rPr>
-              <a:t>}/${assembly}_</a:t>
+              <a:t>}/</a:t>
             </a:r>
             <a:r>
               <a:rPr lang="en-GB" sz="1200" dirty="0" err="1">
                 <a:latin typeface="Courier New" panose="02070309020205020404" pitchFamily="49" charset="0"/>
                 <a:cs typeface="Courier New" panose="02070309020205020404" pitchFamily="49" charset="0"/>
               </a:rPr>
-              <a:t>genomic.gff.gz</a:t>
+              <a:t>annotation.gtf.gz</a:t>
             </a:r>
             <a:r>
               <a:rPr lang="en-GB" sz="1200" dirty="0">
                 <a:latin typeface="Courier New" panose="02070309020205020404" pitchFamily="49" charset="0"/>
                 <a:cs typeface="Courier New" panose="02070309020205020404" pitchFamily="49" charset="0"/>
               </a:rPr>
-              <a:t>" -o "${</a:t>
-            </a:r>
-            <a:r>
-              <a:rPr lang="en-GB" sz="1200" dirty="0" err="1">
+              <a:t>"</a:t>
+            </a:r>
+          </a:p>
+          <a:p>
+            <a:endParaRPr lang="en-GB" sz="1200" b="1" dirty="0">
+              <a:solidFill>
+                <a:srgbClr val="FF0000"/>
+              </a:solidFill>
+              <a:latin typeface="Courier New" panose="02070309020205020404" pitchFamily="49" charset="0"/>
+              <a:cs typeface="Courier New" panose="02070309020205020404" pitchFamily="49" charset="0"/>
+            </a:endParaRPr>
+          </a:p>
+          <a:p>
+            <a:r>
+              <a:rPr lang="en-GB" sz="1200" b="1" dirty="0">
+                <a:solidFill>
+                  <a:srgbClr val="FF0000"/>
+                </a:solidFill>
+                <a:latin typeface="Courier New" panose="02070309020205020404" pitchFamily="49" charset="0"/>
+                <a:cs typeface="Courier New" panose="02070309020205020404" pitchFamily="49" charset="0"/>
+              </a:rPr>
+              <a:t>awk -F '\t' '</a:t>
+            </a:r>
+          </a:p>
+          <a:p>
+            <a:r>
+              <a:rPr lang="en-GB" sz="1200" b="1" dirty="0">
+                <a:solidFill>
+                  <a:srgbClr val="FF0000"/>
+                </a:solidFill>
+                <a:latin typeface="Courier New" panose="02070309020205020404" pitchFamily="49" charset="0"/>
+                <a:cs typeface="Courier New" panose="02070309020205020404" pitchFamily="49" charset="0"/>
+              </a:rPr>
+              <a:t>BEGIN { OFS = "\t" }</a:t>
+            </a:r>
+          </a:p>
+          <a:p>
+            <a:r>
+              <a:rPr lang="en-GB" sz="1200" b="1" dirty="0">
+                <a:solidFill>
+                  <a:srgbClr val="FF0000"/>
+                </a:solidFill>
+                <a:latin typeface="Courier New" panose="02070309020205020404" pitchFamily="49" charset="0"/>
+                <a:cs typeface="Courier New" panose="02070309020205020404" pitchFamily="49" charset="0"/>
+              </a:rPr>
+              <a:t>$3 == "gene" {</a:t>
+            </a:r>
+          </a:p>
+          <a:p>
+            <a:r>
+              <a:rPr lang="en-GB" sz="1200" b="1" dirty="0">
+                <a:solidFill>
+                  <a:srgbClr val="FF0000"/>
+                </a:solidFill>
+                <a:latin typeface="Courier New" panose="02070309020205020404" pitchFamily="49" charset="0"/>
+                <a:cs typeface="Courier New" panose="02070309020205020404" pitchFamily="49" charset="0"/>
+              </a:rPr>
+              <a:t>  split($9, attributes, ";")</a:t>
+            </a:r>
+          </a:p>
+          <a:p>
+            <a:r>
+              <a:rPr lang="en-GB" sz="1200" b="1" dirty="0">
+                <a:solidFill>
+                  <a:srgbClr val="FF0000"/>
+                </a:solidFill>
+                <a:latin typeface="Courier New" panose="02070309020205020404" pitchFamily="49" charset="0"/>
+                <a:cs typeface="Courier New" panose="02070309020205020404" pitchFamily="49" charset="0"/>
+              </a:rPr>
+              <a:t>  sub(/^ID=/, "", attributes[1])</a:t>
+            </a:r>
+          </a:p>
+          <a:p>
+            <a:r>
+              <a:rPr lang="en-GB" sz="1200" b="1" dirty="0">
+                <a:solidFill>
+                  <a:srgbClr val="FF0000"/>
+                </a:solidFill>
+                <a:latin typeface="Courier New" panose="02070309020205020404" pitchFamily="49" charset="0"/>
+                <a:cs typeface="Courier New" panose="02070309020205020404" pitchFamily="49" charset="0"/>
+              </a:rPr>
+              <a:t>  </a:t>
+            </a:r>
+            <a:r>
+              <a:rPr lang="en-GB" sz="1200" b="1" dirty="0" err="1">
+                <a:solidFill>
+                  <a:srgbClr val="FF0000"/>
+                </a:solidFill>
+                <a:latin typeface="Courier New" panose="02070309020205020404" pitchFamily="49" charset="0"/>
+                <a:cs typeface="Courier New" panose="02070309020205020404" pitchFamily="49" charset="0"/>
+              </a:rPr>
+              <a:t>bed_start</a:t>
+            </a:r>
+            <a:r>
+              <a:rPr lang="en-GB" sz="1200" b="1" dirty="0">
+                <a:solidFill>
+                  <a:srgbClr val="FF0000"/>
+                </a:solidFill>
+                <a:latin typeface="Courier New" panose="02070309020205020404" pitchFamily="49" charset="0"/>
+                <a:cs typeface="Courier New" panose="02070309020205020404" pitchFamily="49" charset="0"/>
+              </a:rPr>
+              <a:t> = $4 - 1</a:t>
+            </a:r>
+          </a:p>
+          <a:p>
+            <a:r>
+              <a:rPr lang="en-GB" sz="1200" b="1" dirty="0">
+                <a:solidFill>
+                  <a:srgbClr val="FF0000"/>
+                </a:solidFill>
+                <a:latin typeface="Courier New" panose="02070309020205020404" pitchFamily="49" charset="0"/>
+                <a:cs typeface="Courier New" panose="02070309020205020404" pitchFamily="49" charset="0"/>
+              </a:rPr>
+              <a:t>  print $1, </a:t>
+            </a:r>
+            <a:r>
+              <a:rPr lang="en-GB" sz="1200" b="1" dirty="0" err="1">
+                <a:solidFill>
+                  <a:srgbClr val="FF0000"/>
+                </a:solidFill>
+                <a:latin typeface="Courier New" panose="02070309020205020404" pitchFamily="49" charset="0"/>
+                <a:cs typeface="Courier New" panose="02070309020205020404" pitchFamily="49" charset="0"/>
+              </a:rPr>
+              <a:t>bed_start</a:t>
+            </a:r>
+            <a:r>
+              <a:rPr lang="en-GB" sz="1200" b="1" dirty="0">
+                <a:solidFill>
+                  <a:srgbClr val="FF0000"/>
+                </a:solidFill>
+                <a:latin typeface="Courier New" panose="02070309020205020404" pitchFamily="49" charset="0"/>
+                <a:cs typeface="Courier New" panose="02070309020205020404" pitchFamily="49" charset="0"/>
+              </a:rPr>
+              <a:t>, $5, attributes[1], 0, $7, </a:t>
+            </a:r>
+            <a:r>
+              <a:rPr lang="en-GB" sz="1200" b="1" dirty="0" err="1">
+                <a:solidFill>
+                  <a:srgbClr val="FF0000"/>
+                </a:solidFill>
+                <a:latin typeface="Courier New" panose="02070309020205020404" pitchFamily="49" charset="0"/>
+                <a:cs typeface="Courier New" panose="02070309020205020404" pitchFamily="49" charset="0"/>
+              </a:rPr>
+              <a:t>bed_start</a:t>
+            </a:r>
+            <a:r>
+              <a:rPr lang="en-GB" sz="1200" b="1" dirty="0">
+                <a:solidFill>
+                  <a:srgbClr val="FF0000"/>
+                </a:solidFill>
+                <a:latin typeface="Courier New" panose="02070309020205020404" pitchFamily="49" charset="0"/>
+                <a:cs typeface="Courier New" panose="02070309020205020404" pitchFamily="49" charset="0"/>
+              </a:rPr>
+              <a:t>, $5, 0, 1, $5 - </a:t>
+            </a:r>
+            <a:r>
+              <a:rPr lang="en-GB" sz="1200" b="1" dirty="0" err="1">
+                <a:solidFill>
+                  <a:srgbClr val="FF0000"/>
+                </a:solidFill>
+                <a:latin typeface="Courier New" panose="02070309020205020404" pitchFamily="49" charset="0"/>
+                <a:cs typeface="Courier New" panose="02070309020205020404" pitchFamily="49" charset="0"/>
+              </a:rPr>
+              <a:t>bed_start</a:t>
+            </a:r>
+            <a:r>
+              <a:rPr lang="en-GB" sz="1200" b="1" dirty="0">
+                <a:solidFill>
+                  <a:srgbClr val="FF0000"/>
+                </a:solidFill>
+                <a:latin typeface="Courier New" panose="02070309020205020404" pitchFamily="49" charset="0"/>
+                <a:cs typeface="Courier New" panose="02070309020205020404" pitchFamily="49" charset="0"/>
+              </a:rPr>
+              <a:t>, 0</a:t>
+            </a:r>
+          </a:p>
+          <a:p>
+            <a:r>
+              <a:rPr lang="en-GB" sz="1200" b="1" dirty="0">
+                <a:solidFill>
+                  <a:srgbClr val="FF0000"/>
+                </a:solidFill>
+                <a:latin typeface="Courier New" panose="02070309020205020404" pitchFamily="49" charset="0"/>
+                <a:cs typeface="Courier New" panose="02070309020205020404" pitchFamily="49" charset="0"/>
+              </a:rPr>
+              <a:t>}</a:t>
+            </a:r>
+          </a:p>
+          <a:p>
+            <a:r>
+              <a:rPr lang="en-GB" sz="1200" b="1" dirty="0">
+                <a:solidFill>
+                  <a:srgbClr val="FF0000"/>
+                </a:solidFill>
+                <a:latin typeface="Courier New" panose="02070309020205020404" pitchFamily="49" charset="0"/>
+                <a:cs typeface="Courier New" panose="02070309020205020404" pitchFamily="49" charset="0"/>
+              </a:rPr>
+              <a:t>' "${</a:t>
+            </a:r>
+            <a:r>
+              <a:rPr lang="en-GB" sz="1200" b="1" dirty="0" err="1">
+                <a:solidFill>
+                  <a:srgbClr val="FF0000"/>
+                </a:solidFill>
                 <a:latin typeface="Courier New" panose="02070309020205020404" pitchFamily="49" charset="0"/>
                 <a:cs typeface="Courier New" panose="02070309020205020404" pitchFamily="49" charset="0"/>
               </a:rPr>
               <a:t>out_dir</a:t>
             </a:r>
             <a:r>
-              <a:rPr lang="en-GB" sz="1200" dirty="0">
-                <a:latin typeface="Courier New" panose="02070309020205020404" pitchFamily="49" charset="0"/>
-                <a:cs typeface="Courier New" panose="02070309020205020404" pitchFamily="49" charset="0"/>
-              </a:rPr>
-              <a:t>}/annotation.gff3.gz"</a:t>
-            </a:r>
-          </a:p>
-          <a:p>
-            <a:r>
-              <a:rPr lang="en-GB" sz="1200" dirty="0" err="1">
-                <a:latin typeface="Courier New" panose="02070309020205020404" pitchFamily="49" charset="0"/>
-                <a:cs typeface="Courier New" panose="02070309020205020404" pitchFamily="49" charset="0"/>
-              </a:rPr>
-              <a:t>gzip</a:t>
-            </a:r>
-            <a:r>
-              <a:rPr lang="en-GB" sz="1200" dirty="0">
-                <a:latin typeface="Courier New" panose="02070309020205020404" pitchFamily="49" charset="0"/>
-                <a:cs typeface="Courier New" panose="02070309020205020404" pitchFamily="49" charset="0"/>
-              </a:rPr>
-              <a:t> -</a:t>
-            </a:r>
-            <a:r>
-              <a:rPr lang="en-GB" sz="1200" dirty="0" err="1">
-                <a:latin typeface="Courier New" panose="02070309020205020404" pitchFamily="49" charset="0"/>
-                <a:cs typeface="Courier New" panose="02070309020205020404" pitchFamily="49" charset="0"/>
-              </a:rPr>
-              <a:t>df</a:t>
-            </a:r>
-            <a:r>
-              <a:rPr lang="en-GB" sz="1200" dirty="0">
-                <a:latin typeface="Courier New" panose="02070309020205020404" pitchFamily="49" charset="0"/>
-                <a:cs typeface="Courier New" panose="02070309020205020404" pitchFamily="49" charset="0"/>
-              </a:rPr>
-              <a:t> "${</a:t>
-            </a:r>
-            <a:r>
-              <a:rPr lang="en-GB" sz="1200" dirty="0" err="1">
+              <a:rPr lang="en-GB" sz="1200" b="1" dirty="0">
+                <a:solidFill>
+                  <a:srgbClr val="FF0000"/>
+                </a:solidFill>
+                <a:latin typeface="Courier New" panose="02070309020205020404" pitchFamily="49" charset="0"/>
+                <a:cs typeface="Courier New" panose="02070309020205020404" pitchFamily="49" charset="0"/>
+              </a:rPr>
+              <a:t>}/annotation.gff3" &gt; "${</a:t>
+            </a:r>
+            <a:r>
+              <a:rPr lang="en-GB" sz="1200" b="1" dirty="0" err="1">
+                <a:solidFill>
+                  <a:srgbClr val="FF0000"/>
+                </a:solidFill>
                 <a:latin typeface="Courier New" panose="02070309020205020404" pitchFamily="49" charset="0"/>
                 <a:cs typeface="Courier New" panose="02070309020205020404" pitchFamily="49" charset="0"/>
               </a:rPr>
               <a:t>out_dir</a:t>
             </a:r>
             <a:r>
-              <a:rPr lang="en-GB" sz="1200" dirty="0">
-                <a:latin typeface="Courier New" panose="02070309020205020404" pitchFamily="49" charset="0"/>
-                <a:cs typeface="Courier New" panose="02070309020205020404" pitchFamily="49" charset="0"/>
-              </a:rPr>
-              <a:t>}/annotation.gff3.gz"</a:t>
+              <a:rPr lang="en-GB" sz="1200" b="1" dirty="0">
+                <a:solidFill>
+                  <a:srgbClr val="FF0000"/>
+                </a:solidFill>
+                <a:latin typeface="Courier New" panose="02070309020205020404" pitchFamily="49" charset="0"/>
+                <a:cs typeface="Courier New" panose="02070309020205020404" pitchFamily="49" charset="0"/>
+              </a:rPr>
+              <a:t>}/</a:t>
+            </a:r>
+            <a:r>
+              <a:rPr lang="en-GB" sz="1200" b="1" dirty="0" err="1">
+                <a:solidFill>
+                  <a:srgbClr val="FF0000"/>
+                </a:solidFill>
+                <a:latin typeface="Courier New" panose="02070309020205020404" pitchFamily="49" charset="0"/>
+                <a:cs typeface="Courier New" panose="02070309020205020404" pitchFamily="49" charset="0"/>
+              </a:rPr>
+              <a:t>genes.bed</a:t>
+            </a:r>
+            <a:r>
+              <a:rPr lang="en-GB" sz="1200" b="1" dirty="0">
+                <a:solidFill>
+                  <a:srgbClr val="FF0000"/>
+                </a:solidFill>
+                <a:latin typeface="Courier New" panose="02070309020205020404" pitchFamily="49" charset="0"/>
+                <a:cs typeface="Courier New" panose="02070309020205020404" pitchFamily="49" charset="0"/>
+              </a:rPr>
+              <a:t>"</a:t>
             </a:r>
           </a:p>
           <a:p>
@@ -10397,393 +10810,149 @@
               <a:cs typeface="Courier New" panose="02070309020205020404" pitchFamily="49" charset="0"/>
             </a:endParaRPr>
           </a:p>
-          <a:p>
-            <a:r>
-              <a:rPr lang="en-GB" sz="1200" dirty="0">
-                <a:latin typeface="Courier New" panose="02070309020205020404" pitchFamily="49" charset="0"/>
-                <a:cs typeface="Courier New" panose="02070309020205020404" pitchFamily="49" charset="0"/>
-              </a:rPr>
-              <a:t>echo "Downloading GTF annotation" | tee -a "${</a:t>
-            </a:r>
-            <a:r>
-              <a:rPr lang="en-GB" sz="1200" dirty="0" err="1">
-                <a:latin typeface="Courier New" panose="02070309020205020404" pitchFamily="49" charset="0"/>
-                <a:cs typeface="Courier New" panose="02070309020205020404" pitchFamily="49" charset="0"/>
-              </a:rPr>
-              <a:t>log_file</a:t>
-            </a:r>
-            <a:r>
-              <a:rPr lang="en-GB" sz="1200" dirty="0">
-                <a:latin typeface="Courier New" panose="02070309020205020404" pitchFamily="49" charset="0"/>
-                <a:cs typeface="Courier New" panose="02070309020205020404" pitchFamily="49" charset="0"/>
-              </a:rPr>
-              <a:t>}"</a:t>
-            </a:r>
-          </a:p>
-          <a:p>
-            <a:r>
-              <a:rPr lang="en-GB" sz="1200" dirty="0">
-                <a:latin typeface="Courier New" panose="02070309020205020404" pitchFamily="49" charset="0"/>
-                <a:cs typeface="Courier New" panose="02070309020205020404" pitchFamily="49" charset="0"/>
-              </a:rPr>
-              <a:t>curl -</a:t>
-            </a:r>
-            <a:r>
-              <a:rPr lang="en-GB" sz="1200" dirty="0" err="1">
-                <a:latin typeface="Courier New" panose="02070309020205020404" pitchFamily="49" charset="0"/>
-                <a:cs typeface="Courier New" panose="02070309020205020404" pitchFamily="49" charset="0"/>
-              </a:rPr>
-              <a:t>fL</a:t>
-            </a:r>
-            <a:r>
-              <a:rPr lang="en-GB" sz="1200" dirty="0">
-                <a:latin typeface="Courier New" panose="02070309020205020404" pitchFamily="49" charset="0"/>
-                <a:cs typeface="Courier New" panose="02070309020205020404" pitchFamily="49" charset="0"/>
-              </a:rPr>
-              <a:t> "${</a:t>
-            </a:r>
-            <a:r>
-              <a:rPr lang="en-GB" sz="1200" dirty="0" err="1">
-                <a:latin typeface="Courier New" panose="02070309020205020404" pitchFamily="49" charset="0"/>
-                <a:cs typeface="Courier New" panose="02070309020205020404" pitchFamily="49" charset="0"/>
-              </a:rPr>
-              <a:t>base_url</a:t>
-            </a:r>
-            <a:r>
-              <a:rPr lang="en-GB" sz="1200" dirty="0">
-                <a:latin typeface="Courier New" panose="02070309020205020404" pitchFamily="49" charset="0"/>
-                <a:cs typeface="Courier New" panose="02070309020205020404" pitchFamily="49" charset="0"/>
-              </a:rPr>
-              <a:t>}/${assembly}_</a:t>
-            </a:r>
-            <a:r>
-              <a:rPr lang="en-GB" sz="1200" dirty="0" err="1">
-                <a:latin typeface="Courier New" panose="02070309020205020404" pitchFamily="49" charset="0"/>
-                <a:cs typeface="Courier New" panose="02070309020205020404" pitchFamily="49" charset="0"/>
-              </a:rPr>
-              <a:t>genomic.gtf.gz</a:t>
-            </a:r>
-            <a:r>
-              <a:rPr lang="en-GB" sz="1200" dirty="0">
-                <a:latin typeface="Courier New" panose="02070309020205020404" pitchFamily="49" charset="0"/>
-                <a:cs typeface="Courier New" panose="02070309020205020404" pitchFamily="49" charset="0"/>
-              </a:rPr>
-              <a:t>" -o "${</a:t>
-            </a:r>
-            <a:r>
-              <a:rPr lang="en-GB" sz="1200" dirty="0" err="1">
-                <a:latin typeface="Courier New" panose="02070309020205020404" pitchFamily="49" charset="0"/>
-                <a:cs typeface="Courier New" panose="02070309020205020404" pitchFamily="49" charset="0"/>
-              </a:rPr>
-              <a:t>out_dir</a:t>
-            </a:r>
-            <a:r>
-              <a:rPr lang="en-GB" sz="1200" dirty="0">
-                <a:latin typeface="Courier New" panose="02070309020205020404" pitchFamily="49" charset="0"/>
-                <a:cs typeface="Courier New" panose="02070309020205020404" pitchFamily="49" charset="0"/>
-              </a:rPr>
-              <a:t>}/</a:t>
-            </a:r>
-            <a:r>
-              <a:rPr lang="en-GB" sz="1200" dirty="0" err="1">
-                <a:latin typeface="Courier New" panose="02070309020205020404" pitchFamily="49" charset="0"/>
-                <a:cs typeface="Courier New" panose="02070309020205020404" pitchFamily="49" charset="0"/>
-              </a:rPr>
-              <a:t>annotation.gtf.gz</a:t>
-            </a:r>
-            <a:r>
-              <a:rPr lang="en-GB" sz="1200" dirty="0">
-                <a:latin typeface="Courier New" panose="02070309020205020404" pitchFamily="49" charset="0"/>
-                <a:cs typeface="Courier New" panose="02070309020205020404" pitchFamily="49" charset="0"/>
-              </a:rPr>
-              <a:t>"</a:t>
-            </a:r>
-          </a:p>
-          <a:p>
-            <a:r>
-              <a:rPr lang="en-GB" sz="1200" dirty="0" err="1">
-                <a:latin typeface="Courier New" panose="02070309020205020404" pitchFamily="49" charset="0"/>
-                <a:cs typeface="Courier New" panose="02070309020205020404" pitchFamily="49" charset="0"/>
-              </a:rPr>
-              <a:t>gzip</a:t>
-            </a:r>
-            <a:r>
-              <a:rPr lang="en-GB" sz="1200" dirty="0">
-                <a:latin typeface="Courier New" panose="02070309020205020404" pitchFamily="49" charset="0"/>
-                <a:cs typeface="Courier New" panose="02070309020205020404" pitchFamily="49" charset="0"/>
-              </a:rPr>
-              <a:t> -</a:t>
-            </a:r>
-            <a:r>
-              <a:rPr lang="en-GB" sz="1200" dirty="0" err="1">
-                <a:latin typeface="Courier New" panose="02070309020205020404" pitchFamily="49" charset="0"/>
-                <a:cs typeface="Courier New" panose="02070309020205020404" pitchFamily="49" charset="0"/>
-              </a:rPr>
-              <a:t>df</a:t>
-            </a:r>
-            <a:r>
-              <a:rPr lang="en-GB" sz="1200" dirty="0">
-                <a:latin typeface="Courier New" panose="02070309020205020404" pitchFamily="49" charset="0"/>
-                <a:cs typeface="Courier New" panose="02070309020205020404" pitchFamily="49" charset="0"/>
-              </a:rPr>
-              <a:t> "${</a:t>
-            </a:r>
-            <a:r>
-              <a:rPr lang="en-GB" sz="1200" dirty="0" err="1">
-                <a:latin typeface="Courier New" panose="02070309020205020404" pitchFamily="49" charset="0"/>
-                <a:cs typeface="Courier New" panose="02070309020205020404" pitchFamily="49" charset="0"/>
-              </a:rPr>
-              <a:t>out_dir</a:t>
-            </a:r>
-            <a:r>
-              <a:rPr lang="en-GB" sz="1200" dirty="0">
-                <a:latin typeface="Courier New" panose="02070309020205020404" pitchFamily="49" charset="0"/>
-                <a:cs typeface="Courier New" panose="02070309020205020404" pitchFamily="49" charset="0"/>
-              </a:rPr>
-              <a:t>}/</a:t>
-            </a:r>
-            <a:r>
-              <a:rPr lang="en-GB" sz="1200" dirty="0" err="1">
-                <a:latin typeface="Courier New" panose="02070309020205020404" pitchFamily="49" charset="0"/>
-                <a:cs typeface="Courier New" panose="02070309020205020404" pitchFamily="49" charset="0"/>
-              </a:rPr>
-              <a:t>annotation.gtf.gz</a:t>
-            </a:r>
-            <a:r>
-              <a:rPr lang="en-GB" sz="1200" dirty="0">
-                <a:latin typeface="Courier New" panose="02070309020205020404" pitchFamily="49" charset="0"/>
-                <a:cs typeface="Courier New" panose="02070309020205020404" pitchFamily="49" charset="0"/>
-              </a:rPr>
-              <a:t>"</a:t>
-            </a:r>
-          </a:p>
-          <a:p>
-            <a:endParaRPr lang="en-GB" sz="1200" dirty="0">
-              <a:latin typeface="Courier New" panose="02070309020205020404" pitchFamily="49" charset="0"/>
-              <a:cs typeface="Courier New" panose="02070309020205020404" pitchFamily="49" charset="0"/>
-            </a:endParaRPr>
-          </a:p>
-          <a:p>
-            <a:r>
-              <a:rPr lang="en-GB" sz="1200" dirty="0">
-                <a:latin typeface="Courier New" panose="02070309020205020404" pitchFamily="49" charset="0"/>
-                <a:cs typeface="Courier New" panose="02070309020205020404" pitchFamily="49" charset="0"/>
-              </a:rPr>
-              <a:t>echo "Creating BED12 gene model for </a:t>
-            </a:r>
-            <a:r>
-              <a:rPr lang="en-GB" sz="1200" dirty="0" err="1">
-                <a:latin typeface="Courier New" panose="02070309020205020404" pitchFamily="49" charset="0"/>
-                <a:cs typeface="Courier New" panose="02070309020205020404" pitchFamily="49" charset="0"/>
-              </a:rPr>
-              <a:t>RSeQC</a:t>
-            </a:r>
-            <a:r>
-              <a:rPr lang="en-GB" sz="1200" dirty="0">
-                <a:latin typeface="Courier New" panose="02070309020205020404" pitchFamily="49" charset="0"/>
-                <a:cs typeface="Courier New" panose="02070309020205020404" pitchFamily="49" charset="0"/>
-              </a:rPr>
-              <a:t>" | tee -a "${</a:t>
-            </a:r>
-            <a:r>
-              <a:rPr lang="en-GB" sz="1200" dirty="0" err="1">
-                <a:latin typeface="Courier New" panose="02070309020205020404" pitchFamily="49" charset="0"/>
-                <a:cs typeface="Courier New" panose="02070309020205020404" pitchFamily="49" charset="0"/>
-              </a:rPr>
-              <a:t>log_file</a:t>
-            </a:r>
-            <a:r>
-              <a:rPr lang="en-GB" sz="1200" dirty="0">
-                <a:latin typeface="Courier New" panose="02070309020205020404" pitchFamily="49" charset="0"/>
-                <a:cs typeface="Courier New" panose="02070309020205020404" pitchFamily="49" charset="0"/>
-              </a:rPr>
-              <a:t>}"</a:t>
-            </a:r>
-          </a:p>
-          <a:p>
-            <a:r>
-              <a:rPr lang="en-GB" sz="1200" dirty="0">
-                <a:latin typeface="Courier New" panose="02070309020205020404" pitchFamily="49" charset="0"/>
-                <a:cs typeface="Courier New" panose="02070309020205020404" pitchFamily="49" charset="0"/>
-              </a:rPr>
-              <a:t>awk -F '\t' '</a:t>
-            </a:r>
-          </a:p>
-          <a:p>
-            <a:r>
-              <a:rPr lang="en-GB" sz="1200" dirty="0">
-                <a:latin typeface="Courier New" panose="02070309020205020404" pitchFamily="49" charset="0"/>
-                <a:cs typeface="Courier New" panose="02070309020205020404" pitchFamily="49" charset="0"/>
-              </a:rPr>
-              <a:t>BEGIN { OFS = "\t" }</a:t>
-            </a:r>
-          </a:p>
-          <a:p>
-            <a:r>
-              <a:rPr lang="en-GB" sz="1200" dirty="0">
-                <a:latin typeface="Courier New" panose="02070309020205020404" pitchFamily="49" charset="0"/>
-                <a:cs typeface="Courier New" panose="02070309020205020404" pitchFamily="49" charset="0"/>
-              </a:rPr>
-              <a:t>$3 == "gene" {</a:t>
-            </a:r>
-          </a:p>
-          <a:p>
-            <a:r>
-              <a:rPr lang="en-GB" sz="1200" dirty="0">
-                <a:latin typeface="Courier New" panose="02070309020205020404" pitchFamily="49" charset="0"/>
-                <a:cs typeface="Courier New" panose="02070309020205020404" pitchFamily="49" charset="0"/>
-              </a:rPr>
-              <a:t>  split($9, attributes, ";")</a:t>
-            </a:r>
-          </a:p>
-          <a:p>
-            <a:r>
-              <a:rPr lang="en-GB" sz="1200" dirty="0">
-                <a:latin typeface="Courier New" panose="02070309020205020404" pitchFamily="49" charset="0"/>
-                <a:cs typeface="Courier New" panose="02070309020205020404" pitchFamily="49" charset="0"/>
-              </a:rPr>
-              <a:t>  sub(/^ID=/, "", attributes[1])</a:t>
-            </a:r>
-          </a:p>
-          <a:p>
-            <a:r>
-              <a:rPr lang="en-GB" sz="1200" dirty="0">
+        </p:txBody>
+      </p:sp>
+      <p:sp>
+        <p:nvSpPr>
+          <p:cNvPr id="2" name="TextBox 1">
+            <a:extLst>
+              <a:ext uri="{FF2B5EF4-FFF2-40B4-BE49-F238E27FC236}">
+                <a16:creationId xmlns:a16="http://schemas.microsoft.com/office/drawing/2014/main" id="{CEDDF423-5B2C-5635-F6DD-AA74A3735CF1}"/>
+              </a:ext>
+            </a:extLst>
+          </p:cNvPr>
+          <p:cNvSpPr txBox="1"/>
+          <p:nvPr/>
+        </p:nvSpPr>
+        <p:spPr>
+          <a:xfrm>
+            <a:off x="6330461" y="4031143"/>
+            <a:ext cx="5861539" cy="1169551"/>
+          </a:xfrm>
+          <a:prstGeom prst="rect">
+            <a:avLst/>
+          </a:prstGeom>
+          <a:solidFill>
+            <a:schemeClr val="bg1"/>
+          </a:solidFill>
+          <a:ln>
+            <a:solidFill>
+              <a:schemeClr val="tx1"/>
+            </a:solidFill>
+          </a:ln>
+        </p:spPr>
+        <p:txBody>
+          <a:bodyPr wrap="square">
+            <a:spAutoFit/>
+          </a:bodyPr>
+          <a:lstStyle/>
+          <a:p>
+            <a:r>
+              <a:rPr lang="en-GB" sz="1400" dirty="0">
+                <a:latin typeface="Courier New" panose="02070309020205020404" pitchFamily="49" charset="0"/>
+                <a:cs typeface="Courier New" panose="02070309020205020404" pitchFamily="49" charset="0"/>
+              </a:rPr>
+              <a:t>docker run --rm \</a:t>
+            </a:r>
+          </a:p>
+          <a:p>
+            <a:r>
+              <a:rPr lang="en-GB" sz="1400" dirty="0">
+                <a:latin typeface="Courier New" panose="02070309020205020404" pitchFamily="49" charset="0"/>
+                <a:cs typeface="Courier New" panose="02070309020205020404" pitchFamily="49" charset="0"/>
+              </a:rPr>
+              <a:t>  -v "$PWD:/work" \</a:t>
+            </a:r>
+          </a:p>
+          <a:p>
+            <a:r>
+              <a:rPr lang="en-GB" sz="1400" dirty="0">
+                <a:latin typeface="Courier New" panose="02070309020205020404" pitchFamily="49" charset="0"/>
+                <a:cs typeface="Courier New" panose="02070309020205020404" pitchFamily="49" charset="0"/>
+              </a:rPr>
+              <a:t>  -w /work \</a:t>
+            </a:r>
+          </a:p>
+          <a:p>
+            <a:r>
+              <a:rPr lang="en-GB" sz="1400" dirty="0">
                 <a:latin typeface="Courier New" panose="02070309020205020404" pitchFamily="49" charset="0"/>
                 <a:cs typeface="Courier New" panose="02070309020205020404" pitchFamily="49" charset="0"/>
               </a:rPr>
               <a:t>  </a:t>
             </a:r>
             <a:r>
-              <a:rPr lang="en-GB" sz="1200" dirty="0" err="1">
-                <a:latin typeface="Courier New" panose="02070309020205020404" pitchFamily="49" charset="0"/>
-                <a:cs typeface="Courier New" panose="02070309020205020404" pitchFamily="49" charset="0"/>
-              </a:rPr>
-              <a:t>bed_start</a:t>
-            </a:r>
-            <a:r>
-              <a:rPr lang="en-GB" sz="1200" dirty="0">
-                <a:latin typeface="Courier New" panose="02070309020205020404" pitchFamily="49" charset="0"/>
-                <a:cs typeface="Courier New" panose="02070309020205020404" pitchFamily="49" charset="0"/>
-              </a:rPr>
-              <a:t> = $4 - 1</a:t>
-            </a:r>
-          </a:p>
-          <a:p>
-            <a:r>
-              <a:rPr lang="en-GB" sz="1200" dirty="0">
-                <a:latin typeface="Courier New" panose="02070309020205020404" pitchFamily="49" charset="0"/>
-                <a:cs typeface="Courier New" panose="02070309020205020404" pitchFamily="49" charset="0"/>
-              </a:rPr>
-              <a:t>  print $1, </a:t>
-            </a:r>
-            <a:r>
-              <a:rPr lang="en-GB" sz="1200" dirty="0" err="1">
-                <a:latin typeface="Courier New" panose="02070309020205020404" pitchFamily="49" charset="0"/>
-                <a:cs typeface="Courier New" panose="02070309020205020404" pitchFamily="49" charset="0"/>
-              </a:rPr>
-              <a:t>bed_start</a:t>
-            </a:r>
-            <a:r>
-              <a:rPr lang="en-GB" sz="1200" dirty="0">
-                <a:latin typeface="Courier New" panose="02070309020205020404" pitchFamily="49" charset="0"/>
-                <a:cs typeface="Courier New" panose="02070309020205020404" pitchFamily="49" charset="0"/>
-              </a:rPr>
-              <a:t>, $5, attributes[1], 0, $7, </a:t>
-            </a:r>
-            <a:r>
-              <a:rPr lang="en-GB" sz="1200" dirty="0" err="1">
-                <a:latin typeface="Courier New" panose="02070309020205020404" pitchFamily="49" charset="0"/>
-                <a:cs typeface="Courier New" panose="02070309020205020404" pitchFamily="49" charset="0"/>
-              </a:rPr>
-              <a:t>bed_start</a:t>
-            </a:r>
-            <a:r>
-              <a:rPr lang="en-GB" sz="1200" dirty="0">
-                <a:latin typeface="Courier New" panose="02070309020205020404" pitchFamily="49" charset="0"/>
-                <a:cs typeface="Courier New" panose="02070309020205020404" pitchFamily="49" charset="0"/>
-              </a:rPr>
-              <a:t>, $5, 0, 1, $5 - </a:t>
-            </a:r>
-            <a:r>
-              <a:rPr lang="en-GB" sz="1200" dirty="0" err="1">
-                <a:latin typeface="Courier New" panose="02070309020205020404" pitchFamily="49" charset="0"/>
-                <a:cs typeface="Courier New" panose="02070309020205020404" pitchFamily="49" charset="0"/>
-              </a:rPr>
-              <a:t>bed_start</a:t>
-            </a:r>
-            <a:r>
-              <a:rPr lang="en-GB" sz="1200" dirty="0">
-                <a:latin typeface="Courier New" panose="02070309020205020404" pitchFamily="49" charset="0"/>
-                <a:cs typeface="Courier New" panose="02070309020205020404" pitchFamily="49" charset="0"/>
-              </a:rPr>
-              <a:t>, 0</a:t>
-            </a:r>
-          </a:p>
-          <a:p>
-            <a:r>
-              <a:rPr lang="en-GB" sz="1200" dirty="0">
-                <a:latin typeface="Courier New" panose="02070309020205020404" pitchFamily="49" charset="0"/>
-                <a:cs typeface="Courier New" panose="02070309020205020404" pitchFamily="49" charset="0"/>
-              </a:rPr>
-              <a:t>}</a:t>
-            </a:r>
-          </a:p>
-          <a:p>
-            <a:r>
-              <a:rPr lang="en-GB" sz="1200" dirty="0">
-                <a:latin typeface="Courier New" panose="02070309020205020404" pitchFamily="49" charset="0"/>
-                <a:cs typeface="Courier New" panose="02070309020205020404" pitchFamily="49" charset="0"/>
-              </a:rPr>
-              <a:t>' "${</a:t>
-            </a:r>
-            <a:r>
-              <a:rPr lang="en-GB" sz="1200" dirty="0" err="1">
-                <a:latin typeface="Courier New" panose="02070309020205020404" pitchFamily="49" charset="0"/>
-                <a:cs typeface="Courier New" panose="02070309020205020404" pitchFamily="49" charset="0"/>
-              </a:rPr>
-              <a:t>out_dir</a:t>
-            </a:r>
-            <a:r>
-              <a:rPr lang="en-GB" sz="1200" dirty="0">
-                <a:latin typeface="Courier New" panose="02070309020205020404" pitchFamily="49" charset="0"/>
-                <a:cs typeface="Courier New" panose="02070309020205020404" pitchFamily="49" charset="0"/>
-              </a:rPr>
-              <a:t>}/annotation.gff3" &gt; "${</a:t>
-            </a:r>
-            <a:r>
-              <a:rPr lang="en-GB" sz="1200" dirty="0" err="1">
-                <a:latin typeface="Courier New" panose="02070309020205020404" pitchFamily="49" charset="0"/>
-                <a:cs typeface="Courier New" panose="02070309020205020404" pitchFamily="49" charset="0"/>
-              </a:rPr>
-              <a:t>out_dir</a:t>
-            </a:r>
-            <a:r>
-              <a:rPr lang="en-GB" sz="1200" dirty="0">
-                <a:latin typeface="Courier New" panose="02070309020205020404" pitchFamily="49" charset="0"/>
-                <a:cs typeface="Courier New" panose="02070309020205020404" pitchFamily="49" charset="0"/>
-              </a:rPr>
-              <a:t>}/</a:t>
-            </a:r>
-            <a:r>
-              <a:rPr lang="en-GB" sz="1200" dirty="0" err="1">
-                <a:latin typeface="Courier New" panose="02070309020205020404" pitchFamily="49" charset="0"/>
-                <a:cs typeface="Courier New" panose="02070309020205020404" pitchFamily="49" charset="0"/>
-              </a:rPr>
-              <a:t>genes.bed</a:t>
-            </a:r>
-            <a:r>
-              <a:rPr lang="en-GB" sz="1200" dirty="0">
-                <a:latin typeface="Courier New" panose="02070309020205020404" pitchFamily="49" charset="0"/>
-                <a:cs typeface="Courier New" panose="02070309020205020404" pitchFamily="49" charset="0"/>
-              </a:rPr>
-              <a:t>"</a:t>
-            </a:r>
-          </a:p>
-          <a:p>
-            <a:endParaRPr lang="en-GB" sz="1200" dirty="0">
-              <a:latin typeface="Courier New" panose="02070309020205020404" pitchFamily="49" charset="0"/>
-              <a:cs typeface="Courier New" panose="02070309020205020404" pitchFamily="49" charset="0"/>
-            </a:endParaRPr>
+              <a:rPr lang="en-GB" sz="1400" dirty="0" err="1">
+                <a:latin typeface="Courier New" panose="02070309020205020404" pitchFamily="49" charset="0"/>
+                <a:cs typeface="Courier New" panose="02070309020205020404" pitchFamily="49" charset="0"/>
+              </a:rPr>
+              <a:t>docker.io</a:t>
+            </a:r>
+            <a:r>
+              <a:rPr lang="en-GB" sz="1400" dirty="0">
+                <a:latin typeface="Courier New" panose="02070309020205020404" pitchFamily="49" charset="0"/>
+                <a:cs typeface="Courier New" panose="02070309020205020404" pitchFamily="49" charset="0"/>
+              </a:rPr>
+              <a:t>/</a:t>
+            </a:r>
+            <a:r>
+              <a:rPr lang="en-GB" sz="1400" dirty="0" err="1">
+                <a:latin typeface="Courier New" panose="02070309020205020404" pitchFamily="49" charset="0"/>
+                <a:cs typeface="Courier New" panose="02070309020205020404" pitchFamily="49" charset="0"/>
+              </a:rPr>
+              <a:t>fgualdr</a:t>
+            </a:r>
+            <a:r>
+              <a:rPr lang="en-GB" sz="1400" dirty="0">
+                <a:latin typeface="Courier New" panose="02070309020205020404" pitchFamily="49" charset="0"/>
+                <a:cs typeface="Courier New" panose="02070309020205020404" pitchFamily="49" charset="0"/>
+              </a:rPr>
+              <a:t>/ngs-curl:1.0 \</a:t>
+            </a:r>
+          </a:p>
+          <a:p>
+            <a:r>
+              <a:rPr lang="en-GB" sz="1400" dirty="0">
+                <a:latin typeface="Courier New" panose="02070309020205020404" pitchFamily="49" charset="0"/>
+                <a:cs typeface="Courier New" panose="02070309020205020404" pitchFamily="49" charset="0"/>
+              </a:rPr>
+              <a:t>  bash scripts/day1/01_reference_genome_annotation.sh</a:t>
+            </a:r>
+          </a:p>
+        </p:txBody>
+      </p:sp>
+      <p:sp>
+        <p:nvSpPr>
+          <p:cNvPr id="3" name="TextBox 2">
+            <a:extLst>
+              <a:ext uri="{FF2B5EF4-FFF2-40B4-BE49-F238E27FC236}">
+                <a16:creationId xmlns:a16="http://schemas.microsoft.com/office/drawing/2014/main" id="{7B9DD333-93B1-0B8B-8D17-B3BB8CFD4A41}"/>
+              </a:ext>
+            </a:extLst>
+          </p:cNvPr>
+          <p:cNvSpPr txBox="1"/>
+          <p:nvPr/>
+        </p:nvSpPr>
+        <p:spPr>
+          <a:xfrm>
+            <a:off x="10221569" y="4151724"/>
+            <a:ext cx="1828800" cy="369332"/>
+          </a:xfrm>
+          <a:prstGeom prst="rect">
+            <a:avLst/>
+          </a:prstGeom>
+          <a:noFill/>
+        </p:spPr>
+        <p:txBody>
+          <a:bodyPr wrap="square" rtlCol="0">
+            <a:spAutoFit/>
+          </a:bodyPr>
+          <a:lstStyle/>
+          <a:p>
+            <a:r>
+              <a:rPr lang="en-GB" dirty="0"/>
+              <a:t>In Terminal</a:t>
+            </a:r>
           </a:p>
         </p:txBody>
       </p:sp>
@@ -10895,6 +11064,51 @@
                       </p:childTnLst>
                     </p:cTn>
                   </p:par>
+                  <p:par>
+                    <p:cTn id="11" fill="hold">
+                      <p:stCondLst>
+                        <p:cond delay="indefinite"/>
+                      </p:stCondLst>
+                      <p:childTnLst>
+                        <p:par>
+                          <p:cTn id="12" fill="hold">
+                            <p:stCondLst>
+                              <p:cond delay="0"/>
+                            </p:stCondLst>
+                            <p:childTnLst>
+                              <p:par>
+                                <p:cTn id="13" presetID="1" presetClass="entr" presetSubtype="0" fill="hold" grpId="0" nodeType="clickEffect">
+                                  <p:stCondLst>
+                                    <p:cond delay="0"/>
+                                  </p:stCondLst>
+                                  <p:childTnLst>
+                                    <p:set>
+                                      <p:cBhvr>
+                                        <p:cTn id="14" dur="1" fill="hold">
+                                          <p:stCondLst>
+                                            <p:cond delay="0"/>
+                                          </p:stCondLst>
+                                        </p:cTn>
+                                        <p:tgtEl>
+                                          <p:spTgt spid="2"/>
+                                        </p:tgtEl>
+                                        <p:attrNameLst>
+                                          <p:attrName>style.visibility</p:attrName>
+                                        </p:attrNameLst>
+                                      </p:cBhvr>
+                                      <p:to>
+                                        <p:strVal val="visible"/>
+                                      </p:to>
+                                    </p:set>
+                                  </p:childTnLst>
+                                </p:cTn>
+                              </p:par>
+                            </p:childTnLst>
+                          </p:cTn>
+                        </p:par>
+                      </p:childTnLst>
+                    </p:cTn>
+                  </p:par>
                 </p:childTnLst>
               </p:cTn>
               <p:prevCondLst>
@@ -10919,6 +11133,7 @@
     <p:bldLst>
       <p:bldP spid="5" grpId="0" animBg="1"/>
       <p:bldP spid="6" grpId="0" animBg="1"/>
+      <p:bldP spid="2" grpId="0" animBg="1"/>
     </p:bldLst>
   </p:timing>
 </p:sld>
@@ -11016,7 +11231,7 @@
           <a:p>
             <a:fld id="{761DFEEA-1162-B343-ACBF-B3E92F6AC390}" type="datetime1">
               <a:rPr lang="it-IT" smtClean="0"/>
-              <a:t>18/09/26</a:t>
+              <a:t>21/09/26</a:t>
             </a:fld>
             <a:endParaRPr lang="en-GB"/>
           </a:p>
@@ -11361,7 +11576,7 @@
           <a:p>
             <a:fld id="{761DFEEA-1162-B343-ACBF-B3E92F6AC390}" type="datetime1">
               <a:rPr lang="it-IT" smtClean="0"/>
-              <a:t>17/09/26</a:t>
+              <a:t>21/09/26</a:t>
             </a:fld>
             <a:endParaRPr lang="en-GB"/>
           </a:p>
@@ -11736,7 +11951,7 @@
           <a:p>
             <a:fld id="{761DFEEA-1162-B343-ACBF-B3E92F6AC390}" type="datetime1">
               <a:rPr lang="it-IT" smtClean="0"/>
-              <a:t>17/09/26</a:t>
+              <a:t>21/09/26</a:t>
             </a:fld>
             <a:endParaRPr lang="en-GB"/>
           </a:p>
@@ -11965,7 +12180,7 @@
           <a:p>
             <a:fld id="{761DFEEA-1162-B343-ACBF-B3E92F6AC390}" type="datetime1">
               <a:rPr lang="it-IT" smtClean="0"/>
-              <a:t>17/09/26</a:t>
+              <a:t>21/09/26</a:t>
             </a:fld>
             <a:endParaRPr lang="en-GB"/>
           </a:p>
@@ -13931,7 +14146,7 @@
           <a:p>
             <a:fld id="{761DFEEA-1162-B343-ACBF-B3E92F6AC390}" type="datetime1">
               <a:rPr lang="it-IT" smtClean="0"/>
-              <a:t>17/09/26</a:t>
+              <a:t>21/09/26</a:t>
             </a:fld>
             <a:endParaRPr lang="en-GB"/>
           </a:p>
@@ -14083,7 +14298,7 @@
           <a:p>
             <a:fld id="{761DFEEA-1162-B343-ACBF-B3E92F6AC390}" type="datetime1">
               <a:rPr lang="it-IT" smtClean="0"/>
-              <a:t>17/09/26</a:t>
+              <a:t>21/09/26</a:t>
             </a:fld>
             <a:endParaRPr lang="en-GB"/>
           </a:p>
@@ -14963,7 +15178,7 @@
           <a:p>
             <a:fld id="{761DFEEA-1162-B343-ACBF-B3E92F6AC390}" type="datetime1">
               <a:rPr lang="it-IT" smtClean="0"/>
-              <a:t>17/09/26</a:t>
+              <a:t>21/09/26</a:t>
             </a:fld>
             <a:endParaRPr lang="en-GB" dirty="0"/>
           </a:p>
@@ -15128,7 +15343,7 @@
           <a:p>
             <a:fld id="{761DFEEA-1162-B343-ACBF-B3E92F6AC390}" type="datetime1">
               <a:rPr lang="it-IT" smtClean="0"/>
-              <a:t>17/09/26</a:t>
+              <a:t>21/09/26</a:t>
             </a:fld>
             <a:endParaRPr lang="en-GB"/>
           </a:p>
@@ -15547,7 +15762,7 @@
           <a:p>
             <a:fld id="{761DFEEA-1162-B343-ACBF-B3E92F6AC390}" type="datetime1">
               <a:rPr lang="it-IT" smtClean="0"/>
-              <a:t>17/09/26</a:t>
+              <a:t>21/09/26</a:t>
             </a:fld>
             <a:endParaRPr lang="en-GB"/>
           </a:p>
@@ -15624,8 +15839,8 @@
         </p:nvSpPr>
         <p:spPr>
           <a:xfrm>
-            <a:off x="520523" y="136525"/>
-            <a:ext cx="9975199" cy="5632311"/>
+            <a:off x="691388" y="327975"/>
+            <a:ext cx="9975199" cy="5755422"/>
           </a:xfrm>
           <a:prstGeom prst="rect">
             <a:avLst/>
@@ -15644,21 +15859,21 @@
           <a:lstStyle/>
           <a:p>
             <a:r>
-              <a:rPr lang="en-GB" dirty="0">
+              <a:rPr lang="en-GB" sz="1600" dirty="0">
                 <a:latin typeface="Courier New" panose="02070309020205020404" pitchFamily="49" charset="0"/>
                 <a:cs typeface="Courier New" panose="02070309020205020404" pitchFamily="49" charset="0"/>
               </a:rPr>
               <a:t>#!/</a:t>
             </a:r>
             <a:r>
-              <a:rPr lang="en-GB" dirty="0" err="1">
+              <a:rPr lang="en-GB" sz="1600" dirty="0" err="1">
                 <a:latin typeface="Courier New" panose="02070309020205020404" pitchFamily="49" charset="0"/>
                 <a:cs typeface="Courier New" panose="02070309020205020404" pitchFamily="49" charset="0"/>
               </a:rPr>
               <a:t>usr</a:t>
             </a:r>
             <a:r>
-              <a:rPr lang="en-GB" dirty="0">
+              <a:rPr lang="en-GB" sz="1600" dirty="0">
                 <a:latin typeface="Courier New" panose="02070309020205020404" pitchFamily="49" charset="0"/>
                 <a:cs typeface="Courier New" panose="02070309020205020404" pitchFamily="49" charset="0"/>
               </a:rPr>
@@ -15667,54 +15882,54 @@
           </a:p>
           <a:p>
             <a:r>
-              <a:rPr lang="en-GB" dirty="0">
+              <a:rPr lang="en-GB" sz="1600" dirty="0">
                 <a:latin typeface="Courier New" panose="02070309020205020404" pitchFamily="49" charset="0"/>
                 <a:cs typeface="Courier New" panose="02070309020205020404" pitchFamily="49" charset="0"/>
               </a:rPr>
               <a:t>set -</a:t>
             </a:r>
             <a:r>
-              <a:rPr lang="en-GB" dirty="0" err="1">
+              <a:rPr lang="en-GB" sz="1600" dirty="0" err="1">
                 <a:latin typeface="Courier New" panose="02070309020205020404" pitchFamily="49" charset="0"/>
                 <a:cs typeface="Courier New" panose="02070309020205020404" pitchFamily="49" charset="0"/>
               </a:rPr>
               <a:t>euo</a:t>
             </a:r>
             <a:r>
-              <a:rPr lang="en-GB" dirty="0">
+              <a:rPr lang="en-GB" sz="1600" dirty="0">
                 <a:latin typeface="Courier New" panose="02070309020205020404" pitchFamily="49" charset="0"/>
                 <a:cs typeface="Courier New" panose="02070309020205020404" pitchFamily="49" charset="0"/>
               </a:rPr>
               <a:t> </a:t>
             </a:r>
             <a:r>
-              <a:rPr lang="en-GB" dirty="0" err="1">
+              <a:rPr lang="en-GB" sz="1600" dirty="0" err="1">
                 <a:latin typeface="Courier New" panose="02070309020205020404" pitchFamily="49" charset="0"/>
                 <a:cs typeface="Courier New" panose="02070309020205020404" pitchFamily="49" charset="0"/>
               </a:rPr>
               <a:t>pipefail</a:t>
             </a:r>
-            <a:endParaRPr lang="en-GB" dirty="0">
+            <a:endParaRPr lang="en-GB" sz="1600" dirty="0">
               <a:latin typeface="Courier New" panose="02070309020205020404" pitchFamily="49" charset="0"/>
               <a:cs typeface="Courier New" panose="02070309020205020404" pitchFamily="49" charset="0"/>
             </a:endParaRPr>
           </a:p>
           <a:p>
-            <a:endParaRPr lang="en-GB" dirty="0">
+            <a:endParaRPr lang="en-GB" sz="1600" dirty="0">
               <a:latin typeface="Courier New" panose="02070309020205020404" pitchFamily="49" charset="0"/>
               <a:cs typeface="Courier New" panose="02070309020205020404" pitchFamily="49" charset="0"/>
             </a:endParaRPr>
           </a:p>
           <a:p>
             <a:r>
-              <a:rPr lang="en-GB" dirty="0" err="1">
+              <a:rPr lang="en-GB" sz="1600" dirty="0" err="1">
                 <a:latin typeface="Courier New" panose="02070309020205020404" pitchFamily="49" charset="0"/>
                 <a:cs typeface="Courier New" panose="02070309020205020404" pitchFamily="49" charset="0"/>
               </a:rPr>
               <a:t>srr</a:t>
             </a:r>
             <a:r>
-              <a:rPr lang="en-GB" dirty="0">
+              <a:rPr lang="en-GB" sz="1600" dirty="0">
                 <a:latin typeface="Courier New" panose="02070309020205020404" pitchFamily="49" charset="0"/>
                 <a:cs typeface="Courier New" panose="02070309020205020404" pitchFamily="49" charset="0"/>
               </a:rPr>
@@ -15723,7 +15938,7 @@
           </a:p>
           <a:p>
             <a:r>
-              <a:rPr lang="en-GB" dirty="0">
+              <a:rPr lang="en-GB" sz="1600" dirty="0">
                 <a:latin typeface="Courier New" panose="02070309020205020404" pitchFamily="49" charset="0"/>
                 <a:cs typeface="Courier New" panose="02070309020205020404" pitchFamily="49" charset="0"/>
               </a:rPr>
@@ -15731,202 +15946,143 @@
             </a:r>
           </a:p>
           <a:p>
-            <a:r>
-              <a:rPr lang="en-GB" dirty="0" err="1">
-                <a:latin typeface="Courier New" panose="02070309020205020404" pitchFamily="49" charset="0"/>
-                <a:cs typeface="Courier New" panose="02070309020205020404" pitchFamily="49" charset="0"/>
-              </a:rPr>
-              <a:t>outdir</a:t>
-            </a:r>
-            <a:r>
-              <a:rPr lang="en-GB" dirty="0">
-                <a:latin typeface="Courier New" panose="02070309020205020404" pitchFamily="49" charset="0"/>
-                <a:cs typeface="Courier New" panose="02070309020205020404" pitchFamily="49" charset="0"/>
-              </a:rPr>
-              <a:t>="</a:t>
-            </a:r>
-            <a:r>
-              <a:rPr lang="en-GB" dirty="0" err="1">
-                <a:latin typeface="Courier New" panose="02070309020205020404" pitchFamily="49" charset="0"/>
-                <a:cs typeface="Courier New" panose="02070309020205020404" pitchFamily="49" charset="0"/>
-              </a:rPr>
-              <a:t>raw_data</a:t>
-            </a:r>
-            <a:r>
-              <a:rPr lang="en-GB" dirty="0">
-                <a:latin typeface="Courier New" panose="02070309020205020404" pitchFamily="49" charset="0"/>
-                <a:cs typeface="Courier New" panose="02070309020205020404" pitchFamily="49" charset="0"/>
-              </a:rPr>
-              <a:t>/</a:t>
-            </a:r>
-            <a:r>
-              <a:rPr lang="en-GB" dirty="0" err="1">
-                <a:latin typeface="Courier New" panose="02070309020205020404" pitchFamily="49" charset="0"/>
-                <a:cs typeface="Courier New" panose="02070309020205020404" pitchFamily="49" charset="0"/>
-              </a:rPr>
-              <a:t>fastq</a:t>
-            </a:r>
-            <a:r>
-              <a:rPr lang="en-GB" dirty="0">
-                <a:latin typeface="Courier New" panose="02070309020205020404" pitchFamily="49" charset="0"/>
-                <a:cs typeface="Courier New" panose="02070309020205020404" pitchFamily="49" charset="0"/>
-              </a:rPr>
-              <a:t>/</a:t>
-            </a:r>
-            <a:r>
-              <a:rPr lang="en-GB" dirty="0" err="1">
-                <a:latin typeface="Courier New" panose="02070309020205020404" pitchFamily="49" charset="0"/>
-                <a:cs typeface="Courier New" panose="02070309020205020404" pitchFamily="49" charset="0"/>
-              </a:rPr>
-              <a:t>rnaseq</a:t>
-            </a:r>
-            <a:r>
-              <a:rPr lang="en-GB" dirty="0">
-                <a:latin typeface="Courier New" panose="02070309020205020404" pitchFamily="49" charset="0"/>
-                <a:cs typeface="Courier New" panose="02070309020205020404" pitchFamily="49" charset="0"/>
-              </a:rPr>
-              <a:t>"</a:t>
-            </a:r>
-          </a:p>
-          <a:p>
-            <a:endParaRPr lang="en-GB" dirty="0">
+            <a:endParaRPr lang="en-GB" sz="1600" dirty="0">
               <a:latin typeface="Courier New" panose="02070309020205020404" pitchFamily="49" charset="0"/>
               <a:cs typeface="Courier New" panose="02070309020205020404" pitchFamily="49" charset="0"/>
             </a:endParaRPr>
           </a:p>
           <a:p>
             <a:r>
-              <a:rPr lang="en-GB" dirty="0" err="1">
-                <a:latin typeface="Courier New" panose="02070309020205020404" pitchFamily="49" charset="0"/>
-                <a:cs typeface="Courier New" panose="02070309020205020404" pitchFamily="49" charset="0"/>
-              </a:rPr>
-              <a:t>mkdir</a:t>
-            </a:r>
-            <a:r>
-              <a:rPr lang="en-GB" dirty="0">
-                <a:latin typeface="Courier New" panose="02070309020205020404" pitchFamily="49" charset="0"/>
-                <a:cs typeface="Courier New" panose="02070309020205020404" pitchFamily="49" charset="0"/>
-              </a:rPr>
-              <a:t> -p "${</a:t>
-            </a:r>
-            <a:r>
-              <a:rPr lang="en-GB" dirty="0" err="1">
+              <a:rPr lang="en-GB" sz="1600" dirty="0" err="1">
                 <a:latin typeface="Courier New" panose="02070309020205020404" pitchFamily="49" charset="0"/>
                 <a:cs typeface="Courier New" panose="02070309020205020404" pitchFamily="49" charset="0"/>
               </a:rPr>
               <a:t>outdir</a:t>
             </a:r>
             <a:r>
-              <a:rPr lang="en-GB" dirty="0">
-                <a:latin typeface="Courier New" panose="02070309020205020404" pitchFamily="49" charset="0"/>
-                <a:cs typeface="Courier New" panose="02070309020205020404" pitchFamily="49" charset="0"/>
-              </a:rPr>
-              <a:t>}"</a:t>
-            </a:r>
-          </a:p>
-          <a:p>
-            <a:endParaRPr lang="en-GB" dirty="0">
+              <a:rPr lang="en-GB" sz="1600" dirty="0">
+                <a:latin typeface="Courier New" panose="02070309020205020404" pitchFamily="49" charset="0"/>
+                <a:cs typeface="Courier New" panose="02070309020205020404" pitchFamily="49" charset="0"/>
+              </a:rPr>
+              <a:t>="</a:t>
+            </a:r>
+            <a:r>
+              <a:rPr lang="en-GB" sz="1600" dirty="0" err="1">
+                <a:latin typeface="Courier New" panose="02070309020205020404" pitchFamily="49" charset="0"/>
+                <a:cs typeface="Courier New" panose="02070309020205020404" pitchFamily="49" charset="0"/>
+              </a:rPr>
+              <a:t>raw_data</a:t>
+            </a:r>
+            <a:r>
+              <a:rPr lang="en-GB" sz="1600" dirty="0">
+                <a:latin typeface="Courier New" panose="02070309020205020404" pitchFamily="49" charset="0"/>
+                <a:cs typeface="Courier New" panose="02070309020205020404" pitchFamily="49" charset="0"/>
+              </a:rPr>
+              <a:t>/</a:t>
+            </a:r>
+            <a:r>
+              <a:rPr lang="en-GB" sz="1600" dirty="0" err="1">
+                <a:latin typeface="Courier New" panose="02070309020205020404" pitchFamily="49" charset="0"/>
+                <a:cs typeface="Courier New" panose="02070309020205020404" pitchFamily="49" charset="0"/>
+              </a:rPr>
+              <a:t>fastq</a:t>
+            </a:r>
+            <a:r>
+              <a:rPr lang="en-GB" sz="1600" dirty="0">
+                <a:latin typeface="Courier New" panose="02070309020205020404" pitchFamily="49" charset="0"/>
+                <a:cs typeface="Courier New" panose="02070309020205020404" pitchFamily="49" charset="0"/>
+              </a:rPr>
+              <a:t>/</a:t>
+            </a:r>
+            <a:r>
+              <a:rPr lang="en-GB" sz="1600" dirty="0" err="1">
+                <a:latin typeface="Courier New" panose="02070309020205020404" pitchFamily="49" charset="0"/>
+                <a:cs typeface="Courier New" panose="02070309020205020404" pitchFamily="49" charset="0"/>
+              </a:rPr>
+              <a:t>rnaseq</a:t>
+            </a:r>
+            <a:r>
+              <a:rPr lang="en-GB" sz="1600" dirty="0">
+                <a:latin typeface="Courier New" panose="02070309020205020404" pitchFamily="49" charset="0"/>
+                <a:cs typeface="Courier New" panose="02070309020205020404" pitchFamily="49" charset="0"/>
+              </a:rPr>
+              <a:t>"</a:t>
+            </a:r>
+          </a:p>
+          <a:p>
+            <a:r>
+              <a:rPr lang="en-GB" sz="1600" dirty="0" err="1">
+                <a:latin typeface="Courier New" panose="02070309020205020404" pitchFamily="49" charset="0"/>
+                <a:cs typeface="Courier New" panose="02070309020205020404" pitchFamily="49" charset="0"/>
+              </a:rPr>
+              <a:t>tmpdir</a:t>
+            </a:r>
+            <a:r>
+              <a:rPr lang="en-GB" sz="1600" dirty="0">
+                <a:latin typeface="Courier New" panose="02070309020205020404" pitchFamily="49" charset="0"/>
+                <a:cs typeface="Courier New" panose="02070309020205020404" pitchFamily="49" charset="0"/>
+              </a:rPr>
+              <a:t>="</a:t>
+            </a:r>
+            <a:r>
+              <a:rPr lang="en-GB" sz="1600" dirty="0" err="1">
+                <a:latin typeface="Courier New" panose="02070309020205020404" pitchFamily="49" charset="0"/>
+                <a:cs typeface="Courier New" panose="02070309020205020404" pitchFamily="49" charset="0"/>
+              </a:rPr>
+              <a:t>sra_tmp</a:t>
+            </a:r>
+            <a:r>
+              <a:rPr lang="en-GB" sz="1600" dirty="0">
+                <a:latin typeface="Courier New" panose="02070309020205020404" pitchFamily="49" charset="0"/>
+                <a:cs typeface="Courier New" panose="02070309020205020404" pitchFamily="49" charset="0"/>
+              </a:rPr>
+              <a:t>"</a:t>
+            </a:r>
+          </a:p>
+          <a:p>
+            <a:endParaRPr lang="en-GB" sz="1600" dirty="0">
               <a:latin typeface="Courier New" panose="02070309020205020404" pitchFamily="49" charset="0"/>
               <a:cs typeface="Courier New" panose="02070309020205020404" pitchFamily="49" charset="0"/>
             </a:endParaRPr>
           </a:p>
           <a:p>
             <a:r>
-              <a:rPr lang="en-GB" dirty="0" err="1">
-                <a:latin typeface="Courier New" panose="02070309020205020404" pitchFamily="49" charset="0"/>
-                <a:cs typeface="Courier New" panose="02070309020205020404" pitchFamily="49" charset="0"/>
-              </a:rPr>
-              <a:t>fasterq</a:t>
-            </a:r>
-            <a:r>
-              <a:rPr lang="en-GB" dirty="0">
-                <a:latin typeface="Courier New" panose="02070309020205020404" pitchFamily="49" charset="0"/>
-                <a:cs typeface="Courier New" panose="02070309020205020404" pitchFamily="49" charset="0"/>
-              </a:rPr>
-              <a:t>-dump "${</a:t>
-            </a:r>
-            <a:r>
-              <a:rPr lang="en-GB" dirty="0" err="1">
-                <a:latin typeface="Courier New" panose="02070309020205020404" pitchFamily="49" charset="0"/>
-                <a:cs typeface="Courier New" panose="02070309020205020404" pitchFamily="49" charset="0"/>
-              </a:rPr>
-              <a:t>srr</a:t>
-            </a:r>
-            <a:r>
-              <a:rPr lang="en-GB" dirty="0">
-                <a:latin typeface="Courier New" panose="02070309020205020404" pitchFamily="49" charset="0"/>
-                <a:cs typeface="Courier New" panose="02070309020205020404" pitchFamily="49" charset="0"/>
-              </a:rPr>
-              <a:t>}" \</a:t>
-            </a:r>
-          </a:p>
-          <a:p>
-            <a:r>
-              <a:rPr lang="en-GB" dirty="0">
-                <a:latin typeface="Courier New" panose="02070309020205020404" pitchFamily="49" charset="0"/>
-                <a:cs typeface="Courier New" panose="02070309020205020404" pitchFamily="49" charset="0"/>
-              </a:rPr>
-              <a:t>  --split-files \</a:t>
-            </a:r>
-          </a:p>
-          <a:p>
-            <a:r>
-              <a:rPr lang="en-GB" dirty="0">
-                <a:latin typeface="Courier New" panose="02070309020205020404" pitchFamily="49" charset="0"/>
-                <a:cs typeface="Courier New" panose="02070309020205020404" pitchFamily="49" charset="0"/>
-              </a:rPr>
-              <a:t>  --threads 2 \</a:t>
-            </a:r>
-          </a:p>
-          <a:p>
-            <a:r>
-              <a:rPr lang="en-GB" dirty="0">
-                <a:latin typeface="Courier New" panose="02070309020205020404" pitchFamily="49" charset="0"/>
-                <a:cs typeface="Courier New" panose="02070309020205020404" pitchFamily="49" charset="0"/>
-              </a:rPr>
-              <a:t>  --progress \</a:t>
-            </a:r>
-          </a:p>
-          <a:p>
-            <a:r>
-              <a:rPr lang="en-GB" dirty="0">
-                <a:latin typeface="Courier New" panose="02070309020205020404" pitchFamily="49" charset="0"/>
-                <a:cs typeface="Courier New" panose="02070309020205020404" pitchFamily="49" charset="0"/>
-              </a:rPr>
-              <a:t>  --details \</a:t>
-            </a:r>
-          </a:p>
-          <a:p>
-            <a:r>
-              <a:rPr lang="en-GB" dirty="0">
-                <a:latin typeface="Courier New" panose="02070309020205020404" pitchFamily="49" charset="0"/>
-                <a:cs typeface="Courier New" panose="02070309020205020404" pitchFamily="49" charset="0"/>
-              </a:rPr>
-              <a:t>  --</a:t>
-            </a:r>
-            <a:r>
-              <a:rPr lang="en-GB" dirty="0" err="1">
+              <a:rPr lang="en-GB" sz="1600" dirty="0" err="1">
+                <a:latin typeface="Courier New" panose="02070309020205020404" pitchFamily="49" charset="0"/>
+                <a:cs typeface="Courier New" panose="02070309020205020404" pitchFamily="49" charset="0"/>
+              </a:rPr>
+              <a:t>mkdir</a:t>
+            </a:r>
+            <a:r>
+              <a:rPr lang="en-GB" sz="1600" dirty="0">
+                <a:latin typeface="Courier New" panose="02070309020205020404" pitchFamily="49" charset="0"/>
+                <a:cs typeface="Courier New" panose="02070309020205020404" pitchFamily="49" charset="0"/>
+              </a:rPr>
+              <a:t> -p "${</a:t>
+            </a:r>
+            <a:r>
+              <a:rPr lang="en-GB" sz="1600" dirty="0" err="1">
                 <a:latin typeface="Courier New" panose="02070309020205020404" pitchFamily="49" charset="0"/>
                 <a:cs typeface="Courier New" panose="02070309020205020404" pitchFamily="49" charset="0"/>
               </a:rPr>
               <a:t>outdir</a:t>
             </a:r>
             <a:r>
-              <a:rPr lang="en-GB" dirty="0">
-                <a:latin typeface="Courier New" panose="02070309020205020404" pitchFamily="49" charset="0"/>
-                <a:cs typeface="Courier New" panose="02070309020205020404" pitchFamily="49" charset="0"/>
-              </a:rPr>
-              <a:t> "${</a:t>
-            </a:r>
-            <a:r>
-              <a:rPr lang="en-GB" dirty="0" err="1">
-                <a:latin typeface="Courier New" panose="02070309020205020404" pitchFamily="49" charset="0"/>
-                <a:cs typeface="Courier New" panose="02070309020205020404" pitchFamily="49" charset="0"/>
-              </a:rPr>
-              <a:t>outdir</a:t>
-            </a:r>
-            <a:r>
-              <a:rPr lang="en-GB" dirty="0">
+              <a:rPr lang="en-GB" sz="1600" dirty="0">
+                <a:latin typeface="Courier New" panose="02070309020205020404" pitchFamily="49" charset="0"/>
+                <a:cs typeface="Courier New" panose="02070309020205020404" pitchFamily="49" charset="0"/>
+              </a:rPr>
+              <a:t>}" "${</a:t>
+            </a:r>
+            <a:r>
+              <a:rPr lang="en-GB" sz="1600" dirty="0" err="1">
+                <a:latin typeface="Courier New" panose="02070309020205020404" pitchFamily="49" charset="0"/>
+                <a:cs typeface="Courier New" panose="02070309020205020404" pitchFamily="49" charset="0"/>
+              </a:rPr>
+              <a:t>tmpdir</a:t>
+            </a:r>
+            <a:r>
+              <a:rPr lang="en-GB" sz="1600" dirty="0">
                 <a:latin typeface="Courier New" panose="02070309020205020404" pitchFamily="49" charset="0"/>
                 <a:cs typeface="Courier New" panose="02070309020205020404" pitchFamily="49" charset="0"/>
               </a:rPr>
@@ -15934,172 +16090,293 @@
             </a:r>
           </a:p>
           <a:p>
-            <a:endParaRPr lang="en-GB" dirty="0">
+            <a:endParaRPr lang="en-GB" sz="1600" dirty="0">
               <a:latin typeface="Courier New" panose="02070309020205020404" pitchFamily="49" charset="0"/>
               <a:cs typeface="Courier New" panose="02070309020205020404" pitchFamily="49" charset="0"/>
             </a:endParaRPr>
           </a:p>
           <a:p>
             <a:r>
-              <a:rPr lang="en-GB" dirty="0" err="1">
-                <a:latin typeface="Courier New" panose="02070309020205020404" pitchFamily="49" charset="0"/>
-                <a:cs typeface="Courier New" panose="02070309020205020404" pitchFamily="49" charset="0"/>
-              </a:rPr>
-              <a:t>gzip</a:t>
-            </a:r>
-            <a:r>
-              <a:rPr lang="en-GB" dirty="0">
-                <a:latin typeface="Courier New" panose="02070309020205020404" pitchFamily="49" charset="0"/>
-                <a:cs typeface="Courier New" panose="02070309020205020404" pitchFamily="49" charset="0"/>
-              </a:rPr>
-              <a:t> -p 4 "${</a:t>
-            </a:r>
-            <a:r>
-              <a:rPr lang="en-GB" dirty="0" err="1">
+              <a:rPr lang="en-GB" sz="1600" dirty="0" err="1">
+                <a:latin typeface="Courier New" panose="02070309020205020404" pitchFamily="49" charset="0"/>
+                <a:cs typeface="Courier New" panose="02070309020205020404" pitchFamily="49" charset="0"/>
+              </a:rPr>
+              <a:t>fasterq</a:t>
+            </a:r>
+            <a:r>
+              <a:rPr lang="en-GB" sz="1600" dirty="0">
+                <a:latin typeface="Courier New" panose="02070309020205020404" pitchFamily="49" charset="0"/>
+                <a:cs typeface="Courier New" panose="02070309020205020404" pitchFamily="49" charset="0"/>
+              </a:rPr>
+              <a:t>-dump "${</a:t>
+            </a:r>
+            <a:r>
+              <a:rPr lang="en-GB" sz="1600" dirty="0" err="1">
+                <a:latin typeface="Courier New" panose="02070309020205020404" pitchFamily="49" charset="0"/>
+                <a:cs typeface="Courier New" panose="02070309020205020404" pitchFamily="49" charset="0"/>
+              </a:rPr>
+              <a:t>srr</a:t>
+            </a:r>
+            <a:r>
+              <a:rPr lang="en-GB" sz="1600" dirty="0">
+                <a:latin typeface="Courier New" panose="02070309020205020404" pitchFamily="49" charset="0"/>
+                <a:cs typeface="Courier New" panose="02070309020205020404" pitchFamily="49" charset="0"/>
+              </a:rPr>
+              <a:t>}" \</a:t>
+            </a:r>
+          </a:p>
+          <a:p>
+            <a:r>
+              <a:rPr lang="en-GB" sz="1600" dirty="0">
+                <a:latin typeface="Courier New" panose="02070309020205020404" pitchFamily="49" charset="0"/>
+                <a:cs typeface="Courier New" panose="02070309020205020404" pitchFamily="49" charset="0"/>
+              </a:rPr>
+              <a:t>  --split-files \</a:t>
+            </a:r>
+          </a:p>
+          <a:p>
+            <a:r>
+              <a:rPr lang="en-GB" sz="1600" dirty="0">
+                <a:latin typeface="Courier New" panose="02070309020205020404" pitchFamily="49" charset="0"/>
+                <a:cs typeface="Courier New" panose="02070309020205020404" pitchFamily="49" charset="0"/>
+              </a:rPr>
+              <a:t>  --threads 2 \</a:t>
+            </a:r>
+          </a:p>
+          <a:p>
+            <a:r>
+              <a:rPr lang="en-GB" sz="1600" dirty="0">
+                <a:latin typeface="Courier New" panose="02070309020205020404" pitchFamily="49" charset="0"/>
+                <a:cs typeface="Courier New" panose="02070309020205020404" pitchFamily="49" charset="0"/>
+              </a:rPr>
+              <a:t>  --progress \</a:t>
+            </a:r>
+          </a:p>
+          <a:p>
+            <a:r>
+              <a:rPr lang="en-GB" sz="1600" dirty="0">
+                <a:latin typeface="Courier New" panose="02070309020205020404" pitchFamily="49" charset="0"/>
+                <a:cs typeface="Courier New" panose="02070309020205020404" pitchFamily="49" charset="0"/>
+              </a:rPr>
+              <a:t>  --details \</a:t>
+            </a:r>
+          </a:p>
+          <a:p>
+            <a:r>
+              <a:rPr lang="en-GB" sz="1600" dirty="0">
+                <a:latin typeface="Courier New" panose="02070309020205020404" pitchFamily="49" charset="0"/>
+                <a:cs typeface="Courier New" panose="02070309020205020404" pitchFamily="49" charset="0"/>
+              </a:rPr>
+              <a:t>  --</a:t>
+            </a:r>
+            <a:r>
+              <a:rPr lang="en-GB" sz="1600" dirty="0" err="1">
                 <a:latin typeface="Courier New" panose="02070309020205020404" pitchFamily="49" charset="0"/>
                 <a:cs typeface="Courier New" panose="02070309020205020404" pitchFamily="49" charset="0"/>
               </a:rPr>
               <a:t>outdir</a:t>
             </a:r>
             <a:r>
-              <a:rPr lang="en-GB" dirty="0">
-                <a:latin typeface="Courier New" panose="02070309020205020404" pitchFamily="49" charset="0"/>
-                <a:cs typeface="Courier New" panose="02070309020205020404" pitchFamily="49" charset="0"/>
-              </a:rPr>
-              <a:t>}/${</a:t>
-            </a:r>
-            <a:r>
-              <a:rPr lang="en-GB" dirty="0" err="1">
-                <a:latin typeface="Courier New" panose="02070309020205020404" pitchFamily="49" charset="0"/>
-                <a:cs typeface="Courier New" panose="02070309020205020404" pitchFamily="49" charset="0"/>
-              </a:rPr>
-              <a:t>srr</a:t>
-            </a:r>
-            <a:r>
-              <a:rPr lang="en-GB" dirty="0">
-                <a:latin typeface="Courier New" panose="02070309020205020404" pitchFamily="49" charset="0"/>
-                <a:cs typeface="Courier New" panose="02070309020205020404" pitchFamily="49" charset="0"/>
-              </a:rPr>
-              <a:t>}"*.</a:t>
-            </a:r>
-            <a:r>
-              <a:rPr lang="en-GB" dirty="0" err="1">
-                <a:latin typeface="Courier New" panose="02070309020205020404" pitchFamily="49" charset="0"/>
-                <a:cs typeface="Courier New" panose="02070309020205020404" pitchFamily="49" charset="0"/>
-              </a:rPr>
-              <a:t>fastq</a:t>
-            </a:r>
-            <a:endParaRPr lang="en-GB" dirty="0">
+              <a:rPr lang="en-GB" sz="1600" dirty="0">
+                <a:latin typeface="Courier New" panose="02070309020205020404" pitchFamily="49" charset="0"/>
+                <a:cs typeface="Courier New" panose="02070309020205020404" pitchFamily="49" charset="0"/>
+              </a:rPr>
+              <a:t> "${</a:t>
+            </a:r>
+            <a:r>
+              <a:rPr lang="en-GB" sz="1600" dirty="0" err="1">
+                <a:latin typeface="Courier New" panose="02070309020205020404" pitchFamily="49" charset="0"/>
+                <a:cs typeface="Courier New" panose="02070309020205020404" pitchFamily="49" charset="0"/>
+              </a:rPr>
+              <a:t>outdir</a:t>
+            </a:r>
+            <a:r>
+              <a:rPr lang="en-GB" sz="1600" dirty="0">
+                <a:latin typeface="Courier New" panose="02070309020205020404" pitchFamily="49" charset="0"/>
+                <a:cs typeface="Courier New" panose="02070309020205020404" pitchFamily="49" charset="0"/>
+              </a:rPr>
+              <a:t>}" \</a:t>
+            </a:r>
+          </a:p>
+          <a:p>
+            <a:r>
+              <a:rPr lang="en-GB" sz="1600" dirty="0">
+                <a:latin typeface="Courier New" panose="02070309020205020404" pitchFamily="49" charset="0"/>
+                <a:cs typeface="Courier New" panose="02070309020205020404" pitchFamily="49" charset="0"/>
+              </a:rPr>
+              <a:t>  --temp "${</a:t>
+            </a:r>
+            <a:r>
+              <a:rPr lang="en-GB" sz="1600" dirty="0" err="1">
+                <a:latin typeface="Courier New" panose="02070309020205020404" pitchFamily="49" charset="0"/>
+                <a:cs typeface="Courier New" panose="02070309020205020404" pitchFamily="49" charset="0"/>
+              </a:rPr>
+              <a:t>tmpdir</a:t>
+            </a:r>
+            <a:r>
+              <a:rPr lang="en-GB" sz="1600" dirty="0">
+                <a:latin typeface="Courier New" panose="02070309020205020404" pitchFamily="49" charset="0"/>
+                <a:cs typeface="Courier New" panose="02070309020205020404" pitchFamily="49" charset="0"/>
+              </a:rPr>
+              <a:t>}"</a:t>
+            </a:r>
+          </a:p>
+          <a:p>
+            <a:endParaRPr lang="en-GB" sz="1600" dirty="0">
               <a:latin typeface="Courier New" panose="02070309020205020404" pitchFamily="49" charset="0"/>
               <a:cs typeface="Courier New" panose="02070309020205020404" pitchFamily="49" charset="0"/>
             </a:endParaRPr>
           </a:p>
           <a:p>
-            <a:endParaRPr lang="en-GB" dirty="0">
+            <a:r>
+              <a:rPr lang="en-GB" sz="1600" dirty="0">
+                <a:latin typeface="Courier New" panose="02070309020205020404" pitchFamily="49" charset="0"/>
+                <a:cs typeface="Courier New" panose="02070309020205020404" pitchFamily="49" charset="0"/>
+              </a:rPr>
+              <a:t>mv "${</a:t>
+            </a:r>
+            <a:r>
+              <a:rPr lang="en-GB" sz="1600" dirty="0" err="1">
+                <a:latin typeface="Courier New" panose="02070309020205020404" pitchFamily="49" charset="0"/>
+                <a:cs typeface="Courier New" panose="02070309020205020404" pitchFamily="49" charset="0"/>
+              </a:rPr>
+              <a:t>outdir</a:t>
+            </a:r>
+            <a:r>
+              <a:rPr lang="en-GB" sz="1600" dirty="0">
+                <a:latin typeface="Courier New" panose="02070309020205020404" pitchFamily="49" charset="0"/>
+                <a:cs typeface="Courier New" panose="02070309020205020404" pitchFamily="49" charset="0"/>
+              </a:rPr>
+              <a:t>}/${</a:t>
+            </a:r>
+            <a:r>
+              <a:rPr lang="en-GB" sz="1600" dirty="0" err="1">
+                <a:latin typeface="Courier New" panose="02070309020205020404" pitchFamily="49" charset="0"/>
+                <a:cs typeface="Courier New" panose="02070309020205020404" pitchFamily="49" charset="0"/>
+              </a:rPr>
+              <a:t>srr</a:t>
+            </a:r>
+            <a:r>
+              <a:rPr lang="en-GB" sz="1600" dirty="0">
+                <a:latin typeface="Courier New" panose="02070309020205020404" pitchFamily="49" charset="0"/>
+                <a:cs typeface="Courier New" panose="02070309020205020404" pitchFamily="49" charset="0"/>
+              </a:rPr>
+              <a:t>}_1.fastq" "${</a:t>
+            </a:r>
+            <a:r>
+              <a:rPr lang="en-GB" sz="1600" dirty="0" err="1">
+                <a:latin typeface="Courier New" panose="02070309020205020404" pitchFamily="49" charset="0"/>
+                <a:cs typeface="Courier New" panose="02070309020205020404" pitchFamily="49" charset="0"/>
+              </a:rPr>
+              <a:t>outdir</a:t>
+            </a:r>
+            <a:r>
+              <a:rPr lang="en-GB" sz="1600" dirty="0">
+                <a:latin typeface="Courier New" panose="02070309020205020404" pitchFamily="49" charset="0"/>
+                <a:cs typeface="Courier New" panose="02070309020205020404" pitchFamily="49" charset="0"/>
+              </a:rPr>
+              <a:t>}/${sample}_R1.fastq"</a:t>
+            </a:r>
+          </a:p>
+          <a:p>
+            <a:r>
+              <a:rPr lang="en-GB" sz="1600" dirty="0">
+                <a:latin typeface="Courier New" panose="02070309020205020404" pitchFamily="49" charset="0"/>
+                <a:cs typeface="Courier New" panose="02070309020205020404" pitchFamily="49" charset="0"/>
+              </a:rPr>
+              <a:t>mv "${</a:t>
+            </a:r>
+            <a:r>
+              <a:rPr lang="en-GB" sz="1600" dirty="0" err="1">
+                <a:latin typeface="Courier New" panose="02070309020205020404" pitchFamily="49" charset="0"/>
+                <a:cs typeface="Courier New" panose="02070309020205020404" pitchFamily="49" charset="0"/>
+              </a:rPr>
+              <a:t>outdir</a:t>
+            </a:r>
+            <a:r>
+              <a:rPr lang="en-GB" sz="1600" dirty="0">
+                <a:latin typeface="Courier New" panose="02070309020205020404" pitchFamily="49" charset="0"/>
+                <a:cs typeface="Courier New" panose="02070309020205020404" pitchFamily="49" charset="0"/>
+              </a:rPr>
+              <a:t>}/${</a:t>
+            </a:r>
+            <a:r>
+              <a:rPr lang="en-GB" sz="1600" dirty="0" err="1">
+                <a:latin typeface="Courier New" panose="02070309020205020404" pitchFamily="49" charset="0"/>
+                <a:cs typeface="Courier New" panose="02070309020205020404" pitchFamily="49" charset="0"/>
+              </a:rPr>
+              <a:t>srr</a:t>
+            </a:r>
+            <a:r>
+              <a:rPr lang="en-GB" sz="1600" dirty="0">
+                <a:latin typeface="Courier New" panose="02070309020205020404" pitchFamily="49" charset="0"/>
+                <a:cs typeface="Courier New" panose="02070309020205020404" pitchFamily="49" charset="0"/>
+              </a:rPr>
+              <a:t>}_2.fastq" "${</a:t>
+            </a:r>
+            <a:r>
+              <a:rPr lang="en-GB" sz="1600" dirty="0" err="1">
+                <a:latin typeface="Courier New" panose="02070309020205020404" pitchFamily="49" charset="0"/>
+                <a:cs typeface="Courier New" panose="02070309020205020404" pitchFamily="49" charset="0"/>
+              </a:rPr>
+              <a:t>outdir</a:t>
+            </a:r>
+            <a:r>
+              <a:rPr lang="en-GB" sz="1600" dirty="0">
+                <a:latin typeface="Courier New" panose="02070309020205020404" pitchFamily="49" charset="0"/>
+                <a:cs typeface="Courier New" panose="02070309020205020404" pitchFamily="49" charset="0"/>
+              </a:rPr>
+              <a:t>}/${sample}_R2.fastq"</a:t>
+            </a:r>
+          </a:p>
+          <a:p>
+            <a:endParaRPr lang="en-GB" sz="1600" dirty="0">
               <a:latin typeface="Courier New" panose="02070309020205020404" pitchFamily="49" charset="0"/>
               <a:cs typeface="Courier New" panose="02070309020205020404" pitchFamily="49" charset="0"/>
             </a:endParaRPr>
           </a:p>
           <a:p>
             <a:r>
-              <a:rPr lang="en-GB" dirty="0">
-                <a:latin typeface="Courier New" panose="02070309020205020404" pitchFamily="49" charset="0"/>
-                <a:cs typeface="Courier New" panose="02070309020205020404" pitchFamily="49" charset="0"/>
-              </a:rPr>
-              <a:t>mv "${</a:t>
-            </a:r>
-            <a:r>
-              <a:rPr lang="en-GB" dirty="0" err="1">
+              <a:rPr lang="en-GB" sz="1600" dirty="0" err="1">
+                <a:latin typeface="Courier New" panose="02070309020205020404" pitchFamily="49" charset="0"/>
+                <a:cs typeface="Courier New" panose="02070309020205020404" pitchFamily="49" charset="0"/>
+              </a:rPr>
+              <a:t>gzip</a:t>
+            </a:r>
+            <a:r>
+              <a:rPr lang="en-GB" sz="1600" dirty="0">
+                <a:latin typeface="Courier New" panose="02070309020205020404" pitchFamily="49" charset="0"/>
+                <a:cs typeface="Courier New" panose="02070309020205020404" pitchFamily="49" charset="0"/>
+              </a:rPr>
+              <a:t> "${</a:t>
+            </a:r>
+            <a:r>
+              <a:rPr lang="en-GB" sz="1600" dirty="0" err="1">
                 <a:latin typeface="Courier New" panose="02070309020205020404" pitchFamily="49" charset="0"/>
                 <a:cs typeface="Courier New" panose="02070309020205020404" pitchFamily="49" charset="0"/>
               </a:rPr>
               <a:t>outdir</a:t>
             </a:r>
             <a:r>
-              <a:rPr lang="en-GB" dirty="0">
-                <a:latin typeface="Courier New" panose="02070309020205020404" pitchFamily="49" charset="0"/>
-                <a:cs typeface="Courier New" panose="02070309020205020404" pitchFamily="49" charset="0"/>
-              </a:rPr>
-              <a:t>}/${</a:t>
-            </a:r>
-            <a:r>
-              <a:rPr lang="en-GB" dirty="0" err="1">
-                <a:latin typeface="Courier New" panose="02070309020205020404" pitchFamily="49" charset="0"/>
-                <a:cs typeface="Courier New" panose="02070309020205020404" pitchFamily="49" charset="0"/>
-              </a:rPr>
-              <a:t>srr</a:t>
-            </a:r>
-            <a:r>
-              <a:rPr lang="en-GB" dirty="0">
-                <a:latin typeface="Courier New" panose="02070309020205020404" pitchFamily="49" charset="0"/>
-                <a:cs typeface="Courier New" panose="02070309020205020404" pitchFamily="49" charset="0"/>
-              </a:rPr>
-              <a:t>}_1.fastq.gz” "${</a:t>
-            </a:r>
-            <a:r>
-              <a:rPr lang="en-GB" dirty="0" err="1">
+              <a:rPr lang="en-GB" sz="1600" dirty="0">
+                <a:latin typeface="Courier New" panose="02070309020205020404" pitchFamily="49" charset="0"/>
+                <a:cs typeface="Courier New" panose="02070309020205020404" pitchFamily="49" charset="0"/>
+              </a:rPr>
+              <a:t>}/${sample}_R1.fastq" "${</a:t>
+            </a:r>
+            <a:r>
+              <a:rPr lang="en-GB" sz="1600" dirty="0" err="1">
                 <a:latin typeface="Courier New" panose="02070309020205020404" pitchFamily="49" charset="0"/>
                 <a:cs typeface="Courier New" panose="02070309020205020404" pitchFamily="49" charset="0"/>
               </a:rPr>
               <a:t>outdir</a:t>
             </a:r>
             <a:r>
-              <a:rPr lang="en-GB" dirty="0">
-                <a:latin typeface="Courier New" panose="02070309020205020404" pitchFamily="49" charset="0"/>
-                <a:cs typeface="Courier New" panose="02070309020205020404" pitchFamily="49" charset="0"/>
-              </a:rPr>
-              <a:t>}/${sample}_R1.fastq.gz"</a:t>
-            </a:r>
-          </a:p>
-          <a:p>
-            <a:r>
-              <a:rPr lang="en-GB" dirty="0">
-                <a:latin typeface="Courier New" panose="02070309020205020404" pitchFamily="49" charset="0"/>
-                <a:cs typeface="Courier New" panose="02070309020205020404" pitchFamily="49" charset="0"/>
-              </a:rPr>
-              <a:t>mv "${</a:t>
-            </a:r>
-            <a:r>
-              <a:rPr lang="en-GB" dirty="0" err="1">
-                <a:latin typeface="Courier New" panose="02070309020205020404" pitchFamily="49" charset="0"/>
-                <a:cs typeface="Courier New" panose="02070309020205020404" pitchFamily="49" charset="0"/>
-              </a:rPr>
-              <a:t>outdir</a:t>
-            </a:r>
-            <a:r>
-              <a:rPr lang="en-GB" dirty="0">
-                <a:latin typeface="Courier New" panose="02070309020205020404" pitchFamily="49" charset="0"/>
-                <a:cs typeface="Courier New" panose="02070309020205020404" pitchFamily="49" charset="0"/>
-              </a:rPr>
-              <a:t>}/${</a:t>
-            </a:r>
-            <a:r>
-              <a:rPr lang="en-GB" dirty="0" err="1">
-                <a:latin typeface="Courier New" panose="02070309020205020404" pitchFamily="49" charset="0"/>
-                <a:cs typeface="Courier New" panose="02070309020205020404" pitchFamily="49" charset="0"/>
-              </a:rPr>
-              <a:t>srr</a:t>
-            </a:r>
-            <a:r>
-              <a:rPr lang="en-GB" dirty="0">
-                <a:latin typeface="Courier New" panose="02070309020205020404" pitchFamily="49" charset="0"/>
-                <a:cs typeface="Courier New" panose="02070309020205020404" pitchFamily="49" charset="0"/>
-              </a:rPr>
-              <a:t>}_2.fastq.gz" "${</a:t>
-            </a:r>
-            <a:r>
-              <a:rPr lang="en-GB" dirty="0" err="1">
-                <a:latin typeface="Courier New" panose="02070309020205020404" pitchFamily="49" charset="0"/>
-                <a:cs typeface="Courier New" panose="02070309020205020404" pitchFamily="49" charset="0"/>
-              </a:rPr>
-              <a:t>outdir</a:t>
-            </a:r>
-            <a:r>
-              <a:rPr lang="en-GB" dirty="0">
-                <a:latin typeface="Courier New" panose="02070309020205020404" pitchFamily="49" charset="0"/>
-                <a:cs typeface="Courier New" panose="02070309020205020404" pitchFamily="49" charset="0"/>
-              </a:rPr>
-              <a:t>}/${sample}_R2.fastq.gz"</a:t>
+              <a:rPr lang="en-GB" sz="1600" dirty="0">
+                <a:latin typeface="Courier New" panose="02070309020205020404" pitchFamily="49" charset="0"/>
+                <a:cs typeface="Courier New" panose="02070309020205020404" pitchFamily="49" charset="0"/>
+              </a:rPr>
+              <a:t>}/${sample}_R2.fastq"</a:t>
             </a:r>
           </a:p>
         </p:txBody>
@@ -16223,6 +16500,41 @@
                 <a:cs typeface="Courier New" panose="02070309020205020404" pitchFamily="49" charset="0"/>
               </a:rPr>
               <a:t>  bash scripts/day1/01_download_fastq.sh</a:t>
+            </a:r>
+          </a:p>
+        </p:txBody>
+      </p:sp>
+      <p:sp>
+        <p:nvSpPr>
+          <p:cNvPr id="2" name="TextBox 1">
+            <a:extLst>
+              <a:ext uri="{FF2B5EF4-FFF2-40B4-BE49-F238E27FC236}">
+                <a16:creationId xmlns:a16="http://schemas.microsoft.com/office/drawing/2014/main" id="{0C10DB7B-E377-2319-504E-648AF8223011}"/>
+              </a:ext>
+            </a:extLst>
+          </p:cNvPr>
+          <p:cNvSpPr txBox="1"/>
+          <p:nvPr/>
+        </p:nvSpPr>
+        <p:spPr>
+          <a:xfrm>
+            <a:off x="10477881" y="1824660"/>
+            <a:ext cx="1193596" cy="369332"/>
+          </a:xfrm>
+          <a:prstGeom prst="rect">
+            <a:avLst/>
+          </a:prstGeom>
+          <a:noFill/>
+        </p:spPr>
+        <p:txBody>
+          <a:bodyPr wrap="none" rtlCol="0">
+            <a:spAutoFit/>
+          </a:bodyPr>
+          <a:lstStyle/>
+          <a:p>
+            <a:r>
+              <a:rPr lang="en-GB" dirty="0"/>
+              <a:t>In Terminal</a:t>
             </a:r>
           </a:p>
         </p:txBody>
@@ -16387,7 +16699,7 @@
             </a:pPr>
             <a:r>
               <a:rPr lang="en-IT" sz="4800" dirty="0"/>
-              <a:t>setting</a:t>
+              <a:t>settings</a:t>
             </a:r>
             <a:endParaRPr lang="en-GB" sz="4800" dirty="0"/>
           </a:p>
@@ -16416,7 +16728,7 @@
           <a:p>
             <a:fld id="{761DFEEA-1162-B343-ACBF-B3E92F6AC390}" type="datetime1">
               <a:rPr lang="it-IT" smtClean="0"/>
-              <a:t>17/09/26</a:t>
+              <a:t>21/09/26</a:t>
             </a:fld>
             <a:endParaRPr lang="en-GB"/>
           </a:p>
@@ -16511,62 +16823,10 @@
       </p:grpSpPr>
       <p:sp>
         <p:nvSpPr>
-          <p:cNvPr id="2" name="Title 1">
-            <a:extLst>
-              <a:ext uri="{FF2B5EF4-FFF2-40B4-BE49-F238E27FC236}">
-                <a16:creationId xmlns:a16="http://schemas.microsoft.com/office/drawing/2014/main" id="{8C8BBC5F-DBAB-E5FB-6643-3AF879D05C30}"/>
-              </a:ext>
-            </a:extLst>
-          </p:cNvPr>
-          <p:cNvSpPr>
-            <a:spLocks noGrp="1"/>
-          </p:cNvSpPr>
-          <p:nvPr>
-            <p:ph type="title"/>
-          </p:nvPr>
-        </p:nvSpPr>
-        <p:spPr/>
-        <p:txBody>
-          <a:bodyPr>
-            <a:normAutofit fontScale="90000"/>
-          </a:bodyPr>
-          <a:lstStyle/>
-          <a:p>
-            <a:endParaRPr lang="en-GB"/>
-          </a:p>
-        </p:txBody>
-      </p:sp>
-      <p:sp>
-        <p:nvSpPr>
-          <p:cNvPr id="3" name="Content Placeholder 2">
-            <a:extLst>
-              <a:ext uri="{FF2B5EF4-FFF2-40B4-BE49-F238E27FC236}">
-                <a16:creationId xmlns:a16="http://schemas.microsoft.com/office/drawing/2014/main" id="{8F3BC83A-61C8-E3E6-ADD3-8D25E4F66364}"/>
-              </a:ext>
-            </a:extLst>
-          </p:cNvPr>
-          <p:cNvSpPr>
-            <a:spLocks noGrp="1"/>
-          </p:cNvSpPr>
-          <p:nvPr>
-            <p:ph idx="1"/>
-          </p:nvPr>
-        </p:nvSpPr>
-        <p:spPr/>
-        <p:txBody>
-          <a:bodyPr/>
-          <a:lstStyle/>
-          <a:p>
-            <a:endParaRPr lang="en-GB"/>
-          </a:p>
-        </p:txBody>
-      </p:sp>
-      <p:sp>
-        <p:nvSpPr>
           <p:cNvPr id="4" name="Date Placeholder 3">
             <a:extLst>
               <a:ext uri="{FF2B5EF4-FFF2-40B4-BE49-F238E27FC236}">
-                <a16:creationId xmlns:a16="http://schemas.microsoft.com/office/drawing/2014/main" id="{85E9A7A0-2BFF-5CEA-363B-8BFC4E699BAA}"/>
+                <a16:creationId xmlns:a16="http://schemas.microsoft.com/office/drawing/2014/main" id="{706766E2-0546-7F2D-1773-D306B4F4916D}"/>
               </a:ext>
             </a:extLst>
           </p:cNvPr>
@@ -16584,7 +16844,7 @@
           <a:p>
             <a:fld id="{761DFEEA-1162-B343-ACBF-B3E92F6AC390}" type="datetime1">
               <a:rPr lang="it-IT" smtClean="0"/>
-              <a:t>18/09/26</a:t>
+              <a:t>21/09/26</a:t>
             </a:fld>
             <a:endParaRPr lang="en-GB"/>
           </a:p>
@@ -16595,7 +16855,7 @@
           <p:cNvPr id="5" name="Footer Placeholder 4">
             <a:extLst>
               <a:ext uri="{FF2B5EF4-FFF2-40B4-BE49-F238E27FC236}">
-                <a16:creationId xmlns:a16="http://schemas.microsoft.com/office/drawing/2014/main" id="{49ECC0AA-17BB-73B1-FBB3-8D407418CE5A}"/>
+                <a16:creationId xmlns:a16="http://schemas.microsoft.com/office/drawing/2014/main" id="{47E1B8BD-DD3C-E6C2-14BA-CA1A243B94B6}"/>
               </a:ext>
             </a:extLst>
           </p:cNvPr>
@@ -16623,7 +16883,7 @@
           <p:cNvPr id="6" name="Slide Number Placeholder 5">
             <a:extLst>
               <a:ext uri="{FF2B5EF4-FFF2-40B4-BE49-F238E27FC236}">
-                <a16:creationId xmlns:a16="http://schemas.microsoft.com/office/drawing/2014/main" id="{56E26FE7-F7B1-A11F-B507-656150232AD6}"/>
+                <a16:creationId xmlns:a16="http://schemas.microsoft.com/office/drawing/2014/main" id="{A80E506C-3D2C-FC9B-2370-B97995B3878C}"/>
               </a:ext>
             </a:extLst>
           </p:cNvPr>
@@ -16647,10 +16907,1714 @@
           </a:p>
         </p:txBody>
       </p:sp>
+      <p:sp>
+        <p:nvSpPr>
+          <p:cNvPr id="7" name="TextBox 6">
+            <a:extLst>
+              <a:ext uri="{FF2B5EF4-FFF2-40B4-BE49-F238E27FC236}">
+                <a16:creationId xmlns:a16="http://schemas.microsoft.com/office/drawing/2014/main" id="{2DF612A4-60E1-735E-D83C-115AD5FA453E}"/>
+              </a:ext>
+            </a:extLst>
+          </p:cNvPr>
+          <p:cNvSpPr txBox="1"/>
+          <p:nvPr/>
+        </p:nvSpPr>
+        <p:spPr>
+          <a:xfrm>
+            <a:off x="252883" y="1426866"/>
+            <a:ext cx="5735934" cy="1754326"/>
+          </a:xfrm>
+          <a:prstGeom prst="rect">
+            <a:avLst/>
+          </a:prstGeom>
+          <a:noFill/>
+        </p:spPr>
+        <p:txBody>
+          <a:bodyPr wrap="square" rtlCol="0">
+            <a:spAutoFit/>
+          </a:bodyPr>
+          <a:lstStyle/>
+          <a:p>
+            <a:r>
+              <a:rPr lang="en-GB" dirty="0"/>
+              <a:t>The above run should produce something like this:</a:t>
+            </a:r>
+          </a:p>
+          <a:p>
+            <a:r>
+              <a:rPr lang="en-GB" dirty="0"/>
+              <a:t>Which is structured in various parts:</a:t>
+            </a:r>
+          </a:p>
+          <a:p>
+            <a:pPr marL="285750" indent="-285750">
+              <a:buFontTx/>
+              <a:buChar char="-"/>
+            </a:pPr>
+            <a:r>
+              <a:rPr lang="en-GB" dirty="0"/>
+              <a:t>Docker download the image if not already present</a:t>
+            </a:r>
+          </a:p>
+          <a:p>
+            <a:pPr marL="285750" indent="-285750">
+              <a:buFontTx/>
+              <a:buChar char="-"/>
+            </a:pPr>
+            <a:r>
+              <a:rPr lang="en-IT" dirty="0"/>
+              <a:t>fasterq-dump check path to temporary folder and provenence of the data to be downloaded.</a:t>
+            </a:r>
+          </a:p>
+          <a:p>
+            <a:pPr marL="285750" indent="-285750">
+              <a:buFontTx/>
+              <a:buChar char="-"/>
+            </a:pPr>
+            <a:r>
+              <a:rPr lang="en-IT" dirty="0"/>
+              <a:t>Then the download proceed.</a:t>
+            </a:r>
+          </a:p>
+        </p:txBody>
+      </p:sp>
+      <p:sp>
+        <p:nvSpPr>
+          <p:cNvPr id="8" name="TextBox 7">
+            <a:extLst>
+              <a:ext uri="{FF2B5EF4-FFF2-40B4-BE49-F238E27FC236}">
+                <a16:creationId xmlns:a16="http://schemas.microsoft.com/office/drawing/2014/main" id="{FB980780-F05F-8C23-DC7A-268132E19645}"/>
+              </a:ext>
+            </a:extLst>
+          </p:cNvPr>
+          <p:cNvSpPr txBox="1"/>
+          <p:nvPr/>
+        </p:nvSpPr>
+        <p:spPr>
+          <a:xfrm>
+            <a:off x="6096000" y="447040"/>
+            <a:ext cx="4846655" cy="5893921"/>
+          </a:xfrm>
+          <a:prstGeom prst="rect">
+            <a:avLst/>
+          </a:prstGeom>
+          <a:noFill/>
+        </p:spPr>
+        <p:txBody>
+          <a:bodyPr wrap="square" rtlCol="0">
+            <a:spAutoFit/>
+          </a:bodyPr>
+          <a:lstStyle/>
+          <a:p>
+            <a:r>
+              <a:rPr lang="en-GB" sz="650" dirty="0">
+                <a:solidFill>
+                  <a:schemeClr val="accent3">
+                    <a:lumMod val="75000"/>
+                  </a:schemeClr>
+                </a:solidFill>
+                <a:latin typeface="Courier New" panose="02070309020205020404" pitchFamily="49" charset="0"/>
+                <a:cs typeface="Courier New" panose="02070309020205020404" pitchFamily="49" charset="0"/>
+              </a:rPr>
+              <a:t>Unable to find image '</a:t>
+            </a:r>
+            <a:r>
+              <a:rPr lang="en-GB" sz="650" dirty="0" err="1">
+                <a:solidFill>
+                  <a:schemeClr val="accent3">
+                    <a:lumMod val="75000"/>
+                  </a:schemeClr>
+                </a:solidFill>
+                <a:latin typeface="Courier New" panose="02070309020205020404" pitchFamily="49" charset="0"/>
+                <a:cs typeface="Courier New" panose="02070309020205020404" pitchFamily="49" charset="0"/>
+              </a:rPr>
+              <a:t>fgualdr</a:t>
+            </a:r>
+            <a:r>
+              <a:rPr lang="en-GB" sz="650" dirty="0">
+                <a:solidFill>
+                  <a:schemeClr val="accent3">
+                    <a:lumMod val="75000"/>
+                  </a:schemeClr>
+                </a:solidFill>
+                <a:latin typeface="Courier New" panose="02070309020205020404" pitchFamily="49" charset="0"/>
+                <a:cs typeface="Courier New" panose="02070309020205020404" pitchFamily="49" charset="0"/>
+              </a:rPr>
+              <a:t>/</a:t>
+            </a:r>
+            <a:r>
+              <a:rPr lang="en-GB" sz="650" dirty="0" err="1">
+                <a:solidFill>
+                  <a:schemeClr val="accent3">
+                    <a:lumMod val="75000"/>
+                  </a:schemeClr>
+                </a:solidFill>
+                <a:latin typeface="Courier New" panose="02070309020205020404" pitchFamily="49" charset="0"/>
+                <a:cs typeface="Courier New" panose="02070309020205020404" pitchFamily="49" charset="0"/>
+              </a:rPr>
+              <a:t>ngs-sra-tools:latest</a:t>
+            </a:r>
+            <a:r>
+              <a:rPr lang="en-GB" sz="650" dirty="0">
+                <a:solidFill>
+                  <a:schemeClr val="accent3">
+                    <a:lumMod val="75000"/>
+                  </a:schemeClr>
+                </a:solidFill>
+                <a:latin typeface="Courier New" panose="02070309020205020404" pitchFamily="49" charset="0"/>
+                <a:cs typeface="Courier New" panose="02070309020205020404" pitchFamily="49" charset="0"/>
+              </a:rPr>
+              <a:t>' locally</a:t>
+            </a:r>
+          </a:p>
+          <a:p>
+            <a:r>
+              <a:rPr lang="en-GB" sz="650" dirty="0">
+                <a:solidFill>
+                  <a:schemeClr val="accent3">
+                    <a:lumMod val="75000"/>
+                  </a:schemeClr>
+                </a:solidFill>
+                <a:latin typeface="Courier New" panose="02070309020205020404" pitchFamily="49" charset="0"/>
+                <a:cs typeface="Courier New" panose="02070309020205020404" pitchFamily="49" charset="0"/>
+              </a:rPr>
+              <a:t>latest: Pulling from </a:t>
+            </a:r>
+            <a:r>
+              <a:rPr lang="en-GB" sz="650" dirty="0" err="1">
+                <a:solidFill>
+                  <a:schemeClr val="accent3">
+                    <a:lumMod val="75000"/>
+                  </a:schemeClr>
+                </a:solidFill>
+                <a:latin typeface="Courier New" panose="02070309020205020404" pitchFamily="49" charset="0"/>
+                <a:cs typeface="Courier New" panose="02070309020205020404" pitchFamily="49" charset="0"/>
+              </a:rPr>
+              <a:t>fgualdr</a:t>
+            </a:r>
+            <a:r>
+              <a:rPr lang="en-GB" sz="650" dirty="0">
+                <a:solidFill>
+                  <a:schemeClr val="accent3">
+                    <a:lumMod val="75000"/>
+                  </a:schemeClr>
+                </a:solidFill>
+                <a:latin typeface="Courier New" panose="02070309020205020404" pitchFamily="49" charset="0"/>
+                <a:cs typeface="Courier New" panose="02070309020205020404" pitchFamily="49" charset="0"/>
+              </a:rPr>
+              <a:t>/</a:t>
+            </a:r>
+            <a:r>
+              <a:rPr lang="en-GB" sz="650" dirty="0" err="1">
+                <a:solidFill>
+                  <a:schemeClr val="accent3">
+                    <a:lumMod val="75000"/>
+                  </a:schemeClr>
+                </a:solidFill>
+                <a:latin typeface="Courier New" panose="02070309020205020404" pitchFamily="49" charset="0"/>
+                <a:cs typeface="Courier New" panose="02070309020205020404" pitchFamily="49" charset="0"/>
+              </a:rPr>
+              <a:t>ngs</a:t>
+            </a:r>
+            <a:r>
+              <a:rPr lang="en-GB" sz="650" dirty="0">
+                <a:solidFill>
+                  <a:schemeClr val="accent3">
+                    <a:lumMod val="75000"/>
+                  </a:schemeClr>
+                </a:solidFill>
+                <a:latin typeface="Courier New" panose="02070309020205020404" pitchFamily="49" charset="0"/>
+                <a:cs typeface="Courier New" panose="02070309020205020404" pitchFamily="49" charset="0"/>
+              </a:rPr>
+              <a:t>-</a:t>
+            </a:r>
+            <a:r>
+              <a:rPr lang="en-GB" sz="650" dirty="0" err="1">
+                <a:solidFill>
+                  <a:schemeClr val="accent3">
+                    <a:lumMod val="75000"/>
+                  </a:schemeClr>
+                </a:solidFill>
+                <a:latin typeface="Courier New" panose="02070309020205020404" pitchFamily="49" charset="0"/>
+                <a:cs typeface="Courier New" panose="02070309020205020404" pitchFamily="49" charset="0"/>
+              </a:rPr>
+              <a:t>sra</a:t>
+            </a:r>
+            <a:r>
+              <a:rPr lang="en-GB" sz="650" dirty="0">
+                <a:solidFill>
+                  <a:schemeClr val="accent3">
+                    <a:lumMod val="75000"/>
+                  </a:schemeClr>
+                </a:solidFill>
+                <a:latin typeface="Courier New" panose="02070309020205020404" pitchFamily="49" charset="0"/>
+                <a:cs typeface="Courier New" panose="02070309020205020404" pitchFamily="49" charset="0"/>
+              </a:rPr>
+              <a:t>-tools</a:t>
+            </a:r>
+          </a:p>
+          <a:p>
+            <a:r>
+              <a:rPr lang="en-GB" sz="650" dirty="0">
+                <a:solidFill>
+                  <a:schemeClr val="accent3">
+                    <a:lumMod val="75000"/>
+                  </a:schemeClr>
+                </a:solidFill>
+                <a:latin typeface="Courier New" panose="02070309020205020404" pitchFamily="49" charset="0"/>
+                <a:cs typeface="Courier New" panose="02070309020205020404" pitchFamily="49" charset="0"/>
+              </a:rPr>
+              <a:t>a51c11bda596: Pull complete </a:t>
+            </a:r>
+          </a:p>
+          <a:p>
+            <a:r>
+              <a:rPr lang="en-GB" sz="650" dirty="0">
+                <a:solidFill>
+                  <a:schemeClr val="accent3">
+                    <a:lumMod val="75000"/>
+                  </a:schemeClr>
+                </a:solidFill>
+                <a:latin typeface="Courier New" panose="02070309020205020404" pitchFamily="49" charset="0"/>
+                <a:cs typeface="Courier New" panose="02070309020205020404" pitchFamily="49" charset="0"/>
+              </a:rPr>
+              <a:t>db035acc8c2c: Pull complete </a:t>
+            </a:r>
+          </a:p>
+          <a:p>
+            <a:r>
+              <a:rPr lang="en-GB" sz="650" dirty="0">
+                <a:solidFill>
+                  <a:schemeClr val="accent3">
+                    <a:lumMod val="75000"/>
+                  </a:schemeClr>
+                </a:solidFill>
+                <a:latin typeface="Courier New" panose="02070309020205020404" pitchFamily="49" charset="0"/>
+                <a:cs typeface="Courier New" panose="02070309020205020404" pitchFamily="49" charset="0"/>
+              </a:rPr>
+              <a:t>44136fa355b3: Already exists </a:t>
+            </a:r>
+          </a:p>
+          <a:p>
+            <a:r>
+              <a:rPr lang="en-GB" sz="650" dirty="0">
+                <a:solidFill>
+                  <a:schemeClr val="accent3">
+                    <a:lumMod val="75000"/>
+                  </a:schemeClr>
+                </a:solidFill>
+                <a:latin typeface="Courier New" panose="02070309020205020404" pitchFamily="49" charset="0"/>
+                <a:cs typeface="Courier New" panose="02070309020205020404" pitchFamily="49" charset="0"/>
+              </a:rPr>
+              <a:t>23acc7d0f59a: Download complete </a:t>
+            </a:r>
+          </a:p>
+          <a:p>
+            <a:r>
+              <a:rPr lang="en-GB" sz="650" dirty="0">
+                <a:solidFill>
+                  <a:schemeClr val="accent3">
+                    <a:lumMod val="75000"/>
+                  </a:schemeClr>
+                </a:solidFill>
+                <a:latin typeface="Courier New" panose="02070309020205020404" pitchFamily="49" charset="0"/>
+                <a:cs typeface="Courier New" panose="02070309020205020404" pitchFamily="49" charset="0"/>
+              </a:rPr>
+              <a:t>Digest: sha256:4f5c87b31c35d6ef2878c474592fa200a4ae290a415ad5e647c746c12bea6a45</a:t>
+            </a:r>
+          </a:p>
+          <a:p>
+            <a:r>
+              <a:rPr lang="en-GB" sz="650" dirty="0">
+                <a:solidFill>
+                  <a:schemeClr val="accent3">
+                    <a:lumMod val="75000"/>
+                  </a:schemeClr>
+                </a:solidFill>
+                <a:latin typeface="Courier New" panose="02070309020205020404" pitchFamily="49" charset="0"/>
+                <a:cs typeface="Courier New" panose="02070309020205020404" pitchFamily="49" charset="0"/>
+              </a:rPr>
+              <a:t>Status: Downloaded newer image for </a:t>
+            </a:r>
+            <a:r>
+              <a:rPr lang="en-GB" sz="650" dirty="0" err="1">
+                <a:solidFill>
+                  <a:schemeClr val="accent3">
+                    <a:lumMod val="75000"/>
+                  </a:schemeClr>
+                </a:solidFill>
+                <a:latin typeface="Courier New" panose="02070309020205020404" pitchFamily="49" charset="0"/>
+                <a:cs typeface="Courier New" panose="02070309020205020404" pitchFamily="49" charset="0"/>
+              </a:rPr>
+              <a:t>fgualdr</a:t>
+            </a:r>
+            <a:r>
+              <a:rPr lang="en-GB" sz="650" dirty="0">
+                <a:solidFill>
+                  <a:schemeClr val="accent3">
+                    <a:lumMod val="75000"/>
+                  </a:schemeClr>
+                </a:solidFill>
+                <a:latin typeface="Courier New" panose="02070309020205020404" pitchFamily="49" charset="0"/>
+                <a:cs typeface="Courier New" panose="02070309020205020404" pitchFamily="49" charset="0"/>
+              </a:rPr>
+              <a:t>/</a:t>
+            </a:r>
+            <a:r>
+              <a:rPr lang="en-GB" sz="650" dirty="0" err="1">
+                <a:solidFill>
+                  <a:schemeClr val="accent3">
+                    <a:lumMod val="75000"/>
+                  </a:schemeClr>
+                </a:solidFill>
+                <a:latin typeface="Courier New" panose="02070309020205020404" pitchFamily="49" charset="0"/>
+                <a:cs typeface="Courier New" panose="02070309020205020404" pitchFamily="49" charset="0"/>
+              </a:rPr>
+              <a:t>ngs-sra-tools:latest</a:t>
+            </a:r>
+            <a:endParaRPr lang="en-GB" sz="650" dirty="0">
+              <a:solidFill>
+                <a:schemeClr val="accent3">
+                  <a:lumMod val="75000"/>
+                </a:schemeClr>
+              </a:solidFill>
+              <a:latin typeface="Courier New" panose="02070309020205020404" pitchFamily="49" charset="0"/>
+              <a:cs typeface="Courier New" panose="02070309020205020404" pitchFamily="49" charset="0"/>
+            </a:endParaRPr>
+          </a:p>
+          <a:p>
+            <a:r>
+              <a:rPr lang="en-GB" sz="650" dirty="0">
+                <a:solidFill>
+                  <a:schemeClr val="accent4">
+                    <a:lumMod val="75000"/>
+                  </a:schemeClr>
+                </a:solidFill>
+                <a:latin typeface="Courier New" panose="02070309020205020404" pitchFamily="49" charset="0"/>
+                <a:cs typeface="Courier New" panose="02070309020205020404" pitchFamily="49" charset="0"/>
+              </a:rPr>
+              <a:t>cursor-cache : 5,242,880 bytes</a:t>
+            </a:r>
+          </a:p>
+          <a:p>
+            <a:r>
+              <a:rPr lang="en-GB" sz="650" dirty="0" err="1">
+                <a:solidFill>
+                  <a:schemeClr val="accent4">
+                    <a:lumMod val="75000"/>
+                  </a:schemeClr>
+                </a:solidFill>
+                <a:latin typeface="Courier New" panose="02070309020205020404" pitchFamily="49" charset="0"/>
+                <a:cs typeface="Courier New" panose="02070309020205020404" pitchFamily="49" charset="0"/>
+              </a:rPr>
+              <a:t>buf</a:t>
+            </a:r>
+            <a:r>
+              <a:rPr lang="en-GB" sz="650" dirty="0">
+                <a:solidFill>
+                  <a:schemeClr val="accent4">
+                    <a:lumMod val="75000"/>
+                  </a:schemeClr>
+                </a:solidFill>
+                <a:latin typeface="Courier New" panose="02070309020205020404" pitchFamily="49" charset="0"/>
+                <a:cs typeface="Courier New" panose="02070309020205020404" pitchFamily="49" charset="0"/>
+              </a:rPr>
+              <a:t>-size     : 1,048,576 bytes</a:t>
+            </a:r>
+          </a:p>
+          <a:p>
+            <a:r>
+              <a:rPr lang="en-GB" sz="650" dirty="0">
+                <a:solidFill>
+                  <a:schemeClr val="accent4">
+                    <a:lumMod val="75000"/>
+                  </a:schemeClr>
+                </a:solidFill>
+                <a:latin typeface="Courier New" panose="02070309020205020404" pitchFamily="49" charset="0"/>
+                <a:cs typeface="Courier New" panose="02070309020205020404" pitchFamily="49" charset="0"/>
+              </a:rPr>
+              <a:t>mem-limit    : 52,428,800 bytes</a:t>
+            </a:r>
+          </a:p>
+          <a:p>
+            <a:r>
+              <a:rPr lang="en-GB" sz="650" dirty="0">
+                <a:solidFill>
+                  <a:schemeClr val="accent4">
+                    <a:lumMod val="75000"/>
+                  </a:schemeClr>
+                </a:solidFill>
+                <a:latin typeface="Courier New" panose="02070309020205020404" pitchFamily="49" charset="0"/>
+                <a:cs typeface="Courier New" panose="02070309020205020404" pitchFamily="49" charset="0"/>
+              </a:rPr>
+              <a:t>threads      : 2</a:t>
+            </a:r>
+          </a:p>
+          <a:p>
+            <a:r>
+              <a:rPr lang="en-GB" sz="650" dirty="0">
+                <a:solidFill>
+                  <a:schemeClr val="accent4">
+                    <a:lumMod val="75000"/>
+                  </a:schemeClr>
+                </a:solidFill>
+                <a:latin typeface="Courier New" panose="02070309020205020404" pitchFamily="49" charset="0"/>
+                <a:cs typeface="Courier New" panose="02070309020205020404" pitchFamily="49" charset="0"/>
+              </a:rPr>
+              <a:t>scratch-path : '/work/</a:t>
+            </a:r>
+            <a:r>
+              <a:rPr lang="en-GB" sz="650" dirty="0" err="1">
+                <a:solidFill>
+                  <a:schemeClr val="accent4">
+                    <a:lumMod val="75000"/>
+                  </a:schemeClr>
+                </a:solidFill>
+                <a:latin typeface="Courier New" panose="02070309020205020404" pitchFamily="49" charset="0"/>
+                <a:cs typeface="Courier New" panose="02070309020205020404" pitchFamily="49" charset="0"/>
+              </a:rPr>
+              <a:t>sra_tmp</a:t>
+            </a:r>
+            <a:r>
+              <a:rPr lang="en-GB" sz="650" dirty="0">
+                <a:solidFill>
+                  <a:schemeClr val="accent4">
+                    <a:lumMod val="75000"/>
+                  </a:schemeClr>
+                </a:solidFill>
+                <a:latin typeface="Courier New" panose="02070309020205020404" pitchFamily="49" charset="0"/>
+                <a:cs typeface="Courier New" panose="02070309020205020404" pitchFamily="49" charset="0"/>
+              </a:rPr>
+              <a:t>/fasterq.tmp.bf03403e5f9d.20/'</a:t>
+            </a:r>
+          </a:p>
+          <a:p>
+            <a:r>
+              <a:rPr lang="en-GB" sz="650" dirty="0">
+                <a:solidFill>
+                  <a:schemeClr val="accent4">
+                    <a:lumMod val="75000"/>
+                  </a:schemeClr>
+                </a:solidFill>
+                <a:latin typeface="Courier New" panose="02070309020205020404" pitchFamily="49" charset="0"/>
+                <a:cs typeface="Courier New" panose="02070309020205020404" pitchFamily="49" charset="0"/>
+              </a:rPr>
+              <a:t>total ram    : 8,319,504,384 bytes</a:t>
+            </a:r>
+          </a:p>
+          <a:p>
+            <a:r>
+              <a:rPr lang="en-GB" sz="650" dirty="0">
+                <a:solidFill>
+                  <a:schemeClr val="accent4">
+                    <a:lumMod val="75000"/>
+                  </a:schemeClr>
+                </a:solidFill>
+                <a:latin typeface="Courier New" panose="02070309020205020404" pitchFamily="49" charset="0"/>
+                <a:cs typeface="Courier New" panose="02070309020205020404" pitchFamily="49" charset="0"/>
+              </a:rPr>
+              <a:t>output-format: FASTQ split file</a:t>
+            </a:r>
+          </a:p>
+          <a:p>
+            <a:r>
+              <a:rPr lang="en-GB" sz="650" dirty="0">
+                <a:solidFill>
+                  <a:schemeClr val="accent4">
+                    <a:lumMod val="75000"/>
+                  </a:schemeClr>
+                </a:solidFill>
+                <a:latin typeface="Courier New" panose="02070309020205020404" pitchFamily="49" charset="0"/>
+                <a:cs typeface="Courier New" panose="02070309020205020404" pitchFamily="49" charset="0"/>
+              </a:rPr>
+              <a:t>check-mode   : on</a:t>
+            </a:r>
+          </a:p>
+          <a:p>
+            <a:r>
+              <a:rPr lang="en-GB" sz="650" dirty="0">
+                <a:solidFill>
+                  <a:schemeClr val="accent4">
+                    <a:lumMod val="75000"/>
+                  </a:schemeClr>
+                </a:solidFill>
+                <a:latin typeface="Courier New" panose="02070309020205020404" pitchFamily="49" charset="0"/>
+                <a:cs typeface="Courier New" panose="02070309020205020404" pitchFamily="49" charset="0"/>
+              </a:rPr>
+              <a:t>output-file  : '/work/</a:t>
+            </a:r>
+            <a:r>
+              <a:rPr lang="en-GB" sz="650" dirty="0" err="1">
+                <a:solidFill>
+                  <a:schemeClr val="accent4">
+                    <a:lumMod val="75000"/>
+                  </a:schemeClr>
+                </a:solidFill>
+                <a:latin typeface="Courier New" panose="02070309020205020404" pitchFamily="49" charset="0"/>
+                <a:cs typeface="Courier New" panose="02070309020205020404" pitchFamily="49" charset="0"/>
+              </a:rPr>
+              <a:t>raw_data</a:t>
+            </a:r>
+            <a:r>
+              <a:rPr lang="en-GB" sz="650" dirty="0">
+                <a:solidFill>
+                  <a:schemeClr val="accent4">
+                    <a:lumMod val="75000"/>
+                  </a:schemeClr>
+                </a:solidFill>
+                <a:latin typeface="Courier New" panose="02070309020205020404" pitchFamily="49" charset="0"/>
+                <a:cs typeface="Courier New" panose="02070309020205020404" pitchFamily="49" charset="0"/>
+              </a:rPr>
+              <a:t>/</a:t>
+            </a:r>
+            <a:r>
+              <a:rPr lang="en-GB" sz="650" dirty="0" err="1">
+                <a:solidFill>
+                  <a:schemeClr val="accent4">
+                    <a:lumMod val="75000"/>
+                  </a:schemeClr>
+                </a:solidFill>
+                <a:latin typeface="Courier New" panose="02070309020205020404" pitchFamily="49" charset="0"/>
+                <a:cs typeface="Courier New" panose="02070309020205020404" pitchFamily="49" charset="0"/>
+              </a:rPr>
+              <a:t>fastq</a:t>
+            </a:r>
+            <a:r>
+              <a:rPr lang="en-GB" sz="650" dirty="0">
+                <a:solidFill>
+                  <a:schemeClr val="accent4">
+                    <a:lumMod val="75000"/>
+                  </a:schemeClr>
+                </a:solidFill>
+                <a:latin typeface="Courier New" panose="02070309020205020404" pitchFamily="49" charset="0"/>
+                <a:cs typeface="Courier New" panose="02070309020205020404" pitchFamily="49" charset="0"/>
+              </a:rPr>
+              <a:t>/</a:t>
+            </a:r>
+            <a:r>
+              <a:rPr lang="en-GB" sz="650" dirty="0" err="1">
+                <a:solidFill>
+                  <a:schemeClr val="accent4">
+                    <a:lumMod val="75000"/>
+                  </a:schemeClr>
+                </a:solidFill>
+                <a:latin typeface="Courier New" panose="02070309020205020404" pitchFamily="49" charset="0"/>
+                <a:cs typeface="Courier New" panose="02070309020205020404" pitchFamily="49" charset="0"/>
+              </a:rPr>
+              <a:t>rnaseq_test</a:t>
+            </a:r>
+            <a:r>
+              <a:rPr lang="en-GB" sz="650" dirty="0">
+                <a:solidFill>
+                  <a:schemeClr val="accent4">
+                    <a:lumMod val="75000"/>
+                  </a:schemeClr>
+                </a:solidFill>
+                <a:latin typeface="Courier New" panose="02070309020205020404" pitchFamily="49" charset="0"/>
+                <a:cs typeface="Courier New" panose="02070309020205020404" pitchFamily="49" charset="0"/>
+              </a:rPr>
+              <a:t>/ERR11479311.fastq'</a:t>
+            </a:r>
+          </a:p>
+          <a:p>
+            <a:r>
+              <a:rPr lang="en-GB" sz="650" dirty="0">
+                <a:solidFill>
+                  <a:schemeClr val="accent4">
+                    <a:lumMod val="75000"/>
+                  </a:schemeClr>
+                </a:solidFill>
+                <a:latin typeface="Courier New" panose="02070309020205020404" pitchFamily="49" charset="0"/>
+                <a:cs typeface="Courier New" panose="02070309020205020404" pitchFamily="49" charset="0"/>
+              </a:rPr>
+              <a:t>output-</a:t>
+            </a:r>
+            <a:r>
+              <a:rPr lang="en-GB" sz="650" dirty="0" err="1">
+                <a:solidFill>
+                  <a:schemeClr val="accent4">
+                    <a:lumMod val="75000"/>
+                  </a:schemeClr>
+                </a:solidFill>
+                <a:latin typeface="Courier New" panose="02070309020205020404" pitchFamily="49" charset="0"/>
+                <a:cs typeface="Courier New" panose="02070309020205020404" pitchFamily="49" charset="0"/>
+              </a:rPr>
+              <a:t>dir</a:t>
+            </a:r>
+            <a:r>
+              <a:rPr lang="en-GB" sz="650" dirty="0">
+                <a:solidFill>
+                  <a:schemeClr val="accent4">
+                    <a:lumMod val="75000"/>
+                  </a:schemeClr>
+                </a:solidFill>
+                <a:latin typeface="Courier New" panose="02070309020205020404" pitchFamily="49" charset="0"/>
+                <a:cs typeface="Courier New" panose="02070309020205020404" pitchFamily="49" charset="0"/>
+              </a:rPr>
+              <a:t>   : '</a:t>
+            </a:r>
+            <a:r>
+              <a:rPr lang="en-GB" sz="650" dirty="0" err="1">
+                <a:solidFill>
+                  <a:schemeClr val="accent4">
+                    <a:lumMod val="75000"/>
+                  </a:schemeClr>
+                </a:solidFill>
+                <a:latin typeface="Courier New" panose="02070309020205020404" pitchFamily="49" charset="0"/>
+                <a:cs typeface="Courier New" panose="02070309020205020404" pitchFamily="49" charset="0"/>
+              </a:rPr>
+              <a:t>raw_data</a:t>
+            </a:r>
+            <a:r>
+              <a:rPr lang="en-GB" sz="650" dirty="0">
+                <a:solidFill>
+                  <a:schemeClr val="accent4">
+                    <a:lumMod val="75000"/>
+                  </a:schemeClr>
+                </a:solidFill>
+                <a:latin typeface="Courier New" panose="02070309020205020404" pitchFamily="49" charset="0"/>
+                <a:cs typeface="Courier New" panose="02070309020205020404" pitchFamily="49" charset="0"/>
+              </a:rPr>
+              <a:t>/</a:t>
+            </a:r>
+            <a:r>
+              <a:rPr lang="en-GB" sz="650" dirty="0" err="1">
+                <a:solidFill>
+                  <a:schemeClr val="accent4">
+                    <a:lumMod val="75000"/>
+                  </a:schemeClr>
+                </a:solidFill>
+                <a:latin typeface="Courier New" panose="02070309020205020404" pitchFamily="49" charset="0"/>
+                <a:cs typeface="Courier New" panose="02070309020205020404" pitchFamily="49" charset="0"/>
+              </a:rPr>
+              <a:t>fastq</a:t>
+            </a:r>
+            <a:r>
+              <a:rPr lang="en-GB" sz="650" dirty="0">
+                <a:solidFill>
+                  <a:schemeClr val="accent4">
+                    <a:lumMod val="75000"/>
+                  </a:schemeClr>
+                </a:solidFill>
+                <a:latin typeface="Courier New" panose="02070309020205020404" pitchFamily="49" charset="0"/>
+                <a:cs typeface="Courier New" panose="02070309020205020404" pitchFamily="49" charset="0"/>
+              </a:rPr>
+              <a:t>/</a:t>
+            </a:r>
+            <a:r>
+              <a:rPr lang="en-GB" sz="650" dirty="0" err="1">
+                <a:solidFill>
+                  <a:schemeClr val="accent4">
+                    <a:lumMod val="75000"/>
+                  </a:schemeClr>
+                </a:solidFill>
+                <a:latin typeface="Courier New" panose="02070309020205020404" pitchFamily="49" charset="0"/>
+                <a:cs typeface="Courier New" panose="02070309020205020404" pitchFamily="49" charset="0"/>
+              </a:rPr>
+              <a:t>rnaseq_test</a:t>
+            </a:r>
+            <a:r>
+              <a:rPr lang="en-GB" sz="650" dirty="0">
+                <a:solidFill>
+                  <a:schemeClr val="accent4">
+                    <a:lumMod val="75000"/>
+                  </a:schemeClr>
+                </a:solidFill>
+                <a:latin typeface="Courier New" panose="02070309020205020404" pitchFamily="49" charset="0"/>
+                <a:cs typeface="Courier New" panose="02070309020205020404" pitchFamily="49" charset="0"/>
+              </a:rPr>
+              <a:t>'</a:t>
+            </a:r>
+          </a:p>
+          <a:p>
+            <a:r>
+              <a:rPr lang="en-GB" sz="650" dirty="0">
+                <a:solidFill>
+                  <a:schemeClr val="accent4">
+                    <a:lumMod val="75000"/>
+                  </a:schemeClr>
+                </a:solidFill>
+                <a:latin typeface="Courier New" panose="02070309020205020404" pitchFamily="49" charset="0"/>
+                <a:cs typeface="Courier New" panose="02070309020205020404" pitchFamily="49" charset="0"/>
+              </a:rPr>
+              <a:t>output       : '/work/</a:t>
+            </a:r>
+            <a:r>
+              <a:rPr lang="en-GB" sz="650" dirty="0" err="1">
+                <a:solidFill>
+                  <a:schemeClr val="accent4">
+                    <a:lumMod val="75000"/>
+                  </a:schemeClr>
+                </a:solidFill>
+                <a:latin typeface="Courier New" panose="02070309020205020404" pitchFamily="49" charset="0"/>
+                <a:cs typeface="Courier New" panose="02070309020205020404" pitchFamily="49" charset="0"/>
+              </a:rPr>
+              <a:t>raw_data</a:t>
+            </a:r>
+            <a:r>
+              <a:rPr lang="en-GB" sz="650" dirty="0">
+                <a:solidFill>
+                  <a:schemeClr val="accent4">
+                    <a:lumMod val="75000"/>
+                  </a:schemeClr>
+                </a:solidFill>
+                <a:latin typeface="Courier New" panose="02070309020205020404" pitchFamily="49" charset="0"/>
+                <a:cs typeface="Courier New" panose="02070309020205020404" pitchFamily="49" charset="0"/>
+              </a:rPr>
+              <a:t>/</a:t>
+            </a:r>
+            <a:r>
+              <a:rPr lang="en-GB" sz="650" dirty="0" err="1">
+                <a:solidFill>
+                  <a:schemeClr val="accent4">
+                    <a:lumMod val="75000"/>
+                  </a:schemeClr>
+                </a:solidFill>
+                <a:latin typeface="Courier New" panose="02070309020205020404" pitchFamily="49" charset="0"/>
+                <a:cs typeface="Courier New" panose="02070309020205020404" pitchFamily="49" charset="0"/>
+              </a:rPr>
+              <a:t>fastq</a:t>
+            </a:r>
+            <a:r>
+              <a:rPr lang="en-GB" sz="650" dirty="0">
+                <a:solidFill>
+                  <a:schemeClr val="accent4">
+                    <a:lumMod val="75000"/>
+                  </a:schemeClr>
+                </a:solidFill>
+                <a:latin typeface="Courier New" panose="02070309020205020404" pitchFamily="49" charset="0"/>
+                <a:cs typeface="Courier New" panose="02070309020205020404" pitchFamily="49" charset="0"/>
+              </a:rPr>
+              <a:t>/</a:t>
+            </a:r>
+            <a:r>
+              <a:rPr lang="en-GB" sz="650" dirty="0" err="1">
+                <a:solidFill>
+                  <a:schemeClr val="accent4">
+                    <a:lumMod val="75000"/>
+                  </a:schemeClr>
+                </a:solidFill>
+                <a:latin typeface="Courier New" panose="02070309020205020404" pitchFamily="49" charset="0"/>
+                <a:cs typeface="Courier New" panose="02070309020205020404" pitchFamily="49" charset="0"/>
+              </a:rPr>
+              <a:t>rnaseq_test</a:t>
+            </a:r>
+            <a:r>
+              <a:rPr lang="en-GB" sz="650" dirty="0">
+                <a:solidFill>
+                  <a:schemeClr val="accent4">
+                    <a:lumMod val="75000"/>
+                  </a:schemeClr>
+                </a:solidFill>
+                <a:latin typeface="Courier New" panose="02070309020205020404" pitchFamily="49" charset="0"/>
+                <a:cs typeface="Courier New" panose="02070309020205020404" pitchFamily="49" charset="0"/>
+              </a:rPr>
+              <a:t>/ERR11479311.fastq'</a:t>
+            </a:r>
+          </a:p>
+          <a:p>
+            <a:r>
+              <a:rPr lang="en-GB" sz="650" dirty="0">
+                <a:solidFill>
+                  <a:schemeClr val="accent4">
+                    <a:lumMod val="75000"/>
+                  </a:schemeClr>
+                </a:solidFill>
+                <a:latin typeface="Courier New" panose="02070309020205020404" pitchFamily="49" charset="0"/>
+                <a:cs typeface="Courier New" panose="02070309020205020404" pitchFamily="49" charset="0"/>
+              </a:rPr>
+              <a:t>append-mode  : 'NO'</a:t>
+            </a:r>
+          </a:p>
+          <a:p>
+            <a:r>
+              <a:rPr lang="en-GB" sz="650" dirty="0" err="1">
+                <a:solidFill>
+                  <a:schemeClr val="accent4">
+                    <a:lumMod val="75000"/>
+                  </a:schemeClr>
+                </a:solidFill>
+                <a:latin typeface="Courier New" panose="02070309020205020404" pitchFamily="49" charset="0"/>
+                <a:cs typeface="Courier New" panose="02070309020205020404" pitchFamily="49" charset="0"/>
+              </a:rPr>
+              <a:t>stdout</a:t>
+            </a:r>
+            <a:r>
+              <a:rPr lang="en-GB" sz="650" dirty="0">
+                <a:solidFill>
+                  <a:schemeClr val="accent4">
+                    <a:lumMod val="75000"/>
+                  </a:schemeClr>
+                </a:solidFill>
+                <a:latin typeface="Courier New" panose="02070309020205020404" pitchFamily="49" charset="0"/>
+                <a:cs typeface="Courier New" panose="02070309020205020404" pitchFamily="49" charset="0"/>
+              </a:rPr>
+              <a:t>-mode  : 'NO'</a:t>
+            </a:r>
+          </a:p>
+          <a:p>
+            <a:r>
+              <a:rPr lang="en-GB" sz="650" dirty="0" err="1">
+                <a:solidFill>
+                  <a:schemeClr val="accent4">
+                    <a:lumMod val="75000"/>
+                  </a:schemeClr>
+                </a:solidFill>
+                <a:latin typeface="Courier New" panose="02070309020205020404" pitchFamily="49" charset="0"/>
+                <a:cs typeface="Courier New" panose="02070309020205020404" pitchFamily="49" charset="0"/>
+              </a:rPr>
+              <a:t>seq-defline</a:t>
+            </a:r>
+            <a:r>
+              <a:rPr lang="en-GB" sz="650" dirty="0">
+                <a:solidFill>
+                  <a:schemeClr val="accent4">
+                    <a:lumMod val="75000"/>
+                  </a:schemeClr>
+                </a:solidFill>
+                <a:latin typeface="Courier New" panose="02070309020205020404" pitchFamily="49" charset="0"/>
+                <a:cs typeface="Courier New" panose="02070309020205020404" pitchFamily="49" charset="0"/>
+              </a:rPr>
+              <a:t>  : '@$ac.$</a:t>
+            </a:r>
+            <a:r>
+              <a:rPr lang="en-GB" sz="650" dirty="0" err="1">
+                <a:solidFill>
+                  <a:schemeClr val="accent4">
+                    <a:lumMod val="75000"/>
+                  </a:schemeClr>
+                </a:solidFill>
+                <a:latin typeface="Courier New" panose="02070309020205020404" pitchFamily="49" charset="0"/>
+                <a:cs typeface="Courier New" panose="02070309020205020404" pitchFamily="49" charset="0"/>
+              </a:rPr>
+              <a:t>si</a:t>
+            </a:r>
+            <a:r>
+              <a:rPr lang="en-GB" sz="650" dirty="0">
+                <a:solidFill>
+                  <a:schemeClr val="accent4">
+                    <a:lumMod val="75000"/>
+                  </a:schemeClr>
+                </a:solidFill>
+                <a:latin typeface="Courier New" panose="02070309020205020404" pitchFamily="49" charset="0"/>
+                <a:cs typeface="Courier New" panose="02070309020205020404" pitchFamily="49" charset="0"/>
+              </a:rPr>
+              <a:t> $</a:t>
+            </a:r>
+            <a:r>
+              <a:rPr lang="en-GB" sz="650" dirty="0" err="1">
+                <a:solidFill>
+                  <a:schemeClr val="accent4">
+                    <a:lumMod val="75000"/>
+                  </a:schemeClr>
+                </a:solidFill>
+                <a:latin typeface="Courier New" panose="02070309020205020404" pitchFamily="49" charset="0"/>
+                <a:cs typeface="Courier New" panose="02070309020205020404" pitchFamily="49" charset="0"/>
+              </a:rPr>
+              <a:t>sn</a:t>
+            </a:r>
+            <a:r>
+              <a:rPr lang="en-GB" sz="650" dirty="0">
+                <a:solidFill>
+                  <a:schemeClr val="accent4">
+                    <a:lumMod val="75000"/>
+                  </a:schemeClr>
+                </a:solidFill>
+                <a:latin typeface="Courier New" panose="02070309020205020404" pitchFamily="49" charset="0"/>
+                <a:cs typeface="Courier New" panose="02070309020205020404" pitchFamily="49" charset="0"/>
+              </a:rPr>
+              <a:t> length=$</a:t>
+            </a:r>
+            <a:r>
+              <a:rPr lang="en-GB" sz="650" dirty="0" err="1">
+                <a:solidFill>
+                  <a:schemeClr val="accent4">
+                    <a:lumMod val="75000"/>
+                  </a:schemeClr>
+                </a:solidFill>
+                <a:latin typeface="Courier New" panose="02070309020205020404" pitchFamily="49" charset="0"/>
+                <a:cs typeface="Courier New" panose="02070309020205020404" pitchFamily="49" charset="0"/>
+              </a:rPr>
+              <a:t>rl</a:t>
+            </a:r>
+            <a:r>
+              <a:rPr lang="en-GB" sz="650" dirty="0">
+                <a:solidFill>
+                  <a:schemeClr val="accent4">
+                    <a:lumMod val="75000"/>
+                  </a:schemeClr>
+                </a:solidFill>
+                <a:latin typeface="Courier New" panose="02070309020205020404" pitchFamily="49" charset="0"/>
+                <a:cs typeface="Courier New" panose="02070309020205020404" pitchFamily="49" charset="0"/>
+              </a:rPr>
+              <a:t>'</a:t>
+            </a:r>
+          </a:p>
+          <a:p>
+            <a:r>
+              <a:rPr lang="en-GB" sz="650" dirty="0">
+                <a:solidFill>
+                  <a:schemeClr val="accent4">
+                    <a:lumMod val="75000"/>
+                  </a:schemeClr>
+                </a:solidFill>
+                <a:latin typeface="Courier New" panose="02070309020205020404" pitchFamily="49" charset="0"/>
+                <a:cs typeface="Courier New" panose="02070309020205020404" pitchFamily="49" charset="0"/>
+              </a:rPr>
+              <a:t>qual-</a:t>
+            </a:r>
+            <a:r>
+              <a:rPr lang="en-GB" sz="650" dirty="0" err="1">
+                <a:solidFill>
+                  <a:schemeClr val="accent4">
+                    <a:lumMod val="75000"/>
+                  </a:schemeClr>
+                </a:solidFill>
+                <a:latin typeface="Courier New" panose="02070309020205020404" pitchFamily="49" charset="0"/>
+                <a:cs typeface="Courier New" panose="02070309020205020404" pitchFamily="49" charset="0"/>
+              </a:rPr>
+              <a:t>defline</a:t>
+            </a:r>
+            <a:r>
+              <a:rPr lang="en-GB" sz="650" dirty="0">
+                <a:solidFill>
+                  <a:schemeClr val="accent4">
+                    <a:lumMod val="75000"/>
+                  </a:schemeClr>
+                </a:solidFill>
+                <a:latin typeface="Courier New" panose="02070309020205020404" pitchFamily="49" charset="0"/>
+                <a:cs typeface="Courier New" panose="02070309020205020404" pitchFamily="49" charset="0"/>
+              </a:rPr>
+              <a:t>  : '+$ac.$</a:t>
+            </a:r>
+            <a:r>
+              <a:rPr lang="en-GB" sz="650" dirty="0" err="1">
+                <a:solidFill>
+                  <a:schemeClr val="accent4">
+                    <a:lumMod val="75000"/>
+                  </a:schemeClr>
+                </a:solidFill>
+                <a:latin typeface="Courier New" panose="02070309020205020404" pitchFamily="49" charset="0"/>
+                <a:cs typeface="Courier New" panose="02070309020205020404" pitchFamily="49" charset="0"/>
+              </a:rPr>
+              <a:t>si</a:t>
+            </a:r>
+            <a:r>
+              <a:rPr lang="en-GB" sz="650" dirty="0">
+                <a:solidFill>
+                  <a:schemeClr val="accent4">
+                    <a:lumMod val="75000"/>
+                  </a:schemeClr>
+                </a:solidFill>
+                <a:latin typeface="Courier New" panose="02070309020205020404" pitchFamily="49" charset="0"/>
+                <a:cs typeface="Courier New" panose="02070309020205020404" pitchFamily="49" charset="0"/>
+              </a:rPr>
+              <a:t> $</a:t>
+            </a:r>
+            <a:r>
+              <a:rPr lang="en-GB" sz="650" dirty="0" err="1">
+                <a:solidFill>
+                  <a:schemeClr val="accent4">
+                    <a:lumMod val="75000"/>
+                  </a:schemeClr>
+                </a:solidFill>
+                <a:latin typeface="Courier New" panose="02070309020205020404" pitchFamily="49" charset="0"/>
+                <a:cs typeface="Courier New" panose="02070309020205020404" pitchFamily="49" charset="0"/>
+              </a:rPr>
+              <a:t>sn</a:t>
+            </a:r>
+            <a:r>
+              <a:rPr lang="en-GB" sz="650" dirty="0">
+                <a:solidFill>
+                  <a:schemeClr val="accent4">
+                    <a:lumMod val="75000"/>
+                  </a:schemeClr>
+                </a:solidFill>
+                <a:latin typeface="Courier New" panose="02070309020205020404" pitchFamily="49" charset="0"/>
+                <a:cs typeface="Courier New" panose="02070309020205020404" pitchFamily="49" charset="0"/>
+              </a:rPr>
+              <a:t> length=$</a:t>
+            </a:r>
+            <a:r>
+              <a:rPr lang="en-GB" sz="650" dirty="0" err="1">
+                <a:solidFill>
+                  <a:schemeClr val="accent4">
+                    <a:lumMod val="75000"/>
+                  </a:schemeClr>
+                </a:solidFill>
+                <a:latin typeface="Courier New" panose="02070309020205020404" pitchFamily="49" charset="0"/>
+                <a:cs typeface="Courier New" panose="02070309020205020404" pitchFamily="49" charset="0"/>
+              </a:rPr>
+              <a:t>rl</a:t>
+            </a:r>
+            <a:r>
+              <a:rPr lang="en-GB" sz="650" dirty="0">
+                <a:solidFill>
+                  <a:schemeClr val="accent4">
+                    <a:lumMod val="75000"/>
+                  </a:schemeClr>
+                </a:solidFill>
+                <a:latin typeface="Courier New" panose="02070309020205020404" pitchFamily="49" charset="0"/>
+                <a:cs typeface="Courier New" panose="02070309020205020404" pitchFamily="49" charset="0"/>
+              </a:rPr>
+              <a:t>'</a:t>
+            </a:r>
+          </a:p>
+          <a:p>
+            <a:r>
+              <a:rPr lang="en-GB" sz="650" dirty="0">
+                <a:solidFill>
+                  <a:schemeClr val="accent4">
+                    <a:lumMod val="75000"/>
+                  </a:schemeClr>
+                </a:solidFill>
+                <a:latin typeface="Courier New" panose="02070309020205020404" pitchFamily="49" charset="0"/>
+                <a:cs typeface="Courier New" panose="02070309020205020404" pitchFamily="49" charset="0"/>
+              </a:rPr>
+              <a:t>only-unaligned : 'NO'</a:t>
+            </a:r>
+          </a:p>
+          <a:p>
+            <a:r>
+              <a:rPr lang="en-GB" sz="650" dirty="0">
+                <a:solidFill>
+                  <a:schemeClr val="accent4">
+                    <a:lumMod val="75000"/>
+                  </a:schemeClr>
+                </a:solidFill>
+                <a:latin typeface="Courier New" panose="02070309020205020404" pitchFamily="49" charset="0"/>
+                <a:cs typeface="Courier New" panose="02070309020205020404" pitchFamily="49" charset="0"/>
+              </a:rPr>
+              <a:t>only-aligned   : 'NO'</a:t>
+            </a:r>
+          </a:p>
+          <a:p>
+            <a:r>
+              <a:rPr lang="en-GB" sz="650" dirty="0">
+                <a:solidFill>
+                  <a:schemeClr val="accent4">
+                    <a:lumMod val="75000"/>
+                  </a:schemeClr>
+                </a:solidFill>
+                <a:latin typeface="Courier New" panose="02070309020205020404" pitchFamily="49" charset="0"/>
+                <a:cs typeface="Courier New" panose="02070309020205020404" pitchFamily="49" charset="0"/>
+              </a:rPr>
+              <a:t>accession     : 'ERR11479311'</a:t>
+            </a:r>
+          </a:p>
+          <a:p>
+            <a:r>
+              <a:rPr lang="en-GB" sz="650" dirty="0">
+                <a:solidFill>
+                  <a:schemeClr val="accent4">
+                    <a:lumMod val="75000"/>
+                  </a:schemeClr>
+                </a:solidFill>
+                <a:latin typeface="Courier New" panose="02070309020205020404" pitchFamily="49" charset="0"/>
+                <a:cs typeface="Courier New" panose="02070309020205020404" pitchFamily="49" charset="0"/>
+              </a:rPr>
+              <a:t>accession-path: 'ERR11479311'</a:t>
+            </a:r>
+          </a:p>
+          <a:p>
+            <a:r>
+              <a:rPr lang="en-GB" sz="650" dirty="0">
+                <a:solidFill>
+                  <a:schemeClr val="accent4">
+                    <a:lumMod val="75000"/>
+                  </a:schemeClr>
+                </a:solidFill>
+                <a:latin typeface="Courier New" panose="02070309020205020404" pitchFamily="49" charset="0"/>
+                <a:cs typeface="Courier New" panose="02070309020205020404" pitchFamily="49" charset="0"/>
+              </a:rPr>
+              <a:t>est. output          : 9,441,782,544 bytes</a:t>
+            </a:r>
+          </a:p>
+          <a:p>
+            <a:r>
+              <a:rPr lang="en-GB" sz="650" dirty="0">
+                <a:solidFill>
+                  <a:schemeClr val="accent4">
+                    <a:lumMod val="75000"/>
+                  </a:schemeClr>
+                </a:solidFill>
+                <a:latin typeface="Courier New" panose="02070309020205020404" pitchFamily="49" charset="0"/>
+                <a:cs typeface="Courier New" panose="02070309020205020404" pitchFamily="49" charset="0"/>
+              </a:rPr>
+              <a:t>disk-limit (OS)      : 560,381,894,656 bytes</a:t>
+            </a:r>
+          </a:p>
+          <a:p>
+            <a:r>
+              <a:rPr lang="en-GB" sz="650" dirty="0">
+                <a:solidFill>
+                  <a:schemeClr val="accent4">
+                    <a:lumMod val="75000"/>
+                  </a:schemeClr>
+                </a:solidFill>
+                <a:latin typeface="Courier New" panose="02070309020205020404" pitchFamily="49" charset="0"/>
+                <a:cs typeface="Courier New" panose="02070309020205020404" pitchFamily="49" charset="0"/>
+              </a:rPr>
+              <a:t>disk-limit-</a:t>
+            </a:r>
+            <a:r>
+              <a:rPr lang="en-GB" sz="650" dirty="0" err="1">
+                <a:solidFill>
+                  <a:schemeClr val="accent4">
+                    <a:lumMod val="75000"/>
+                  </a:schemeClr>
+                </a:solidFill>
+                <a:latin typeface="Courier New" panose="02070309020205020404" pitchFamily="49" charset="0"/>
+                <a:cs typeface="Courier New" panose="02070309020205020404" pitchFamily="49" charset="0"/>
+              </a:rPr>
+              <a:t>tmp</a:t>
+            </a:r>
+            <a:r>
+              <a:rPr lang="en-GB" sz="650" dirty="0">
+                <a:solidFill>
+                  <a:schemeClr val="accent4">
+                    <a:lumMod val="75000"/>
+                  </a:schemeClr>
+                </a:solidFill>
+                <a:latin typeface="Courier New" panose="02070309020205020404" pitchFamily="49" charset="0"/>
+                <a:cs typeface="Courier New" panose="02070309020205020404" pitchFamily="49" charset="0"/>
+              </a:rPr>
+              <a:t> (OS)  : 560,381,894,656 bytes</a:t>
+            </a:r>
+          </a:p>
+          <a:p>
+            <a:r>
+              <a:rPr lang="en-GB" sz="650" dirty="0">
+                <a:solidFill>
+                  <a:schemeClr val="accent4">
+                    <a:lumMod val="75000"/>
+                  </a:schemeClr>
+                </a:solidFill>
+                <a:latin typeface="Courier New" panose="02070309020205020404" pitchFamily="49" charset="0"/>
+                <a:cs typeface="Courier New" panose="02070309020205020404" pitchFamily="49" charset="0"/>
+              </a:rPr>
+              <a:t>out/</a:t>
+            </a:r>
+            <a:r>
+              <a:rPr lang="en-GB" sz="650" dirty="0" err="1">
+                <a:solidFill>
+                  <a:schemeClr val="accent4">
+                    <a:lumMod val="75000"/>
+                  </a:schemeClr>
+                </a:solidFill>
+                <a:latin typeface="Courier New" panose="02070309020205020404" pitchFamily="49" charset="0"/>
+                <a:cs typeface="Courier New" panose="02070309020205020404" pitchFamily="49" charset="0"/>
+              </a:rPr>
+              <a:t>tmp</a:t>
+            </a:r>
+            <a:r>
+              <a:rPr lang="en-GB" sz="650" dirty="0">
+                <a:solidFill>
+                  <a:schemeClr val="accent4">
+                    <a:lumMod val="75000"/>
+                  </a:schemeClr>
+                </a:solidFill>
+                <a:latin typeface="Courier New" panose="02070309020205020404" pitchFamily="49" charset="0"/>
+                <a:cs typeface="Courier New" panose="02070309020205020404" pitchFamily="49" charset="0"/>
+              </a:rPr>
+              <a:t> on same fs   : 'YES'</a:t>
+            </a:r>
+          </a:p>
+          <a:p>
+            <a:endParaRPr lang="en-GB" sz="650" dirty="0">
+              <a:latin typeface="Courier New" panose="02070309020205020404" pitchFamily="49" charset="0"/>
+              <a:cs typeface="Courier New" panose="02070309020205020404" pitchFamily="49" charset="0"/>
+            </a:endParaRPr>
+          </a:p>
+          <a:p>
+            <a:r>
+              <a:rPr lang="en-GB" sz="650" dirty="0">
+                <a:solidFill>
+                  <a:srgbClr val="A72AA7"/>
+                </a:solidFill>
+                <a:latin typeface="Courier New" panose="02070309020205020404" pitchFamily="49" charset="0"/>
+                <a:cs typeface="Courier New" panose="02070309020205020404" pitchFamily="49" charset="0"/>
+              </a:rPr>
+              <a:t>ERR11479311 is remote</a:t>
+            </a:r>
+          </a:p>
+          <a:p>
+            <a:r>
+              <a:rPr lang="en-GB" sz="650" dirty="0">
+                <a:solidFill>
+                  <a:srgbClr val="A72AA7"/>
+                </a:solidFill>
+                <a:latin typeface="Courier New" panose="02070309020205020404" pitchFamily="49" charset="0"/>
+                <a:cs typeface="Courier New" panose="02070309020205020404" pitchFamily="49" charset="0"/>
+              </a:rPr>
+              <a:t>... has a size of 1,077,348,139 bytes</a:t>
+            </a:r>
+          </a:p>
+          <a:p>
+            <a:r>
+              <a:rPr lang="en-GB" sz="650" dirty="0">
+                <a:solidFill>
+                  <a:srgbClr val="A72AA7"/>
+                </a:solidFill>
+                <a:latin typeface="Courier New" panose="02070309020205020404" pitchFamily="49" charset="0"/>
+                <a:cs typeface="Courier New" panose="02070309020205020404" pitchFamily="49" charset="0"/>
+              </a:rPr>
+              <a:t>... is SRA-</a:t>
+            </a:r>
+            <a:r>
+              <a:rPr lang="en-GB" sz="650" dirty="0" err="1">
+                <a:solidFill>
+                  <a:srgbClr val="A72AA7"/>
+                </a:solidFill>
+                <a:latin typeface="Courier New" panose="02070309020205020404" pitchFamily="49" charset="0"/>
+                <a:cs typeface="Courier New" panose="02070309020205020404" pitchFamily="49" charset="0"/>
+              </a:rPr>
+              <a:t>db</a:t>
+            </a:r>
+            <a:endParaRPr lang="en-GB" sz="650" dirty="0">
+              <a:solidFill>
+                <a:srgbClr val="A72AA7"/>
+              </a:solidFill>
+              <a:latin typeface="Courier New" panose="02070309020205020404" pitchFamily="49" charset="0"/>
+              <a:cs typeface="Courier New" panose="02070309020205020404" pitchFamily="49" charset="0"/>
+            </a:endParaRPr>
+          </a:p>
+          <a:p>
+            <a:r>
+              <a:rPr lang="en-GB" sz="650" dirty="0">
+                <a:solidFill>
+                  <a:srgbClr val="A72AA7"/>
+                </a:solidFill>
+                <a:latin typeface="Courier New" panose="02070309020205020404" pitchFamily="49" charset="0"/>
+                <a:cs typeface="Courier New" panose="02070309020205020404" pitchFamily="49" charset="0"/>
+              </a:rPr>
+              <a:t>... SEQ has NAME column = YES</a:t>
+            </a:r>
+          </a:p>
+          <a:p>
+            <a:r>
+              <a:rPr lang="en-GB" sz="650" dirty="0">
+                <a:solidFill>
+                  <a:srgbClr val="A72AA7"/>
+                </a:solidFill>
+                <a:latin typeface="Courier New" panose="02070309020205020404" pitchFamily="49" charset="0"/>
+                <a:cs typeface="Courier New" panose="02070309020205020404" pitchFamily="49" charset="0"/>
+              </a:rPr>
+              <a:t>... SEQ has SPOT_GROUP column = YES</a:t>
+            </a:r>
+          </a:p>
+          <a:p>
+            <a:r>
+              <a:rPr lang="en-GB" sz="650" dirty="0">
+                <a:solidFill>
+                  <a:srgbClr val="A72AA7"/>
+                </a:solidFill>
+                <a:latin typeface="Courier New" panose="02070309020205020404" pitchFamily="49" charset="0"/>
+                <a:cs typeface="Courier New" panose="02070309020205020404" pitchFamily="49" charset="0"/>
+              </a:rPr>
+              <a:t>... SEQ has READ_TYPE column = YES</a:t>
+            </a:r>
+          </a:p>
+          <a:p>
+            <a:r>
+              <a:rPr lang="en-GB" sz="650" dirty="0">
+                <a:solidFill>
+                  <a:srgbClr val="A72AA7"/>
+                </a:solidFill>
+                <a:latin typeface="Courier New" panose="02070309020205020404" pitchFamily="49" charset="0"/>
+                <a:cs typeface="Courier New" panose="02070309020205020404" pitchFamily="49" charset="0"/>
+              </a:rPr>
+              <a:t>... SEQ has QUALITY column = YES</a:t>
+            </a:r>
+          </a:p>
+          <a:p>
+            <a:r>
+              <a:rPr lang="en-GB" sz="650" dirty="0">
+                <a:solidFill>
+                  <a:srgbClr val="A72AA7"/>
+                </a:solidFill>
+                <a:latin typeface="Courier New" panose="02070309020205020404" pitchFamily="49" charset="0"/>
+                <a:cs typeface="Courier New" panose="02070309020205020404" pitchFamily="49" charset="0"/>
+              </a:rPr>
+              <a:t>... SEQ has READ column = YES</a:t>
+            </a:r>
+          </a:p>
+          <a:p>
+            <a:r>
+              <a:rPr lang="en-GB" sz="650" dirty="0">
+                <a:solidFill>
+                  <a:srgbClr val="A72AA7"/>
+                </a:solidFill>
+                <a:latin typeface="Courier New" panose="02070309020205020404" pitchFamily="49" charset="0"/>
+                <a:cs typeface="Courier New" panose="02070309020205020404" pitchFamily="49" charset="0"/>
+              </a:rPr>
+              <a:t>... uses 'SEQUENCE' as sequence-table</a:t>
+            </a:r>
+          </a:p>
+          <a:p>
+            <a:r>
+              <a:rPr lang="en-GB" sz="650" dirty="0" err="1">
+                <a:solidFill>
+                  <a:srgbClr val="A72AA7"/>
+                </a:solidFill>
+                <a:latin typeface="Courier New" panose="02070309020205020404" pitchFamily="49" charset="0"/>
+                <a:cs typeface="Courier New" panose="02070309020205020404" pitchFamily="49" charset="0"/>
+              </a:rPr>
+              <a:t>SEQ.first_row</a:t>
+            </a:r>
+            <a:r>
+              <a:rPr lang="en-GB" sz="650" dirty="0">
+                <a:solidFill>
+                  <a:srgbClr val="A72AA7"/>
+                </a:solidFill>
+                <a:latin typeface="Courier New" panose="02070309020205020404" pitchFamily="49" charset="0"/>
+                <a:cs typeface="Courier New" panose="02070309020205020404" pitchFamily="49" charset="0"/>
+              </a:rPr>
+              <a:t> = 1</a:t>
+            </a:r>
+          </a:p>
+          <a:p>
+            <a:r>
+              <a:rPr lang="en-GB" sz="650" dirty="0" err="1">
+                <a:solidFill>
+                  <a:srgbClr val="A72AA7"/>
+                </a:solidFill>
+                <a:latin typeface="Courier New" panose="02070309020205020404" pitchFamily="49" charset="0"/>
+                <a:cs typeface="Courier New" panose="02070309020205020404" pitchFamily="49" charset="0"/>
+              </a:rPr>
+              <a:t>SEQ.row_count</a:t>
+            </a:r>
+            <a:r>
+              <a:rPr lang="en-GB" sz="650" dirty="0">
+                <a:solidFill>
+                  <a:srgbClr val="A72AA7"/>
+                </a:solidFill>
+                <a:latin typeface="Courier New" panose="02070309020205020404" pitchFamily="49" charset="0"/>
+                <a:cs typeface="Courier New" panose="02070309020205020404" pitchFamily="49" charset="0"/>
+              </a:rPr>
+              <a:t> = 10,632,638</a:t>
+            </a:r>
+          </a:p>
+          <a:p>
+            <a:r>
+              <a:rPr lang="en-GB" sz="650" dirty="0" err="1">
+                <a:solidFill>
+                  <a:srgbClr val="A72AA7"/>
+                </a:solidFill>
+                <a:latin typeface="Courier New" panose="02070309020205020404" pitchFamily="49" charset="0"/>
+                <a:cs typeface="Courier New" panose="02070309020205020404" pitchFamily="49" charset="0"/>
+              </a:rPr>
+              <a:t>SEQ.spot_count</a:t>
+            </a:r>
+            <a:r>
+              <a:rPr lang="en-GB" sz="650" dirty="0">
+                <a:solidFill>
+                  <a:srgbClr val="A72AA7"/>
+                </a:solidFill>
+                <a:latin typeface="Courier New" panose="02070309020205020404" pitchFamily="49" charset="0"/>
+                <a:cs typeface="Courier New" panose="02070309020205020404" pitchFamily="49" charset="0"/>
+              </a:rPr>
+              <a:t> = 10,632,638</a:t>
+            </a:r>
+          </a:p>
+          <a:p>
+            <a:r>
+              <a:rPr lang="en-GB" sz="650" dirty="0" err="1">
+                <a:solidFill>
+                  <a:srgbClr val="A72AA7"/>
+                </a:solidFill>
+                <a:latin typeface="Courier New" panose="02070309020205020404" pitchFamily="49" charset="0"/>
+                <a:cs typeface="Courier New" panose="02070309020205020404" pitchFamily="49" charset="0"/>
+              </a:rPr>
+              <a:t>SEQ.total_base_count</a:t>
+            </a:r>
+            <a:r>
+              <a:rPr lang="en-GB" sz="650" dirty="0">
+                <a:solidFill>
+                  <a:srgbClr val="A72AA7"/>
+                </a:solidFill>
+                <a:latin typeface="Courier New" panose="02070309020205020404" pitchFamily="49" charset="0"/>
+                <a:cs typeface="Courier New" panose="02070309020205020404" pitchFamily="49" charset="0"/>
+              </a:rPr>
+              <a:t> = 3,189,791,400</a:t>
+            </a:r>
+          </a:p>
+          <a:p>
+            <a:r>
+              <a:rPr lang="en-GB" sz="650" dirty="0" err="1">
+                <a:solidFill>
+                  <a:srgbClr val="A72AA7"/>
+                </a:solidFill>
+                <a:latin typeface="Courier New" panose="02070309020205020404" pitchFamily="49" charset="0"/>
+                <a:cs typeface="Courier New" panose="02070309020205020404" pitchFamily="49" charset="0"/>
+              </a:rPr>
+              <a:t>SEQ.bio_base_count</a:t>
+            </a:r>
+            <a:r>
+              <a:rPr lang="en-GB" sz="650" dirty="0">
+                <a:solidFill>
+                  <a:srgbClr val="A72AA7"/>
+                </a:solidFill>
+                <a:latin typeface="Courier New" panose="02070309020205020404" pitchFamily="49" charset="0"/>
+                <a:cs typeface="Courier New" panose="02070309020205020404" pitchFamily="49" charset="0"/>
+              </a:rPr>
+              <a:t> = 3,189,791,400</a:t>
+            </a:r>
+          </a:p>
+          <a:p>
+            <a:r>
+              <a:rPr lang="en-GB" sz="650" dirty="0" err="1">
+                <a:solidFill>
+                  <a:srgbClr val="A72AA7"/>
+                </a:solidFill>
+                <a:latin typeface="Courier New" panose="02070309020205020404" pitchFamily="49" charset="0"/>
+                <a:cs typeface="Courier New" panose="02070309020205020404" pitchFamily="49" charset="0"/>
+              </a:rPr>
+              <a:t>SEQ.avg_name_len</a:t>
+            </a:r>
+            <a:r>
+              <a:rPr lang="en-GB" sz="650" dirty="0">
+                <a:solidFill>
+                  <a:srgbClr val="A72AA7"/>
+                </a:solidFill>
+                <a:latin typeface="Courier New" panose="02070309020205020404" pitchFamily="49" charset="0"/>
+                <a:cs typeface="Courier New" panose="02070309020205020404" pitchFamily="49" charset="0"/>
+              </a:rPr>
+              <a:t> = 37</a:t>
+            </a:r>
+          </a:p>
+          <a:p>
+            <a:r>
+              <a:rPr lang="en-GB" sz="650" dirty="0" err="1">
+                <a:solidFill>
+                  <a:srgbClr val="A72AA7"/>
+                </a:solidFill>
+                <a:latin typeface="Courier New" panose="02070309020205020404" pitchFamily="49" charset="0"/>
+                <a:cs typeface="Courier New" panose="02070309020205020404" pitchFamily="49" charset="0"/>
+              </a:rPr>
+              <a:t>SEQ.avg_spot_group_len</a:t>
+            </a:r>
+            <a:r>
+              <a:rPr lang="en-GB" sz="650" dirty="0">
+                <a:solidFill>
+                  <a:srgbClr val="A72AA7"/>
+                </a:solidFill>
+                <a:latin typeface="Courier New" panose="02070309020205020404" pitchFamily="49" charset="0"/>
+                <a:cs typeface="Courier New" panose="02070309020205020404" pitchFamily="49" charset="0"/>
+              </a:rPr>
+              <a:t> = 17</a:t>
+            </a:r>
+          </a:p>
+          <a:p>
+            <a:r>
+              <a:rPr lang="en-GB" sz="650" dirty="0" err="1">
+                <a:solidFill>
+                  <a:srgbClr val="A72AA7"/>
+                </a:solidFill>
+                <a:latin typeface="Courier New" panose="02070309020205020404" pitchFamily="49" charset="0"/>
+                <a:cs typeface="Courier New" panose="02070309020205020404" pitchFamily="49" charset="0"/>
+              </a:rPr>
+              <a:t>SEQ.avg_bio_reads_per_spot</a:t>
+            </a:r>
+            <a:r>
+              <a:rPr lang="en-GB" sz="650" dirty="0">
+                <a:solidFill>
+                  <a:srgbClr val="A72AA7"/>
+                </a:solidFill>
+                <a:latin typeface="Courier New" panose="02070309020205020404" pitchFamily="49" charset="0"/>
+                <a:cs typeface="Courier New" panose="02070309020205020404" pitchFamily="49" charset="0"/>
+              </a:rPr>
+              <a:t> = 2</a:t>
+            </a:r>
+          </a:p>
+          <a:p>
+            <a:r>
+              <a:rPr lang="en-GB" sz="650" dirty="0" err="1">
+                <a:solidFill>
+                  <a:srgbClr val="A72AA7"/>
+                </a:solidFill>
+                <a:latin typeface="Courier New" panose="02070309020205020404" pitchFamily="49" charset="0"/>
+                <a:cs typeface="Courier New" panose="02070309020205020404" pitchFamily="49" charset="0"/>
+              </a:rPr>
+              <a:t>SEQ.avg_tech_reads_per_spot</a:t>
+            </a:r>
+            <a:r>
+              <a:rPr lang="en-GB" sz="650" dirty="0">
+                <a:solidFill>
+                  <a:srgbClr val="A72AA7"/>
+                </a:solidFill>
+                <a:latin typeface="Courier New" panose="02070309020205020404" pitchFamily="49" charset="0"/>
+                <a:cs typeface="Courier New" panose="02070309020205020404" pitchFamily="49" charset="0"/>
+              </a:rPr>
+              <a:t> = 0</a:t>
+            </a:r>
+          </a:p>
+          <a:p>
+            <a:r>
+              <a:rPr lang="en-GB" sz="650" dirty="0" err="1">
+                <a:solidFill>
+                  <a:srgbClr val="A72AA7"/>
+                </a:solidFill>
+                <a:latin typeface="Courier New" panose="02070309020205020404" pitchFamily="49" charset="0"/>
+                <a:cs typeface="Courier New" panose="02070309020205020404" pitchFamily="49" charset="0"/>
+              </a:rPr>
+              <a:t>ALIGN.first_row</a:t>
+            </a:r>
+            <a:r>
+              <a:rPr lang="en-GB" sz="650" dirty="0">
+                <a:solidFill>
+                  <a:srgbClr val="A72AA7"/>
+                </a:solidFill>
+                <a:latin typeface="Courier New" panose="02070309020205020404" pitchFamily="49" charset="0"/>
+                <a:cs typeface="Courier New" panose="02070309020205020404" pitchFamily="49" charset="0"/>
+              </a:rPr>
+              <a:t> = 0</a:t>
+            </a:r>
+          </a:p>
+          <a:p>
+            <a:r>
+              <a:rPr lang="en-GB" sz="650" dirty="0" err="1">
+                <a:solidFill>
+                  <a:srgbClr val="A72AA7"/>
+                </a:solidFill>
+                <a:latin typeface="Courier New" panose="02070309020205020404" pitchFamily="49" charset="0"/>
+                <a:cs typeface="Courier New" panose="02070309020205020404" pitchFamily="49" charset="0"/>
+              </a:rPr>
+              <a:t>ALIGN.row_count</a:t>
+            </a:r>
+            <a:r>
+              <a:rPr lang="en-GB" sz="650" dirty="0">
+                <a:solidFill>
+                  <a:srgbClr val="A72AA7"/>
+                </a:solidFill>
+                <a:latin typeface="Courier New" panose="02070309020205020404" pitchFamily="49" charset="0"/>
+                <a:cs typeface="Courier New" panose="02070309020205020404" pitchFamily="49" charset="0"/>
+              </a:rPr>
+              <a:t> = 0</a:t>
+            </a:r>
+          </a:p>
+          <a:p>
+            <a:r>
+              <a:rPr lang="en-GB" sz="650" dirty="0" err="1">
+                <a:solidFill>
+                  <a:srgbClr val="A72AA7"/>
+                </a:solidFill>
+                <a:latin typeface="Courier New" panose="02070309020205020404" pitchFamily="49" charset="0"/>
+                <a:cs typeface="Courier New" panose="02070309020205020404" pitchFamily="49" charset="0"/>
+              </a:rPr>
+              <a:t>ALIGN.spot_count</a:t>
+            </a:r>
+            <a:r>
+              <a:rPr lang="en-GB" sz="650" dirty="0">
+                <a:solidFill>
+                  <a:srgbClr val="A72AA7"/>
+                </a:solidFill>
+                <a:latin typeface="Courier New" panose="02070309020205020404" pitchFamily="49" charset="0"/>
+                <a:cs typeface="Courier New" panose="02070309020205020404" pitchFamily="49" charset="0"/>
+              </a:rPr>
+              <a:t> = 0</a:t>
+            </a:r>
+          </a:p>
+          <a:p>
+            <a:r>
+              <a:rPr lang="en-GB" sz="650" dirty="0" err="1">
+                <a:solidFill>
+                  <a:srgbClr val="A72AA7"/>
+                </a:solidFill>
+                <a:latin typeface="Courier New" panose="02070309020205020404" pitchFamily="49" charset="0"/>
+                <a:cs typeface="Courier New" panose="02070309020205020404" pitchFamily="49" charset="0"/>
+              </a:rPr>
+              <a:t>ALIGN.total_base_count</a:t>
+            </a:r>
+            <a:r>
+              <a:rPr lang="en-GB" sz="650" dirty="0">
+                <a:solidFill>
+                  <a:srgbClr val="A72AA7"/>
+                </a:solidFill>
+                <a:latin typeface="Courier New" panose="02070309020205020404" pitchFamily="49" charset="0"/>
+                <a:cs typeface="Courier New" panose="02070309020205020404" pitchFamily="49" charset="0"/>
+              </a:rPr>
+              <a:t> = 0</a:t>
+            </a:r>
+          </a:p>
+          <a:p>
+            <a:r>
+              <a:rPr lang="en-GB" sz="650" dirty="0" err="1">
+                <a:solidFill>
+                  <a:srgbClr val="A72AA7"/>
+                </a:solidFill>
+                <a:latin typeface="Courier New" panose="02070309020205020404" pitchFamily="49" charset="0"/>
+                <a:cs typeface="Courier New" panose="02070309020205020404" pitchFamily="49" charset="0"/>
+              </a:rPr>
+              <a:t>ALIGN.bio_base_count</a:t>
+            </a:r>
+            <a:r>
+              <a:rPr lang="en-GB" sz="650" dirty="0">
+                <a:solidFill>
+                  <a:srgbClr val="A72AA7"/>
+                </a:solidFill>
+                <a:latin typeface="Courier New" panose="02070309020205020404" pitchFamily="49" charset="0"/>
+                <a:cs typeface="Courier New" panose="02070309020205020404" pitchFamily="49" charset="0"/>
+              </a:rPr>
+              <a:t> = 0</a:t>
+            </a:r>
+          </a:p>
+          <a:p>
+            <a:endParaRPr lang="en-GB" sz="650" dirty="0">
+              <a:latin typeface="Courier New" panose="02070309020205020404" pitchFamily="49" charset="0"/>
+              <a:cs typeface="Courier New" panose="02070309020205020404" pitchFamily="49" charset="0"/>
+            </a:endParaRPr>
+          </a:p>
+          <a:p>
+            <a:r>
+              <a:rPr lang="en-GB" sz="650" dirty="0">
+                <a:solidFill>
+                  <a:srgbClr val="FF0000"/>
+                </a:solidFill>
+                <a:latin typeface="Courier New" panose="02070309020205020404" pitchFamily="49" charset="0"/>
+                <a:cs typeface="Courier New" panose="02070309020205020404" pitchFamily="49" charset="0"/>
+              </a:rPr>
+              <a:t>disk-limit(s) not </a:t>
+            </a:r>
+            <a:r>
+              <a:rPr lang="en-GB" sz="650" dirty="0" err="1">
+                <a:solidFill>
+                  <a:srgbClr val="FF0000"/>
+                </a:solidFill>
+                <a:latin typeface="Courier New" panose="02070309020205020404" pitchFamily="49" charset="0"/>
+                <a:cs typeface="Courier New" panose="02070309020205020404" pitchFamily="49" charset="0"/>
+              </a:rPr>
+              <a:t>exeeded</a:t>
+            </a:r>
+            <a:r>
+              <a:rPr lang="en-GB" sz="650" dirty="0">
+                <a:solidFill>
+                  <a:srgbClr val="FF0000"/>
+                </a:solidFill>
+                <a:latin typeface="Courier New" panose="02070309020205020404" pitchFamily="49" charset="0"/>
+                <a:cs typeface="Courier New" panose="02070309020205020404" pitchFamily="49" charset="0"/>
+              </a:rPr>
+              <a:t>!</a:t>
+            </a:r>
+          </a:p>
+          <a:p>
+            <a:r>
+              <a:rPr lang="en-GB" sz="650" dirty="0">
+                <a:solidFill>
+                  <a:srgbClr val="FF0000"/>
+                </a:solidFill>
+                <a:latin typeface="Courier New" panose="02070309020205020404" pitchFamily="49" charset="0"/>
+                <a:cs typeface="Courier New" panose="02070309020205020404" pitchFamily="49" charset="0"/>
+              </a:rPr>
+              <a:t>join   :|----- 10.71%</a:t>
+            </a:r>
+          </a:p>
+        </p:txBody>
+      </p:sp>
     </p:spTree>
     <p:extLst>
       <p:ext uri="{BB962C8B-B14F-4D97-AF65-F5344CB8AC3E}">
-        <p14:creationId xmlns:p14="http://schemas.microsoft.com/office/powerpoint/2010/main" val="144554119"/>
+        <p14:creationId xmlns:p14="http://schemas.microsoft.com/office/powerpoint/2010/main" val="4040285510"/>
       </p:ext>
     </p:extLst>
   </p:cSld>
@@ -16682,6 +18646,174 @@
           <p:cNvPr id="2" name="Title 1">
             <a:extLst>
               <a:ext uri="{FF2B5EF4-FFF2-40B4-BE49-F238E27FC236}">
+                <a16:creationId xmlns:a16="http://schemas.microsoft.com/office/drawing/2014/main" id="{8C8BBC5F-DBAB-E5FB-6643-3AF879D05C30}"/>
+              </a:ext>
+            </a:extLst>
+          </p:cNvPr>
+          <p:cNvSpPr>
+            <a:spLocks noGrp="1"/>
+          </p:cNvSpPr>
+          <p:nvPr>
+            <p:ph type="title"/>
+          </p:nvPr>
+        </p:nvSpPr>
+        <p:spPr/>
+        <p:txBody>
+          <a:bodyPr>
+            <a:normAutofit fontScale="90000"/>
+          </a:bodyPr>
+          <a:lstStyle/>
+          <a:p>
+            <a:endParaRPr lang="en-GB"/>
+          </a:p>
+        </p:txBody>
+      </p:sp>
+      <p:sp>
+        <p:nvSpPr>
+          <p:cNvPr id="3" name="Content Placeholder 2">
+            <a:extLst>
+              <a:ext uri="{FF2B5EF4-FFF2-40B4-BE49-F238E27FC236}">
+                <a16:creationId xmlns:a16="http://schemas.microsoft.com/office/drawing/2014/main" id="{8F3BC83A-61C8-E3E6-ADD3-8D25E4F66364}"/>
+              </a:ext>
+            </a:extLst>
+          </p:cNvPr>
+          <p:cNvSpPr>
+            <a:spLocks noGrp="1"/>
+          </p:cNvSpPr>
+          <p:nvPr>
+            <p:ph idx="1"/>
+          </p:nvPr>
+        </p:nvSpPr>
+        <p:spPr/>
+        <p:txBody>
+          <a:bodyPr/>
+          <a:lstStyle/>
+          <a:p>
+            <a:endParaRPr lang="en-GB"/>
+          </a:p>
+        </p:txBody>
+      </p:sp>
+      <p:sp>
+        <p:nvSpPr>
+          <p:cNvPr id="4" name="Date Placeholder 3">
+            <a:extLst>
+              <a:ext uri="{FF2B5EF4-FFF2-40B4-BE49-F238E27FC236}">
+                <a16:creationId xmlns:a16="http://schemas.microsoft.com/office/drawing/2014/main" id="{85E9A7A0-2BFF-5CEA-363B-8BFC4E699BAA}"/>
+              </a:ext>
+            </a:extLst>
+          </p:cNvPr>
+          <p:cNvSpPr>
+            <a:spLocks noGrp="1"/>
+          </p:cNvSpPr>
+          <p:nvPr>
+            <p:ph type="dt" sz="half" idx="10"/>
+          </p:nvPr>
+        </p:nvSpPr>
+        <p:spPr/>
+        <p:txBody>
+          <a:bodyPr/>
+          <a:lstStyle/>
+          <a:p>
+            <a:fld id="{761DFEEA-1162-B343-ACBF-B3E92F6AC390}" type="datetime1">
+              <a:rPr lang="it-IT" smtClean="0"/>
+              <a:t>21/09/26</a:t>
+            </a:fld>
+            <a:endParaRPr lang="en-GB"/>
+          </a:p>
+        </p:txBody>
+      </p:sp>
+      <p:sp>
+        <p:nvSpPr>
+          <p:cNvPr id="5" name="Footer Placeholder 4">
+            <a:extLst>
+              <a:ext uri="{FF2B5EF4-FFF2-40B4-BE49-F238E27FC236}">
+                <a16:creationId xmlns:a16="http://schemas.microsoft.com/office/drawing/2014/main" id="{49ECC0AA-17BB-73B1-FBB3-8D407418CE5A}"/>
+              </a:ext>
+            </a:extLst>
+          </p:cNvPr>
+          <p:cNvSpPr>
+            <a:spLocks noGrp="1"/>
+          </p:cNvSpPr>
+          <p:nvPr>
+            <p:ph type="ftr" sz="quarter" idx="11"/>
+          </p:nvPr>
+        </p:nvSpPr>
+        <p:spPr/>
+        <p:txBody>
+          <a:bodyPr/>
+          <a:lstStyle/>
+          <a:p>
+            <a:r>
+              <a:rPr lang="en-GB"/>
+              <a:t>Day 1: Reproducible NGS Data Analysis on Personal Laptops</a:t>
+            </a:r>
+          </a:p>
+        </p:txBody>
+      </p:sp>
+      <p:sp>
+        <p:nvSpPr>
+          <p:cNvPr id="6" name="Slide Number Placeholder 5">
+            <a:extLst>
+              <a:ext uri="{FF2B5EF4-FFF2-40B4-BE49-F238E27FC236}">
+                <a16:creationId xmlns:a16="http://schemas.microsoft.com/office/drawing/2014/main" id="{56E26FE7-F7B1-A11F-B507-656150232AD6}"/>
+              </a:ext>
+            </a:extLst>
+          </p:cNvPr>
+          <p:cNvSpPr>
+            <a:spLocks noGrp="1"/>
+          </p:cNvSpPr>
+          <p:nvPr>
+            <p:ph type="sldNum" sz="quarter" idx="12"/>
+          </p:nvPr>
+        </p:nvSpPr>
+        <p:spPr/>
+        <p:txBody>
+          <a:bodyPr/>
+          <a:lstStyle/>
+          <a:p>
+            <a:fld id="{62E92BA6-6E87-3343-8D2C-B7A656D628E4}" type="slidenum">
+              <a:rPr lang="en-GB" smtClean="0"/>
+              <a:t>30</a:t>
+            </a:fld>
+            <a:endParaRPr lang="en-GB"/>
+          </a:p>
+        </p:txBody>
+      </p:sp>
+    </p:spTree>
+    <p:extLst>
+      <p:ext uri="{BB962C8B-B14F-4D97-AF65-F5344CB8AC3E}">
+        <p14:creationId xmlns:p14="http://schemas.microsoft.com/office/powerpoint/2010/main" val="144554119"/>
+      </p:ext>
+    </p:extLst>
+  </p:cSld>
+  <p:clrMapOvr>
+    <a:masterClrMapping/>
+  </p:clrMapOvr>
+</p:sld>
+</file>
+
+<file path=ppt/slides/slide32.xml><?xml version="1.0" encoding="utf-8"?>
+<p:sld xmlns:a="http://schemas.openxmlformats.org/drawingml/2006/main" xmlns:r="http://schemas.openxmlformats.org/officeDocument/2006/relationships" xmlns:p="http://schemas.openxmlformats.org/presentationml/2006/main">
+  <p:cSld>
+    <p:spTree>
+      <p:nvGrpSpPr>
+        <p:cNvPr id="1" name=""/>
+        <p:cNvGrpSpPr/>
+        <p:nvPr/>
+      </p:nvGrpSpPr>
+      <p:grpSpPr>
+        <a:xfrm>
+          <a:off x="0" y="0"/>
+          <a:ext cx="0" cy="0"/>
+          <a:chOff x="0" y="0"/>
+          <a:chExt cx="0" cy="0"/>
+        </a:xfrm>
+      </p:grpSpPr>
+      <p:sp>
+        <p:nvSpPr>
+          <p:cNvPr id="2" name="Title 1">
+            <a:extLst>
+              <a:ext uri="{FF2B5EF4-FFF2-40B4-BE49-F238E27FC236}">
                 <a16:creationId xmlns:a16="http://schemas.microsoft.com/office/drawing/2014/main" id="{31AAA667-07B1-285F-4787-11EC68B87B8E}"/>
               </a:ext>
             </a:extLst>
@@ -16739,7 +18871,7 @@
           <a:p>
             <a:fld id="{761DFEEA-1162-B343-ACBF-B3E92F6AC390}" type="datetime1">
               <a:rPr lang="it-IT" smtClean="0"/>
-              <a:t>17/09/26</a:t>
+              <a:t>21/09/26</a:t>
             </a:fld>
             <a:endParaRPr lang="en-GB"/>
           </a:p>
@@ -16796,7 +18928,7 @@
           <a:p>
             <a:fld id="{62E92BA6-6E87-3343-8D2C-B7A656D628E4}" type="slidenum">
               <a:rPr lang="en-GB" smtClean="0"/>
-              <a:t>30</a:t>
+              <a:t>31</a:t>
             </a:fld>
             <a:endParaRPr lang="en-GB"/>
           </a:p>
@@ -17702,7 +19834,7 @@
 </p:sld>
 </file>
 
-<file path=ppt/slides/slide32.xml><?xml version="1.0" encoding="utf-8"?>
+<file path=ppt/slides/slide33.xml><?xml version="1.0" encoding="utf-8"?>
 <p:sld xmlns:a="http://schemas.openxmlformats.org/drawingml/2006/main" xmlns:r="http://schemas.openxmlformats.org/officeDocument/2006/relationships" xmlns:p="http://schemas.openxmlformats.org/presentationml/2006/main">
   <p:cSld>
     <p:spTree>
@@ -17773,7 +19905,7 @@
           <a:p>
             <a:fld id="{761DFEEA-1162-B343-ACBF-B3E92F6AC390}" type="datetime1">
               <a:rPr lang="it-IT" smtClean="0"/>
-              <a:t>17/09/26</a:t>
+              <a:t>21/09/26</a:t>
             </a:fld>
             <a:endParaRPr lang="en-GB"/>
           </a:p>
@@ -17830,7 +19962,7 @@
           <a:p>
             <a:fld id="{62E92BA6-6E87-3343-8D2C-B7A656D628E4}" type="slidenum">
               <a:rPr lang="en-GB" smtClean="0"/>
-              <a:t>31</a:t>
+              <a:t>32</a:t>
             </a:fld>
             <a:endParaRPr lang="en-GB"/>
           </a:p>
@@ -18095,8 +20227,8 @@
         </p:nvSpPr>
         <p:spPr>
           <a:xfrm>
-            <a:off x="7594076" y="1349527"/>
-            <a:ext cx="4597924" cy="2308324"/>
+            <a:off x="7594076" y="1580628"/>
+            <a:ext cx="4313002" cy="2308324"/>
           </a:xfrm>
           <a:prstGeom prst="rect">
             <a:avLst/>
@@ -18120,7 +20252,7 @@
           <a:p>
             <a:r>
               <a:rPr lang="en-IT" dirty="0"/>
-              <a:t>Remove sequence that is demonstrably technical or unreliable while retaining as much informative sequence as possible.</a:t>
+              <a:t>Remove sequence that is technical or unreliable while retaining as much informative sequence as possible.</a:t>
             </a:r>
             <a:endParaRPr lang="en-GB" dirty="0"/>
           </a:p>
@@ -18219,7 +20351,7 @@
         </p:nvSpPr>
         <p:spPr>
           <a:xfrm>
-            <a:off x="7594076" y="3917666"/>
+            <a:off x="7594076" y="4365469"/>
             <a:ext cx="4501846" cy="1754326"/>
           </a:xfrm>
           <a:prstGeom prst="rect">
@@ -18238,7 +20370,7 @@
             </a:pPr>
             <a:r>
               <a:rPr lang="en-IT" b="1" i="1" dirty="0"/>
-              <a:t>Trimming is protocol-dependent</a:t>
+              <a:t>!Trimming is protocol-dependent</a:t>
             </a:r>
             <a:endParaRPr lang="en-IT" i="1" dirty="0"/>
           </a:p>
@@ -18265,7 +20397,7 @@
             </a:r>
             <a:r>
               <a:rPr lang="en-IT" i="1" dirty="0"/>
-              <a:t>:</a:t>
+              <a:t>!</a:t>
             </a:r>
           </a:p>
         </p:txBody>
@@ -18481,7 +20613,7 @@
 </p:sld>
 </file>
 
-<file path=ppt/slides/slide33.xml><?xml version="1.0" encoding="utf-8"?>
+<file path=ppt/slides/slide34.xml><?xml version="1.0" encoding="utf-8"?>
 <p:sld xmlns:a="http://schemas.openxmlformats.org/drawingml/2006/main" xmlns:r="http://schemas.openxmlformats.org/officeDocument/2006/relationships" xmlns:p="http://schemas.openxmlformats.org/presentationml/2006/main">
   <p:cSld>
     <p:spTree>
@@ -18558,7 +20690,7 @@
           <a:p>
             <a:fld id="{761DFEEA-1162-B343-ACBF-B3E92F6AC390}" type="datetime1">
               <a:rPr lang="it-IT" smtClean="0"/>
-              <a:t>17/09/26</a:t>
+              <a:t>21/09/26</a:t>
             </a:fld>
             <a:endParaRPr lang="en-GB"/>
           </a:p>
@@ -18615,7 +20747,7 @@
           <a:p>
             <a:fld id="{62E92BA6-6E87-3343-8D2C-B7A656D628E4}" type="slidenum">
               <a:rPr lang="en-GB" smtClean="0"/>
-              <a:t>32</a:t>
+              <a:t>33</a:t>
             </a:fld>
             <a:endParaRPr lang="en-GB"/>
           </a:p>
@@ -19098,7 +21230,7 @@
         </p:nvSpPr>
         <p:spPr>
           <a:xfrm>
-            <a:off x="8058622" y="2439401"/>
+            <a:off x="8058622" y="1660960"/>
             <a:ext cx="4133378" cy="707886"/>
           </a:xfrm>
           <a:prstGeom prst="rect">
@@ -19308,823 +21440,6 @@
 </p:sld>
 </file>
 
-<file path=ppt/slides/slide34.xml><?xml version="1.0" encoding="utf-8"?>
-<p:sld xmlns:a="http://schemas.openxmlformats.org/drawingml/2006/main" xmlns:r="http://schemas.openxmlformats.org/officeDocument/2006/relationships" xmlns:p="http://schemas.openxmlformats.org/presentationml/2006/main">
-  <p:cSld>
-    <p:spTree>
-      <p:nvGrpSpPr>
-        <p:cNvPr id="1" name=""/>
-        <p:cNvGrpSpPr/>
-        <p:nvPr/>
-      </p:nvGrpSpPr>
-      <p:grpSpPr>
-        <a:xfrm>
-          <a:off x="0" y="0"/>
-          <a:ext cx="0" cy="0"/>
-          <a:chOff x="0" y="0"/>
-          <a:chExt cx="0" cy="0"/>
-        </a:xfrm>
-      </p:grpSpPr>
-      <p:sp>
-        <p:nvSpPr>
-          <p:cNvPr id="4" name="Date Placeholder 3">
-            <a:extLst>
-              <a:ext uri="{FF2B5EF4-FFF2-40B4-BE49-F238E27FC236}">
-                <a16:creationId xmlns:a16="http://schemas.microsoft.com/office/drawing/2014/main" id="{0A0AE082-C1A9-1B3F-D795-57F2AB077DC5}"/>
-              </a:ext>
-            </a:extLst>
-          </p:cNvPr>
-          <p:cNvSpPr>
-            <a:spLocks noGrp="1"/>
-          </p:cNvSpPr>
-          <p:nvPr>
-            <p:ph type="dt" sz="half" idx="10"/>
-          </p:nvPr>
-        </p:nvSpPr>
-        <p:spPr/>
-        <p:txBody>
-          <a:bodyPr/>
-          <a:lstStyle/>
-          <a:p>
-            <a:fld id="{761DFEEA-1162-B343-ACBF-B3E92F6AC390}" type="datetime1">
-              <a:rPr lang="it-IT" smtClean="0"/>
-              <a:t>17/09/26</a:t>
-            </a:fld>
-            <a:endParaRPr lang="en-GB"/>
-          </a:p>
-        </p:txBody>
-      </p:sp>
-      <p:sp>
-        <p:nvSpPr>
-          <p:cNvPr id="5" name="Footer Placeholder 4">
-            <a:extLst>
-              <a:ext uri="{FF2B5EF4-FFF2-40B4-BE49-F238E27FC236}">
-                <a16:creationId xmlns:a16="http://schemas.microsoft.com/office/drawing/2014/main" id="{DF914694-E199-CC70-ACF8-FAD4E53C60D7}"/>
-              </a:ext>
-            </a:extLst>
-          </p:cNvPr>
-          <p:cNvSpPr>
-            <a:spLocks noGrp="1"/>
-          </p:cNvSpPr>
-          <p:nvPr>
-            <p:ph type="ftr" sz="quarter" idx="11"/>
-          </p:nvPr>
-        </p:nvSpPr>
-        <p:spPr/>
-        <p:txBody>
-          <a:bodyPr/>
-          <a:lstStyle/>
-          <a:p>
-            <a:r>
-              <a:rPr lang="en-GB"/>
-              <a:t>Day 1: Reproducible NGS Data Analysis on Personal Laptops</a:t>
-            </a:r>
-          </a:p>
-        </p:txBody>
-      </p:sp>
-      <p:sp>
-        <p:nvSpPr>
-          <p:cNvPr id="6" name="Slide Number Placeholder 5">
-            <a:extLst>
-              <a:ext uri="{FF2B5EF4-FFF2-40B4-BE49-F238E27FC236}">
-                <a16:creationId xmlns:a16="http://schemas.microsoft.com/office/drawing/2014/main" id="{CCCE29CA-B368-9210-8875-DD7C28F841C6}"/>
-              </a:ext>
-            </a:extLst>
-          </p:cNvPr>
-          <p:cNvSpPr>
-            <a:spLocks noGrp="1"/>
-          </p:cNvSpPr>
-          <p:nvPr>
-            <p:ph type="sldNum" sz="quarter" idx="12"/>
-          </p:nvPr>
-        </p:nvSpPr>
-        <p:spPr/>
-        <p:txBody>
-          <a:bodyPr/>
-          <a:lstStyle/>
-          <a:p>
-            <a:fld id="{62E92BA6-6E87-3343-8D2C-B7A656D628E4}" type="slidenum">
-              <a:rPr lang="en-GB" smtClean="0"/>
-              <a:t>33</a:t>
-            </a:fld>
-            <a:endParaRPr lang="en-GB"/>
-          </a:p>
-        </p:txBody>
-      </p:sp>
-      <p:sp>
-        <p:nvSpPr>
-          <p:cNvPr id="7" name="TextBox 6">
-            <a:extLst>
-              <a:ext uri="{FF2B5EF4-FFF2-40B4-BE49-F238E27FC236}">
-                <a16:creationId xmlns:a16="http://schemas.microsoft.com/office/drawing/2014/main" id="{239251DB-FCF4-1761-552E-97CFE53C02B2}"/>
-              </a:ext>
-            </a:extLst>
-          </p:cNvPr>
-          <p:cNvSpPr txBox="1"/>
-          <p:nvPr/>
-        </p:nvSpPr>
-        <p:spPr>
-          <a:xfrm>
-            <a:off x="520523" y="0"/>
-            <a:ext cx="5575477" cy="6340197"/>
-          </a:xfrm>
-          <a:prstGeom prst="rect">
-            <a:avLst/>
-          </a:prstGeom>
-          <a:noFill/>
-          <a:ln>
-            <a:solidFill>
-              <a:schemeClr val="tx1"/>
-            </a:solidFill>
-          </a:ln>
-        </p:spPr>
-        <p:txBody>
-          <a:bodyPr wrap="square">
-            <a:spAutoFit/>
-          </a:bodyPr>
-          <a:lstStyle/>
-          <a:p>
-            <a:r>
-              <a:rPr lang="en-GB" sz="1400" dirty="0">
-                <a:latin typeface="Courier New" panose="02070309020205020404" pitchFamily="49" charset="0"/>
-                <a:cs typeface="Courier New" panose="02070309020205020404" pitchFamily="49" charset="0"/>
-              </a:rPr>
-              <a:t>#!/</a:t>
-            </a:r>
-            <a:r>
-              <a:rPr lang="en-GB" sz="1400" dirty="0" err="1">
-                <a:latin typeface="Courier New" panose="02070309020205020404" pitchFamily="49" charset="0"/>
-                <a:cs typeface="Courier New" panose="02070309020205020404" pitchFamily="49" charset="0"/>
-              </a:rPr>
-              <a:t>usr</a:t>
-            </a:r>
-            <a:r>
-              <a:rPr lang="en-GB" sz="1400" dirty="0">
-                <a:latin typeface="Courier New" panose="02070309020205020404" pitchFamily="49" charset="0"/>
-                <a:cs typeface="Courier New" panose="02070309020205020404" pitchFamily="49" charset="0"/>
-              </a:rPr>
-              <a:t>/bin/env bash</a:t>
-            </a:r>
-          </a:p>
-          <a:p>
-            <a:r>
-              <a:rPr lang="en-GB" sz="1400" dirty="0">
-                <a:latin typeface="Courier New" panose="02070309020205020404" pitchFamily="49" charset="0"/>
-                <a:cs typeface="Courier New" panose="02070309020205020404" pitchFamily="49" charset="0"/>
-              </a:rPr>
-              <a:t>set -</a:t>
-            </a:r>
-            <a:r>
-              <a:rPr lang="en-GB" sz="1400" dirty="0" err="1">
-                <a:latin typeface="Courier New" panose="02070309020205020404" pitchFamily="49" charset="0"/>
-                <a:cs typeface="Courier New" panose="02070309020205020404" pitchFamily="49" charset="0"/>
-              </a:rPr>
-              <a:t>euo</a:t>
-            </a:r>
-            <a:r>
-              <a:rPr lang="en-GB" sz="1400" dirty="0">
-                <a:latin typeface="Courier New" panose="02070309020205020404" pitchFamily="49" charset="0"/>
-                <a:cs typeface="Courier New" panose="02070309020205020404" pitchFamily="49" charset="0"/>
-              </a:rPr>
-              <a:t> </a:t>
-            </a:r>
-            <a:r>
-              <a:rPr lang="en-GB" sz="1400" dirty="0" err="1">
-                <a:latin typeface="Courier New" panose="02070309020205020404" pitchFamily="49" charset="0"/>
-                <a:cs typeface="Courier New" panose="02070309020205020404" pitchFamily="49" charset="0"/>
-              </a:rPr>
-              <a:t>pipefail</a:t>
-            </a:r>
-            <a:endParaRPr lang="en-GB" sz="1400" dirty="0">
-              <a:latin typeface="Courier New" panose="02070309020205020404" pitchFamily="49" charset="0"/>
-              <a:cs typeface="Courier New" panose="02070309020205020404" pitchFamily="49" charset="0"/>
-            </a:endParaRPr>
-          </a:p>
-          <a:p>
-            <a:endParaRPr lang="en-GB" sz="1400" dirty="0">
-              <a:latin typeface="Courier New" panose="02070309020205020404" pitchFamily="49" charset="0"/>
-              <a:cs typeface="Courier New" panose="02070309020205020404" pitchFamily="49" charset="0"/>
-            </a:endParaRPr>
-          </a:p>
-          <a:p>
-            <a:r>
-              <a:rPr lang="en-GB" sz="1400" dirty="0">
-                <a:latin typeface="Courier New" panose="02070309020205020404" pitchFamily="49" charset="0"/>
-                <a:cs typeface="Courier New" panose="02070309020205020404" pitchFamily="49" charset="0"/>
-              </a:rPr>
-              <a:t>sample="WT_2"</a:t>
-            </a:r>
-          </a:p>
-          <a:p>
-            <a:endParaRPr lang="en-GB" sz="1400" dirty="0">
-              <a:latin typeface="Courier New" panose="02070309020205020404" pitchFamily="49" charset="0"/>
-              <a:cs typeface="Courier New" panose="02070309020205020404" pitchFamily="49" charset="0"/>
-            </a:endParaRPr>
-          </a:p>
-          <a:p>
-            <a:r>
-              <a:rPr lang="en-GB" sz="1400" dirty="0" err="1">
-                <a:latin typeface="Courier New" panose="02070309020205020404" pitchFamily="49" charset="0"/>
-                <a:cs typeface="Courier New" panose="02070309020205020404" pitchFamily="49" charset="0"/>
-              </a:rPr>
-              <a:t>raw_dir</a:t>
-            </a:r>
-            <a:r>
-              <a:rPr lang="en-GB" sz="1400" dirty="0">
-                <a:latin typeface="Courier New" panose="02070309020205020404" pitchFamily="49" charset="0"/>
-                <a:cs typeface="Courier New" panose="02070309020205020404" pitchFamily="49" charset="0"/>
-              </a:rPr>
-              <a:t>="</a:t>
-            </a:r>
-            <a:r>
-              <a:rPr lang="en-GB" sz="1400" dirty="0" err="1">
-                <a:latin typeface="Courier New" panose="02070309020205020404" pitchFamily="49" charset="0"/>
-                <a:cs typeface="Courier New" panose="02070309020205020404" pitchFamily="49" charset="0"/>
-              </a:rPr>
-              <a:t>raw_data</a:t>
-            </a:r>
-            <a:r>
-              <a:rPr lang="en-GB" sz="1400" dirty="0">
-                <a:latin typeface="Courier New" panose="02070309020205020404" pitchFamily="49" charset="0"/>
-                <a:cs typeface="Courier New" panose="02070309020205020404" pitchFamily="49" charset="0"/>
-              </a:rPr>
-              <a:t>/</a:t>
-            </a:r>
-            <a:r>
-              <a:rPr lang="en-GB" sz="1400" dirty="0" err="1">
-                <a:latin typeface="Courier New" panose="02070309020205020404" pitchFamily="49" charset="0"/>
-                <a:cs typeface="Courier New" panose="02070309020205020404" pitchFamily="49" charset="0"/>
-              </a:rPr>
-              <a:t>fastq</a:t>
-            </a:r>
-            <a:r>
-              <a:rPr lang="en-GB" sz="1400" dirty="0">
-                <a:latin typeface="Courier New" panose="02070309020205020404" pitchFamily="49" charset="0"/>
-                <a:cs typeface="Courier New" panose="02070309020205020404" pitchFamily="49" charset="0"/>
-              </a:rPr>
-              <a:t>/</a:t>
-            </a:r>
-            <a:r>
-              <a:rPr lang="en-GB" sz="1400" dirty="0" err="1">
-                <a:latin typeface="Courier New" panose="02070309020205020404" pitchFamily="49" charset="0"/>
-                <a:cs typeface="Courier New" panose="02070309020205020404" pitchFamily="49" charset="0"/>
-              </a:rPr>
-              <a:t>rnaseq</a:t>
-            </a:r>
-            <a:r>
-              <a:rPr lang="en-GB" sz="1400" dirty="0">
-                <a:latin typeface="Courier New" panose="02070309020205020404" pitchFamily="49" charset="0"/>
-                <a:cs typeface="Courier New" panose="02070309020205020404" pitchFamily="49" charset="0"/>
-              </a:rPr>
-              <a:t>"</a:t>
-            </a:r>
-          </a:p>
-          <a:p>
-            <a:r>
-              <a:rPr lang="en-GB" sz="1400" dirty="0" err="1">
-                <a:latin typeface="Courier New" panose="02070309020205020404" pitchFamily="49" charset="0"/>
-                <a:cs typeface="Courier New" panose="02070309020205020404" pitchFamily="49" charset="0"/>
-              </a:rPr>
-              <a:t>out_dir</a:t>
-            </a:r>
-            <a:r>
-              <a:rPr lang="en-GB" sz="1400" dirty="0">
-                <a:latin typeface="Courier New" panose="02070309020205020404" pitchFamily="49" charset="0"/>
-                <a:cs typeface="Courier New" panose="02070309020205020404" pitchFamily="49" charset="0"/>
-              </a:rPr>
-              <a:t>="results/day1_qc/</a:t>
-            </a:r>
-            <a:r>
-              <a:rPr lang="en-GB" sz="1400" dirty="0" err="1">
-                <a:latin typeface="Courier New" panose="02070309020205020404" pitchFamily="49" charset="0"/>
-                <a:cs typeface="Courier New" panose="02070309020205020404" pitchFamily="49" charset="0"/>
-              </a:rPr>
-              <a:t>trimmed_fastq</a:t>
-            </a:r>
-            <a:r>
-              <a:rPr lang="en-GB" sz="1400" dirty="0">
-                <a:latin typeface="Courier New" panose="02070309020205020404" pitchFamily="49" charset="0"/>
-                <a:cs typeface="Courier New" panose="02070309020205020404" pitchFamily="49" charset="0"/>
-              </a:rPr>
-              <a:t>/</a:t>
-            </a:r>
-            <a:r>
-              <a:rPr lang="en-GB" sz="1400" dirty="0" err="1">
-                <a:latin typeface="Courier New" panose="02070309020205020404" pitchFamily="49" charset="0"/>
-                <a:cs typeface="Courier New" panose="02070309020205020404" pitchFamily="49" charset="0"/>
-              </a:rPr>
-              <a:t>rnaseq</a:t>
-            </a:r>
-            <a:r>
-              <a:rPr lang="en-GB" sz="1400" dirty="0">
-                <a:latin typeface="Courier New" panose="02070309020205020404" pitchFamily="49" charset="0"/>
-                <a:cs typeface="Courier New" panose="02070309020205020404" pitchFamily="49" charset="0"/>
-              </a:rPr>
-              <a:t>"</a:t>
-            </a:r>
-          </a:p>
-          <a:p>
-            <a:r>
-              <a:rPr lang="en-GB" sz="1400" dirty="0" err="1">
-                <a:latin typeface="Courier New" panose="02070309020205020404" pitchFamily="49" charset="0"/>
-                <a:cs typeface="Courier New" panose="02070309020205020404" pitchFamily="49" charset="0"/>
-              </a:rPr>
-              <a:t>report_dir</a:t>
-            </a:r>
-            <a:r>
-              <a:rPr lang="en-GB" sz="1400" dirty="0">
-                <a:latin typeface="Courier New" panose="02070309020205020404" pitchFamily="49" charset="0"/>
-                <a:cs typeface="Courier New" panose="02070309020205020404" pitchFamily="49" charset="0"/>
-              </a:rPr>
-              <a:t>="results/logs/day1/</a:t>
-            </a:r>
-            <a:r>
-              <a:rPr lang="en-GB" sz="1400" dirty="0" err="1">
-                <a:latin typeface="Courier New" panose="02070309020205020404" pitchFamily="49" charset="0"/>
-                <a:cs typeface="Courier New" panose="02070309020205020404" pitchFamily="49" charset="0"/>
-              </a:rPr>
-              <a:t>fastp</a:t>
-            </a:r>
-            <a:r>
-              <a:rPr lang="en-GB" sz="1400" dirty="0">
-                <a:latin typeface="Courier New" panose="02070309020205020404" pitchFamily="49" charset="0"/>
-                <a:cs typeface="Courier New" panose="02070309020205020404" pitchFamily="49" charset="0"/>
-              </a:rPr>
-              <a:t>"</a:t>
-            </a:r>
-          </a:p>
-          <a:p>
-            <a:endParaRPr lang="en-GB" sz="1400" dirty="0">
-              <a:latin typeface="Courier New" panose="02070309020205020404" pitchFamily="49" charset="0"/>
-              <a:cs typeface="Courier New" panose="02070309020205020404" pitchFamily="49" charset="0"/>
-            </a:endParaRPr>
-          </a:p>
-          <a:p>
-            <a:r>
-              <a:rPr lang="en-GB" sz="1400" dirty="0" err="1">
-                <a:latin typeface="Courier New" panose="02070309020205020404" pitchFamily="49" charset="0"/>
-                <a:cs typeface="Courier New" panose="02070309020205020404" pitchFamily="49" charset="0"/>
-              </a:rPr>
-              <a:t>mkdir</a:t>
-            </a:r>
-            <a:r>
-              <a:rPr lang="en-GB" sz="1400" dirty="0">
-                <a:latin typeface="Courier New" panose="02070309020205020404" pitchFamily="49" charset="0"/>
-                <a:cs typeface="Courier New" panose="02070309020205020404" pitchFamily="49" charset="0"/>
-              </a:rPr>
-              <a:t> -p "${</a:t>
-            </a:r>
-            <a:r>
-              <a:rPr lang="en-GB" sz="1400" dirty="0" err="1">
-                <a:latin typeface="Courier New" panose="02070309020205020404" pitchFamily="49" charset="0"/>
-                <a:cs typeface="Courier New" panose="02070309020205020404" pitchFamily="49" charset="0"/>
-              </a:rPr>
-              <a:t>out_dir</a:t>
-            </a:r>
-            <a:r>
-              <a:rPr lang="en-GB" sz="1400" dirty="0">
-                <a:latin typeface="Courier New" panose="02070309020205020404" pitchFamily="49" charset="0"/>
-                <a:cs typeface="Courier New" panose="02070309020205020404" pitchFamily="49" charset="0"/>
-              </a:rPr>
-              <a:t>}" "${</a:t>
-            </a:r>
-            <a:r>
-              <a:rPr lang="en-GB" sz="1400" dirty="0" err="1">
-                <a:latin typeface="Courier New" panose="02070309020205020404" pitchFamily="49" charset="0"/>
-                <a:cs typeface="Courier New" panose="02070309020205020404" pitchFamily="49" charset="0"/>
-              </a:rPr>
-              <a:t>report_dir</a:t>
-            </a:r>
-            <a:r>
-              <a:rPr lang="en-GB" sz="1400" dirty="0">
-                <a:latin typeface="Courier New" panose="02070309020205020404" pitchFamily="49" charset="0"/>
-                <a:cs typeface="Courier New" panose="02070309020205020404" pitchFamily="49" charset="0"/>
-              </a:rPr>
-              <a:t>}"</a:t>
-            </a:r>
-          </a:p>
-          <a:p>
-            <a:endParaRPr lang="en-GB" sz="1400" dirty="0">
-              <a:latin typeface="Courier New" panose="02070309020205020404" pitchFamily="49" charset="0"/>
-              <a:cs typeface="Courier New" panose="02070309020205020404" pitchFamily="49" charset="0"/>
-            </a:endParaRPr>
-          </a:p>
-          <a:p>
-            <a:r>
-              <a:rPr lang="en-GB" sz="1400" dirty="0">
-                <a:latin typeface="Courier New" panose="02070309020205020404" pitchFamily="49" charset="0"/>
-                <a:cs typeface="Courier New" panose="02070309020205020404" pitchFamily="49" charset="0"/>
-              </a:rPr>
-              <a:t>read1="${</a:t>
-            </a:r>
-            <a:r>
-              <a:rPr lang="en-GB" sz="1400" dirty="0" err="1">
-                <a:latin typeface="Courier New" panose="02070309020205020404" pitchFamily="49" charset="0"/>
-                <a:cs typeface="Courier New" panose="02070309020205020404" pitchFamily="49" charset="0"/>
-              </a:rPr>
-              <a:t>raw_dir</a:t>
-            </a:r>
-            <a:r>
-              <a:rPr lang="en-GB" sz="1400" dirty="0">
-                <a:latin typeface="Courier New" panose="02070309020205020404" pitchFamily="49" charset="0"/>
-                <a:cs typeface="Courier New" panose="02070309020205020404" pitchFamily="49" charset="0"/>
-              </a:rPr>
-              <a:t>}/${sample}_R1.fastq.gz"</a:t>
-            </a:r>
-          </a:p>
-          <a:p>
-            <a:r>
-              <a:rPr lang="en-GB" sz="1400" dirty="0">
-                <a:latin typeface="Courier New" panose="02070309020205020404" pitchFamily="49" charset="0"/>
-                <a:cs typeface="Courier New" panose="02070309020205020404" pitchFamily="49" charset="0"/>
-              </a:rPr>
-              <a:t>read2="${</a:t>
-            </a:r>
-            <a:r>
-              <a:rPr lang="en-GB" sz="1400" dirty="0" err="1">
-                <a:latin typeface="Courier New" panose="02070309020205020404" pitchFamily="49" charset="0"/>
-                <a:cs typeface="Courier New" panose="02070309020205020404" pitchFamily="49" charset="0"/>
-              </a:rPr>
-              <a:t>raw_dir</a:t>
-            </a:r>
-            <a:r>
-              <a:rPr lang="en-GB" sz="1400" dirty="0">
-                <a:latin typeface="Courier New" panose="02070309020205020404" pitchFamily="49" charset="0"/>
-                <a:cs typeface="Courier New" panose="02070309020205020404" pitchFamily="49" charset="0"/>
-              </a:rPr>
-              <a:t>}/${sample}_R2.fastq.gz"</a:t>
-            </a:r>
-          </a:p>
-          <a:p>
-            <a:endParaRPr lang="en-GB" sz="1400" dirty="0">
-              <a:latin typeface="Courier New" panose="02070309020205020404" pitchFamily="49" charset="0"/>
-              <a:cs typeface="Courier New" panose="02070309020205020404" pitchFamily="49" charset="0"/>
-            </a:endParaRPr>
-          </a:p>
-          <a:p>
-            <a:r>
-              <a:rPr lang="en-GB" sz="1400" dirty="0" err="1">
-                <a:latin typeface="Courier New" panose="02070309020205020404" pitchFamily="49" charset="0"/>
-                <a:cs typeface="Courier New" panose="02070309020205020404" pitchFamily="49" charset="0"/>
-              </a:rPr>
-              <a:t>fastp</a:t>
-            </a:r>
-            <a:r>
-              <a:rPr lang="en-GB" sz="1400" dirty="0">
-                <a:latin typeface="Courier New" panose="02070309020205020404" pitchFamily="49" charset="0"/>
-                <a:cs typeface="Courier New" panose="02070309020205020404" pitchFamily="49" charset="0"/>
-              </a:rPr>
-              <a:t> \</a:t>
-            </a:r>
-          </a:p>
-          <a:p>
-            <a:r>
-              <a:rPr lang="en-GB" sz="1400" dirty="0">
-                <a:latin typeface="Courier New" panose="02070309020205020404" pitchFamily="49" charset="0"/>
-                <a:cs typeface="Courier New" panose="02070309020205020404" pitchFamily="49" charset="0"/>
-              </a:rPr>
-              <a:t>  -</a:t>
-            </a:r>
-            <a:r>
-              <a:rPr lang="en-GB" sz="1400" dirty="0" err="1">
-                <a:latin typeface="Courier New" panose="02070309020205020404" pitchFamily="49" charset="0"/>
-                <a:cs typeface="Courier New" panose="02070309020205020404" pitchFamily="49" charset="0"/>
-              </a:rPr>
-              <a:t>i</a:t>
-            </a:r>
-            <a:r>
-              <a:rPr lang="en-GB" sz="1400" dirty="0">
-                <a:latin typeface="Courier New" panose="02070309020205020404" pitchFamily="49" charset="0"/>
-                <a:cs typeface="Courier New" panose="02070309020205020404" pitchFamily="49" charset="0"/>
-              </a:rPr>
-              <a:t> "${read1}" \</a:t>
-            </a:r>
-          </a:p>
-          <a:p>
-            <a:r>
-              <a:rPr lang="en-GB" sz="1400" dirty="0">
-                <a:latin typeface="Courier New" panose="02070309020205020404" pitchFamily="49" charset="0"/>
-                <a:cs typeface="Courier New" panose="02070309020205020404" pitchFamily="49" charset="0"/>
-              </a:rPr>
-              <a:t>  -I "${read2}" \</a:t>
-            </a:r>
-          </a:p>
-          <a:p>
-            <a:r>
-              <a:rPr lang="en-GB" sz="1400" dirty="0">
-                <a:latin typeface="Courier New" panose="02070309020205020404" pitchFamily="49" charset="0"/>
-                <a:cs typeface="Courier New" panose="02070309020205020404" pitchFamily="49" charset="0"/>
-              </a:rPr>
-              <a:t>  -o "${</a:t>
-            </a:r>
-            <a:r>
-              <a:rPr lang="en-GB" sz="1400" dirty="0" err="1">
-                <a:latin typeface="Courier New" panose="02070309020205020404" pitchFamily="49" charset="0"/>
-                <a:cs typeface="Courier New" panose="02070309020205020404" pitchFamily="49" charset="0"/>
-              </a:rPr>
-              <a:t>out_dir</a:t>
-            </a:r>
-            <a:r>
-              <a:rPr lang="en-GB" sz="1400" dirty="0">
-                <a:latin typeface="Courier New" panose="02070309020205020404" pitchFamily="49" charset="0"/>
-                <a:cs typeface="Courier New" panose="02070309020205020404" pitchFamily="49" charset="0"/>
-              </a:rPr>
-              <a:t>}/${sample}_R1.trimmed.fastq.gz" \</a:t>
-            </a:r>
-          </a:p>
-          <a:p>
-            <a:r>
-              <a:rPr lang="en-GB" sz="1400" dirty="0">
-                <a:latin typeface="Courier New" panose="02070309020205020404" pitchFamily="49" charset="0"/>
-                <a:cs typeface="Courier New" panose="02070309020205020404" pitchFamily="49" charset="0"/>
-              </a:rPr>
-              <a:t>  -O "${</a:t>
-            </a:r>
-            <a:r>
-              <a:rPr lang="en-GB" sz="1400" dirty="0" err="1">
-                <a:latin typeface="Courier New" panose="02070309020205020404" pitchFamily="49" charset="0"/>
-                <a:cs typeface="Courier New" panose="02070309020205020404" pitchFamily="49" charset="0"/>
-              </a:rPr>
-              <a:t>out_dir</a:t>
-            </a:r>
-            <a:r>
-              <a:rPr lang="en-GB" sz="1400" dirty="0">
-                <a:latin typeface="Courier New" panose="02070309020205020404" pitchFamily="49" charset="0"/>
-                <a:cs typeface="Courier New" panose="02070309020205020404" pitchFamily="49" charset="0"/>
-              </a:rPr>
-              <a:t>}/${sample}_R2.trimmed.fastq.gz" \</a:t>
-            </a:r>
-          </a:p>
-          <a:p>
-            <a:r>
-              <a:rPr lang="en-GB" sz="1400" dirty="0">
-                <a:latin typeface="Courier New" panose="02070309020205020404" pitchFamily="49" charset="0"/>
-                <a:cs typeface="Courier New" panose="02070309020205020404" pitchFamily="49" charset="0"/>
-              </a:rPr>
-              <a:t>  --</a:t>
-            </a:r>
-            <a:r>
-              <a:rPr lang="en-GB" sz="1400" dirty="0" err="1">
-                <a:latin typeface="Courier New" panose="02070309020205020404" pitchFamily="49" charset="0"/>
-                <a:cs typeface="Courier New" panose="02070309020205020404" pitchFamily="49" charset="0"/>
-              </a:rPr>
-              <a:t>detect_adapter_for_pe</a:t>
-            </a:r>
-            <a:r>
-              <a:rPr lang="en-GB" sz="1400" dirty="0">
-                <a:latin typeface="Courier New" panose="02070309020205020404" pitchFamily="49" charset="0"/>
-                <a:cs typeface="Courier New" panose="02070309020205020404" pitchFamily="49" charset="0"/>
-              </a:rPr>
-              <a:t> \</a:t>
-            </a:r>
-          </a:p>
-          <a:p>
-            <a:r>
-              <a:rPr lang="en-GB" sz="1400" dirty="0">
-                <a:latin typeface="Courier New" panose="02070309020205020404" pitchFamily="49" charset="0"/>
-                <a:cs typeface="Courier New" panose="02070309020205020404" pitchFamily="49" charset="0"/>
-              </a:rPr>
-              <a:t>  --</a:t>
-            </a:r>
-            <a:r>
-              <a:rPr lang="en-GB" sz="1400" dirty="0" err="1">
-                <a:latin typeface="Courier New" panose="02070309020205020404" pitchFamily="49" charset="0"/>
-                <a:cs typeface="Courier New" panose="02070309020205020404" pitchFamily="49" charset="0"/>
-              </a:rPr>
-              <a:t>cut_tail</a:t>
-            </a:r>
-            <a:r>
-              <a:rPr lang="en-GB" sz="1400" dirty="0">
-                <a:latin typeface="Courier New" panose="02070309020205020404" pitchFamily="49" charset="0"/>
-                <a:cs typeface="Courier New" panose="02070309020205020404" pitchFamily="49" charset="0"/>
-              </a:rPr>
-              <a:t> \</a:t>
-            </a:r>
-          </a:p>
-          <a:p>
-            <a:r>
-              <a:rPr lang="en-GB" sz="1400" dirty="0">
-                <a:latin typeface="Courier New" panose="02070309020205020404" pitchFamily="49" charset="0"/>
-                <a:cs typeface="Courier New" panose="02070309020205020404" pitchFamily="49" charset="0"/>
-              </a:rPr>
-              <a:t>  --</a:t>
-            </a:r>
-            <a:r>
-              <a:rPr lang="en-GB" sz="1400" dirty="0" err="1">
-                <a:latin typeface="Courier New" panose="02070309020205020404" pitchFamily="49" charset="0"/>
-                <a:cs typeface="Courier New" panose="02070309020205020404" pitchFamily="49" charset="0"/>
-              </a:rPr>
-              <a:t>cut_tail_window_size</a:t>
-            </a:r>
-            <a:r>
-              <a:rPr lang="en-GB" sz="1400" dirty="0">
-                <a:latin typeface="Courier New" panose="02070309020205020404" pitchFamily="49" charset="0"/>
-                <a:cs typeface="Courier New" panose="02070309020205020404" pitchFamily="49" charset="0"/>
-              </a:rPr>
-              <a:t> 4 \</a:t>
-            </a:r>
-          </a:p>
-          <a:p>
-            <a:r>
-              <a:rPr lang="en-GB" sz="1400" dirty="0">
-                <a:latin typeface="Courier New" panose="02070309020205020404" pitchFamily="49" charset="0"/>
-                <a:cs typeface="Courier New" panose="02070309020205020404" pitchFamily="49" charset="0"/>
-              </a:rPr>
-              <a:t>  --</a:t>
-            </a:r>
-            <a:r>
-              <a:rPr lang="en-GB" sz="1400" dirty="0" err="1">
-                <a:latin typeface="Courier New" panose="02070309020205020404" pitchFamily="49" charset="0"/>
-                <a:cs typeface="Courier New" panose="02070309020205020404" pitchFamily="49" charset="0"/>
-              </a:rPr>
-              <a:t>cut_tail_mean_quality</a:t>
-            </a:r>
-            <a:r>
-              <a:rPr lang="en-GB" sz="1400" dirty="0">
-                <a:latin typeface="Courier New" panose="02070309020205020404" pitchFamily="49" charset="0"/>
-                <a:cs typeface="Courier New" panose="02070309020205020404" pitchFamily="49" charset="0"/>
-              </a:rPr>
-              <a:t> 20 \</a:t>
-            </a:r>
-          </a:p>
-          <a:p>
-            <a:r>
-              <a:rPr lang="en-GB" sz="1400" dirty="0">
-                <a:latin typeface="Courier New" panose="02070309020205020404" pitchFamily="49" charset="0"/>
-                <a:cs typeface="Courier New" panose="02070309020205020404" pitchFamily="49" charset="0"/>
-              </a:rPr>
-              <a:t>  --thread 2 \</a:t>
-            </a:r>
-          </a:p>
-          <a:p>
-            <a:r>
-              <a:rPr lang="en-GB" sz="1400" dirty="0">
-                <a:latin typeface="Courier New" panose="02070309020205020404" pitchFamily="49" charset="0"/>
-                <a:cs typeface="Courier New" panose="02070309020205020404" pitchFamily="49" charset="0"/>
-              </a:rPr>
-              <a:t>  --html "${</a:t>
-            </a:r>
-            <a:r>
-              <a:rPr lang="en-GB" sz="1400" dirty="0" err="1">
-                <a:latin typeface="Courier New" panose="02070309020205020404" pitchFamily="49" charset="0"/>
-                <a:cs typeface="Courier New" panose="02070309020205020404" pitchFamily="49" charset="0"/>
-              </a:rPr>
-              <a:t>report_dir</a:t>
-            </a:r>
-            <a:r>
-              <a:rPr lang="en-GB" sz="1400" dirty="0">
-                <a:latin typeface="Courier New" panose="02070309020205020404" pitchFamily="49" charset="0"/>
-                <a:cs typeface="Courier New" panose="02070309020205020404" pitchFamily="49" charset="0"/>
-              </a:rPr>
-              <a:t>}/${sample}.</a:t>
-            </a:r>
-            <a:r>
-              <a:rPr lang="en-GB" sz="1400" dirty="0" err="1">
-                <a:latin typeface="Courier New" panose="02070309020205020404" pitchFamily="49" charset="0"/>
-                <a:cs typeface="Courier New" panose="02070309020205020404" pitchFamily="49" charset="0"/>
-              </a:rPr>
-              <a:t>fastp.html</a:t>
-            </a:r>
-            <a:r>
-              <a:rPr lang="en-GB" sz="1400" dirty="0">
-                <a:latin typeface="Courier New" panose="02070309020205020404" pitchFamily="49" charset="0"/>
-                <a:cs typeface="Courier New" panose="02070309020205020404" pitchFamily="49" charset="0"/>
-              </a:rPr>
-              <a:t>" \</a:t>
-            </a:r>
-          </a:p>
-          <a:p>
-            <a:r>
-              <a:rPr lang="en-GB" sz="1400" dirty="0">
-                <a:latin typeface="Courier New" panose="02070309020205020404" pitchFamily="49" charset="0"/>
-                <a:cs typeface="Courier New" panose="02070309020205020404" pitchFamily="49" charset="0"/>
-              </a:rPr>
-              <a:t>  --</a:t>
-            </a:r>
-            <a:r>
-              <a:rPr lang="en-GB" sz="1400" dirty="0" err="1">
-                <a:latin typeface="Courier New" panose="02070309020205020404" pitchFamily="49" charset="0"/>
-                <a:cs typeface="Courier New" panose="02070309020205020404" pitchFamily="49" charset="0"/>
-              </a:rPr>
-              <a:t>json</a:t>
-            </a:r>
-            <a:r>
-              <a:rPr lang="en-GB" sz="1400" dirty="0">
-                <a:latin typeface="Courier New" panose="02070309020205020404" pitchFamily="49" charset="0"/>
-                <a:cs typeface="Courier New" panose="02070309020205020404" pitchFamily="49" charset="0"/>
-              </a:rPr>
-              <a:t> "${</a:t>
-            </a:r>
-            <a:r>
-              <a:rPr lang="en-GB" sz="1400" dirty="0" err="1">
-                <a:latin typeface="Courier New" panose="02070309020205020404" pitchFamily="49" charset="0"/>
-                <a:cs typeface="Courier New" panose="02070309020205020404" pitchFamily="49" charset="0"/>
-              </a:rPr>
-              <a:t>report_dir</a:t>
-            </a:r>
-            <a:r>
-              <a:rPr lang="en-GB" sz="1400" dirty="0">
-                <a:latin typeface="Courier New" panose="02070309020205020404" pitchFamily="49" charset="0"/>
-                <a:cs typeface="Courier New" panose="02070309020205020404" pitchFamily="49" charset="0"/>
-              </a:rPr>
-              <a:t>}/${sample}.</a:t>
-            </a:r>
-            <a:r>
-              <a:rPr lang="en-GB" sz="1400" dirty="0" err="1">
-                <a:latin typeface="Courier New" panose="02070309020205020404" pitchFamily="49" charset="0"/>
-                <a:cs typeface="Courier New" panose="02070309020205020404" pitchFamily="49" charset="0"/>
-              </a:rPr>
-              <a:t>fastp.json</a:t>
-            </a:r>
-            <a:r>
-              <a:rPr lang="en-GB" sz="1400" dirty="0">
-                <a:latin typeface="Courier New" panose="02070309020205020404" pitchFamily="49" charset="0"/>
-                <a:cs typeface="Courier New" panose="02070309020205020404" pitchFamily="49" charset="0"/>
-              </a:rPr>
-              <a:t>" \</a:t>
-            </a:r>
-          </a:p>
-          <a:p>
-            <a:r>
-              <a:rPr lang="en-GB" sz="1400" dirty="0">
-                <a:latin typeface="Courier New" panose="02070309020205020404" pitchFamily="49" charset="0"/>
-                <a:cs typeface="Courier New" panose="02070309020205020404" pitchFamily="49" charset="0"/>
-              </a:rPr>
-              <a:t>  &gt; "${</a:t>
-            </a:r>
-            <a:r>
-              <a:rPr lang="en-GB" sz="1400" dirty="0" err="1">
-                <a:latin typeface="Courier New" panose="02070309020205020404" pitchFamily="49" charset="0"/>
-                <a:cs typeface="Courier New" panose="02070309020205020404" pitchFamily="49" charset="0"/>
-              </a:rPr>
-              <a:t>report_dir</a:t>
-            </a:r>
-            <a:r>
-              <a:rPr lang="en-GB" sz="1400" dirty="0">
-                <a:latin typeface="Courier New" panose="02070309020205020404" pitchFamily="49" charset="0"/>
-                <a:cs typeface="Courier New" panose="02070309020205020404" pitchFamily="49" charset="0"/>
-              </a:rPr>
-              <a:t>}/${sample}.</a:t>
-            </a:r>
-            <a:r>
-              <a:rPr lang="en-GB" sz="1400" dirty="0" err="1">
-                <a:latin typeface="Courier New" panose="02070309020205020404" pitchFamily="49" charset="0"/>
-                <a:cs typeface="Courier New" panose="02070309020205020404" pitchFamily="49" charset="0"/>
-              </a:rPr>
-              <a:t>fastp.log</a:t>
-            </a:r>
-            <a:r>
-              <a:rPr lang="en-GB" sz="1400" dirty="0">
-                <a:latin typeface="Courier New" panose="02070309020205020404" pitchFamily="49" charset="0"/>
-                <a:cs typeface="Courier New" panose="02070309020205020404" pitchFamily="49" charset="0"/>
-              </a:rPr>
-              <a:t>" 2&gt;&amp;1</a:t>
-            </a:r>
-          </a:p>
-          <a:p>
-            <a:endParaRPr lang="en-GB" sz="1400" dirty="0">
-              <a:latin typeface="Courier New" panose="02070309020205020404" pitchFamily="49" charset="0"/>
-              <a:cs typeface="Courier New" panose="02070309020205020404" pitchFamily="49" charset="0"/>
-            </a:endParaRPr>
-          </a:p>
-          <a:p>
-            <a:r>
-              <a:rPr lang="en-GB" sz="1400" dirty="0">
-                <a:latin typeface="Courier New" panose="02070309020205020404" pitchFamily="49" charset="0"/>
-                <a:cs typeface="Courier New" panose="02070309020205020404" pitchFamily="49" charset="0"/>
-              </a:rPr>
-              <a:t>echo "Finished </a:t>
-            </a:r>
-            <a:r>
-              <a:rPr lang="en-GB" sz="1400" dirty="0" err="1">
-                <a:latin typeface="Courier New" panose="02070309020205020404" pitchFamily="49" charset="0"/>
-                <a:cs typeface="Courier New" panose="02070309020205020404" pitchFamily="49" charset="0"/>
-              </a:rPr>
-              <a:t>fastp</a:t>
-            </a:r>
-            <a:r>
-              <a:rPr lang="en-GB" sz="1400" dirty="0">
-                <a:latin typeface="Courier New" panose="02070309020205020404" pitchFamily="49" charset="0"/>
-                <a:cs typeface="Courier New" panose="02070309020205020404" pitchFamily="49" charset="0"/>
-              </a:rPr>
-              <a:t> for ${sample}"</a:t>
-            </a:r>
-          </a:p>
-        </p:txBody>
-      </p:sp>
-    </p:spTree>
-    <p:extLst>
-      <p:ext uri="{BB962C8B-B14F-4D97-AF65-F5344CB8AC3E}">
-        <p14:creationId xmlns:p14="http://schemas.microsoft.com/office/powerpoint/2010/main" val="507458794"/>
-      </p:ext>
-    </p:extLst>
-  </p:cSld>
-  <p:clrMapOvr>
-    <a:masterClrMapping/>
-  </p:clrMapOvr>
-</p:sld>
-</file>
-
 <file path=ppt/slides/slide35.xml><?xml version="1.0" encoding="utf-8"?>
 <p:sld xmlns:a="http://schemas.openxmlformats.org/drawingml/2006/main" xmlns:r="http://schemas.openxmlformats.org/officeDocument/2006/relationships" xmlns:p="http://schemas.openxmlformats.org/presentationml/2006/main">
   <p:cSld>
@@ -20144,6 +21459,1075 @@
       </p:grpSpPr>
       <p:sp>
         <p:nvSpPr>
+          <p:cNvPr id="4" name="Date Placeholder 3">
+            <a:extLst>
+              <a:ext uri="{FF2B5EF4-FFF2-40B4-BE49-F238E27FC236}">
+                <a16:creationId xmlns:a16="http://schemas.microsoft.com/office/drawing/2014/main" id="{0A0AE082-C1A9-1B3F-D795-57F2AB077DC5}"/>
+              </a:ext>
+            </a:extLst>
+          </p:cNvPr>
+          <p:cNvSpPr>
+            <a:spLocks noGrp="1"/>
+          </p:cNvSpPr>
+          <p:nvPr>
+            <p:ph type="dt" sz="half" idx="10"/>
+          </p:nvPr>
+        </p:nvSpPr>
+        <p:spPr/>
+        <p:txBody>
+          <a:bodyPr/>
+          <a:lstStyle/>
+          <a:p>
+            <a:fld id="{761DFEEA-1162-B343-ACBF-B3E92F6AC390}" type="datetime1">
+              <a:rPr lang="it-IT" smtClean="0"/>
+              <a:t>21/09/26</a:t>
+            </a:fld>
+            <a:endParaRPr lang="en-GB"/>
+          </a:p>
+        </p:txBody>
+      </p:sp>
+      <p:sp>
+        <p:nvSpPr>
+          <p:cNvPr id="5" name="Footer Placeholder 4">
+            <a:extLst>
+              <a:ext uri="{FF2B5EF4-FFF2-40B4-BE49-F238E27FC236}">
+                <a16:creationId xmlns:a16="http://schemas.microsoft.com/office/drawing/2014/main" id="{DF914694-E199-CC70-ACF8-FAD4E53C60D7}"/>
+              </a:ext>
+            </a:extLst>
+          </p:cNvPr>
+          <p:cNvSpPr>
+            <a:spLocks noGrp="1"/>
+          </p:cNvSpPr>
+          <p:nvPr>
+            <p:ph type="ftr" sz="quarter" idx="11"/>
+          </p:nvPr>
+        </p:nvSpPr>
+        <p:spPr/>
+        <p:txBody>
+          <a:bodyPr/>
+          <a:lstStyle/>
+          <a:p>
+            <a:r>
+              <a:rPr lang="en-GB"/>
+              <a:t>Day 1: Reproducible NGS Data Analysis on Personal Laptops</a:t>
+            </a:r>
+          </a:p>
+        </p:txBody>
+      </p:sp>
+      <p:sp>
+        <p:nvSpPr>
+          <p:cNvPr id="6" name="Slide Number Placeholder 5">
+            <a:extLst>
+              <a:ext uri="{FF2B5EF4-FFF2-40B4-BE49-F238E27FC236}">
+                <a16:creationId xmlns:a16="http://schemas.microsoft.com/office/drawing/2014/main" id="{CCCE29CA-B368-9210-8875-DD7C28F841C6}"/>
+              </a:ext>
+            </a:extLst>
+          </p:cNvPr>
+          <p:cNvSpPr>
+            <a:spLocks noGrp="1"/>
+          </p:cNvSpPr>
+          <p:nvPr>
+            <p:ph type="sldNum" sz="quarter" idx="12"/>
+          </p:nvPr>
+        </p:nvSpPr>
+        <p:spPr/>
+        <p:txBody>
+          <a:bodyPr/>
+          <a:lstStyle/>
+          <a:p>
+            <a:fld id="{62E92BA6-6E87-3343-8D2C-B7A656D628E4}" type="slidenum">
+              <a:rPr lang="en-GB" smtClean="0"/>
+              <a:t>34</a:t>
+            </a:fld>
+            <a:endParaRPr lang="en-GB"/>
+          </a:p>
+        </p:txBody>
+      </p:sp>
+      <p:sp>
+        <p:nvSpPr>
+          <p:cNvPr id="7" name="TextBox 6">
+            <a:extLst>
+              <a:ext uri="{FF2B5EF4-FFF2-40B4-BE49-F238E27FC236}">
+                <a16:creationId xmlns:a16="http://schemas.microsoft.com/office/drawing/2014/main" id="{239251DB-FCF4-1761-552E-97CFE53C02B2}"/>
+              </a:ext>
+            </a:extLst>
+          </p:cNvPr>
+          <p:cNvSpPr txBox="1"/>
+          <p:nvPr/>
+        </p:nvSpPr>
+        <p:spPr>
+          <a:xfrm>
+            <a:off x="520523" y="0"/>
+            <a:ext cx="5575477" cy="6340197"/>
+          </a:xfrm>
+          <a:prstGeom prst="rect">
+            <a:avLst/>
+          </a:prstGeom>
+          <a:noFill/>
+          <a:ln>
+            <a:solidFill>
+              <a:schemeClr val="tx1"/>
+            </a:solidFill>
+          </a:ln>
+        </p:spPr>
+        <p:txBody>
+          <a:bodyPr wrap="square">
+            <a:spAutoFit/>
+          </a:bodyPr>
+          <a:lstStyle/>
+          <a:p>
+            <a:r>
+              <a:rPr lang="en-GB" sz="1400" dirty="0">
+                <a:latin typeface="Courier New" panose="02070309020205020404" pitchFamily="49" charset="0"/>
+                <a:cs typeface="Courier New" panose="02070309020205020404" pitchFamily="49" charset="0"/>
+              </a:rPr>
+              <a:t>#!/</a:t>
+            </a:r>
+            <a:r>
+              <a:rPr lang="en-GB" sz="1400" dirty="0" err="1">
+                <a:latin typeface="Courier New" panose="02070309020205020404" pitchFamily="49" charset="0"/>
+                <a:cs typeface="Courier New" panose="02070309020205020404" pitchFamily="49" charset="0"/>
+              </a:rPr>
+              <a:t>usr</a:t>
+            </a:r>
+            <a:r>
+              <a:rPr lang="en-GB" sz="1400" dirty="0">
+                <a:latin typeface="Courier New" panose="02070309020205020404" pitchFamily="49" charset="0"/>
+                <a:cs typeface="Courier New" panose="02070309020205020404" pitchFamily="49" charset="0"/>
+              </a:rPr>
+              <a:t>/bin/env bash</a:t>
+            </a:r>
+          </a:p>
+          <a:p>
+            <a:r>
+              <a:rPr lang="en-GB" sz="1400" dirty="0">
+                <a:latin typeface="Courier New" panose="02070309020205020404" pitchFamily="49" charset="0"/>
+                <a:cs typeface="Courier New" panose="02070309020205020404" pitchFamily="49" charset="0"/>
+              </a:rPr>
+              <a:t>set -</a:t>
+            </a:r>
+            <a:r>
+              <a:rPr lang="en-GB" sz="1400" dirty="0" err="1">
+                <a:latin typeface="Courier New" panose="02070309020205020404" pitchFamily="49" charset="0"/>
+                <a:cs typeface="Courier New" panose="02070309020205020404" pitchFamily="49" charset="0"/>
+              </a:rPr>
+              <a:t>euo</a:t>
+            </a:r>
+            <a:r>
+              <a:rPr lang="en-GB" sz="1400" dirty="0">
+                <a:latin typeface="Courier New" panose="02070309020205020404" pitchFamily="49" charset="0"/>
+                <a:cs typeface="Courier New" panose="02070309020205020404" pitchFamily="49" charset="0"/>
+              </a:rPr>
+              <a:t> </a:t>
+            </a:r>
+            <a:r>
+              <a:rPr lang="en-GB" sz="1400" dirty="0" err="1">
+                <a:latin typeface="Courier New" panose="02070309020205020404" pitchFamily="49" charset="0"/>
+                <a:cs typeface="Courier New" panose="02070309020205020404" pitchFamily="49" charset="0"/>
+              </a:rPr>
+              <a:t>pipefail</a:t>
+            </a:r>
+            <a:endParaRPr lang="en-GB" sz="1400" dirty="0">
+              <a:latin typeface="Courier New" panose="02070309020205020404" pitchFamily="49" charset="0"/>
+              <a:cs typeface="Courier New" panose="02070309020205020404" pitchFamily="49" charset="0"/>
+            </a:endParaRPr>
+          </a:p>
+          <a:p>
+            <a:endParaRPr lang="en-GB" sz="1400" dirty="0">
+              <a:latin typeface="Courier New" panose="02070309020205020404" pitchFamily="49" charset="0"/>
+              <a:cs typeface="Courier New" panose="02070309020205020404" pitchFamily="49" charset="0"/>
+            </a:endParaRPr>
+          </a:p>
+          <a:p>
+            <a:r>
+              <a:rPr lang="en-GB" sz="1400" dirty="0">
+                <a:latin typeface="Courier New" panose="02070309020205020404" pitchFamily="49" charset="0"/>
+                <a:cs typeface="Courier New" panose="02070309020205020404" pitchFamily="49" charset="0"/>
+              </a:rPr>
+              <a:t>sample="WT_2"</a:t>
+            </a:r>
+          </a:p>
+          <a:p>
+            <a:endParaRPr lang="en-GB" sz="1400" dirty="0">
+              <a:latin typeface="Courier New" panose="02070309020205020404" pitchFamily="49" charset="0"/>
+              <a:cs typeface="Courier New" panose="02070309020205020404" pitchFamily="49" charset="0"/>
+            </a:endParaRPr>
+          </a:p>
+          <a:p>
+            <a:r>
+              <a:rPr lang="en-GB" sz="1400" dirty="0" err="1">
+                <a:latin typeface="Courier New" panose="02070309020205020404" pitchFamily="49" charset="0"/>
+                <a:cs typeface="Courier New" panose="02070309020205020404" pitchFamily="49" charset="0"/>
+              </a:rPr>
+              <a:t>raw_dir</a:t>
+            </a:r>
+            <a:r>
+              <a:rPr lang="en-GB" sz="1400" dirty="0">
+                <a:latin typeface="Courier New" panose="02070309020205020404" pitchFamily="49" charset="0"/>
+                <a:cs typeface="Courier New" panose="02070309020205020404" pitchFamily="49" charset="0"/>
+              </a:rPr>
+              <a:t>="</a:t>
+            </a:r>
+            <a:r>
+              <a:rPr lang="en-GB" sz="1400" dirty="0" err="1">
+                <a:latin typeface="Courier New" panose="02070309020205020404" pitchFamily="49" charset="0"/>
+                <a:cs typeface="Courier New" panose="02070309020205020404" pitchFamily="49" charset="0"/>
+              </a:rPr>
+              <a:t>raw_data</a:t>
+            </a:r>
+            <a:r>
+              <a:rPr lang="en-GB" sz="1400" dirty="0">
+                <a:latin typeface="Courier New" panose="02070309020205020404" pitchFamily="49" charset="0"/>
+                <a:cs typeface="Courier New" panose="02070309020205020404" pitchFamily="49" charset="0"/>
+              </a:rPr>
+              <a:t>/</a:t>
+            </a:r>
+            <a:r>
+              <a:rPr lang="en-GB" sz="1400" dirty="0" err="1">
+                <a:latin typeface="Courier New" panose="02070309020205020404" pitchFamily="49" charset="0"/>
+                <a:cs typeface="Courier New" panose="02070309020205020404" pitchFamily="49" charset="0"/>
+              </a:rPr>
+              <a:t>fastq</a:t>
+            </a:r>
+            <a:r>
+              <a:rPr lang="en-GB" sz="1400" dirty="0">
+                <a:latin typeface="Courier New" panose="02070309020205020404" pitchFamily="49" charset="0"/>
+                <a:cs typeface="Courier New" panose="02070309020205020404" pitchFamily="49" charset="0"/>
+              </a:rPr>
+              <a:t>/</a:t>
+            </a:r>
+            <a:r>
+              <a:rPr lang="en-GB" sz="1400" dirty="0" err="1">
+                <a:latin typeface="Courier New" panose="02070309020205020404" pitchFamily="49" charset="0"/>
+                <a:cs typeface="Courier New" panose="02070309020205020404" pitchFamily="49" charset="0"/>
+              </a:rPr>
+              <a:t>rnaseq</a:t>
+            </a:r>
+            <a:r>
+              <a:rPr lang="en-GB" sz="1400" dirty="0">
+                <a:latin typeface="Courier New" panose="02070309020205020404" pitchFamily="49" charset="0"/>
+                <a:cs typeface="Courier New" panose="02070309020205020404" pitchFamily="49" charset="0"/>
+              </a:rPr>
+              <a:t>"</a:t>
+            </a:r>
+          </a:p>
+          <a:p>
+            <a:r>
+              <a:rPr lang="en-GB" sz="1400" dirty="0" err="1">
+                <a:latin typeface="Courier New" panose="02070309020205020404" pitchFamily="49" charset="0"/>
+                <a:cs typeface="Courier New" panose="02070309020205020404" pitchFamily="49" charset="0"/>
+              </a:rPr>
+              <a:t>out_dir</a:t>
+            </a:r>
+            <a:r>
+              <a:rPr lang="en-GB" sz="1400" dirty="0">
+                <a:latin typeface="Courier New" panose="02070309020205020404" pitchFamily="49" charset="0"/>
+                <a:cs typeface="Courier New" panose="02070309020205020404" pitchFamily="49" charset="0"/>
+              </a:rPr>
+              <a:t>="results/day1_qc/</a:t>
+            </a:r>
+            <a:r>
+              <a:rPr lang="en-GB" sz="1400" dirty="0" err="1">
+                <a:latin typeface="Courier New" panose="02070309020205020404" pitchFamily="49" charset="0"/>
+                <a:cs typeface="Courier New" panose="02070309020205020404" pitchFamily="49" charset="0"/>
+              </a:rPr>
+              <a:t>trimmed_fastq</a:t>
+            </a:r>
+            <a:r>
+              <a:rPr lang="en-GB" sz="1400" dirty="0">
+                <a:latin typeface="Courier New" panose="02070309020205020404" pitchFamily="49" charset="0"/>
+                <a:cs typeface="Courier New" panose="02070309020205020404" pitchFamily="49" charset="0"/>
+              </a:rPr>
+              <a:t>/</a:t>
+            </a:r>
+            <a:r>
+              <a:rPr lang="en-GB" sz="1400" dirty="0" err="1">
+                <a:latin typeface="Courier New" panose="02070309020205020404" pitchFamily="49" charset="0"/>
+                <a:cs typeface="Courier New" panose="02070309020205020404" pitchFamily="49" charset="0"/>
+              </a:rPr>
+              <a:t>rnaseq</a:t>
+            </a:r>
+            <a:r>
+              <a:rPr lang="en-GB" sz="1400" dirty="0">
+                <a:latin typeface="Courier New" panose="02070309020205020404" pitchFamily="49" charset="0"/>
+                <a:cs typeface="Courier New" panose="02070309020205020404" pitchFamily="49" charset="0"/>
+              </a:rPr>
+              <a:t>"</a:t>
+            </a:r>
+          </a:p>
+          <a:p>
+            <a:r>
+              <a:rPr lang="en-GB" sz="1400" dirty="0" err="1">
+                <a:latin typeface="Courier New" panose="02070309020205020404" pitchFamily="49" charset="0"/>
+                <a:cs typeface="Courier New" panose="02070309020205020404" pitchFamily="49" charset="0"/>
+              </a:rPr>
+              <a:t>report_dir</a:t>
+            </a:r>
+            <a:r>
+              <a:rPr lang="en-GB" sz="1400" dirty="0">
+                <a:latin typeface="Courier New" panose="02070309020205020404" pitchFamily="49" charset="0"/>
+                <a:cs typeface="Courier New" panose="02070309020205020404" pitchFamily="49" charset="0"/>
+              </a:rPr>
+              <a:t>="results/logs/day1/</a:t>
+            </a:r>
+            <a:r>
+              <a:rPr lang="en-GB" sz="1400" dirty="0" err="1">
+                <a:latin typeface="Courier New" panose="02070309020205020404" pitchFamily="49" charset="0"/>
+                <a:cs typeface="Courier New" panose="02070309020205020404" pitchFamily="49" charset="0"/>
+              </a:rPr>
+              <a:t>fastp</a:t>
+            </a:r>
+            <a:r>
+              <a:rPr lang="en-GB" sz="1400" dirty="0">
+                <a:latin typeface="Courier New" panose="02070309020205020404" pitchFamily="49" charset="0"/>
+                <a:cs typeface="Courier New" panose="02070309020205020404" pitchFamily="49" charset="0"/>
+              </a:rPr>
+              <a:t>"</a:t>
+            </a:r>
+          </a:p>
+          <a:p>
+            <a:endParaRPr lang="en-GB" sz="1400" dirty="0">
+              <a:latin typeface="Courier New" panose="02070309020205020404" pitchFamily="49" charset="0"/>
+              <a:cs typeface="Courier New" panose="02070309020205020404" pitchFamily="49" charset="0"/>
+            </a:endParaRPr>
+          </a:p>
+          <a:p>
+            <a:r>
+              <a:rPr lang="en-GB" sz="1400" dirty="0" err="1">
+                <a:latin typeface="Courier New" panose="02070309020205020404" pitchFamily="49" charset="0"/>
+                <a:cs typeface="Courier New" panose="02070309020205020404" pitchFamily="49" charset="0"/>
+              </a:rPr>
+              <a:t>mkdir</a:t>
+            </a:r>
+            <a:r>
+              <a:rPr lang="en-GB" sz="1400" dirty="0">
+                <a:latin typeface="Courier New" panose="02070309020205020404" pitchFamily="49" charset="0"/>
+                <a:cs typeface="Courier New" panose="02070309020205020404" pitchFamily="49" charset="0"/>
+              </a:rPr>
+              <a:t> -p "${</a:t>
+            </a:r>
+            <a:r>
+              <a:rPr lang="en-GB" sz="1400" dirty="0" err="1">
+                <a:latin typeface="Courier New" panose="02070309020205020404" pitchFamily="49" charset="0"/>
+                <a:cs typeface="Courier New" panose="02070309020205020404" pitchFamily="49" charset="0"/>
+              </a:rPr>
+              <a:t>out_dir</a:t>
+            </a:r>
+            <a:r>
+              <a:rPr lang="en-GB" sz="1400" dirty="0">
+                <a:latin typeface="Courier New" panose="02070309020205020404" pitchFamily="49" charset="0"/>
+                <a:cs typeface="Courier New" panose="02070309020205020404" pitchFamily="49" charset="0"/>
+              </a:rPr>
+              <a:t>}" "${</a:t>
+            </a:r>
+            <a:r>
+              <a:rPr lang="en-GB" sz="1400" dirty="0" err="1">
+                <a:latin typeface="Courier New" panose="02070309020205020404" pitchFamily="49" charset="0"/>
+                <a:cs typeface="Courier New" panose="02070309020205020404" pitchFamily="49" charset="0"/>
+              </a:rPr>
+              <a:t>report_dir</a:t>
+            </a:r>
+            <a:r>
+              <a:rPr lang="en-GB" sz="1400" dirty="0">
+                <a:latin typeface="Courier New" panose="02070309020205020404" pitchFamily="49" charset="0"/>
+                <a:cs typeface="Courier New" panose="02070309020205020404" pitchFamily="49" charset="0"/>
+              </a:rPr>
+              <a:t>}"</a:t>
+            </a:r>
+          </a:p>
+          <a:p>
+            <a:endParaRPr lang="en-GB" sz="1400" dirty="0">
+              <a:latin typeface="Courier New" panose="02070309020205020404" pitchFamily="49" charset="0"/>
+              <a:cs typeface="Courier New" panose="02070309020205020404" pitchFamily="49" charset="0"/>
+            </a:endParaRPr>
+          </a:p>
+          <a:p>
+            <a:r>
+              <a:rPr lang="en-GB" sz="1400" dirty="0">
+                <a:latin typeface="Courier New" panose="02070309020205020404" pitchFamily="49" charset="0"/>
+                <a:cs typeface="Courier New" panose="02070309020205020404" pitchFamily="49" charset="0"/>
+              </a:rPr>
+              <a:t>read1="${</a:t>
+            </a:r>
+            <a:r>
+              <a:rPr lang="en-GB" sz="1400" dirty="0" err="1">
+                <a:latin typeface="Courier New" panose="02070309020205020404" pitchFamily="49" charset="0"/>
+                <a:cs typeface="Courier New" panose="02070309020205020404" pitchFamily="49" charset="0"/>
+              </a:rPr>
+              <a:t>raw_dir</a:t>
+            </a:r>
+            <a:r>
+              <a:rPr lang="en-GB" sz="1400" dirty="0">
+                <a:latin typeface="Courier New" panose="02070309020205020404" pitchFamily="49" charset="0"/>
+                <a:cs typeface="Courier New" panose="02070309020205020404" pitchFamily="49" charset="0"/>
+              </a:rPr>
+              <a:t>}/${sample}_R1.fastq.gz"</a:t>
+            </a:r>
+          </a:p>
+          <a:p>
+            <a:r>
+              <a:rPr lang="en-GB" sz="1400" dirty="0">
+                <a:latin typeface="Courier New" panose="02070309020205020404" pitchFamily="49" charset="0"/>
+                <a:cs typeface="Courier New" panose="02070309020205020404" pitchFamily="49" charset="0"/>
+              </a:rPr>
+              <a:t>read2="${</a:t>
+            </a:r>
+            <a:r>
+              <a:rPr lang="en-GB" sz="1400" dirty="0" err="1">
+                <a:latin typeface="Courier New" panose="02070309020205020404" pitchFamily="49" charset="0"/>
+                <a:cs typeface="Courier New" panose="02070309020205020404" pitchFamily="49" charset="0"/>
+              </a:rPr>
+              <a:t>raw_dir</a:t>
+            </a:r>
+            <a:r>
+              <a:rPr lang="en-GB" sz="1400" dirty="0">
+                <a:latin typeface="Courier New" panose="02070309020205020404" pitchFamily="49" charset="0"/>
+                <a:cs typeface="Courier New" panose="02070309020205020404" pitchFamily="49" charset="0"/>
+              </a:rPr>
+              <a:t>}/${sample}_R2.fastq.gz"</a:t>
+            </a:r>
+          </a:p>
+          <a:p>
+            <a:endParaRPr lang="en-GB" sz="1400" dirty="0">
+              <a:latin typeface="Courier New" panose="02070309020205020404" pitchFamily="49" charset="0"/>
+              <a:cs typeface="Courier New" panose="02070309020205020404" pitchFamily="49" charset="0"/>
+            </a:endParaRPr>
+          </a:p>
+          <a:p>
+            <a:r>
+              <a:rPr lang="en-GB" sz="1400" dirty="0" err="1">
+                <a:latin typeface="Courier New" panose="02070309020205020404" pitchFamily="49" charset="0"/>
+                <a:cs typeface="Courier New" panose="02070309020205020404" pitchFamily="49" charset="0"/>
+              </a:rPr>
+              <a:t>fastp</a:t>
+            </a:r>
+            <a:r>
+              <a:rPr lang="en-GB" sz="1400" dirty="0">
+                <a:latin typeface="Courier New" panose="02070309020205020404" pitchFamily="49" charset="0"/>
+                <a:cs typeface="Courier New" panose="02070309020205020404" pitchFamily="49" charset="0"/>
+              </a:rPr>
+              <a:t> \</a:t>
+            </a:r>
+          </a:p>
+          <a:p>
+            <a:r>
+              <a:rPr lang="en-GB" sz="1400" dirty="0">
+                <a:latin typeface="Courier New" panose="02070309020205020404" pitchFamily="49" charset="0"/>
+                <a:cs typeface="Courier New" panose="02070309020205020404" pitchFamily="49" charset="0"/>
+              </a:rPr>
+              <a:t>  -</a:t>
+            </a:r>
+            <a:r>
+              <a:rPr lang="en-GB" sz="1400" dirty="0" err="1">
+                <a:latin typeface="Courier New" panose="02070309020205020404" pitchFamily="49" charset="0"/>
+                <a:cs typeface="Courier New" panose="02070309020205020404" pitchFamily="49" charset="0"/>
+              </a:rPr>
+              <a:t>i</a:t>
+            </a:r>
+            <a:r>
+              <a:rPr lang="en-GB" sz="1400" dirty="0">
+                <a:latin typeface="Courier New" panose="02070309020205020404" pitchFamily="49" charset="0"/>
+                <a:cs typeface="Courier New" panose="02070309020205020404" pitchFamily="49" charset="0"/>
+              </a:rPr>
+              <a:t> "${read1}" \</a:t>
+            </a:r>
+          </a:p>
+          <a:p>
+            <a:r>
+              <a:rPr lang="en-GB" sz="1400" dirty="0">
+                <a:latin typeface="Courier New" panose="02070309020205020404" pitchFamily="49" charset="0"/>
+                <a:cs typeface="Courier New" panose="02070309020205020404" pitchFamily="49" charset="0"/>
+              </a:rPr>
+              <a:t>  -I "${read2}" \</a:t>
+            </a:r>
+          </a:p>
+          <a:p>
+            <a:r>
+              <a:rPr lang="en-GB" sz="1400" dirty="0">
+                <a:latin typeface="Courier New" panose="02070309020205020404" pitchFamily="49" charset="0"/>
+                <a:cs typeface="Courier New" panose="02070309020205020404" pitchFamily="49" charset="0"/>
+              </a:rPr>
+              <a:t>  -o "${</a:t>
+            </a:r>
+            <a:r>
+              <a:rPr lang="en-GB" sz="1400" dirty="0" err="1">
+                <a:latin typeface="Courier New" panose="02070309020205020404" pitchFamily="49" charset="0"/>
+                <a:cs typeface="Courier New" panose="02070309020205020404" pitchFamily="49" charset="0"/>
+              </a:rPr>
+              <a:t>out_dir</a:t>
+            </a:r>
+            <a:r>
+              <a:rPr lang="en-GB" sz="1400" dirty="0">
+                <a:latin typeface="Courier New" panose="02070309020205020404" pitchFamily="49" charset="0"/>
+                <a:cs typeface="Courier New" panose="02070309020205020404" pitchFamily="49" charset="0"/>
+              </a:rPr>
+              <a:t>}/${sample}_R1.trimmed.fastq.gz" \</a:t>
+            </a:r>
+          </a:p>
+          <a:p>
+            <a:r>
+              <a:rPr lang="en-GB" sz="1400" dirty="0">
+                <a:latin typeface="Courier New" panose="02070309020205020404" pitchFamily="49" charset="0"/>
+                <a:cs typeface="Courier New" panose="02070309020205020404" pitchFamily="49" charset="0"/>
+              </a:rPr>
+              <a:t>  -O "${</a:t>
+            </a:r>
+            <a:r>
+              <a:rPr lang="en-GB" sz="1400" dirty="0" err="1">
+                <a:latin typeface="Courier New" panose="02070309020205020404" pitchFamily="49" charset="0"/>
+                <a:cs typeface="Courier New" panose="02070309020205020404" pitchFamily="49" charset="0"/>
+              </a:rPr>
+              <a:t>out_dir</a:t>
+            </a:r>
+            <a:r>
+              <a:rPr lang="en-GB" sz="1400" dirty="0">
+                <a:latin typeface="Courier New" panose="02070309020205020404" pitchFamily="49" charset="0"/>
+                <a:cs typeface="Courier New" panose="02070309020205020404" pitchFamily="49" charset="0"/>
+              </a:rPr>
+              <a:t>}/${sample}_R2.trimmed.fastq.gz" \</a:t>
+            </a:r>
+          </a:p>
+          <a:p>
+            <a:r>
+              <a:rPr lang="en-GB" sz="1400" dirty="0">
+                <a:latin typeface="Courier New" panose="02070309020205020404" pitchFamily="49" charset="0"/>
+                <a:cs typeface="Courier New" panose="02070309020205020404" pitchFamily="49" charset="0"/>
+              </a:rPr>
+              <a:t>  --</a:t>
+            </a:r>
+            <a:r>
+              <a:rPr lang="en-GB" sz="1400" dirty="0" err="1">
+                <a:latin typeface="Courier New" panose="02070309020205020404" pitchFamily="49" charset="0"/>
+                <a:cs typeface="Courier New" panose="02070309020205020404" pitchFamily="49" charset="0"/>
+              </a:rPr>
+              <a:t>detect_adapter_for_pe</a:t>
+            </a:r>
+            <a:r>
+              <a:rPr lang="en-GB" sz="1400" dirty="0">
+                <a:latin typeface="Courier New" panose="02070309020205020404" pitchFamily="49" charset="0"/>
+                <a:cs typeface="Courier New" panose="02070309020205020404" pitchFamily="49" charset="0"/>
+              </a:rPr>
+              <a:t> \</a:t>
+            </a:r>
+          </a:p>
+          <a:p>
+            <a:r>
+              <a:rPr lang="en-GB" sz="1400" dirty="0">
+                <a:latin typeface="Courier New" panose="02070309020205020404" pitchFamily="49" charset="0"/>
+                <a:cs typeface="Courier New" panose="02070309020205020404" pitchFamily="49" charset="0"/>
+              </a:rPr>
+              <a:t>  --</a:t>
+            </a:r>
+            <a:r>
+              <a:rPr lang="en-GB" sz="1400" dirty="0" err="1">
+                <a:latin typeface="Courier New" panose="02070309020205020404" pitchFamily="49" charset="0"/>
+                <a:cs typeface="Courier New" panose="02070309020205020404" pitchFamily="49" charset="0"/>
+              </a:rPr>
+              <a:t>cut_tail</a:t>
+            </a:r>
+            <a:r>
+              <a:rPr lang="en-GB" sz="1400" dirty="0">
+                <a:latin typeface="Courier New" panose="02070309020205020404" pitchFamily="49" charset="0"/>
+                <a:cs typeface="Courier New" panose="02070309020205020404" pitchFamily="49" charset="0"/>
+              </a:rPr>
+              <a:t> \</a:t>
+            </a:r>
+          </a:p>
+          <a:p>
+            <a:r>
+              <a:rPr lang="en-GB" sz="1400" dirty="0">
+                <a:latin typeface="Courier New" panose="02070309020205020404" pitchFamily="49" charset="0"/>
+                <a:cs typeface="Courier New" panose="02070309020205020404" pitchFamily="49" charset="0"/>
+              </a:rPr>
+              <a:t>  --</a:t>
+            </a:r>
+            <a:r>
+              <a:rPr lang="en-GB" sz="1400" dirty="0" err="1">
+                <a:latin typeface="Courier New" panose="02070309020205020404" pitchFamily="49" charset="0"/>
+                <a:cs typeface="Courier New" panose="02070309020205020404" pitchFamily="49" charset="0"/>
+              </a:rPr>
+              <a:t>cut_tail_window_size</a:t>
+            </a:r>
+            <a:r>
+              <a:rPr lang="en-GB" sz="1400" dirty="0">
+                <a:latin typeface="Courier New" panose="02070309020205020404" pitchFamily="49" charset="0"/>
+                <a:cs typeface="Courier New" panose="02070309020205020404" pitchFamily="49" charset="0"/>
+              </a:rPr>
+              <a:t> 4 \</a:t>
+            </a:r>
+          </a:p>
+          <a:p>
+            <a:r>
+              <a:rPr lang="en-GB" sz="1400" dirty="0">
+                <a:latin typeface="Courier New" panose="02070309020205020404" pitchFamily="49" charset="0"/>
+                <a:cs typeface="Courier New" panose="02070309020205020404" pitchFamily="49" charset="0"/>
+              </a:rPr>
+              <a:t>  --</a:t>
+            </a:r>
+            <a:r>
+              <a:rPr lang="en-GB" sz="1400" dirty="0" err="1">
+                <a:latin typeface="Courier New" panose="02070309020205020404" pitchFamily="49" charset="0"/>
+                <a:cs typeface="Courier New" panose="02070309020205020404" pitchFamily="49" charset="0"/>
+              </a:rPr>
+              <a:t>cut_tail_mean_quality</a:t>
+            </a:r>
+            <a:r>
+              <a:rPr lang="en-GB" sz="1400" dirty="0">
+                <a:latin typeface="Courier New" panose="02070309020205020404" pitchFamily="49" charset="0"/>
+                <a:cs typeface="Courier New" panose="02070309020205020404" pitchFamily="49" charset="0"/>
+              </a:rPr>
+              <a:t> 20 \</a:t>
+            </a:r>
+          </a:p>
+          <a:p>
+            <a:r>
+              <a:rPr lang="en-GB" sz="1400" dirty="0">
+                <a:latin typeface="Courier New" panose="02070309020205020404" pitchFamily="49" charset="0"/>
+                <a:cs typeface="Courier New" panose="02070309020205020404" pitchFamily="49" charset="0"/>
+              </a:rPr>
+              <a:t>  --thread 2 \</a:t>
+            </a:r>
+          </a:p>
+          <a:p>
+            <a:r>
+              <a:rPr lang="en-GB" sz="1400" dirty="0">
+                <a:latin typeface="Courier New" panose="02070309020205020404" pitchFamily="49" charset="0"/>
+                <a:cs typeface="Courier New" panose="02070309020205020404" pitchFamily="49" charset="0"/>
+              </a:rPr>
+              <a:t>  --html "${</a:t>
+            </a:r>
+            <a:r>
+              <a:rPr lang="en-GB" sz="1400" dirty="0" err="1">
+                <a:latin typeface="Courier New" panose="02070309020205020404" pitchFamily="49" charset="0"/>
+                <a:cs typeface="Courier New" panose="02070309020205020404" pitchFamily="49" charset="0"/>
+              </a:rPr>
+              <a:t>report_dir</a:t>
+            </a:r>
+            <a:r>
+              <a:rPr lang="en-GB" sz="1400" dirty="0">
+                <a:latin typeface="Courier New" panose="02070309020205020404" pitchFamily="49" charset="0"/>
+                <a:cs typeface="Courier New" panose="02070309020205020404" pitchFamily="49" charset="0"/>
+              </a:rPr>
+              <a:t>}/${sample}.</a:t>
+            </a:r>
+            <a:r>
+              <a:rPr lang="en-GB" sz="1400" dirty="0" err="1">
+                <a:latin typeface="Courier New" panose="02070309020205020404" pitchFamily="49" charset="0"/>
+                <a:cs typeface="Courier New" panose="02070309020205020404" pitchFamily="49" charset="0"/>
+              </a:rPr>
+              <a:t>fastp.html</a:t>
+            </a:r>
+            <a:r>
+              <a:rPr lang="en-GB" sz="1400" dirty="0">
+                <a:latin typeface="Courier New" panose="02070309020205020404" pitchFamily="49" charset="0"/>
+                <a:cs typeface="Courier New" panose="02070309020205020404" pitchFamily="49" charset="0"/>
+              </a:rPr>
+              <a:t>" \</a:t>
+            </a:r>
+          </a:p>
+          <a:p>
+            <a:r>
+              <a:rPr lang="en-GB" sz="1400" dirty="0">
+                <a:latin typeface="Courier New" panose="02070309020205020404" pitchFamily="49" charset="0"/>
+                <a:cs typeface="Courier New" panose="02070309020205020404" pitchFamily="49" charset="0"/>
+              </a:rPr>
+              <a:t>  --</a:t>
+            </a:r>
+            <a:r>
+              <a:rPr lang="en-GB" sz="1400" dirty="0" err="1">
+                <a:latin typeface="Courier New" panose="02070309020205020404" pitchFamily="49" charset="0"/>
+                <a:cs typeface="Courier New" panose="02070309020205020404" pitchFamily="49" charset="0"/>
+              </a:rPr>
+              <a:t>json</a:t>
+            </a:r>
+            <a:r>
+              <a:rPr lang="en-GB" sz="1400" dirty="0">
+                <a:latin typeface="Courier New" panose="02070309020205020404" pitchFamily="49" charset="0"/>
+                <a:cs typeface="Courier New" panose="02070309020205020404" pitchFamily="49" charset="0"/>
+              </a:rPr>
+              <a:t> "${</a:t>
+            </a:r>
+            <a:r>
+              <a:rPr lang="en-GB" sz="1400" dirty="0" err="1">
+                <a:latin typeface="Courier New" panose="02070309020205020404" pitchFamily="49" charset="0"/>
+                <a:cs typeface="Courier New" panose="02070309020205020404" pitchFamily="49" charset="0"/>
+              </a:rPr>
+              <a:t>report_dir</a:t>
+            </a:r>
+            <a:r>
+              <a:rPr lang="en-GB" sz="1400" dirty="0">
+                <a:latin typeface="Courier New" panose="02070309020205020404" pitchFamily="49" charset="0"/>
+                <a:cs typeface="Courier New" panose="02070309020205020404" pitchFamily="49" charset="0"/>
+              </a:rPr>
+              <a:t>}/${sample}.</a:t>
+            </a:r>
+            <a:r>
+              <a:rPr lang="en-GB" sz="1400" dirty="0" err="1">
+                <a:latin typeface="Courier New" panose="02070309020205020404" pitchFamily="49" charset="0"/>
+                <a:cs typeface="Courier New" panose="02070309020205020404" pitchFamily="49" charset="0"/>
+              </a:rPr>
+              <a:t>fastp.json</a:t>
+            </a:r>
+            <a:r>
+              <a:rPr lang="en-GB" sz="1400" dirty="0">
+                <a:latin typeface="Courier New" panose="02070309020205020404" pitchFamily="49" charset="0"/>
+                <a:cs typeface="Courier New" panose="02070309020205020404" pitchFamily="49" charset="0"/>
+              </a:rPr>
+              <a:t>" \</a:t>
+            </a:r>
+          </a:p>
+          <a:p>
+            <a:r>
+              <a:rPr lang="en-GB" sz="1400" dirty="0">
+                <a:latin typeface="Courier New" panose="02070309020205020404" pitchFamily="49" charset="0"/>
+                <a:cs typeface="Courier New" panose="02070309020205020404" pitchFamily="49" charset="0"/>
+              </a:rPr>
+              <a:t>  &gt; "${</a:t>
+            </a:r>
+            <a:r>
+              <a:rPr lang="en-GB" sz="1400" dirty="0" err="1">
+                <a:latin typeface="Courier New" panose="02070309020205020404" pitchFamily="49" charset="0"/>
+                <a:cs typeface="Courier New" panose="02070309020205020404" pitchFamily="49" charset="0"/>
+              </a:rPr>
+              <a:t>report_dir</a:t>
+            </a:r>
+            <a:r>
+              <a:rPr lang="en-GB" sz="1400" dirty="0">
+                <a:latin typeface="Courier New" panose="02070309020205020404" pitchFamily="49" charset="0"/>
+                <a:cs typeface="Courier New" panose="02070309020205020404" pitchFamily="49" charset="0"/>
+              </a:rPr>
+              <a:t>}/${sample}.</a:t>
+            </a:r>
+            <a:r>
+              <a:rPr lang="en-GB" sz="1400" dirty="0" err="1">
+                <a:latin typeface="Courier New" panose="02070309020205020404" pitchFamily="49" charset="0"/>
+                <a:cs typeface="Courier New" panose="02070309020205020404" pitchFamily="49" charset="0"/>
+              </a:rPr>
+              <a:t>fastp.log</a:t>
+            </a:r>
+            <a:r>
+              <a:rPr lang="en-GB" sz="1400" dirty="0">
+                <a:latin typeface="Courier New" panose="02070309020205020404" pitchFamily="49" charset="0"/>
+                <a:cs typeface="Courier New" panose="02070309020205020404" pitchFamily="49" charset="0"/>
+              </a:rPr>
+              <a:t>" 2&gt;&amp;1</a:t>
+            </a:r>
+          </a:p>
+          <a:p>
+            <a:endParaRPr lang="en-GB" sz="1400" dirty="0">
+              <a:latin typeface="Courier New" panose="02070309020205020404" pitchFamily="49" charset="0"/>
+              <a:cs typeface="Courier New" panose="02070309020205020404" pitchFamily="49" charset="0"/>
+            </a:endParaRPr>
+          </a:p>
+          <a:p>
+            <a:r>
+              <a:rPr lang="en-GB" sz="1400" dirty="0">
+                <a:latin typeface="Courier New" panose="02070309020205020404" pitchFamily="49" charset="0"/>
+                <a:cs typeface="Courier New" panose="02070309020205020404" pitchFamily="49" charset="0"/>
+              </a:rPr>
+              <a:t>echo "Finished </a:t>
+            </a:r>
+            <a:r>
+              <a:rPr lang="en-GB" sz="1400" dirty="0" err="1">
+                <a:latin typeface="Courier New" panose="02070309020205020404" pitchFamily="49" charset="0"/>
+                <a:cs typeface="Courier New" panose="02070309020205020404" pitchFamily="49" charset="0"/>
+              </a:rPr>
+              <a:t>fastp</a:t>
+            </a:r>
+            <a:r>
+              <a:rPr lang="en-GB" sz="1400" dirty="0">
+                <a:latin typeface="Courier New" panose="02070309020205020404" pitchFamily="49" charset="0"/>
+                <a:cs typeface="Courier New" panose="02070309020205020404" pitchFamily="49" charset="0"/>
+              </a:rPr>
+              <a:t> for ${sample}"</a:t>
+            </a:r>
+          </a:p>
+        </p:txBody>
+      </p:sp>
+      <p:sp>
+        <p:nvSpPr>
+          <p:cNvPr id="2" name="TextBox 1">
+            <a:extLst>
+              <a:ext uri="{FF2B5EF4-FFF2-40B4-BE49-F238E27FC236}">
+                <a16:creationId xmlns:a16="http://schemas.microsoft.com/office/drawing/2014/main" id="{B8DCBC38-8369-8B0D-D225-EF5376F6A205}"/>
+              </a:ext>
+            </a:extLst>
+          </p:cNvPr>
+          <p:cNvSpPr txBox="1"/>
+          <p:nvPr/>
+        </p:nvSpPr>
+        <p:spPr>
+          <a:xfrm>
+            <a:off x="5280616" y="1824660"/>
+            <a:ext cx="6390861" cy="1477328"/>
+          </a:xfrm>
+          <a:prstGeom prst="rect">
+            <a:avLst/>
+          </a:prstGeom>
+          <a:solidFill>
+            <a:schemeClr val="bg1"/>
+          </a:solidFill>
+          <a:ln>
+            <a:solidFill>
+              <a:schemeClr val="tx1"/>
+            </a:solidFill>
+          </a:ln>
+        </p:spPr>
+        <p:txBody>
+          <a:bodyPr wrap="square">
+            <a:spAutoFit/>
+          </a:bodyPr>
+          <a:lstStyle/>
+          <a:p>
+            <a:r>
+              <a:rPr lang="en-GB" dirty="0">
+                <a:latin typeface="Courier New" panose="02070309020205020404" pitchFamily="49" charset="0"/>
+                <a:cs typeface="Courier New" panose="02070309020205020404" pitchFamily="49" charset="0"/>
+              </a:rPr>
+              <a:t>docker run --rm \</a:t>
+            </a:r>
+          </a:p>
+          <a:p>
+            <a:r>
+              <a:rPr lang="en-GB" dirty="0">
+                <a:latin typeface="Courier New" panose="02070309020205020404" pitchFamily="49" charset="0"/>
+                <a:cs typeface="Courier New" panose="02070309020205020404" pitchFamily="49" charset="0"/>
+              </a:rPr>
+              <a:t>  -v "$PWD:/work" \</a:t>
+            </a:r>
+          </a:p>
+          <a:p>
+            <a:r>
+              <a:rPr lang="en-GB" dirty="0">
+                <a:latin typeface="Courier New" panose="02070309020205020404" pitchFamily="49" charset="0"/>
+                <a:cs typeface="Courier New" panose="02070309020205020404" pitchFamily="49" charset="0"/>
+              </a:rPr>
+              <a:t>  -w /work \</a:t>
+            </a:r>
+          </a:p>
+          <a:p>
+            <a:r>
+              <a:rPr lang="en-GB" dirty="0">
+                <a:latin typeface="Courier New" panose="02070309020205020404" pitchFamily="49" charset="0"/>
+                <a:cs typeface="Courier New" panose="02070309020205020404" pitchFamily="49" charset="0"/>
+              </a:rPr>
+              <a:t>  </a:t>
+            </a:r>
+            <a:r>
+              <a:rPr lang="en-GB" dirty="0" err="1">
+                <a:latin typeface="Courier New" panose="02070309020205020404" pitchFamily="49" charset="0"/>
+                <a:cs typeface="Courier New" panose="02070309020205020404" pitchFamily="49" charset="0"/>
+              </a:rPr>
+              <a:t>docker.io</a:t>
+            </a:r>
+            <a:r>
+              <a:rPr lang="en-GB" dirty="0">
+                <a:latin typeface="Courier New" panose="02070309020205020404" pitchFamily="49" charset="0"/>
+                <a:cs typeface="Courier New" panose="02070309020205020404" pitchFamily="49" charset="0"/>
+              </a:rPr>
+              <a:t>/</a:t>
+            </a:r>
+            <a:r>
+              <a:rPr lang="en-GB" dirty="0" err="1">
+                <a:latin typeface="Courier New" panose="02070309020205020404" pitchFamily="49" charset="0"/>
+                <a:cs typeface="Courier New" panose="02070309020205020404" pitchFamily="49" charset="0"/>
+              </a:rPr>
+              <a:t>fgualdr</a:t>
+            </a:r>
+            <a:r>
+              <a:rPr lang="en-GB" dirty="0">
+                <a:latin typeface="Courier New" panose="02070309020205020404" pitchFamily="49" charset="0"/>
+                <a:cs typeface="Courier New" panose="02070309020205020404" pitchFamily="49" charset="0"/>
+              </a:rPr>
+              <a:t>/</a:t>
+            </a:r>
+            <a:r>
+              <a:rPr lang="en-GB" dirty="0" err="1">
+                <a:latin typeface="Courier New" panose="02070309020205020404" pitchFamily="49" charset="0"/>
+                <a:cs typeface="Courier New" panose="02070309020205020404" pitchFamily="49" charset="0"/>
+              </a:rPr>
+              <a:t>ngs-fastp</a:t>
+            </a:r>
+            <a:r>
+              <a:rPr lang="en-GB" dirty="0">
+                <a:latin typeface="Courier New" panose="02070309020205020404" pitchFamily="49" charset="0"/>
+                <a:cs typeface="Courier New" panose="02070309020205020404" pitchFamily="49" charset="0"/>
+              </a:rPr>
+              <a:t> \</a:t>
+            </a:r>
+          </a:p>
+          <a:p>
+            <a:r>
+              <a:rPr lang="en-GB" dirty="0">
+                <a:latin typeface="Courier New" panose="02070309020205020404" pitchFamily="49" charset="0"/>
+                <a:cs typeface="Courier New" panose="02070309020205020404" pitchFamily="49" charset="0"/>
+              </a:rPr>
+              <a:t>  bash </a:t>
+            </a:r>
+            <a:r>
+              <a:rPr lang="en-IT" dirty="0">
+                <a:latin typeface="Courier New" panose="02070309020205020404" pitchFamily="49" charset="0"/>
+                <a:cs typeface="Courier New" panose="02070309020205020404" pitchFamily="49" charset="0"/>
+              </a:rPr>
+              <a:t>scripts/day1/03_trim_fastq.sh</a:t>
+            </a:r>
+            <a:endParaRPr lang="en-GB" dirty="0">
+              <a:solidFill>
+                <a:schemeClr val="accent1">
+                  <a:lumMod val="75000"/>
+                </a:schemeClr>
+              </a:solidFill>
+              <a:latin typeface="Courier New" panose="02070309020205020404" pitchFamily="49" charset="0"/>
+              <a:cs typeface="Courier New" panose="02070309020205020404" pitchFamily="49" charset="0"/>
+            </a:endParaRPr>
+          </a:p>
+        </p:txBody>
+      </p:sp>
+      <p:sp>
+        <p:nvSpPr>
+          <p:cNvPr id="3" name="TextBox 2">
+            <a:extLst>
+              <a:ext uri="{FF2B5EF4-FFF2-40B4-BE49-F238E27FC236}">
+                <a16:creationId xmlns:a16="http://schemas.microsoft.com/office/drawing/2014/main" id="{2DAB4971-D6FB-7098-84AD-949E0FC0AE80}"/>
+              </a:ext>
+            </a:extLst>
+          </p:cNvPr>
+          <p:cNvSpPr txBox="1"/>
+          <p:nvPr/>
+        </p:nvSpPr>
+        <p:spPr>
+          <a:xfrm>
+            <a:off x="10477881" y="1824660"/>
+            <a:ext cx="1193596" cy="369332"/>
+          </a:xfrm>
+          <a:prstGeom prst="rect">
+            <a:avLst/>
+          </a:prstGeom>
+          <a:noFill/>
+        </p:spPr>
+        <p:txBody>
+          <a:bodyPr wrap="none" rtlCol="0">
+            <a:spAutoFit/>
+          </a:bodyPr>
+          <a:lstStyle/>
+          <a:p>
+            <a:r>
+              <a:rPr lang="en-GB" dirty="0"/>
+              <a:t>In Terminal</a:t>
+            </a:r>
+          </a:p>
+        </p:txBody>
+      </p:sp>
+    </p:spTree>
+    <p:extLst>
+      <p:ext uri="{BB962C8B-B14F-4D97-AF65-F5344CB8AC3E}">
+        <p14:creationId xmlns:p14="http://schemas.microsoft.com/office/powerpoint/2010/main" val="507458794"/>
+      </p:ext>
+    </p:extLst>
+  </p:cSld>
+  <p:clrMapOvr>
+    <a:masterClrMapping/>
+  </p:clrMapOvr>
+  <p:timing>
+    <p:tnLst>
+      <p:par>
+        <p:cTn id="1" dur="indefinite" restart="never" nodeType="tmRoot">
+          <p:childTnLst>
+            <p:seq concurrent="1" nextAc="seek">
+              <p:cTn id="2" dur="indefinite" nodeType="mainSeq">
+                <p:childTnLst>
+                  <p:par>
+                    <p:cTn id="3" fill="hold">
+                      <p:stCondLst>
+                        <p:cond delay="indefinite"/>
+                      </p:stCondLst>
+                      <p:childTnLst>
+                        <p:par>
+                          <p:cTn id="4" fill="hold">
+                            <p:stCondLst>
+                              <p:cond delay="0"/>
+                            </p:stCondLst>
+                            <p:childTnLst>
+                              <p:par>
+                                <p:cTn id="5" presetID="1" presetClass="entr" presetSubtype="0" fill="hold" grpId="0" nodeType="clickEffect">
+                                  <p:stCondLst>
+                                    <p:cond delay="0"/>
+                                  </p:stCondLst>
+                                  <p:childTnLst>
+                                    <p:set>
+                                      <p:cBhvr>
+                                        <p:cTn id="6" dur="1" fill="hold">
+                                          <p:stCondLst>
+                                            <p:cond delay="0"/>
+                                          </p:stCondLst>
+                                        </p:cTn>
+                                        <p:tgtEl>
+                                          <p:spTgt spid="2"/>
+                                        </p:tgtEl>
+                                        <p:attrNameLst>
+                                          <p:attrName>style.visibility</p:attrName>
+                                        </p:attrNameLst>
+                                      </p:cBhvr>
+                                      <p:to>
+                                        <p:strVal val="visible"/>
+                                      </p:to>
+                                    </p:set>
+                                  </p:childTnLst>
+                                </p:cTn>
+                              </p:par>
+                            </p:childTnLst>
+                          </p:cTn>
+                        </p:par>
+                      </p:childTnLst>
+                    </p:cTn>
+                  </p:par>
+                </p:childTnLst>
+              </p:cTn>
+              <p:prevCondLst>
+                <p:cond evt="onPrev" delay="0">
+                  <p:tgtEl>
+                    <p:sldTgt/>
+                  </p:tgtEl>
+                </p:cond>
+              </p:prevCondLst>
+              <p:nextCondLst>
+                <p:cond evt="onNext" delay="0">
+                  <p:tgtEl>
+                    <p:sldTgt/>
+                  </p:tgtEl>
+                </p:cond>
+              </p:nextCondLst>
+            </p:seq>
+          </p:childTnLst>
+        </p:cTn>
+      </p:par>
+    </p:tnLst>
+    <p:bldLst>
+      <p:bldP spid="2" grpId="0" animBg="1"/>
+    </p:bldLst>
+  </p:timing>
+</p:sld>
+</file>
+
+<file path=ppt/slides/slide36.xml><?xml version="1.0" encoding="utf-8"?>
+<p:sld xmlns:a="http://schemas.openxmlformats.org/drawingml/2006/main" xmlns:r="http://schemas.openxmlformats.org/officeDocument/2006/relationships" xmlns:p="http://schemas.openxmlformats.org/presentationml/2006/main">
+  <p:cSld>
+    <p:spTree>
+      <p:nvGrpSpPr>
+        <p:cNvPr id="1" name=""/>
+        <p:cNvGrpSpPr/>
+        <p:nvPr/>
+      </p:nvGrpSpPr>
+      <p:grpSpPr>
+        <a:xfrm>
+          <a:off x="0" y="0"/>
+          <a:ext cx="0" cy="0"/>
+          <a:chOff x="0" y="0"/>
+          <a:chExt cx="0" cy="0"/>
+        </a:xfrm>
+      </p:grpSpPr>
+      <p:sp>
+        <p:nvSpPr>
           <p:cNvPr id="2" name="Title 1">
             <a:extLst>
               <a:ext uri="{FF2B5EF4-FFF2-40B4-BE49-F238E27FC236}">
@@ -20199,7 +22583,7 @@
           <a:p>
             <a:fld id="{761DFEEA-1162-B343-ACBF-B3E92F6AC390}" type="datetime1">
               <a:rPr lang="it-IT" smtClean="0"/>
-              <a:t>17/09/26</a:t>
+              <a:t>21/09/26</a:t>
             </a:fld>
             <a:endParaRPr lang="en-GB"/>
           </a:p>
@@ -20256,7 +22640,7 @@
           <a:p>
             <a:fld id="{62E92BA6-6E87-3343-8D2C-B7A656D628E4}" type="slidenum">
               <a:rPr lang="en-GB" smtClean="0"/>
-              <a:t>34</a:t>
+              <a:t>35</a:t>
             </a:fld>
             <a:endParaRPr lang="en-GB"/>
           </a:p>
@@ -20319,8 +22703,8 @@
         </p:blipFill>
         <p:spPr>
           <a:xfrm>
-            <a:off x="1978846" y="1674703"/>
-            <a:ext cx="7180759" cy="4560752"/>
+            <a:off x="1978846" y="1674702"/>
+            <a:ext cx="7536014" cy="4786387"/>
           </a:xfrm>
           <a:prstGeom prst="rect">
             <a:avLst/>
@@ -20331,174 +22715,6 @@
     <p:extLst>
       <p:ext uri="{BB962C8B-B14F-4D97-AF65-F5344CB8AC3E}">
         <p14:creationId xmlns:p14="http://schemas.microsoft.com/office/powerpoint/2010/main" val="2467974970"/>
-      </p:ext>
-    </p:extLst>
-  </p:cSld>
-  <p:clrMapOvr>
-    <a:masterClrMapping/>
-  </p:clrMapOvr>
-</p:sld>
-</file>
-
-<file path=ppt/slides/slide36.xml><?xml version="1.0" encoding="utf-8"?>
-<p:sld xmlns:a="http://schemas.openxmlformats.org/drawingml/2006/main" xmlns:r="http://schemas.openxmlformats.org/officeDocument/2006/relationships" xmlns:p="http://schemas.openxmlformats.org/presentationml/2006/main">
-  <p:cSld>
-    <p:spTree>
-      <p:nvGrpSpPr>
-        <p:cNvPr id="1" name=""/>
-        <p:cNvGrpSpPr/>
-        <p:nvPr/>
-      </p:nvGrpSpPr>
-      <p:grpSpPr>
-        <a:xfrm>
-          <a:off x="0" y="0"/>
-          <a:ext cx="0" cy="0"/>
-          <a:chOff x="0" y="0"/>
-          <a:chExt cx="0" cy="0"/>
-        </a:xfrm>
-      </p:grpSpPr>
-      <p:sp>
-        <p:nvSpPr>
-          <p:cNvPr id="2" name="Title 1">
-            <a:extLst>
-              <a:ext uri="{FF2B5EF4-FFF2-40B4-BE49-F238E27FC236}">
-                <a16:creationId xmlns:a16="http://schemas.microsoft.com/office/drawing/2014/main" id="{0E2EF86F-2EB1-5C14-0A89-7C70F09BBF11}"/>
-              </a:ext>
-            </a:extLst>
-          </p:cNvPr>
-          <p:cNvSpPr>
-            <a:spLocks noGrp="1"/>
-          </p:cNvSpPr>
-          <p:nvPr>
-            <p:ph type="title"/>
-          </p:nvPr>
-        </p:nvSpPr>
-        <p:spPr/>
-        <p:txBody>
-          <a:bodyPr>
-            <a:normAutofit fontScale="90000"/>
-          </a:bodyPr>
-          <a:lstStyle/>
-          <a:p>
-            <a:endParaRPr lang="en-GB"/>
-          </a:p>
-        </p:txBody>
-      </p:sp>
-      <p:sp>
-        <p:nvSpPr>
-          <p:cNvPr id="3" name="Content Placeholder 2">
-            <a:extLst>
-              <a:ext uri="{FF2B5EF4-FFF2-40B4-BE49-F238E27FC236}">
-                <a16:creationId xmlns:a16="http://schemas.microsoft.com/office/drawing/2014/main" id="{55CC4D4D-EB64-4848-F3C5-9DA970EBCD48}"/>
-              </a:ext>
-            </a:extLst>
-          </p:cNvPr>
-          <p:cNvSpPr>
-            <a:spLocks noGrp="1"/>
-          </p:cNvSpPr>
-          <p:nvPr>
-            <p:ph idx="1"/>
-          </p:nvPr>
-        </p:nvSpPr>
-        <p:spPr/>
-        <p:txBody>
-          <a:bodyPr/>
-          <a:lstStyle/>
-          <a:p>
-            <a:endParaRPr lang="en-GB"/>
-          </a:p>
-        </p:txBody>
-      </p:sp>
-      <p:sp>
-        <p:nvSpPr>
-          <p:cNvPr id="4" name="Date Placeholder 3">
-            <a:extLst>
-              <a:ext uri="{FF2B5EF4-FFF2-40B4-BE49-F238E27FC236}">
-                <a16:creationId xmlns:a16="http://schemas.microsoft.com/office/drawing/2014/main" id="{442CD647-1409-C0A6-C032-6DDC34B78805}"/>
-              </a:ext>
-            </a:extLst>
-          </p:cNvPr>
-          <p:cNvSpPr>
-            <a:spLocks noGrp="1"/>
-          </p:cNvSpPr>
-          <p:nvPr>
-            <p:ph type="dt" sz="half" idx="10"/>
-          </p:nvPr>
-        </p:nvSpPr>
-        <p:spPr/>
-        <p:txBody>
-          <a:bodyPr/>
-          <a:lstStyle/>
-          <a:p>
-            <a:fld id="{761DFEEA-1162-B343-ACBF-B3E92F6AC390}" type="datetime1">
-              <a:rPr lang="it-IT" smtClean="0"/>
-              <a:t>17/09/26</a:t>
-            </a:fld>
-            <a:endParaRPr lang="en-GB"/>
-          </a:p>
-        </p:txBody>
-      </p:sp>
-      <p:sp>
-        <p:nvSpPr>
-          <p:cNvPr id="5" name="Footer Placeholder 4">
-            <a:extLst>
-              <a:ext uri="{FF2B5EF4-FFF2-40B4-BE49-F238E27FC236}">
-                <a16:creationId xmlns:a16="http://schemas.microsoft.com/office/drawing/2014/main" id="{35DB17A7-0029-3CA7-107A-7DB0407C8238}"/>
-              </a:ext>
-            </a:extLst>
-          </p:cNvPr>
-          <p:cNvSpPr>
-            <a:spLocks noGrp="1"/>
-          </p:cNvSpPr>
-          <p:nvPr>
-            <p:ph type="ftr" sz="quarter" idx="11"/>
-          </p:nvPr>
-        </p:nvSpPr>
-        <p:spPr/>
-        <p:txBody>
-          <a:bodyPr/>
-          <a:lstStyle/>
-          <a:p>
-            <a:r>
-              <a:rPr lang="en-GB"/>
-              <a:t>Day 1: Reproducible NGS Data Analysis on Personal Laptops</a:t>
-            </a:r>
-          </a:p>
-        </p:txBody>
-      </p:sp>
-      <p:sp>
-        <p:nvSpPr>
-          <p:cNvPr id="6" name="Slide Number Placeholder 5">
-            <a:extLst>
-              <a:ext uri="{FF2B5EF4-FFF2-40B4-BE49-F238E27FC236}">
-                <a16:creationId xmlns:a16="http://schemas.microsoft.com/office/drawing/2014/main" id="{78D23CE9-8FB1-B6FE-992E-93CA0FE15139}"/>
-              </a:ext>
-            </a:extLst>
-          </p:cNvPr>
-          <p:cNvSpPr>
-            <a:spLocks noGrp="1"/>
-          </p:cNvSpPr>
-          <p:nvPr>
-            <p:ph type="sldNum" sz="quarter" idx="12"/>
-          </p:nvPr>
-        </p:nvSpPr>
-        <p:spPr/>
-        <p:txBody>
-          <a:bodyPr/>
-          <a:lstStyle/>
-          <a:p>
-            <a:fld id="{62E92BA6-6E87-3343-8D2C-B7A656D628E4}" type="slidenum">
-              <a:rPr lang="en-GB" smtClean="0"/>
-              <a:t>35</a:t>
-            </a:fld>
-            <a:endParaRPr lang="en-GB"/>
-          </a:p>
-        </p:txBody>
-      </p:sp>
-    </p:spTree>
-    <p:extLst>
-      <p:ext uri="{BB962C8B-B14F-4D97-AF65-F5344CB8AC3E}">
-        <p14:creationId xmlns:p14="http://schemas.microsoft.com/office/powerpoint/2010/main" val="2077846842"/>
       </p:ext>
     </p:extLst>
   </p:cSld>
@@ -20530,7 +22746,7 @@
           <p:cNvPr id="2" name="Title 1">
             <a:extLst>
               <a:ext uri="{FF2B5EF4-FFF2-40B4-BE49-F238E27FC236}">
-                <a16:creationId xmlns:a16="http://schemas.microsoft.com/office/drawing/2014/main" id="{06333032-F99F-0D4E-738C-13A9279C5DE2}"/>
+                <a16:creationId xmlns:a16="http://schemas.microsoft.com/office/drawing/2014/main" id="{0E2EF86F-2EB1-5C14-0A89-7C70F09BBF11}"/>
               </a:ext>
             </a:extLst>
           </p:cNvPr>
@@ -20548,11 +22764,7 @@
           </a:bodyPr>
           <a:lstStyle/>
           <a:p>
-            <a:r>
-              <a:rPr lang="en-IT" dirty="0"/>
-              <a:t>Close Day 1: commit the reproducible record</a:t>
-            </a:r>
-            <a:endParaRPr lang="en-GB" dirty="0"/>
+            <a:endParaRPr lang="en-GB"/>
           </a:p>
         </p:txBody>
       </p:sp>
@@ -20561,7 +22773,7 @@
           <p:cNvPr id="3" name="Content Placeholder 2">
             <a:extLst>
               <a:ext uri="{FF2B5EF4-FFF2-40B4-BE49-F238E27FC236}">
-                <a16:creationId xmlns:a16="http://schemas.microsoft.com/office/drawing/2014/main" id="{DD7738BE-36B3-876A-DE23-3FD36CA5F4A5}"/>
+                <a16:creationId xmlns:a16="http://schemas.microsoft.com/office/drawing/2014/main" id="{55CC4D4D-EB64-4848-F3C5-9DA970EBCD48}"/>
               </a:ext>
             </a:extLst>
           </p:cNvPr>
@@ -20572,234 +22784,12 @@
             <p:ph idx="1"/>
           </p:nvPr>
         </p:nvSpPr>
-        <p:spPr>
-          <a:xfrm>
-            <a:off x="398929" y="956048"/>
-            <a:ext cx="11192435" cy="5126700"/>
-          </a:xfrm>
-        </p:spPr>
-        <p:txBody>
-          <a:bodyPr>
-            <a:normAutofit/>
-          </a:bodyPr>
-          <a:lstStyle/>
-          <a:p>
-            <a:r>
-              <a:rPr lang="en-IT" dirty="0"/>
-              <a:t>What did we produce?</a:t>
-            </a:r>
-          </a:p>
-          <a:p>
-            <a:pPr marL="0" indent="0">
-              <a:buNone/>
-            </a:pPr>
-            <a:r>
-              <a:rPr lang="en-GB" sz="1400" dirty="0" err="1">
-                <a:latin typeface="Courier New" panose="02070309020205020404" pitchFamily="49" charset="0"/>
-                <a:cs typeface="Courier New" panose="02070309020205020404" pitchFamily="49" charset="0"/>
-              </a:rPr>
-              <a:t>README.md</a:t>
-            </a:r>
-            <a:endParaRPr lang="en-GB" sz="1400" dirty="0">
-              <a:latin typeface="Courier New" panose="02070309020205020404" pitchFamily="49" charset="0"/>
-              <a:cs typeface="Courier New" panose="02070309020205020404" pitchFamily="49" charset="0"/>
-            </a:endParaRPr>
-          </a:p>
-          <a:p>
-            <a:pPr marL="0" indent="0">
-              <a:buNone/>
-            </a:pPr>
-            <a:r>
-              <a:rPr lang="en-GB" sz="1400" dirty="0">
-                <a:latin typeface="Courier New" panose="02070309020205020404" pitchFamily="49" charset="0"/>
-                <a:cs typeface="Courier New" panose="02070309020205020404" pitchFamily="49" charset="0"/>
-              </a:rPr>
-              <a:t>.</a:t>
-            </a:r>
-            <a:r>
-              <a:rPr lang="en-GB" sz="1400" dirty="0" err="1">
-                <a:latin typeface="Courier New" panose="02070309020205020404" pitchFamily="49" charset="0"/>
-                <a:cs typeface="Courier New" panose="02070309020205020404" pitchFamily="49" charset="0"/>
-              </a:rPr>
-              <a:t>gitignore</a:t>
-            </a:r>
-            <a:endParaRPr lang="en-GB" sz="1400" dirty="0">
-              <a:latin typeface="Courier New" panose="02070309020205020404" pitchFamily="49" charset="0"/>
-              <a:cs typeface="Courier New" panose="02070309020205020404" pitchFamily="49" charset="0"/>
-            </a:endParaRPr>
-          </a:p>
-          <a:p>
-            <a:pPr marL="0" indent="0">
-              <a:buNone/>
-            </a:pPr>
-            <a:endParaRPr lang="en-GB" sz="1400" dirty="0">
-              <a:latin typeface="Courier New" panose="02070309020205020404" pitchFamily="49" charset="0"/>
-              <a:cs typeface="Courier New" panose="02070309020205020404" pitchFamily="49" charset="0"/>
-            </a:endParaRPr>
-          </a:p>
-          <a:p>
-            <a:pPr marL="0" indent="0">
-              <a:buNone/>
-            </a:pPr>
-            <a:r>
-              <a:rPr lang="en-GB" sz="1400" dirty="0" err="1">
-                <a:latin typeface="Courier New" panose="02070309020205020404" pitchFamily="49" charset="0"/>
-                <a:cs typeface="Courier New" panose="02070309020205020404" pitchFamily="49" charset="0"/>
-              </a:rPr>
-              <a:t>raw_data</a:t>
-            </a:r>
-            <a:r>
-              <a:rPr lang="en-GB" sz="1400" dirty="0">
-                <a:latin typeface="Courier New" panose="02070309020205020404" pitchFamily="49" charset="0"/>
-                <a:cs typeface="Courier New" panose="02070309020205020404" pitchFamily="49" charset="0"/>
-              </a:rPr>
-              <a:t>/metadata/…</a:t>
-            </a:r>
-          </a:p>
-          <a:p>
-            <a:pPr marL="0" indent="0">
-              <a:buNone/>
-            </a:pPr>
-            <a:r>
-              <a:rPr lang="en-GB" sz="1400" dirty="0" err="1">
-                <a:latin typeface="Courier New" panose="02070309020205020404" pitchFamily="49" charset="0"/>
-                <a:cs typeface="Courier New" panose="02070309020205020404" pitchFamily="49" charset="0"/>
-              </a:rPr>
-              <a:t>reference_genome</a:t>
-            </a:r>
-            <a:r>
-              <a:rPr lang="en-GB" sz="1400" dirty="0">
-                <a:latin typeface="Courier New" panose="02070309020205020404" pitchFamily="49" charset="0"/>
-                <a:cs typeface="Courier New" panose="02070309020205020404" pitchFamily="49" charset="0"/>
-              </a:rPr>
-              <a:t>/…</a:t>
-            </a:r>
-          </a:p>
-          <a:p>
-            <a:pPr marL="0" indent="0">
-              <a:buNone/>
-            </a:pPr>
-            <a:endParaRPr lang="en-GB" sz="1400" dirty="0">
-              <a:latin typeface="Courier New" panose="02070309020205020404" pitchFamily="49" charset="0"/>
-              <a:cs typeface="Courier New" panose="02070309020205020404" pitchFamily="49" charset="0"/>
-            </a:endParaRPr>
-          </a:p>
-          <a:p>
-            <a:pPr marL="0" indent="0">
-              <a:buNone/>
-            </a:pPr>
-            <a:r>
-              <a:rPr lang="en-GB" sz="1400" dirty="0">
-                <a:latin typeface="Courier New" panose="02070309020205020404" pitchFamily="49" charset="0"/>
-                <a:cs typeface="Courier New" panose="02070309020205020404" pitchFamily="49" charset="0"/>
-              </a:rPr>
-              <a:t>scripts/day1/…</a:t>
-            </a:r>
-          </a:p>
-          <a:p>
-            <a:pPr marL="0" indent="0">
-              <a:buNone/>
-            </a:pPr>
-            <a:r>
-              <a:rPr lang="en-GB" sz="1400" dirty="0">
-                <a:latin typeface="Courier New" panose="02070309020205020404" pitchFamily="49" charset="0"/>
-                <a:cs typeface="Courier New" panose="02070309020205020404" pitchFamily="49" charset="0"/>
-              </a:rPr>
-              <a:t>results/day1_qc/</a:t>
-            </a:r>
-            <a:r>
-              <a:rPr lang="en-GB" sz="1400" dirty="0" err="1">
-                <a:latin typeface="Courier New" panose="02070309020205020404" pitchFamily="49" charset="0"/>
-                <a:cs typeface="Courier New" panose="02070309020205020404" pitchFamily="49" charset="0"/>
-              </a:rPr>
-              <a:t>trimmed_fastq</a:t>
-            </a:r>
-            <a:r>
-              <a:rPr lang="en-GB" sz="1400" dirty="0">
-                <a:latin typeface="Courier New" panose="02070309020205020404" pitchFamily="49" charset="0"/>
-                <a:cs typeface="Courier New" panose="02070309020205020404" pitchFamily="49" charset="0"/>
-              </a:rPr>
-              <a:t>/</a:t>
-            </a:r>
-          </a:p>
-          <a:p>
-            <a:pPr marL="0" indent="0">
-              <a:buNone/>
-            </a:pPr>
-            <a:r>
-              <a:rPr lang="en-GB" sz="1400" dirty="0">
-                <a:latin typeface="Courier New" panose="02070309020205020404" pitchFamily="49" charset="0"/>
-                <a:cs typeface="Courier New" panose="02070309020205020404" pitchFamily="49" charset="0"/>
-              </a:rPr>
-              <a:t>results/logs/day1/</a:t>
-            </a:r>
-            <a:r>
-              <a:rPr lang="en-GB" sz="1400" dirty="0" err="1">
-                <a:latin typeface="Courier New" panose="02070309020205020404" pitchFamily="49" charset="0"/>
-                <a:cs typeface="Courier New" panose="02070309020205020404" pitchFamily="49" charset="0"/>
-              </a:rPr>
-              <a:t>metadata_fastq_download.log</a:t>
-            </a:r>
-            <a:endParaRPr lang="en-GB" sz="1400" dirty="0">
-              <a:latin typeface="Courier New" panose="02070309020205020404" pitchFamily="49" charset="0"/>
-              <a:cs typeface="Courier New" panose="02070309020205020404" pitchFamily="49" charset="0"/>
-            </a:endParaRPr>
-          </a:p>
-          <a:p>
-            <a:pPr marL="0" indent="0">
-              <a:buNone/>
-            </a:pPr>
-            <a:r>
-              <a:rPr lang="en-GB" sz="1400" dirty="0">
-                <a:latin typeface="Courier New" panose="02070309020205020404" pitchFamily="49" charset="0"/>
-                <a:cs typeface="Courier New" panose="02070309020205020404" pitchFamily="49" charset="0"/>
-              </a:rPr>
-              <a:t>results/logs/day1/</a:t>
-            </a:r>
-            <a:r>
-              <a:rPr lang="en-GB" sz="1400" dirty="0" err="1">
-                <a:latin typeface="Courier New" panose="02070309020205020404" pitchFamily="49" charset="0"/>
-                <a:cs typeface="Courier New" panose="02070309020205020404" pitchFamily="49" charset="0"/>
-              </a:rPr>
-              <a:t>fastp</a:t>
-            </a:r>
-            <a:r>
-              <a:rPr lang="en-GB" sz="1400" dirty="0">
-                <a:latin typeface="Courier New" panose="02070309020205020404" pitchFamily="49" charset="0"/>
-                <a:cs typeface="Courier New" panose="02070309020205020404" pitchFamily="49" charset="0"/>
-              </a:rPr>
-              <a:t>/</a:t>
-            </a:r>
-          </a:p>
-          <a:p>
-            <a:pPr marL="0" indent="0">
-              <a:buNone/>
-            </a:pPr>
-            <a:endParaRPr lang="en-GB" sz="1400" dirty="0">
-              <a:latin typeface="Courier New" panose="02070309020205020404" pitchFamily="49" charset="0"/>
-              <a:cs typeface="Courier New" panose="02070309020205020404" pitchFamily="49" charset="0"/>
-            </a:endParaRPr>
-          </a:p>
-          <a:p>
-            <a:pPr marL="0" indent="0">
-              <a:buNone/>
-            </a:pPr>
-            <a:r>
-              <a:rPr lang="en-GB" sz="1400" dirty="0">
-                <a:latin typeface="Courier New" panose="02070309020205020404" pitchFamily="49" charset="0"/>
-                <a:cs typeface="Courier New" panose="02070309020205020404" pitchFamily="49" charset="0"/>
-              </a:rPr>
-              <a:t>…</a:t>
-            </a:r>
-          </a:p>
-          <a:p>
-            <a:pPr marL="0" indent="0">
-              <a:buNone/>
-            </a:pPr>
-            <a:endParaRPr lang="en-GB" sz="1400" dirty="0">
-              <a:latin typeface="Courier New" panose="02070309020205020404" pitchFamily="49" charset="0"/>
-              <a:cs typeface="Courier New" panose="02070309020205020404" pitchFamily="49" charset="0"/>
-            </a:endParaRPr>
+        <p:spPr/>
+        <p:txBody>
+          <a:bodyPr/>
+          <a:lstStyle/>
+          <a:p>
+            <a:endParaRPr lang="en-GB"/>
           </a:p>
         </p:txBody>
       </p:sp>
@@ -20808,7 +22798,7 @@
           <p:cNvPr id="4" name="Date Placeholder 3">
             <a:extLst>
               <a:ext uri="{FF2B5EF4-FFF2-40B4-BE49-F238E27FC236}">
-                <a16:creationId xmlns:a16="http://schemas.microsoft.com/office/drawing/2014/main" id="{674263D0-66E7-0F1C-BB53-388D191B23A8}"/>
+                <a16:creationId xmlns:a16="http://schemas.microsoft.com/office/drawing/2014/main" id="{442CD647-1409-C0A6-C032-6DDC34B78805}"/>
               </a:ext>
             </a:extLst>
           </p:cNvPr>
@@ -20826,7 +22816,7 @@
           <a:p>
             <a:fld id="{761DFEEA-1162-B343-ACBF-B3E92F6AC390}" type="datetime1">
               <a:rPr lang="it-IT" smtClean="0"/>
-              <a:t>17/09/26</a:t>
+              <a:t>21/09/26</a:t>
             </a:fld>
             <a:endParaRPr lang="en-GB"/>
           </a:p>
@@ -20837,7 +22827,7 @@
           <p:cNvPr id="5" name="Footer Placeholder 4">
             <a:extLst>
               <a:ext uri="{FF2B5EF4-FFF2-40B4-BE49-F238E27FC236}">
-                <a16:creationId xmlns:a16="http://schemas.microsoft.com/office/drawing/2014/main" id="{167BF2E2-C806-4215-4FC3-7AF1B47585CA}"/>
+                <a16:creationId xmlns:a16="http://schemas.microsoft.com/office/drawing/2014/main" id="{35DB17A7-0029-3CA7-107A-7DB0407C8238}"/>
               </a:ext>
             </a:extLst>
           </p:cNvPr>
@@ -20865,7 +22855,7 @@
           <p:cNvPr id="6" name="Slide Number Placeholder 5">
             <a:extLst>
               <a:ext uri="{FF2B5EF4-FFF2-40B4-BE49-F238E27FC236}">
-                <a16:creationId xmlns:a16="http://schemas.microsoft.com/office/drawing/2014/main" id="{A0324971-A5C4-ED83-DEA8-0A36467B4D68}"/>
+                <a16:creationId xmlns:a16="http://schemas.microsoft.com/office/drawing/2014/main" id="{78D23CE9-8FB1-B6FE-992E-93CA0FE15139}"/>
               </a:ext>
             </a:extLst>
           </p:cNvPr>
@@ -20892,7 +22882,7 @@
     </p:spTree>
     <p:extLst>
       <p:ext uri="{BB962C8B-B14F-4D97-AF65-F5344CB8AC3E}">
-        <p14:creationId xmlns:p14="http://schemas.microsoft.com/office/powerpoint/2010/main" val="2692028016"/>
+        <p14:creationId xmlns:p14="http://schemas.microsoft.com/office/powerpoint/2010/main" val="2077846842"/>
       </p:ext>
     </p:extLst>
   </p:cSld>
@@ -20921,6 +22911,400 @@
       </p:grpSpPr>
       <p:sp>
         <p:nvSpPr>
+          <p:cNvPr id="2" name="Title 1">
+            <a:extLst>
+              <a:ext uri="{FF2B5EF4-FFF2-40B4-BE49-F238E27FC236}">
+                <a16:creationId xmlns:a16="http://schemas.microsoft.com/office/drawing/2014/main" id="{06333032-F99F-0D4E-738C-13A9279C5DE2}"/>
+              </a:ext>
+            </a:extLst>
+          </p:cNvPr>
+          <p:cNvSpPr>
+            <a:spLocks noGrp="1"/>
+          </p:cNvSpPr>
+          <p:nvPr>
+            <p:ph type="title"/>
+          </p:nvPr>
+        </p:nvSpPr>
+        <p:spPr/>
+        <p:txBody>
+          <a:bodyPr>
+            <a:normAutofit fontScale="90000"/>
+          </a:bodyPr>
+          <a:lstStyle/>
+          <a:p>
+            <a:r>
+              <a:rPr lang="en-IT" dirty="0"/>
+              <a:t>Close Day 1: commit the reproducible record</a:t>
+            </a:r>
+            <a:endParaRPr lang="en-GB" dirty="0"/>
+          </a:p>
+        </p:txBody>
+      </p:sp>
+      <p:sp>
+        <p:nvSpPr>
+          <p:cNvPr id="3" name="Content Placeholder 2">
+            <a:extLst>
+              <a:ext uri="{FF2B5EF4-FFF2-40B4-BE49-F238E27FC236}">
+                <a16:creationId xmlns:a16="http://schemas.microsoft.com/office/drawing/2014/main" id="{DD7738BE-36B3-876A-DE23-3FD36CA5F4A5}"/>
+              </a:ext>
+            </a:extLst>
+          </p:cNvPr>
+          <p:cNvSpPr>
+            <a:spLocks noGrp="1"/>
+          </p:cNvSpPr>
+          <p:nvPr>
+            <p:ph idx="1"/>
+          </p:nvPr>
+        </p:nvSpPr>
+        <p:spPr>
+          <a:xfrm>
+            <a:off x="398929" y="956048"/>
+            <a:ext cx="11192435" cy="5126700"/>
+          </a:xfrm>
+        </p:spPr>
+        <p:txBody>
+          <a:bodyPr>
+            <a:normAutofit/>
+          </a:bodyPr>
+          <a:lstStyle/>
+          <a:p>
+            <a:r>
+              <a:rPr lang="en-IT" dirty="0"/>
+              <a:t>What did we produce?</a:t>
+            </a:r>
+          </a:p>
+          <a:p>
+            <a:pPr marL="0" indent="0">
+              <a:buNone/>
+            </a:pPr>
+            <a:r>
+              <a:rPr lang="en-GB" sz="1400" dirty="0" err="1">
+                <a:latin typeface="Courier New" panose="02070309020205020404" pitchFamily="49" charset="0"/>
+                <a:cs typeface="Courier New" panose="02070309020205020404" pitchFamily="49" charset="0"/>
+              </a:rPr>
+              <a:t>README.md</a:t>
+            </a:r>
+            <a:endParaRPr lang="en-GB" sz="1400" dirty="0">
+              <a:latin typeface="Courier New" panose="02070309020205020404" pitchFamily="49" charset="0"/>
+              <a:cs typeface="Courier New" panose="02070309020205020404" pitchFamily="49" charset="0"/>
+            </a:endParaRPr>
+          </a:p>
+          <a:p>
+            <a:pPr marL="0" indent="0">
+              <a:buNone/>
+            </a:pPr>
+            <a:r>
+              <a:rPr lang="en-GB" sz="1400" dirty="0">
+                <a:latin typeface="Courier New" panose="02070309020205020404" pitchFamily="49" charset="0"/>
+                <a:cs typeface="Courier New" panose="02070309020205020404" pitchFamily="49" charset="0"/>
+              </a:rPr>
+              <a:t>.</a:t>
+            </a:r>
+            <a:r>
+              <a:rPr lang="en-GB" sz="1400" dirty="0" err="1">
+                <a:latin typeface="Courier New" panose="02070309020205020404" pitchFamily="49" charset="0"/>
+                <a:cs typeface="Courier New" panose="02070309020205020404" pitchFamily="49" charset="0"/>
+              </a:rPr>
+              <a:t>gitignore</a:t>
+            </a:r>
+            <a:endParaRPr lang="en-GB" sz="1400" dirty="0">
+              <a:latin typeface="Courier New" panose="02070309020205020404" pitchFamily="49" charset="0"/>
+              <a:cs typeface="Courier New" panose="02070309020205020404" pitchFamily="49" charset="0"/>
+            </a:endParaRPr>
+          </a:p>
+          <a:p>
+            <a:pPr marL="0" indent="0">
+              <a:buNone/>
+            </a:pPr>
+            <a:endParaRPr lang="en-GB" sz="1400" dirty="0">
+              <a:latin typeface="Courier New" panose="02070309020205020404" pitchFamily="49" charset="0"/>
+              <a:cs typeface="Courier New" panose="02070309020205020404" pitchFamily="49" charset="0"/>
+            </a:endParaRPr>
+          </a:p>
+          <a:p>
+            <a:pPr marL="0" indent="0">
+              <a:buNone/>
+            </a:pPr>
+            <a:r>
+              <a:rPr lang="en-GB" sz="1400" dirty="0" err="1">
+                <a:latin typeface="Courier New" panose="02070309020205020404" pitchFamily="49" charset="0"/>
+                <a:cs typeface="Courier New" panose="02070309020205020404" pitchFamily="49" charset="0"/>
+              </a:rPr>
+              <a:t>raw_data</a:t>
+            </a:r>
+            <a:r>
+              <a:rPr lang="en-GB" sz="1400" dirty="0">
+                <a:latin typeface="Courier New" panose="02070309020205020404" pitchFamily="49" charset="0"/>
+                <a:cs typeface="Courier New" panose="02070309020205020404" pitchFamily="49" charset="0"/>
+              </a:rPr>
+              <a:t>/metadata/…</a:t>
+            </a:r>
+          </a:p>
+          <a:p>
+            <a:pPr marL="0" indent="0">
+              <a:buNone/>
+            </a:pPr>
+            <a:r>
+              <a:rPr lang="en-GB" sz="1400" dirty="0" err="1">
+                <a:latin typeface="Courier New" panose="02070309020205020404" pitchFamily="49" charset="0"/>
+                <a:cs typeface="Courier New" panose="02070309020205020404" pitchFamily="49" charset="0"/>
+              </a:rPr>
+              <a:t>reference_genome</a:t>
+            </a:r>
+            <a:r>
+              <a:rPr lang="en-GB" sz="1400" dirty="0">
+                <a:latin typeface="Courier New" panose="02070309020205020404" pitchFamily="49" charset="0"/>
+                <a:cs typeface="Courier New" panose="02070309020205020404" pitchFamily="49" charset="0"/>
+              </a:rPr>
+              <a:t>/…</a:t>
+            </a:r>
+          </a:p>
+          <a:p>
+            <a:pPr marL="0" indent="0">
+              <a:buNone/>
+            </a:pPr>
+            <a:endParaRPr lang="en-GB" sz="1400" dirty="0">
+              <a:latin typeface="Courier New" panose="02070309020205020404" pitchFamily="49" charset="0"/>
+              <a:cs typeface="Courier New" panose="02070309020205020404" pitchFamily="49" charset="0"/>
+            </a:endParaRPr>
+          </a:p>
+          <a:p>
+            <a:pPr marL="0" indent="0">
+              <a:buNone/>
+            </a:pPr>
+            <a:r>
+              <a:rPr lang="en-GB" sz="1400" dirty="0">
+                <a:latin typeface="Courier New" panose="02070309020205020404" pitchFamily="49" charset="0"/>
+                <a:cs typeface="Courier New" panose="02070309020205020404" pitchFamily="49" charset="0"/>
+              </a:rPr>
+              <a:t>scripts/day1/…</a:t>
+            </a:r>
+          </a:p>
+          <a:p>
+            <a:pPr marL="0" indent="0">
+              <a:buNone/>
+            </a:pPr>
+            <a:r>
+              <a:rPr lang="en-GB" sz="1400" dirty="0">
+                <a:latin typeface="Courier New" panose="02070309020205020404" pitchFamily="49" charset="0"/>
+                <a:cs typeface="Courier New" panose="02070309020205020404" pitchFamily="49" charset="0"/>
+              </a:rPr>
+              <a:t>results/day1_qc/</a:t>
+            </a:r>
+            <a:r>
+              <a:rPr lang="en-GB" sz="1400" dirty="0" err="1">
+                <a:latin typeface="Courier New" panose="02070309020205020404" pitchFamily="49" charset="0"/>
+                <a:cs typeface="Courier New" panose="02070309020205020404" pitchFamily="49" charset="0"/>
+              </a:rPr>
+              <a:t>trimmed_fastq</a:t>
+            </a:r>
+            <a:r>
+              <a:rPr lang="en-GB" sz="1400" dirty="0">
+                <a:latin typeface="Courier New" panose="02070309020205020404" pitchFamily="49" charset="0"/>
+                <a:cs typeface="Courier New" panose="02070309020205020404" pitchFamily="49" charset="0"/>
+              </a:rPr>
+              <a:t>/</a:t>
+            </a:r>
+          </a:p>
+          <a:p>
+            <a:pPr marL="0" indent="0">
+              <a:buNone/>
+            </a:pPr>
+            <a:r>
+              <a:rPr lang="en-GB" sz="1400" dirty="0">
+                <a:latin typeface="Courier New" panose="02070309020205020404" pitchFamily="49" charset="0"/>
+                <a:cs typeface="Courier New" panose="02070309020205020404" pitchFamily="49" charset="0"/>
+              </a:rPr>
+              <a:t>results/logs/day1/</a:t>
+            </a:r>
+            <a:r>
+              <a:rPr lang="en-GB" sz="1400" dirty="0" err="1">
+                <a:latin typeface="Courier New" panose="02070309020205020404" pitchFamily="49" charset="0"/>
+                <a:cs typeface="Courier New" panose="02070309020205020404" pitchFamily="49" charset="0"/>
+              </a:rPr>
+              <a:t>metadata_fastq_download.log</a:t>
+            </a:r>
+            <a:endParaRPr lang="en-GB" sz="1400" dirty="0">
+              <a:latin typeface="Courier New" panose="02070309020205020404" pitchFamily="49" charset="0"/>
+              <a:cs typeface="Courier New" panose="02070309020205020404" pitchFamily="49" charset="0"/>
+            </a:endParaRPr>
+          </a:p>
+          <a:p>
+            <a:pPr marL="0" indent="0">
+              <a:buNone/>
+            </a:pPr>
+            <a:r>
+              <a:rPr lang="en-GB" sz="1400" dirty="0">
+                <a:latin typeface="Courier New" panose="02070309020205020404" pitchFamily="49" charset="0"/>
+                <a:cs typeface="Courier New" panose="02070309020205020404" pitchFamily="49" charset="0"/>
+              </a:rPr>
+              <a:t>results/logs/day1/</a:t>
+            </a:r>
+            <a:r>
+              <a:rPr lang="en-GB" sz="1400" dirty="0" err="1">
+                <a:latin typeface="Courier New" panose="02070309020205020404" pitchFamily="49" charset="0"/>
+                <a:cs typeface="Courier New" panose="02070309020205020404" pitchFamily="49" charset="0"/>
+              </a:rPr>
+              <a:t>fastp</a:t>
+            </a:r>
+            <a:r>
+              <a:rPr lang="en-GB" sz="1400" dirty="0">
+                <a:latin typeface="Courier New" panose="02070309020205020404" pitchFamily="49" charset="0"/>
+                <a:cs typeface="Courier New" panose="02070309020205020404" pitchFamily="49" charset="0"/>
+              </a:rPr>
+              <a:t>/</a:t>
+            </a:r>
+          </a:p>
+          <a:p>
+            <a:pPr marL="0" indent="0">
+              <a:buNone/>
+            </a:pPr>
+            <a:endParaRPr lang="en-GB" sz="1400" dirty="0">
+              <a:latin typeface="Courier New" panose="02070309020205020404" pitchFamily="49" charset="0"/>
+              <a:cs typeface="Courier New" panose="02070309020205020404" pitchFamily="49" charset="0"/>
+            </a:endParaRPr>
+          </a:p>
+          <a:p>
+            <a:pPr marL="0" indent="0">
+              <a:buNone/>
+            </a:pPr>
+            <a:r>
+              <a:rPr lang="en-GB" sz="1400" dirty="0">
+                <a:latin typeface="Courier New" panose="02070309020205020404" pitchFamily="49" charset="0"/>
+                <a:cs typeface="Courier New" panose="02070309020205020404" pitchFamily="49" charset="0"/>
+              </a:rPr>
+              <a:t>…</a:t>
+            </a:r>
+          </a:p>
+          <a:p>
+            <a:pPr marL="0" indent="0">
+              <a:buNone/>
+            </a:pPr>
+            <a:endParaRPr lang="en-GB" sz="1400" dirty="0">
+              <a:latin typeface="Courier New" panose="02070309020205020404" pitchFamily="49" charset="0"/>
+              <a:cs typeface="Courier New" panose="02070309020205020404" pitchFamily="49" charset="0"/>
+            </a:endParaRPr>
+          </a:p>
+        </p:txBody>
+      </p:sp>
+      <p:sp>
+        <p:nvSpPr>
+          <p:cNvPr id="4" name="Date Placeholder 3">
+            <a:extLst>
+              <a:ext uri="{FF2B5EF4-FFF2-40B4-BE49-F238E27FC236}">
+                <a16:creationId xmlns:a16="http://schemas.microsoft.com/office/drawing/2014/main" id="{674263D0-66E7-0F1C-BB53-388D191B23A8}"/>
+              </a:ext>
+            </a:extLst>
+          </p:cNvPr>
+          <p:cNvSpPr>
+            <a:spLocks noGrp="1"/>
+          </p:cNvSpPr>
+          <p:nvPr>
+            <p:ph type="dt" sz="half" idx="10"/>
+          </p:nvPr>
+        </p:nvSpPr>
+        <p:spPr/>
+        <p:txBody>
+          <a:bodyPr/>
+          <a:lstStyle/>
+          <a:p>
+            <a:fld id="{761DFEEA-1162-B343-ACBF-B3E92F6AC390}" type="datetime1">
+              <a:rPr lang="it-IT" smtClean="0"/>
+              <a:t>21/09/26</a:t>
+            </a:fld>
+            <a:endParaRPr lang="en-GB"/>
+          </a:p>
+        </p:txBody>
+      </p:sp>
+      <p:sp>
+        <p:nvSpPr>
+          <p:cNvPr id="5" name="Footer Placeholder 4">
+            <a:extLst>
+              <a:ext uri="{FF2B5EF4-FFF2-40B4-BE49-F238E27FC236}">
+                <a16:creationId xmlns:a16="http://schemas.microsoft.com/office/drawing/2014/main" id="{167BF2E2-C806-4215-4FC3-7AF1B47585CA}"/>
+              </a:ext>
+            </a:extLst>
+          </p:cNvPr>
+          <p:cNvSpPr>
+            <a:spLocks noGrp="1"/>
+          </p:cNvSpPr>
+          <p:nvPr>
+            <p:ph type="ftr" sz="quarter" idx="11"/>
+          </p:nvPr>
+        </p:nvSpPr>
+        <p:spPr/>
+        <p:txBody>
+          <a:bodyPr/>
+          <a:lstStyle/>
+          <a:p>
+            <a:r>
+              <a:rPr lang="en-GB"/>
+              <a:t>Day 1: Reproducible NGS Data Analysis on Personal Laptops</a:t>
+            </a:r>
+          </a:p>
+        </p:txBody>
+      </p:sp>
+      <p:sp>
+        <p:nvSpPr>
+          <p:cNvPr id="6" name="Slide Number Placeholder 5">
+            <a:extLst>
+              <a:ext uri="{FF2B5EF4-FFF2-40B4-BE49-F238E27FC236}">
+                <a16:creationId xmlns:a16="http://schemas.microsoft.com/office/drawing/2014/main" id="{A0324971-A5C4-ED83-DEA8-0A36467B4D68}"/>
+              </a:ext>
+            </a:extLst>
+          </p:cNvPr>
+          <p:cNvSpPr>
+            <a:spLocks noGrp="1"/>
+          </p:cNvSpPr>
+          <p:nvPr>
+            <p:ph type="sldNum" sz="quarter" idx="12"/>
+          </p:nvPr>
+        </p:nvSpPr>
+        <p:spPr/>
+        <p:txBody>
+          <a:bodyPr/>
+          <a:lstStyle/>
+          <a:p>
+            <a:fld id="{62E92BA6-6E87-3343-8D2C-B7A656D628E4}" type="slidenum">
+              <a:rPr lang="en-GB" smtClean="0"/>
+              <a:t>37</a:t>
+            </a:fld>
+            <a:endParaRPr lang="en-GB"/>
+          </a:p>
+        </p:txBody>
+      </p:sp>
+    </p:spTree>
+    <p:extLst>
+      <p:ext uri="{BB962C8B-B14F-4D97-AF65-F5344CB8AC3E}">
+        <p14:creationId xmlns:p14="http://schemas.microsoft.com/office/powerpoint/2010/main" val="2692028016"/>
+      </p:ext>
+    </p:extLst>
+  </p:cSld>
+  <p:clrMapOvr>
+    <a:masterClrMapping/>
+  </p:clrMapOvr>
+</p:sld>
+</file>
+
+<file path=ppt/slides/slide39.xml><?xml version="1.0" encoding="utf-8"?>
+<p:sld xmlns:a="http://schemas.openxmlformats.org/drawingml/2006/main" xmlns:r="http://schemas.openxmlformats.org/officeDocument/2006/relationships" xmlns:p="http://schemas.openxmlformats.org/presentationml/2006/main">
+  <p:cSld>
+    <p:spTree>
+      <p:nvGrpSpPr>
+        <p:cNvPr id="1" name=""/>
+        <p:cNvGrpSpPr/>
+        <p:nvPr/>
+      </p:nvGrpSpPr>
+      <p:grpSpPr>
+        <a:xfrm>
+          <a:off x="0" y="0"/>
+          <a:ext cx="0" cy="0"/>
+          <a:chOff x="0" y="0"/>
+          <a:chExt cx="0" cy="0"/>
+        </a:xfrm>
+      </p:grpSpPr>
+      <p:sp>
+        <p:nvSpPr>
           <p:cNvPr id="3" name="TextBox 2">
             <a:extLst>
               <a:ext uri="{FF2B5EF4-FFF2-40B4-BE49-F238E27FC236}">
@@ -20934,7 +23318,7 @@
         <p:spPr>
           <a:xfrm>
             <a:off x="334768" y="920153"/>
-            <a:ext cx="11791404" cy="5632311"/>
+            <a:ext cx="11791404" cy="3693319"/>
           </a:xfrm>
           <a:prstGeom prst="rect">
             <a:avLst/>
@@ -21075,43 +23459,10 @@
                 <a:latin typeface="Courier New" panose="02070309020205020404" pitchFamily="49" charset="0"/>
                 <a:cs typeface="Courier New" panose="02070309020205020404" pitchFamily="49" charset="0"/>
               </a:rPr>
-              <a:t>git add </a:t>
-            </a:r>
-            <a:r>
-              <a:rPr lang="en-GB" dirty="0" err="1">
-                <a:latin typeface="Courier New" panose="02070309020205020404" pitchFamily="49" charset="0"/>
-                <a:cs typeface="Courier New" panose="02070309020205020404" pitchFamily="49" charset="0"/>
-              </a:rPr>
-              <a:t>README.md</a:t>
-            </a:r>
-            <a:r>
-              <a:rPr lang="en-GB" dirty="0">
-                <a:latin typeface="Courier New" panose="02070309020205020404" pitchFamily="49" charset="0"/>
-                <a:cs typeface="Courier New" panose="02070309020205020404" pitchFamily="49" charset="0"/>
-              </a:rPr>
-              <a:t> .</a:t>
-            </a:r>
-            <a:r>
-              <a:rPr lang="en-GB" dirty="0" err="1">
-                <a:latin typeface="Courier New" panose="02070309020205020404" pitchFamily="49" charset="0"/>
-                <a:cs typeface="Courier New" panose="02070309020205020404" pitchFamily="49" charset="0"/>
-              </a:rPr>
-              <a:t>gitignore</a:t>
-            </a:r>
-            <a:r>
-              <a:rPr lang="en-GB" dirty="0">
-                <a:latin typeface="Courier New" panose="02070309020205020404" pitchFamily="49" charset="0"/>
-                <a:cs typeface="Courier New" panose="02070309020205020404" pitchFamily="49" charset="0"/>
-              </a:rPr>
-              <a:t> </a:t>
-            </a:r>
-            <a:r>
-              <a:rPr lang="en-GB" dirty="0" err="1">
-                <a:latin typeface="Courier New" panose="02070309020205020404" pitchFamily="49" charset="0"/>
-                <a:cs typeface="Courier New" panose="02070309020205020404" pitchFamily="49" charset="0"/>
-              </a:rPr>
-              <a:t>workflow_execution.md</a:t>
-            </a:r>
+              <a:t>git add .</a:t>
+            </a:r>
+          </a:p>
+          <a:p>
             <a:endParaRPr lang="en-GB" dirty="0">
               <a:latin typeface="Courier New" panose="02070309020205020404" pitchFamily="49" charset="0"/>
               <a:cs typeface="Courier New" panose="02070309020205020404" pitchFamily="49" charset="0"/>
@@ -21123,273 +23474,62 @@
                 <a:latin typeface="Courier New" panose="02070309020205020404" pitchFamily="49" charset="0"/>
                 <a:cs typeface="Courier New" panose="02070309020205020404" pitchFamily="49" charset="0"/>
               </a:rPr>
-              <a:t>git add </a:t>
-            </a:r>
-            <a:r>
-              <a:rPr lang="en-GB" dirty="0" err="1">
-                <a:latin typeface="Courier New" panose="02070309020205020404" pitchFamily="49" charset="0"/>
-                <a:cs typeface="Courier New" panose="02070309020205020404" pitchFamily="49" charset="0"/>
-              </a:rPr>
-              <a:t>raw_data</a:t>
-            </a:r>
+              <a:t>-&gt; if you want could also use:</a:t>
+            </a:r>
+          </a:p>
+          <a:p>
             <a:r>
               <a:rPr lang="en-GB" dirty="0">
                 <a:latin typeface="Courier New" panose="02070309020205020404" pitchFamily="49" charset="0"/>
                 <a:cs typeface="Courier New" panose="02070309020205020404" pitchFamily="49" charset="0"/>
               </a:rPr>
-              <a:t>/metadata/*.csv </a:t>
-            </a:r>
-            <a:r>
-              <a:rPr lang="en-GB" dirty="0" err="1">
-                <a:latin typeface="Courier New" panose="02070309020205020404" pitchFamily="49" charset="0"/>
-                <a:cs typeface="Courier New" panose="02070309020205020404" pitchFamily="49" charset="0"/>
-              </a:rPr>
-              <a:t>raw_data</a:t>
-            </a:r>
-            <a:r>
-              <a:rPr lang="en-GB" dirty="0">
-                <a:latin typeface="Courier New" panose="02070309020205020404" pitchFamily="49" charset="0"/>
-                <a:cs typeface="Courier New" panose="02070309020205020404" pitchFamily="49" charset="0"/>
-              </a:rPr>
-              <a:t>/metadata/*.txt </a:t>
-            </a:r>
-            <a:r>
-              <a:rPr lang="en-GB" dirty="0" err="1">
-                <a:latin typeface="Courier New" panose="02070309020205020404" pitchFamily="49" charset="0"/>
-                <a:cs typeface="Courier New" panose="02070309020205020404" pitchFamily="49" charset="0"/>
-              </a:rPr>
-              <a:t>raw_data</a:t>
-            </a:r>
-            <a:r>
-              <a:rPr lang="en-GB" dirty="0">
-                <a:latin typeface="Courier New" panose="02070309020205020404" pitchFamily="49" charset="0"/>
-                <a:cs typeface="Courier New" panose="02070309020205020404" pitchFamily="49" charset="0"/>
-              </a:rPr>
-              <a:t>/metadata/*.</a:t>
-            </a:r>
-            <a:r>
-              <a:rPr lang="en-GB" dirty="0" err="1">
-                <a:latin typeface="Courier New" panose="02070309020205020404" pitchFamily="49" charset="0"/>
-                <a:cs typeface="Courier New" panose="02070309020205020404" pitchFamily="49" charset="0"/>
-              </a:rPr>
-              <a:t>tsv</a:t>
-            </a:r>
-            <a:endParaRPr lang="en-GB" dirty="0">
-              <a:latin typeface="Courier New" panose="02070309020205020404" pitchFamily="49" charset="0"/>
-              <a:cs typeface="Courier New" panose="02070309020205020404" pitchFamily="49" charset="0"/>
-            </a:endParaRPr>
-          </a:p>
-          <a:p>
-            <a:r>
-              <a:rPr lang="en-GB" dirty="0">
-                <a:latin typeface="Courier New" panose="02070309020205020404" pitchFamily="49" charset="0"/>
-                <a:cs typeface="Courier New" panose="02070309020205020404" pitchFamily="49" charset="0"/>
-              </a:rPr>
-              <a:t>git add </a:t>
-            </a:r>
-            <a:r>
-              <a:rPr lang="en-GB" dirty="0" err="1">
-                <a:latin typeface="Courier New" panose="02070309020205020404" pitchFamily="49" charset="0"/>
-                <a:cs typeface="Courier New" panose="02070309020205020404" pitchFamily="49" charset="0"/>
-              </a:rPr>
-              <a:t>raw_data</a:t>
-            </a:r>
-            <a:r>
-              <a:rPr lang="en-GB" dirty="0">
-                <a:latin typeface="Courier New" panose="02070309020205020404" pitchFamily="49" charset="0"/>
-                <a:cs typeface="Courier New" panose="02070309020205020404" pitchFamily="49" charset="0"/>
-              </a:rPr>
-              <a:t>/metadata/</a:t>
-            </a:r>
-            <a:r>
-              <a:rPr lang="en-GB" dirty="0" err="1">
-                <a:latin typeface="Courier New" panose="02070309020205020404" pitchFamily="49" charset="0"/>
-                <a:cs typeface="Courier New" panose="02070309020205020404" pitchFamily="49" charset="0"/>
-              </a:rPr>
-              <a:t>METADATA.md</a:t>
-            </a:r>
-            <a:endParaRPr lang="en-GB" dirty="0">
-              <a:latin typeface="Courier New" panose="02070309020205020404" pitchFamily="49" charset="0"/>
-              <a:cs typeface="Courier New" panose="02070309020205020404" pitchFamily="49" charset="0"/>
-            </a:endParaRPr>
-          </a:p>
-          <a:p>
-            <a:r>
-              <a:rPr lang="en-GB" dirty="0">
-                <a:latin typeface="Courier New" panose="02070309020205020404" pitchFamily="49" charset="0"/>
-                <a:cs typeface="Courier New" panose="02070309020205020404" pitchFamily="49" charset="0"/>
-              </a:rPr>
-              <a:t>git add </a:t>
-            </a:r>
-            <a:r>
-              <a:rPr lang="en-GB" dirty="0" err="1">
-                <a:latin typeface="Courier New" panose="02070309020205020404" pitchFamily="49" charset="0"/>
-                <a:cs typeface="Courier New" panose="02070309020205020404" pitchFamily="49" charset="0"/>
-              </a:rPr>
-              <a:t>reference_genome</a:t>
-            </a:r>
-            <a:r>
-              <a:rPr lang="en-GB" dirty="0">
-                <a:latin typeface="Courier New" panose="02070309020205020404" pitchFamily="49" charset="0"/>
-                <a:cs typeface="Courier New" panose="02070309020205020404" pitchFamily="49" charset="0"/>
-              </a:rPr>
-              <a:t>/</a:t>
-            </a:r>
-            <a:r>
-              <a:rPr lang="en-GB" dirty="0" err="1">
-                <a:latin typeface="Courier New" panose="02070309020205020404" pitchFamily="49" charset="0"/>
-                <a:cs typeface="Courier New" panose="02070309020205020404" pitchFamily="49" charset="0"/>
-              </a:rPr>
-              <a:t>REFERENCE.md</a:t>
-            </a:r>
-            <a:r>
-              <a:rPr lang="en-GB" dirty="0">
-                <a:latin typeface="Courier New" panose="02070309020205020404" pitchFamily="49" charset="0"/>
-                <a:cs typeface="Courier New" panose="02070309020205020404" pitchFamily="49" charset="0"/>
-              </a:rPr>
-              <a:t> </a:t>
-            </a:r>
-            <a:r>
-              <a:rPr lang="en-GB" dirty="0" err="1">
-                <a:latin typeface="Courier New" panose="02070309020205020404" pitchFamily="49" charset="0"/>
-                <a:cs typeface="Courier New" panose="02070309020205020404" pitchFamily="49" charset="0"/>
-              </a:rPr>
-              <a:t>reference_genome</a:t>
-            </a:r>
-            <a:r>
-              <a:rPr lang="en-GB" dirty="0">
-                <a:latin typeface="Courier New" panose="02070309020205020404" pitchFamily="49" charset="0"/>
-                <a:cs typeface="Courier New" panose="02070309020205020404" pitchFamily="49" charset="0"/>
-              </a:rPr>
-              <a:t>/reference_files.sha256</a:t>
-            </a:r>
-          </a:p>
-          <a:p>
-            <a:r>
-              <a:rPr lang="en-GB" dirty="0">
-                <a:latin typeface="Courier New" panose="02070309020205020404" pitchFamily="49" charset="0"/>
-                <a:cs typeface="Courier New" panose="02070309020205020404" pitchFamily="49" charset="0"/>
-              </a:rPr>
-              <a:t>git add scripts/day1/*.</a:t>
-            </a:r>
-            <a:r>
-              <a:rPr lang="en-GB" dirty="0" err="1">
-                <a:latin typeface="Courier New" panose="02070309020205020404" pitchFamily="49" charset="0"/>
-                <a:cs typeface="Courier New" panose="02070309020205020404" pitchFamily="49" charset="0"/>
-              </a:rPr>
-              <a:t>sh</a:t>
-            </a:r>
-            <a:endParaRPr lang="en-GB" dirty="0">
-              <a:latin typeface="Courier New" panose="02070309020205020404" pitchFamily="49" charset="0"/>
-              <a:cs typeface="Courier New" panose="02070309020205020404" pitchFamily="49" charset="0"/>
-            </a:endParaRPr>
-          </a:p>
-          <a:p>
-            <a:r>
-              <a:rPr lang="en-GB" dirty="0">
-                <a:latin typeface="Courier New" panose="02070309020205020404" pitchFamily="49" charset="0"/>
-                <a:cs typeface="Courier New" panose="02070309020205020404" pitchFamily="49" charset="0"/>
-              </a:rPr>
-              <a:t>git add results/logs/day1/</a:t>
-            </a:r>
-            <a:r>
-              <a:rPr lang="en-GB" dirty="0" err="1">
-                <a:latin typeface="Courier New" panose="02070309020205020404" pitchFamily="49" charset="0"/>
-                <a:cs typeface="Courier New" panose="02070309020205020404" pitchFamily="49" charset="0"/>
-              </a:rPr>
-              <a:t>reference_download.log</a:t>
-            </a:r>
-            <a:endParaRPr lang="en-GB" dirty="0">
-              <a:latin typeface="Courier New" panose="02070309020205020404" pitchFamily="49" charset="0"/>
-              <a:cs typeface="Courier New" panose="02070309020205020404" pitchFamily="49" charset="0"/>
-            </a:endParaRPr>
-          </a:p>
-          <a:p>
-            <a:r>
-              <a:rPr lang="en-GB" dirty="0">
-                <a:latin typeface="Courier New" panose="02070309020205020404" pitchFamily="49" charset="0"/>
-                <a:cs typeface="Courier New" panose="02070309020205020404" pitchFamily="49" charset="0"/>
-              </a:rPr>
-              <a:t>git add results/logs/day1/</a:t>
-            </a:r>
-            <a:r>
-              <a:rPr lang="en-GB" dirty="0" err="1">
-                <a:latin typeface="Courier New" panose="02070309020205020404" pitchFamily="49" charset="0"/>
-                <a:cs typeface="Courier New" panose="02070309020205020404" pitchFamily="49" charset="0"/>
-              </a:rPr>
-              <a:t>metadata_fastq_download.log</a:t>
-            </a:r>
-            <a:endParaRPr lang="en-GB" dirty="0">
-              <a:latin typeface="Courier New" panose="02070309020205020404" pitchFamily="49" charset="0"/>
-              <a:cs typeface="Courier New" panose="02070309020205020404" pitchFamily="49" charset="0"/>
-            </a:endParaRPr>
-          </a:p>
-          <a:p>
-            <a:r>
-              <a:rPr lang="en-GB" dirty="0">
-                <a:latin typeface="Courier New" panose="02070309020205020404" pitchFamily="49" charset="0"/>
-                <a:cs typeface="Courier New" panose="02070309020205020404" pitchFamily="49" charset="0"/>
-              </a:rPr>
-              <a:t>git add results/logs/day1/</a:t>
-            </a:r>
-            <a:r>
-              <a:rPr lang="en-GB" dirty="0" err="1">
-                <a:latin typeface="Courier New" panose="02070309020205020404" pitchFamily="49" charset="0"/>
-                <a:cs typeface="Courier New" panose="02070309020205020404" pitchFamily="49" charset="0"/>
-              </a:rPr>
-              <a:t>fastp</a:t>
-            </a:r>
-            <a:endParaRPr lang="en-GB" dirty="0">
-              <a:latin typeface="Courier New" panose="02070309020205020404" pitchFamily="49" charset="0"/>
-              <a:cs typeface="Courier New" panose="02070309020205020404" pitchFamily="49" charset="0"/>
-            </a:endParaRPr>
-          </a:p>
-          <a:p>
-            <a:endParaRPr lang="en-GB" dirty="0">
-              <a:latin typeface="Courier New" panose="02070309020205020404" pitchFamily="49" charset="0"/>
-              <a:cs typeface="Courier New" panose="02070309020205020404" pitchFamily="49" charset="0"/>
-            </a:endParaRPr>
-          </a:p>
-          <a:p>
-            <a:r>
-              <a:rPr lang="en-GB" dirty="0">
-                <a:latin typeface="Courier New" panose="02070309020205020404" pitchFamily="49" charset="0"/>
-                <a:cs typeface="Courier New" panose="02070309020205020404" pitchFamily="49" charset="0"/>
-              </a:rPr>
-              <a:t>-&gt; if you want could also use:</a:t>
-            </a:r>
-          </a:p>
-          <a:p>
-            <a:r>
-              <a:rPr lang="en-GB" dirty="0">
-                <a:latin typeface="Courier New" panose="02070309020205020404" pitchFamily="49" charset="0"/>
-                <a:cs typeface="Courier New" panose="02070309020205020404" pitchFamily="49" charset="0"/>
-              </a:rPr>
-              <a:t>git add . BUT!!: Be </a:t>
-            </a:r>
-            <a:r>
-              <a:rPr lang="en-GB" dirty="0" err="1">
+              <a:t>git add . BUT!!: </a:t>
+            </a:r>
+            <a:r>
+              <a:rPr lang="en-GB" b="1" dirty="0">
+                <a:solidFill>
+                  <a:srgbClr val="FF0000"/>
+                </a:solidFill>
+                <a:latin typeface="Courier New" panose="02070309020205020404" pitchFamily="49" charset="0"/>
+                <a:cs typeface="Courier New" panose="02070309020205020404" pitchFamily="49" charset="0"/>
+              </a:rPr>
+              <a:t>Be </a:t>
+            </a:r>
+            <a:r>
+              <a:rPr lang="en-GB" b="1" dirty="0" err="1">
+                <a:solidFill>
+                  <a:srgbClr val="FF0000"/>
+                </a:solidFill>
                 <a:latin typeface="Courier New" panose="02070309020205020404" pitchFamily="49" charset="0"/>
                 <a:cs typeface="Courier New" panose="02070309020205020404" pitchFamily="49" charset="0"/>
               </a:rPr>
               <a:t>carefull</a:t>
             </a:r>
             <a:r>
-              <a:rPr lang="en-GB" dirty="0">
+              <a:rPr lang="en-GB" b="1" dirty="0">
+                <a:solidFill>
+                  <a:srgbClr val="FF0000"/>
+                </a:solidFill>
                 <a:latin typeface="Courier New" panose="02070309020205020404" pitchFamily="49" charset="0"/>
                 <a:cs typeface="Courier New" panose="02070309020205020404" pitchFamily="49" charset="0"/>
               </a:rPr>
               <a:t> .</a:t>
             </a:r>
             <a:r>
-              <a:rPr lang="en-GB" dirty="0" err="1">
+              <a:rPr lang="en-GB" b="1" dirty="0" err="1">
+                <a:solidFill>
+                  <a:srgbClr val="FF0000"/>
+                </a:solidFill>
                 <a:latin typeface="Courier New" panose="02070309020205020404" pitchFamily="49" charset="0"/>
                 <a:cs typeface="Courier New" panose="02070309020205020404" pitchFamily="49" charset="0"/>
               </a:rPr>
               <a:t>gitignore</a:t>
             </a:r>
             <a:r>
-              <a:rPr lang="en-GB" dirty="0">
+              <a:rPr lang="en-GB" b="1" dirty="0">
+                <a:solidFill>
+                  <a:srgbClr val="FF0000"/>
+                </a:solidFill>
                 <a:latin typeface="Courier New" panose="02070309020205020404" pitchFamily="49" charset="0"/>
                 <a:cs typeface="Courier New" panose="02070309020205020404" pitchFamily="49" charset="0"/>
               </a:rPr>
@@ -21531,7 +23671,7 @@
           <a:p>
             <a:fld id="{761DFEEA-1162-B343-ACBF-B3E92F6AC390}" type="datetime1">
               <a:rPr lang="it-IT" smtClean="0"/>
-              <a:t>17/09/26</a:t>
+              <a:t>21/09/26</a:t>
             </a:fld>
             <a:endParaRPr lang="en-GB"/>
           </a:p>
@@ -22399,7 +24539,7 @@
           <a:p>
             <a:fld id="{761DFEEA-1162-B343-ACBF-B3E92F6AC390}" type="datetime1">
               <a:rPr lang="it-IT" smtClean="0"/>
-              <a:t>17/09/26</a:t>
+              <a:t>21/09/26</a:t>
             </a:fld>
             <a:endParaRPr lang="en-GB"/>
           </a:p>
@@ -22476,7 +24616,7 @@
         </p:nvSpPr>
         <p:spPr>
           <a:xfrm>
-            <a:off x="838198" y="2288904"/>
+            <a:off x="838198" y="2433455"/>
             <a:ext cx="10515599" cy="1323439"/>
           </a:xfrm>
           <a:prstGeom prst="rect">
@@ -22546,8 +24686,8 @@
         </p:nvSpPr>
         <p:spPr>
           <a:xfrm>
-            <a:off x="838198" y="4184451"/>
-            <a:ext cx="10515599" cy="1477328"/>
+            <a:off x="838198" y="4384182"/>
+            <a:ext cx="10959550" cy="1200329"/>
           </a:xfrm>
           <a:prstGeom prst="rect">
             <a:avLst/>
@@ -22568,7 +24708,19 @@
                   </a:schemeClr>
                 </a:solidFill>
               </a:rPr>
-              <a:t>Bioinformatics provides the computational methods used to process and analyse biological data. Computational biology increasingly uses those data and methods to model and understand biological systems.</a:t>
+              <a:t>Bioinformatics provides the computational methods used to process and analyse biological data. </a:t>
+            </a:r>
+          </a:p>
+          <a:p>
+            <a:r>
+              <a:rPr lang="en-IT" i="1" dirty="0">
+                <a:solidFill>
+                  <a:schemeClr val="bg1">
+                    <a:lumMod val="50000"/>
+                  </a:schemeClr>
+                </a:solidFill>
+              </a:rPr>
+              <a:t>Computational biology uses those data and methods to model and understand biological systems.</a:t>
             </a:r>
           </a:p>
           <a:p>
@@ -22722,7 +24874,7 @@
           <a:p>
             <a:fld id="{761DFEEA-1162-B343-ACBF-B3E92F6AC390}" type="datetime1">
               <a:rPr lang="it-IT" smtClean="0"/>
-              <a:t>17/09/26</a:t>
+              <a:t>21/09/26</a:t>
             </a:fld>
             <a:endParaRPr lang="en-GB"/>
           </a:p>
@@ -23440,7 +25592,7 @@
           <a:p>
             <a:fld id="{761DFEEA-1162-B343-ACBF-B3E92F6AC390}" type="datetime1">
               <a:rPr lang="it-IT" smtClean="0"/>
-              <a:t>17/09/26</a:t>
+              <a:t>21/09/26</a:t>
             </a:fld>
             <a:endParaRPr lang="en-GB"/>
           </a:p>
@@ -23927,7 +26079,7 @@
         </p:nvSpPr>
         <p:spPr>
           <a:xfrm>
-            <a:off x="7790329" y="6228915"/>
+            <a:off x="7790329" y="6037165"/>
             <a:ext cx="2904565" cy="246221"/>
           </a:xfrm>
           <a:prstGeom prst="rect">
@@ -24912,12 +27064,50 @@
             <a:off x="569453" y="1031610"/>
             <a:ext cx="8041148" cy="2635862"/>
           </a:xfrm>
+          <a:ln>
+            <a:solidFill>
+              <a:schemeClr val="tx1"/>
+            </a:solidFill>
+          </a:ln>
         </p:spPr>
         <p:txBody>
           <a:bodyPr>
-            <a:normAutofit/>
+            <a:normAutofit lnSpcReduction="10000"/>
           </a:bodyPr>
           <a:lstStyle/>
+          <a:p>
+            <a:pPr marL="0" indent="0">
+              <a:lnSpc>
+                <a:spcPct val="60000"/>
+              </a:lnSpc>
+              <a:buNone/>
+            </a:pPr>
+            <a:r>
+              <a:rPr lang="en-GB" sz="1100" dirty="0" err="1">
+                <a:latin typeface="Courier New" panose="02070309020205020404" pitchFamily="49" charset="0"/>
+                <a:cs typeface="Courier New" panose="02070309020205020404" pitchFamily="49" charset="0"/>
+              </a:rPr>
+              <a:t>mkdir</a:t>
+            </a:r>
+            <a:r>
+              <a:rPr lang="en-GB" sz="1100" dirty="0">
+                <a:latin typeface="Courier New" panose="02070309020205020404" pitchFamily="49" charset="0"/>
+                <a:cs typeface="Courier New" panose="02070309020205020404" pitchFamily="49" charset="0"/>
+              </a:rPr>
+              <a:t> -p ~/</a:t>
+            </a:r>
+            <a:r>
+              <a:rPr lang="en-GB" sz="1100" dirty="0" err="1">
+                <a:latin typeface="Courier New" panose="02070309020205020404" pitchFamily="49" charset="0"/>
+                <a:cs typeface="Courier New" panose="02070309020205020404" pitchFamily="49" charset="0"/>
+              </a:rPr>
+              <a:t>workshop_ngs</a:t>
+            </a:r>
+            <a:endParaRPr lang="en-GB" sz="1100" dirty="0">
+              <a:latin typeface="Courier New" panose="02070309020205020404" pitchFamily="49" charset="0"/>
+              <a:cs typeface="Courier New" panose="02070309020205020404" pitchFamily="49" charset="0"/>
+            </a:endParaRPr>
+          </a:p>
           <a:p>
             <a:pPr marL="0" indent="0">
               <a:lnSpc>
@@ -25211,7 +27401,7 @@
                 <a:latin typeface="Courier New" panose="02070309020205020404" pitchFamily="49" charset="0"/>
                 <a:cs typeface="Courier New" panose="02070309020205020404" pitchFamily="49" charset="0"/>
               </a:rPr>
-              <a:t>17/09/26</a:t>
+              <a:t>21/09/26</a:t>
             </a:fld>
             <a:endParaRPr lang="en-GB">
               <a:latin typeface="Courier New" panose="02070309020205020404" pitchFamily="49" charset="0"/>
@@ -25301,7 +27491,7 @@
         <p:spPr>
           <a:xfrm>
             <a:off x="499782" y="3616384"/>
-            <a:ext cx="7372767" cy="3308598"/>
+            <a:ext cx="7372767" cy="1785104"/>
           </a:xfrm>
           <a:prstGeom prst="rect">
             <a:avLst/>
@@ -25446,81 +27636,6 @@
               </a:rPr>
               <a:t>https://github.com/YOUR_USERNAME/workshop_ngs</a:t>
             </a:r>
-            <a:endParaRPr lang="en-GB" sz="1100" dirty="0"/>
-          </a:p>
-          <a:p>
-            <a:endParaRPr lang="en-GB" sz="1100" dirty="0"/>
-          </a:p>
-          <a:p>
-            <a:r>
-              <a:rPr lang="en-GB" sz="1100" dirty="0"/>
-              <a:t>Now connect your local folder to the empty GitHub repository. Replace YOUR_USERNAME with your GitHub username:</a:t>
-            </a:r>
-          </a:p>
-          <a:p>
-            <a:endParaRPr lang="en-GB" sz="1100" dirty="0"/>
-          </a:p>
-          <a:p>
-            <a:r>
-              <a:rPr lang="en-GB" sz="1100" dirty="0">
-                <a:latin typeface="Courier New" panose="02070309020205020404" pitchFamily="49" charset="0"/>
-                <a:cs typeface="Courier New" panose="02070309020205020404" pitchFamily="49" charset="0"/>
-              </a:rPr>
-              <a:t>git remote add origin https://</a:t>
-            </a:r>
-            <a:r>
-              <a:rPr lang="en-GB" sz="1100" dirty="0" err="1">
-                <a:latin typeface="Courier New" panose="02070309020205020404" pitchFamily="49" charset="0"/>
-                <a:cs typeface="Courier New" panose="02070309020205020404" pitchFamily="49" charset="0"/>
-              </a:rPr>
-              <a:t>github.com</a:t>
-            </a:r>
-            <a:r>
-              <a:rPr lang="en-GB" sz="1100" dirty="0">
-                <a:latin typeface="Courier New" panose="02070309020205020404" pitchFamily="49" charset="0"/>
-                <a:cs typeface="Courier New" panose="02070309020205020404" pitchFamily="49" charset="0"/>
-              </a:rPr>
-              <a:t>/YOUR_USERNAME/</a:t>
-            </a:r>
-            <a:r>
-              <a:rPr lang="en-GB" sz="1100" dirty="0" err="1">
-                <a:latin typeface="Courier New" panose="02070309020205020404" pitchFamily="49" charset="0"/>
-                <a:cs typeface="Courier New" panose="02070309020205020404" pitchFamily="49" charset="0"/>
-              </a:rPr>
-              <a:t>workshop_ngs.git</a:t>
-            </a:r>
-            <a:endParaRPr lang="en-GB" sz="1100" dirty="0">
-              <a:latin typeface="Courier New" panose="02070309020205020404" pitchFamily="49" charset="0"/>
-              <a:cs typeface="Courier New" panose="02070309020205020404" pitchFamily="49" charset="0"/>
-            </a:endParaRPr>
-          </a:p>
-          <a:p>
-            <a:r>
-              <a:rPr lang="en-GB" sz="1100" dirty="0">
-                <a:latin typeface="Courier New" panose="02070309020205020404" pitchFamily="49" charset="0"/>
-                <a:cs typeface="Courier New" panose="02070309020205020404" pitchFamily="49" charset="0"/>
-              </a:rPr>
-              <a:t>git remote -v</a:t>
-            </a:r>
-          </a:p>
-          <a:p>
-            <a:pPr marL="342900" indent="-342900">
-              <a:buFont typeface="+mj-lt"/>
-              <a:buAutoNum type="arabicPeriod"/>
-            </a:pPr>
-            <a:endParaRPr lang="en-GB" sz="1100" dirty="0"/>
-          </a:p>
-          <a:p>
-            <a:endParaRPr lang="en-GB" sz="1100" dirty="0"/>
-          </a:p>
-          <a:p>
-            <a:pPr marL="342900" indent="-342900">
-              <a:buFont typeface="+mj-lt"/>
-              <a:buAutoNum type="arabicPeriod"/>
-            </a:pPr>
-            <a:endParaRPr lang="en-GB" sz="1100" dirty="0"/>
-          </a:p>
-          <a:p>
             <a:endParaRPr lang="en-GB" sz="1100" dirty="0"/>
           </a:p>
         </p:txBody>
@@ -25671,100 +27786,6 @@
           </a:prstGeom>
         </p:spPr>
       </p:pic>
-      <p:sp>
-        <p:nvSpPr>
-          <p:cNvPr id="11" name="Rectangle 10">
-            <a:extLst>
-              <a:ext uri="{FF2B5EF4-FFF2-40B4-BE49-F238E27FC236}">
-                <a16:creationId xmlns:a16="http://schemas.microsoft.com/office/drawing/2014/main" id="{C0DCCA7E-2D1F-C533-858A-962831FB27E6}"/>
-              </a:ext>
-            </a:extLst>
-          </p:cNvPr>
-          <p:cNvSpPr/>
-          <p:nvPr/>
-        </p:nvSpPr>
-        <p:spPr>
-          <a:xfrm>
-            <a:off x="569453" y="985836"/>
-            <a:ext cx="6780581" cy="2504904"/>
-          </a:xfrm>
-          <a:prstGeom prst="rect">
-            <a:avLst/>
-          </a:prstGeom>
-          <a:noFill/>
-        </p:spPr>
-        <p:style>
-          <a:lnRef idx="2">
-            <a:schemeClr val="accent1">
-              <a:shade val="15000"/>
-            </a:schemeClr>
-          </a:lnRef>
-          <a:fillRef idx="1">
-            <a:schemeClr val="accent1"/>
-          </a:fillRef>
-          <a:effectRef idx="0">
-            <a:schemeClr val="accent1"/>
-          </a:effectRef>
-          <a:fontRef idx="minor">
-            <a:schemeClr val="lt1"/>
-          </a:fontRef>
-        </p:style>
-        <p:txBody>
-          <a:bodyPr rtlCol="0" anchor="ctr"/>
-          <a:lstStyle/>
-          <a:p>
-            <a:pPr algn="ctr"/>
-            <a:endParaRPr lang="en-GB"/>
-          </a:p>
-        </p:txBody>
-      </p:sp>
-      <p:sp>
-        <p:nvSpPr>
-          <p:cNvPr id="12" name="Rectangle 11">
-            <a:extLst>
-              <a:ext uri="{FF2B5EF4-FFF2-40B4-BE49-F238E27FC236}">
-                <a16:creationId xmlns:a16="http://schemas.microsoft.com/office/drawing/2014/main" id="{9C0B9208-A0D6-2C86-71FB-61F2F1439DD3}"/>
-              </a:ext>
-            </a:extLst>
-          </p:cNvPr>
-          <p:cNvSpPr/>
-          <p:nvPr/>
-        </p:nvSpPr>
-        <p:spPr>
-          <a:xfrm>
-            <a:off x="569453" y="5809398"/>
-            <a:ext cx="6780581" cy="391760"/>
-          </a:xfrm>
-          <a:prstGeom prst="rect">
-            <a:avLst/>
-          </a:prstGeom>
-          <a:noFill/>
-        </p:spPr>
-        <p:style>
-          <a:lnRef idx="2">
-            <a:schemeClr val="accent1">
-              <a:shade val="15000"/>
-            </a:schemeClr>
-          </a:lnRef>
-          <a:fillRef idx="1">
-            <a:schemeClr val="accent1"/>
-          </a:fillRef>
-          <a:effectRef idx="0">
-            <a:schemeClr val="accent1"/>
-          </a:effectRef>
-          <a:fontRef idx="minor">
-            <a:schemeClr val="lt1"/>
-          </a:fontRef>
-        </p:style>
-        <p:txBody>
-          <a:bodyPr rtlCol="0" anchor="ctr"/>
-          <a:lstStyle/>
-          <a:p>
-            <a:pPr algn="ctr"/>
-            <a:endParaRPr lang="en-GB"/>
-          </a:p>
-        </p:txBody>
-      </p:sp>
       <p:pic>
         <p:nvPicPr>
           <p:cNvPr id="8" name="Picture 7">
@@ -25800,6 +27821,118 @@
           </a:ln>
         </p:spPr>
       </p:pic>
+      <p:sp>
+        <p:nvSpPr>
+          <p:cNvPr id="14" name="TextBox 13">
+            <a:extLst>
+              <a:ext uri="{FF2B5EF4-FFF2-40B4-BE49-F238E27FC236}">
+                <a16:creationId xmlns:a16="http://schemas.microsoft.com/office/drawing/2014/main" id="{C872811D-9D66-D3DD-B0DF-152C90D57CA0}"/>
+              </a:ext>
+            </a:extLst>
+          </p:cNvPr>
+          <p:cNvSpPr txBox="1"/>
+          <p:nvPr/>
+        </p:nvSpPr>
+        <p:spPr>
+          <a:xfrm>
+            <a:off x="569450" y="5740042"/>
+            <a:ext cx="8041149" cy="430887"/>
+          </a:xfrm>
+          <a:prstGeom prst="rect">
+            <a:avLst/>
+          </a:prstGeom>
+          <a:noFill/>
+          <a:ln>
+            <a:solidFill>
+              <a:schemeClr val="tx1"/>
+            </a:solidFill>
+          </a:ln>
+        </p:spPr>
+        <p:txBody>
+          <a:bodyPr wrap="square">
+            <a:spAutoFit/>
+          </a:bodyPr>
+          <a:lstStyle/>
+          <a:p>
+            <a:r>
+              <a:rPr lang="en-GB" sz="1100" dirty="0">
+                <a:latin typeface="Courier New" panose="02070309020205020404" pitchFamily="49" charset="0"/>
+                <a:cs typeface="Courier New" panose="02070309020205020404" pitchFamily="49" charset="0"/>
+              </a:rPr>
+              <a:t>git remote add origin https://</a:t>
+            </a:r>
+            <a:r>
+              <a:rPr lang="en-GB" sz="1100" dirty="0" err="1">
+                <a:latin typeface="Courier New" panose="02070309020205020404" pitchFamily="49" charset="0"/>
+                <a:cs typeface="Courier New" panose="02070309020205020404" pitchFamily="49" charset="0"/>
+              </a:rPr>
+              <a:t>github.com</a:t>
+            </a:r>
+            <a:r>
+              <a:rPr lang="en-GB" sz="1100" dirty="0">
+                <a:latin typeface="Courier New" panose="02070309020205020404" pitchFamily="49" charset="0"/>
+                <a:cs typeface="Courier New" panose="02070309020205020404" pitchFamily="49" charset="0"/>
+              </a:rPr>
+              <a:t>/YOUR_USERNAME/</a:t>
+            </a:r>
+            <a:r>
+              <a:rPr lang="en-GB" sz="1100" dirty="0" err="1">
+                <a:latin typeface="Courier New" panose="02070309020205020404" pitchFamily="49" charset="0"/>
+                <a:cs typeface="Courier New" panose="02070309020205020404" pitchFamily="49" charset="0"/>
+              </a:rPr>
+              <a:t>workshop_ngs.git</a:t>
+            </a:r>
+            <a:endParaRPr lang="en-GB" sz="1100" dirty="0">
+              <a:latin typeface="Courier New" panose="02070309020205020404" pitchFamily="49" charset="0"/>
+              <a:cs typeface="Courier New" panose="02070309020205020404" pitchFamily="49" charset="0"/>
+            </a:endParaRPr>
+          </a:p>
+          <a:p>
+            <a:r>
+              <a:rPr lang="en-GB" sz="1100" dirty="0">
+                <a:latin typeface="Courier New" panose="02070309020205020404" pitchFamily="49" charset="0"/>
+                <a:cs typeface="Courier New" panose="02070309020205020404" pitchFamily="49" charset="0"/>
+              </a:rPr>
+              <a:t>git remote -v</a:t>
+            </a:r>
+          </a:p>
+        </p:txBody>
+      </p:sp>
+      <p:sp>
+        <p:nvSpPr>
+          <p:cNvPr id="16" name="TextBox 15">
+            <a:extLst>
+              <a:ext uri="{FF2B5EF4-FFF2-40B4-BE49-F238E27FC236}">
+                <a16:creationId xmlns:a16="http://schemas.microsoft.com/office/drawing/2014/main" id="{5A59269D-9C9C-5D06-C801-73C434FBBA17}"/>
+              </a:ext>
+            </a:extLst>
+          </p:cNvPr>
+          <p:cNvSpPr txBox="1"/>
+          <p:nvPr/>
+        </p:nvSpPr>
+        <p:spPr>
+          <a:xfrm>
+            <a:off x="534615" y="5424821"/>
+            <a:ext cx="8110817" cy="261610"/>
+          </a:xfrm>
+          <a:prstGeom prst="rect">
+            <a:avLst/>
+          </a:prstGeom>
+          <a:noFill/>
+        </p:spPr>
+        <p:txBody>
+          <a:bodyPr wrap="square">
+            <a:spAutoFit/>
+          </a:bodyPr>
+          <a:lstStyle/>
+          <a:p>
+            <a:r>
+              <a:rPr lang="en-GB" sz="1100" dirty="0"/>
+              <a:t>Now connect your local folder to the empty GitHub repository. Replace YOUR_USERNAME with your GitHub username:</a:t>
+            </a:r>
+          </a:p>
+        </p:txBody>
+      </p:sp>
     </p:spTree>
     <p:extLst>
       <p:ext uri="{BB962C8B-B14F-4D97-AF65-F5344CB8AC3E}">
@@ -25810,6 +27943,534 @@
   <p:clrMapOvr>
     <a:masterClrMapping/>
   </p:clrMapOvr>
+  <p:timing>
+    <p:tnLst>
+      <p:par>
+        <p:cTn id="1" dur="indefinite" restart="never" nodeType="tmRoot">
+          <p:childTnLst>
+            <p:seq concurrent="1" nextAc="seek">
+              <p:cTn id="2" dur="indefinite" nodeType="mainSeq">
+                <p:childTnLst>
+                  <p:par>
+                    <p:cTn id="3" fill="hold">
+                      <p:stCondLst>
+                        <p:cond delay="indefinite"/>
+                      </p:stCondLst>
+                      <p:childTnLst>
+                        <p:par>
+                          <p:cTn id="4" fill="hold">
+                            <p:stCondLst>
+                              <p:cond delay="0"/>
+                            </p:stCondLst>
+                            <p:childTnLst>
+                              <p:par>
+                                <p:cTn id="5" presetID="1" presetClass="entr" presetSubtype="0" fill="hold" grpId="0" nodeType="clickEffect">
+                                  <p:stCondLst>
+                                    <p:cond delay="0"/>
+                                  </p:stCondLst>
+                                  <p:childTnLst>
+                                    <p:set>
+                                      <p:cBhvr>
+                                        <p:cTn id="6" dur="1" fill="hold">
+                                          <p:stCondLst>
+                                            <p:cond delay="0"/>
+                                          </p:stCondLst>
+                                        </p:cTn>
+                                        <p:tgtEl>
+                                          <p:spTgt spid="3">
+                                            <p:bg/>
+                                          </p:spTgt>
+                                        </p:tgtEl>
+                                        <p:attrNameLst>
+                                          <p:attrName>style.visibility</p:attrName>
+                                        </p:attrNameLst>
+                                      </p:cBhvr>
+                                      <p:to>
+                                        <p:strVal val="visible"/>
+                                      </p:to>
+                                    </p:set>
+                                  </p:childTnLst>
+                                </p:cTn>
+                              </p:par>
+                              <p:par>
+                                <p:cTn id="7" presetID="1" presetClass="entr" presetSubtype="0" fill="hold" grpId="0" nodeType="withEffect">
+                                  <p:stCondLst>
+                                    <p:cond delay="0"/>
+                                  </p:stCondLst>
+                                  <p:childTnLst>
+                                    <p:set>
+                                      <p:cBhvr>
+                                        <p:cTn id="8" dur="1" fill="hold">
+                                          <p:stCondLst>
+                                            <p:cond delay="0"/>
+                                          </p:stCondLst>
+                                        </p:cTn>
+                                        <p:tgtEl>
+                                          <p:spTgt spid="3">
+                                            <p:txEl>
+                                              <p:pRg st="0" end="0"/>
+                                            </p:txEl>
+                                          </p:spTgt>
+                                        </p:tgtEl>
+                                        <p:attrNameLst>
+                                          <p:attrName>style.visibility</p:attrName>
+                                        </p:attrNameLst>
+                                      </p:cBhvr>
+                                      <p:to>
+                                        <p:strVal val="visible"/>
+                                      </p:to>
+                                    </p:set>
+                                  </p:childTnLst>
+                                </p:cTn>
+                              </p:par>
+                            </p:childTnLst>
+                          </p:cTn>
+                        </p:par>
+                      </p:childTnLst>
+                    </p:cTn>
+                  </p:par>
+                  <p:par>
+                    <p:cTn id="9" fill="hold">
+                      <p:stCondLst>
+                        <p:cond delay="indefinite"/>
+                      </p:stCondLst>
+                      <p:childTnLst>
+                        <p:par>
+                          <p:cTn id="10" fill="hold">
+                            <p:stCondLst>
+                              <p:cond delay="0"/>
+                            </p:stCondLst>
+                            <p:childTnLst>
+                              <p:par>
+                                <p:cTn id="11" presetID="1" presetClass="entr" presetSubtype="0" fill="hold" grpId="0" nodeType="clickEffect">
+                                  <p:stCondLst>
+                                    <p:cond delay="0"/>
+                                  </p:stCondLst>
+                                  <p:childTnLst>
+                                    <p:set>
+                                      <p:cBhvr>
+                                        <p:cTn id="12" dur="1" fill="hold">
+                                          <p:stCondLst>
+                                            <p:cond delay="0"/>
+                                          </p:stCondLst>
+                                        </p:cTn>
+                                        <p:tgtEl>
+                                          <p:spTgt spid="3">
+                                            <p:txEl>
+                                              <p:pRg st="1" end="1"/>
+                                            </p:txEl>
+                                          </p:spTgt>
+                                        </p:tgtEl>
+                                        <p:attrNameLst>
+                                          <p:attrName>style.visibility</p:attrName>
+                                        </p:attrNameLst>
+                                      </p:cBhvr>
+                                      <p:to>
+                                        <p:strVal val="visible"/>
+                                      </p:to>
+                                    </p:set>
+                                  </p:childTnLst>
+                                </p:cTn>
+                              </p:par>
+                              <p:par>
+                                <p:cTn id="13" presetID="1" presetClass="entr" presetSubtype="0" fill="hold" grpId="0" nodeType="withEffect">
+                                  <p:stCondLst>
+                                    <p:cond delay="0"/>
+                                  </p:stCondLst>
+                                  <p:childTnLst>
+                                    <p:set>
+                                      <p:cBhvr>
+                                        <p:cTn id="14" dur="1" fill="hold">
+                                          <p:stCondLst>
+                                            <p:cond delay="0"/>
+                                          </p:stCondLst>
+                                        </p:cTn>
+                                        <p:tgtEl>
+                                          <p:spTgt spid="3">
+                                            <p:txEl>
+                                              <p:pRg st="2" end="2"/>
+                                            </p:txEl>
+                                          </p:spTgt>
+                                        </p:tgtEl>
+                                        <p:attrNameLst>
+                                          <p:attrName>style.visibility</p:attrName>
+                                        </p:attrNameLst>
+                                      </p:cBhvr>
+                                      <p:to>
+                                        <p:strVal val="visible"/>
+                                      </p:to>
+                                    </p:set>
+                                  </p:childTnLst>
+                                </p:cTn>
+                              </p:par>
+                              <p:par>
+                                <p:cTn id="15" presetID="1" presetClass="entr" presetSubtype="0" fill="hold" grpId="0" nodeType="withEffect">
+                                  <p:stCondLst>
+                                    <p:cond delay="0"/>
+                                  </p:stCondLst>
+                                  <p:childTnLst>
+                                    <p:set>
+                                      <p:cBhvr>
+                                        <p:cTn id="16" dur="1" fill="hold">
+                                          <p:stCondLst>
+                                            <p:cond delay="0"/>
+                                          </p:stCondLst>
+                                        </p:cTn>
+                                        <p:tgtEl>
+                                          <p:spTgt spid="3">
+                                            <p:txEl>
+                                              <p:pRg st="4" end="4"/>
+                                            </p:txEl>
+                                          </p:spTgt>
+                                        </p:tgtEl>
+                                        <p:attrNameLst>
+                                          <p:attrName>style.visibility</p:attrName>
+                                        </p:attrNameLst>
+                                      </p:cBhvr>
+                                      <p:to>
+                                        <p:strVal val="visible"/>
+                                      </p:to>
+                                    </p:set>
+                                  </p:childTnLst>
+                                </p:cTn>
+                              </p:par>
+                              <p:par>
+                                <p:cTn id="17" presetID="1" presetClass="entr" presetSubtype="0" fill="hold" grpId="0" nodeType="withEffect">
+                                  <p:stCondLst>
+                                    <p:cond delay="0"/>
+                                  </p:stCondLst>
+                                  <p:childTnLst>
+                                    <p:set>
+                                      <p:cBhvr>
+                                        <p:cTn id="18" dur="1" fill="hold">
+                                          <p:stCondLst>
+                                            <p:cond delay="0"/>
+                                          </p:stCondLst>
+                                        </p:cTn>
+                                        <p:tgtEl>
+                                          <p:spTgt spid="3">
+                                            <p:txEl>
+                                              <p:pRg st="5" end="5"/>
+                                            </p:txEl>
+                                          </p:spTgt>
+                                        </p:tgtEl>
+                                        <p:attrNameLst>
+                                          <p:attrName>style.visibility</p:attrName>
+                                        </p:attrNameLst>
+                                      </p:cBhvr>
+                                      <p:to>
+                                        <p:strVal val="visible"/>
+                                      </p:to>
+                                    </p:set>
+                                  </p:childTnLst>
+                                </p:cTn>
+                              </p:par>
+                              <p:par>
+                                <p:cTn id="19" presetID="1" presetClass="entr" presetSubtype="0" fill="hold" grpId="0" nodeType="withEffect">
+                                  <p:stCondLst>
+                                    <p:cond delay="0"/>
+                                  </p:stCondLst>
+                                  <p:childTnLst>
+                                    <p:set>
+                                      <p:cBhvr>
+                                        <p:cTn id="20" dur="1" fill="hold">
+                                          <p:stCondLst>
+                                            <p:cond delay="0"/>
+                                          </p:stCondLst>
+                                        </p:cTn>
+                                        <p:tgtEl>
+                                          <p:spTgt spid="3">
+                                            <p:txEl>
+                                              <p:pRg st="6" end="6"/>
+                                            </p:txEl>
+                                          </p:spTgt>
+                                        </p:tgtEl>
+                                        <p:attrNameLst>
+                                          <p:attrName>style.visibility</p:attrName>
+                                        </p:attrNameLst>
+                                      </p:cBhvr>
+                                      <p:to>
+                                        <p:strVal val="visible"/>
+                                      </p:to>
+                                    </p:set>
+                                  </p:childTnLst>
+                                </p:cTn>
+                              </p:par>
+                              <p:par>
+                                <p:cTn id="21" presetID="1" presetClass="entr" presetSubtype="0" fill="hold" grpId="0" nodeType="withEffect">
+                                  <p:stCondLst>
+                                    <p:cond delay="0"/>
+                                  </p:stCondLst>
+                                  <p:childTnLst>
+                                    <p:set>
+                                      <p:cBhvr>
+                                        <p:cTn id="22" dur="1" fill="hold">
+                                          <p:stCondLst>
+                                            <p:cond delay="0"/>
+                                          </p:stCondLst>
+                                        </p:cTn>
+                                        <p:tgtEl>
+                                          <p:spTgt spid="3">
+                                            <p:txEl>
+                                              <p:pRg st="8" end="8"/>
+                                            </p:txEl>
+                                          </p:spTgt>
+                                        </p:tgtEl>
+                                        <p:attrNameLst>
+                                          <p:attrName>style.visibility</p:attrName>
+                                        </p:attrNameLst>
+                                      </p:cBhvr>
+                                      <p:to>
+                                        <p:strVal val="visible"/>
+                                      </p:to>
+                                    </p:set>
+                                  </p:childTnLst>
+                                </p:cTn>
+                              </p:par>
+                              <p:par>
+                                <p:cTn id="23" presetID="1" presetClass="entr" presetSubtype="0" fill="hold" grpId="0" nodeType="withEffect">
+                                  <p:stCondLst>
+                                    <p:cond delay="0"/>
+                                  </p:stCondLst>
+                                  <p:childTnLst>
+                                    <p:set>
+                                      <p:cBhvr>
+                                        <p:cTn id="24" dur="1" fill="hold">
+                                          <p:stCondLst>
+                                            <p:cond delay="0"/>
+                                          </p:stCondLst>
+                                        </p:cTn>
+                                        <p:tgtEl>
+                                          <p:spTgt spid="3">
+                                            <p:txEl>
+                                              <p:pRg st="9" end="9"/>
+                                            </p:txEl>
+                                          </p:spTgt>
+                                        </p:tgtEl>
+                                        <p:attrNameLst>
+                                          <p:attrName>style.visibility</p:attrName>
+                                        </p:attrNameLst>
+                                      </p:cBhvr>
+                                      <p:to>
+                                        <p:strVal val="visible"/>
+                                      </p:to>
+                                    </p:set>
+                                  </p:childTnLst>
+                                </p:cTn>
+                              </p:par>
+                              <p:par>
+                                <p:cTn id="25" presetID="1" presetClass="entr" presetSubtype="0" fill="hold" grpId="0" nodeType="withEffect">
+                                  <p:stCondLst>
+                                    <p:cond delay="0"/>
+                                  </p:stCondLst>
+                                  <p:childTnLst>
+                                    <p:set>
+                                      <p:cBhvr>
+                                        <p:cTn id="26" dur="1" fill="hold">
+                                          <p:stCondLst>
+                                            <p:cond delay="0"/>
+                                          </p:stCondLst>
+                                        </p:cTn>
+                                        <p:tgtEl>
+                                          <p:spTgt spid="3">
+                                            <p:txEl>
+                                              <p:pRg st="10" end="10"/>
+                                            </p:txEl>
+                                          </p:spTgt>
+                                        </p:tgtEl>
+                                        <p:attrNameLst>
+                                          <p:attrName>style.visibility</p:attrName>
+                                        </p:attrNameLst>
+                                      </p:cBhvr>
+                                      <p:to>
+                                        <p:strVal val="visible"/>
+                                      </p:to>
+                                    </p:set>
+                                  </p:childTnLst>
+                                </p:cTn>
+                              </p:par>
+                              <p:par>
+                                <p:cTn id="27" presetID="1" presetClass="entr" presetSubtype="0" fill="hold" grpId="0" nodeType="withEffect">
+                                  <p:stCondLst>
+                                    <p:cond delay="0"/>
+                                  </p:stCondLst>
+                                  <p:childTnLst>
+                                    <p:set>
+                                      <p:cBhvr>
+                                        <p:cTn id="28" dur="1" fill="hold">
+                                          <p:stCondLst>
+                                            <p:cond delay="0"/>
+                                          </p:stCondLst>
+                                        </p:cTn>
+                                        <p:tgtEl>
+                                          <p:spTgt spid="3">
+                                            <p:txEl>
+                                              <p:pRg st="11" end="11"/>
+                                            </p:txEl>
+                                          </p:spTgt>
+                                        </p:tgtEl>
+                                        <p:attrNameLst>
+                                          <p:attrName>style.visibility</p:attrName>
+                                        </p:attrNameLst>
+                                      </p:cBhvr>
+                                      <p:to>
+                                        <p:strVal val="visible"/>
+                                      </p:to>
+                                    </p:set>
+                                  </p:childTnLst>
+                                </p:cTn>
+                              </p:par>
+                            </p:childTnLst>
+                          </p:cTn>
+                        </p:par>
+                      </p:childTnLst>
+                    </p:cTn>
+                  </p:par>
+                  <p:par>
+                    <p:cTn id="29" fill="hold">
+                      <p:stCondLst>
+                        <p:cond delay="indefinite"/>
+                      </p:stCondLst>
+                      <p:childTnLst>
+                        <p:par>
+                          <p:cTn id="30" fill="hold">
+                            <p:stCondLst>
+                              <p:cond delay="0"/>
+                            </p:stCondLst>
+                            <p:childTnLst>
+                              <p:par>
+                                <p:cTn id="31" presetID="1" presetClass="entr" presetSubtype="0" fill="hold" grpId="0" nodeType="clickEffect">
+                                  <p:stCondLst>
+                                    <p:cond delay="0"/>
+                                  </p:stCondLst>
+                                  <p:childTnLst>
+                                    <p:set>
+                                      <p:cBhvr>
+                                        <p:cTn id="32" dur="1" fill="hold">
+                                          <p:stCondLst>
+                                            <p:cond delay="0"/>
+                                          </p:stCondLst>
+                                        </p:cTn>
+                                        <p:tgtEl>
+                                          <p:spTgt spid="7"/>
+                                        </p:tgtEl>
+                                        <p:attrNameLst>
+                                          <p:attrName>style.visibility</p:attrName>
+                                        </p:attrNameLst>
+                                      </p:cBhvr>
+                                      <p:to>
+                                        <p:strVal val="visible"/>
+                                      </p:to>
+                                    </p:set>
+                                  </p:childTnLst>
+                                </p:cTn>
+                              </p:par>
+                            </p:childTnLst>
+                          </p:cTn>
+                        </p:par>
+                      </p:childTnLst>
+                    </p:cTn>
+                  </p:par>
+                  <p:par>
+                    <p:cTn id="33" fill="hold">
+                      <p:stCondLst>
+                        <p:cond delay="indefinite"/>
+                      </p:stCondLst>
+                      <p:childTnLst>
+                        <p:par>
+                          <p:cTn id="34" fill="hold">
+                            <p:stCondLst>
+                              <p:cond delay="0"/>
+                            </p:stCondLst>
+                            <p:childTnLst>
+                              <p:par>
+                                <p:cTn id="35" presetID="1" presetClass="entr" presetSubtype="0" fill="hold" grpId="0" nodeType="clickEffect">
+                                  <p:stCondLst>
+                                    <p:cond delay="0"/>
+                                  </p:stCondLst>
+                                  <p:childTnLst>
+                                    <p:set>
+                                      <p:cBhvr>
+                                        <p:cTn id="36" dur="1" fill="hold">
+                                          <p:stCondLst>
+                                            <p:cond delay="0"/>
+                                          </p:stCondLst>
+                                        </p:cTn>
+                                        <p:tgtEl>
+                                          <p:spTgt spid="14"/>
+                                        </p:tgtEl>
+                                        <p:attrNameLst>
+                                          <p:attrName>style.visibility</p:attrName>
+                                        </p:attrNameLst>
+                                      </p:cBhvr>
+                                      <p:to>
+                                        <p:strVal val="visible"/>
+                                      </p:to>
+                                    </p:set>
+                                  </p:childTnLst>
+                                </p:cTn>
+                              </p:par>
+                              <p:par>
+                                <p:cTn id="37" presetID="1" presetClass="entr" presetSubtype="0" fill="hold" grpId="0" nodeType="withEffect">
+                                  <p:stCondLst>
+                                    <p:cond delay="0"/>
+                                  </p:stCondLst>
+                                  <p:childTnLst>
+                                    <p:set>
+                                      <p:cBhvr>
+                                        <p:cTn id="38" dur="1" fill="hold">
+                                          <p:stCondLst>
+                                            <p:cond delay="0"/>
+                                          </p:stCondLst>
+                                        </p:cTn>
+                                        <p:tgtEl>
+                                          <p:spTgt spid="16"/>
+                                        </p:tgtEl>
+                                        <p:attrNameLst>
+                                          <p:attrName>style.visibility</p:attrName>
+                                        </p:attrNameLst>
+                                      </p:cBhvr>
+                                      <p:to>
+                                        <p:strVal val="visible"/>
+                                      </p:to>
+                                    </p:set>
+                                  </p:childTnLst>
+                                </p:cTn>
+                              </p:par>
+                            </p:childTnLst>
+                          </p:cTn>
+                        </p:par>
+                      </p:childTnLst>
+                    </p:cTn>
+                  </p:par>
+                </p:childTnLst>
+              </p:cTn>
+              <p:prevCondLst>
+                <p:cond evt="onPrev" delay="0">
+                  <p:tgtEl>
+                    <p:sldTgt/>
+                  </p:tgtEl>
+                </p:cond>
+              </p:prevCondLst>
+              <p:nextCondLst>
+                <p:cond evt="onNext" delay="0">
+                  <p:tgtEl>
+                    <p:sldTgt/>
+                  </p:tgtEl>
+                </p:cond>
+              </p:nextCondLst>
+            </p:seq>
+          </p:childTnLst>
+        </p:cTn>
+      </p:par>
+    </p:tnLst>
+    <p:bldLst>
+      <p:bldP spid="3" grpId="0" uiExpand="1" build="p" animBg="1"/>
+      <p:bldP spid="7" grpId="0"/>
+      <p:bldP spid="14" grpId="0" animBg="1"/>
+      <p:bldP spid="16" grpId="0"/>
+    </p:bldLst>
+  </p:timing>
 </p:sld>
 </file>
 
@@ -25853,7 +28514,7 @@
           <a:p>
             <a:fld id="{761DFEEA-1162-B343-ACBF-B3E92F6AC390}" type="datetime1">
               <a:rPr lang="it-IT" smtClean="0"/>
-              <a:t>17/09/26</a:t>
+              <a:t>21/09/26</a:t>
             </a:fld>
             <a:endParaRPr lang="en-GB"/>
           </a:p>
@@ -26533,7 +29194,14 @@
                 <a:latin typeface="Courier New" panose="02070309020205020404" pitchFamily="49" charset="0"/>
                 <a:cs typeface="Courier New" panose="02070309020205020404" pitchFamily="49" charset="0"/>
               </a:rPr>
-              <a:t>nano README</a:t>
+              <a:t>nano </a:t>
+            </a:r>
+            <a:r>
+              <a:rPr lang="en-GB" sz="1400" dirty="0" err="1">
+                <a:latin typeface="Courier New" panose="02070309020205020404" pitchFamily="49" charset="0"/>
+                <a:cs typeface="Courier New" panose="02070309020205020404" pitchFamily="49" charset="0"/>
+              </a:rPr>
+              <a:t>README.md</a:t>
             </a:r>
             <a:endParaRPr lang="en-GB" sz="1400" dirty="0"/>
           </a:p>
